--- a/n8n-epsilon-detailed.pptx
+++ b/n8n-epsilon-detailed.pptx
@@ -21,10 +21,9 @@
     <p:sldId id="269" r:id="rId15"/>
     <p:sldId id="270" r:id="rId16"/>
     <p:sldId id="271" r:id="rId17"/>
-    <p:sldId id="272" r:id="rId18"/>
   </p:sldIdLst>
   <p:notesMasterIdLst>
-    <p:notesMasterId r:id="rId19"/>
+    <p:notesMasterId r:id="rId18"/>
   </p:notesMasterIdLst>
   <p:sldSz cx="12192000" cy="6858000"/>
   <p:notesSz cx="6858000" cy="12192000"/>
@@ -123,34 +122,34 @@
   <p:extLst>
     <p:ext uri="{521415D9-36F7-43E2-AB2F-B90AF26B5E84}">
       <p14:sectionLst xmlns:p14="http://schemas.microsoft.com/office/powerpoint/2010/main">
-        <p14:section name="Title" id="{1819c7f5-bc89-5463-2b25-199a4ebb9c22}">
+        <p14:section name="Title" id="{79bef504-c25c-d523-ce70-fb699dab4941}">
           <p14:sldIdLst>
             <p14:sldId id="256"/>
           </p14:sldIdLst>
         </p14:section>
-        <p14:section name="Overview" id="{7e1473d0-e326-cb20-fc18-408d0ddd8cad}">
+        <p14:section name="Overview" id="{674ff281-ff4e-f735-9162-42788e9e337b}">
           <p14:sldIdLst>
             <p14:sldId id="257"/>
             <p14:sldId id="258"/>
           </p14:sldIdLst>
         </p14:section>
-        <p14:section name="Architecture" id="{ffcbe2b7-a026-c210-bb7d-237cdeac39b1}">
+        <p14:section name="Architecture" id="{6ab84a24-34bb-a220-5380-67002fb7715e}">
           <p14:sldIdLst>
             <p14:sldId id="259"/>
             <p14:sldId id="260"/>
           </p14:sldIdLst>
         </p14:section>
-        <p14:section name="Logic" id="{f09171c5-154f-6aed-d1aa-f924bb488615}">
+        <p14:section name="Logic" id="{77511e09-5c96-a583-5172-29b040438071}">
           <p14:sldIdLst>
             <p14:sldId id="261"/>
           </p14:sldIdLst>
         </p14:section>
-        <p14:section name="Pipeline" id="{ae95dfdd-dbfb-15ad-b82e-8ac06b111c6e}">
+        <p14:section name="Pipeline" id="{480717bc-cc4b-f816-00bf-35be864b09ea}">
           <p14:sldIdLst>
             <p14:sldId id="262"/>
           </p14:sldIdLst>
         </p14:section>
-        <p14:section name="Reliability" id="{5231954d-7539-f912-4445-e7578415b34d}">
+        <p14:section name="Reliability" id="{545f2a04-1370-964a-d7b5-e93f33405250}">
           <p14:sldIdLst>
             <p14:sldId id="263"/>
             <p14:sldId id="264"/>
@@ -160,16 +159,11 @@
             <p14:sldId id="268"/>
           </p14:sldIdLst>
         </p14:section>
-        <p14:section name="Delivery" id="{ecd6551d-bae9-decc-3c6b-1b066dd13355}">
+        <p14:section name="Delivery" id="{1c02ff88-90c6-4db7-ce90-3dd9a93e27e9}">
           <p14:sldIdLst>
             <p14:sldId id="269"/>
             <p14:sldId id="270"/>
             <p14:sldId id="271"/>
-          </p14:sldIdLst>
-        </p14:section>
-        <p14:section name="Status" id="{c869a52f-7927-cbaf-e265-10f9572deff4}">
-          <p14:sldIdLst>
-            <p14:sldId id="272"/>
           </p14:sldIdLst>
         </p14:section>
       </p14:sectionLst>
@@ -1216,94 +1210,6 @@
             <a:fld id="{F7021451-1387-4CA6-816F-3879F97B5CBC}" type="slidenum">
               <a:rPr lang="en-US"/>
               <a:t>16</a:t>
-            </a:fld>
-            <a:endParaRPr lang="en-US"/>
-          </a:p>
-        </p:txBody>
-      </p:sp>
-    </p:spTree>
-    <p:extLst>
-      <p:ext uri="{BB962C8B-B14F-4D97-AF65-F5344CB8AC3E}">
-        <p14:creationId xmlns:p14="http://schemas.microsoft.com/office/powerpoint/2010/main" val="1024086991"/>
-      </p:ext>
-    </p:extLst>
-  </p:cSld>
-  <p:clrMapOvr>
-    <a:masterClrMapping/>
-  </p:clrMapOvr>
-</p:notes>
-</file>
-
-<file path=ppt/notesSlides/notesSlide17.xml><?xml version="1.0" encoding="utf-8"?>
-<p:notes xmlns:a="http://schemas.openxmlformats.org/drawingml/2006/main" xmlns:r="http://schemas.openxmlformats.org/officeDocument/2006/relationships" xmlns:p="http://schemas.openxmlformats.org/presentationml/2006/main">
-  <p:cSld>
-    <p:spTree>
-      <p:nvGrpSpPr>
-        <p:cNvPr id="1" name=""/>
-        <p:cNvGrpSpPr/>
-        <p:nvPr/>
-      </p:nvGrpSpPr>
-      <p:grpSpPr>
-        <a:xfrm>
-          <a:off x="0" y="0"/>
-          <a:ext cx="0" cy="0"/>
-          <a:chOff x="0" y="0"/>
-          <a:chExt cx="0" cy="0"/>
-        </a:xfrm>
-      </p:grpSpPr>
-      <p:sp>
-        <p:nvSpPr>
-          <p:cNvPr id="2" name="Slide Image Placeholder 1"/>
-          <p:cNvSpPr>
-            <a:spLocks noGrp="1" noRot="1" noChangeAspect="1"/>
-          </p:cNvSpPr>
-          <p:nvPr>
-            <p:ph type="sldImg"/>
-          </p:nvPr>
-        </p:nvSpPr>
-        <p:spPr/>
-      </p:sp>
-      <p:sp>
-        <p:nvSpPr>
-          <p:cNvPr id="3" name="Notes Placeholder 2"/>
-          <p:cNvSpPr>
-            <a:spLocks noGrp="1"/>
-          </p:cNvSpPr>
-          <p:nvPr>
-            <p:ph type="body" idx="1"/>
-          </p:nvPr>
-        </p:nvSpPr>
-        <p:spPr/>
-        <p:txBody>
-          <a:bodyPr/>
-          <a:lstStyle/>
-          <a:p>
-            <a:r>
-              <a:rPr lang="en-US" dirty="0"/>
-              <a:t/>
-            </a:r>
-            <a:endParaRPr lang="en-US" dirty="0"/>
-          </a:p>
-        </p:txBody>
-      </p:sp>
-      <p:sp>
-        <p:nvSpPr>
-          <p:cNvPr id="4" name="Slide Number Placeholder 3"/>
-          <p:cNvSpPr>
-            <a:spLocks noGrp="1"/>
-          </p:cNvSpPr>
-          <p:nvPr>
-            <p:ph type="sldNum" sz="quarter" idx="10"/>
-          </p:nvPr>
-        </p:nvSpPr>
-        <p:spPr/>
-        <p:txBody>
-          <a:bodyPr/>
-          <a:lstStyle/>
-          <a:p>
-            <a:fld id="{F7021451-1387-4CA6-816F-3879F97B5CBC}" type="slidenum">
-              <a:rPr lang="en-US"/>
-              <a:t>17</a:t>
             </a:fld>
             <a:endParaRPr lang="en-US"/>
           </a:p>
@@ -3627,7 +3533,7 @@
                 <a:ea typeface="Courier New" pitchFamily="34" charset="-122"/>
                 <a:cs typeface="Courier New" pitchFamily="34" charset="-120"/>
               </a:rPr>
-              <a:t>// lookup.js — is this key eligible to send?</a:t>
+              <a:t>// lookup.js: is this key eligible to send?</a:t>
             </a:r>
             <a:endParaRPr lang="en-US" sz="1300" dirty="0"/>
           </a:p>
@@ -3880,7 +3786,7 @@
                 <a:ea typeface="Calibri" pitchFamily="34" charset="-122"/>
                 <a:cs typeface="Calibri" pitchFamily="34" charset="-120"/>
               </a:rPr>
-              <a:t>claim.js — written before the send</a:t>
+              <a:t>claim.js: written before the send</a:t>
             </a:r>
             <a:endParaRPr lang="en-US" sz="1300" dirty="0"/>
           </a:p>
@@ -3961,7 +3867,7 @@
                 <a:ea typeface="Calibri" pitchFamily="34" charset="-122"/>
                 <a:cs typeface="Calibri" pitchFamily="34" charset="-120"/>
               </a:rPr>
-              <a:t>This record is what survives a crash — the next run finds it, not silence.</a:t>
+              <a:t>This record is what survives a crash. The next run finds it, not silence.</a:t>
             </a:r>
             <a:endParaRPr lang="en-US" sz="1200" dirty="0"/>
           </a:p>
@@ -4094,7 +4000,7 @@
                 <a:ea typeface="Calibri" pitchFamily="34" charset="-122"/>
                 <a:cs typeface="Calibri" pitchFamily="34" charset="-120"/>
               </a:rPr>
-              <a:t> — a “pending” older than 10 min is reset to retryable.</a:t>
+              <a:t>: a “pending” older than 10 min is reset to retryable.</a:t>
             </a:r>
             <a:endParaRPr lang="en-US" sz="1200" dirty="0"/>
           </a:p>
@@ -4132,7 +4038,7 @@
                 <a:ea typeface="Calibri" pitchFamily="34" charset="-122"/>
                 <a:cs typeface="Calibri" pitchFamily="34" charset="-120"/>
               </a:rPr>
-              <a:t> — a TTL lock stops two runs from racing to claim the same key.</a:t>
+              <a:t>: a TTL lock stops two runs from racing to claim the same key.</a:t>
             </a:r>
             <a:endParaRPr lang="en-US" sz="1200" dirty="0"/>
           </a:p>
@@ -4174,7 +4080,7 @@
                 <a:ea typeface="Calibri" pitchFamily="34" charset="-122"/>
                 <a:cs typeface="Calibri" pitchFamily="34" charset="-120"/>
               </a:rPr>
-              <a:t>At-least-once delivery: a narrow-window duplicate is possible; a missed critical alert is not. Plain SMTP can't guarantee exactly-once — this is the right tradeoff.</a:t>
+              <a:t>At-least-once delivery: a narrow-window duplicate is possible; a missed critical alert is not. Plain SMTP can't guarantee exactly-once. This is the right tradeoff.</a:t>
             </a:r>
             <a:endParaRPr lang="en-US" sz="1150" dirty="0"/>
           </a:p>
@@ -4913,7 +4819,7 @@
                           <a:ea typeface="Calibri" pitchFamily="34" charset="-122"/>
                           <a:cs typeface="Calibri" pitchFamily="34" charset="-120"/>
                         </a:rPr>
-                        <a:t>Wait — reminder interval (10 min) hasn't elapsed.</a:t>
+                        <a:t>Wait: reminder interval (10 min) hasn't elapsed.</a:t>
                       </a:r>
                       <a:endParaRPr lang="en-US" sz="1350" dirty="0">
                         <a:latin typeface="Calibri" charset="0"/>
@@ -5430,7 +5336,7 @@
                 <a:ea typeface="Calibri" pitchFamily="34" charset="-122"/>
                 <a:cs typeface="Calibri" pitchFamily="34" charset="-120"/>
               </a:rPr>
-              <a:t> back to unsent on every run — only </a:t>
+              <a:t> back to unsent on every run; only </a:t>
             </a:r>
             <a:pPr algn="l" indent="0" marL="0">
               <a:lnSpc>
@@ -6922,7 +6828,7 @@
                 <a:ea typeface="Calibri" pitchFamily="34" charset="-122"/>
                 <a:cs typeface="Calibri" pitchFamily="34" charset="-120"/>
               </a:rPr>
-              <a:t>Kept in n8n workflow static data — persists across restarts on an active (production) workflow, but only saved by real scheduled runs, not manual test runs.</a:t>
+              <a:t>Kept in n8n workflow static data, persists across restarts on an active (production) workflow, but only saved by real scheduled runs, not manual test runs.</a:t>
             </a:r>
             <a:endParaRPr lang="en-US" sz="1250" dirty="0"/>
           </a:p>
@@ -7172,7 +7078,7 @@
                 <a:ea typeface="Calibri" pitchFamily="34" charset="-122"/>
                 <a:cs typeface="Calibri" pitchFamily="34" charset="-120"/>
               </a:rPr>
-              <a:t>[CRITICAL INCIDENT]  INC0010042 — Production application unavailable</a:t>
+              <a:t>[CRITICAL INCIDENT]  INC0010042 - Production application unavailable</a:t>
             </a:r>
             <a:endParaRPr lang="en-US" sz="1400" dirty="0"/>
           </a:p>
@@ -7292,7 +7198,7 @@
                 <a:ea typeface="Courier New" pitchFamily="34" charset="-122"/>
                 <a:cs typeface="Courier New" pitchFamily="34" charset="-120"/>
               </a:rPr>
-              <a:t>  Priority:       1 — Critical</a:t>
+              <a:t>  Priority:       1 - Critical</a:t>
             </a:r>
             <a:endParaRPr lang="en-US" sz="1300" dirty="0"/>
           </a:p>
@@ -7572,7 +7478,7 @@
                 <a:ea typeface="Calibri" pitchFamily="34" charset="-122"/>
                 <a:cs typeface="Calibri" pitchFamily="34" charset="-120"/>
               </a:rPr>
-              <a:t>02  —  TESTING &amp; DELIVERY</a:t>
+              <a:t>02 · TESTING &amp; DELIVERY</a:t>
             </a:r>
             <a:endParaRPr lang="en-US" sz="1400" dirty="0"/>
           </a:p>
@@ -7834,7 +7740,7 @@
                 <a:ea typeface="Cambria" pitchFamily="34" charset="-122"/>
                 <a:cs typeface="Cambria" pitchFamily="34" charset="-120"/>
               </a:rPr>
-              <a:t>Unit tests — 13/13 passing</a:t>
+              <a:t>Unit tests: 13/13 passing</a:t>
             </a:r>
             <a:endParaRPr lang="en-US" sz="1500" dirty="0"/>
           </a:p>
@@ -7880,7 +7786,7 @@
                 <a:ea typeface="Calibri" pitchFamily="34" charset="-122"/>
                 <a:cs typeface="Calibri" pitchFamily="34" charset="-120"/>
               </a:rPr>
-              <a:t>Rule logic — critical / high / stale / resolved classification</a:t>
+              <a:t>Rule logic: critical / high / stale / resolved classification</a:t>
             </a:r>
             <a:endParaRPr lang="en-US" sz="1150" dirty="0"/>
           </a:p>
@@ -7904,7 +7810,7 @@
                 <a:ea typeface="Calibri" pitchFamily="34" charset="-122"/>
                 <a:cs typeface="Calibri" pitchFamily="34" charset="-120"/>
               </a:rPr>
-              <a:t>Run lock — blocks within TTL, allows after expiry</a:t>
+              <a:t>Run lock: blocks within TTL, allows after expiry</a:t>
             </a:r>
             <a:endParaRPr lang="en-US" sz="1150" dirty="0"/>
           </a:p>
@@ -7928,7 +7834,7 @@
                 <a:ea typeface="Calibri" pitchFamily="34" charset="-122"/>
                 <a:cs typeface="Calibri" pitchFamily="34" charset="-120"/>
               </a:rPr>
-              <a:t>Stale-claim recovery — abandoned claims reset to retryable</a:t>
+              <a:t>Stale-claim recovery: abandoned claims reset to retryable</a:t>
             </a:r>
             <a:endParaRPr lang="en-US" sz="1150" dirty="0"/>
           </a:p>
@@ -7952,7 +7858,7 @@
                 <a:ea typeface="Calibri" pitchFamily="34" charset="-122"/>
                 <a:cs typeface="Calibri" pitchFamily="34" charset="-120"/>
               </a:rPr>
-              <a:t>Lookup — skip, retry, reminder-due, and reopen cases</a:t>
+              <a:t>Lookup: skip, retry, reminder-due, and reopen cases</a:t>
             </a:r>
             <a:endParaRPr lang="en-US" sz="1150" dirty="0"/>
           </a:p>
@@ -7976,7 +7882,7 @@
                 <a:ea typeface="Calibri" pitchFamily="34" charset="-122"/>
                 <a:cs typeface="Calibri" pitchFamily="34" charset="-120"/>
               </a:rPr>
-              <a:t>Claim — every eligible item marked pending before send</a:t>
+              <a:t>Claim: every eligible item marked pending before send</a:t>
             </a:r>
             <a:endParaRPr lang="en-US" sz="1150" dirty="0"/>
           </a:p>
@@ -8000,7 +7906,7 @@
                 <a:ea typeface="Calibri" pitchFamily="34" charset="-122"/>
                 <a:cs typeface="Calibri" pitchFamily="34" charset="-120"/>
               </a:rPr>
-              <a:t>Resolve — success → sent, failure → failed, error raised</a:t>
+              <a:t>Resolve: success → sent, failure → failed, error raised</a:t>
             </a:r>
             <a:endParaRPr lang="en-US" sz="1150" dirty="0"/>
           </a:p>
@@ -8024,7 +7930,7 @@
                 <a:ea typeface="Calibri" pitchFamily="34" charset="-122"/>
                 <a:cs typeface="Calibri" pitchFamily="34" charset="-120"/>
               </a:rPr>
-              <a:t>Two-run integration — run 2 sends nothing new right after run 1</a:t>
+              <a:t>Two-run integration: run 2 sends nothing new right after run 1</a:t>
             </a:r>
             <a:endParaRPr lang="en-US" sz="1150" dirty="0"/>
           </a:p>
@@ -8151,7 +8057,7 @@
                 <a:ea typeface="Calibri" pitchFamily="34" charset="-122"/>
                 <a:cs typeface="Calibri" pitchFamily="34" charset="-120"/>
               </a:rPr>
-              <a:t>— 5 mock incidents in → 3 emails out (critical, high, stale). Moderate and resolved incidents produced none.
+              <a:t>: 5 mock incidents in → 3 emails out (critical, high, stale). Moderate and resolved incidents produced none.
 </a:t>
             </a:r>
             <a:pPr algn="l" indent="0" marL="0">
@@ -8186,7 +8092,7 @@
                 <a:ea typeface="Calibri" pitchFamily="34" charset="-122"/>
                 <a:cs typeface="Calibri" pitchFamily="34" charset="-120"/>
               </a:rPr>
-              <a:t>— same static data, run immediately after → 0 new emails. All three keys correctly recognized as already sent.</a:t>
+              <a:t>: same static data, run immediately after → 0 new emails. All three keys correctly recognized as already sent.</a:t>
             </a:r>
             <a:endParaRPr lang="en-US" sz="1300" dirty="0"/>
           </a:p>
@@ -8259,7 +8165,7 @@
                 <a:ea typeface="Calibri" pitchFamily="34" charset="-122"/>
                 <a:cs typeface="Calibri" pitchFamily="34" charset="-120"/>
               </a:rPr>
-              <a:t>Not yet tested — needs live credentials</a:t>
+              <a:t>Not yet tested: needs live credentials</a:t>
             </a:r>
             <a:endParaRPr lang="en-US" sz="1200" dirty="0"/>
           </a:p>
@@ -9094,226 +9000,6 @@
       </p:sp>
       <p:sp>
         <p:nvSpPr>
-          <p:cNvPr id="22" name="Shape 20"/>
-          <p:cNvSpPr/>
-          <p:nvPr/>
-        </p:nvSpPr>
-        <p:spPr>
-          <a:xfrm>
-            <a:off x="548640" y="5074920"/>
-            <a:ext cx="5349240" cy="1188720"/>
-          </a:xfrm>
-          <a:prstGeom prst="roundRect">
-            <a:avLst>
-              <a:gd name="adj" fmla="val 6154"/>
-            </a:avLst>
-          </a:prstGeom>
-          <a:solidFill>
-            <a:schemeClr val="tx2"/>
-          </a:solidFill>
-          <a:ln/>
-          <a:effectLst>
-            <a:outerShdw sx="100000" sy="100000" kx="0" ky="0" algn="bl" rotWithShape="0" blurRad="127000" dist="38100" dir="5400000">
-              <a:srgbClr val="1A1F2B">
-                <a:alpha val="18000"/>
-              </a:srgbClr>
-            </a:outerShdw>
-          </a:effectLst>
-        </p:spPr>
-      </p:sp>
-      <p:sp>
-        <p:nvSpPr>
-          <p:cNvPr id="23" name="Text 21"/>
-          <p:cNvSpPr txBox="1"/>
-          <p:nvPr/>
-        </p:nvSpPr>
-        <p:spPr>
-          <a:xfrm>
-            <a:off x="822960" y="5212080"/>
-            <a:ext cx="4846320" cy="320040"/>
-          </a:xfrm>
-          <a:prstGeom prst="rect">
-            <a:avLst/>
-          </a:prstGeom>
-          <a:noFill/>
-          <a:ln/>
-        </p:spPr>
-        <p:txBody>
-          <a:bodyPr wrap="square" lIns="0" tIns="0" rIns="0" bIns="0" rtlCol="0" anchor="ctr"/>
-          <a:lstStyle/>
-          <a:p>
-            <a:pPr algn="l" indent="0" marL="0">
-              <a:buNone/>
-            </a:pPr>
-            <a:r>
-              <a:rPr lang="en-US" sz="1400" b="1" dirty="0">
-                <a:solidFill>
-                  <a:schemeClr val="accent1"/>
-                </a:solidFill>
-                <a:latin typeface="Cambria" pitchFamily="34" charset="0"/>
-                <a:ea typeface="Cambria" pitchFamily="34" charset="-122"/>
-                <a:cs typeface="Cambria" pitchFamily="34" charset="-120"/>
-              </a:rPr>
-              <a:t>Chethan</a:t>
-            </a:r>
-            <a:endParaRPr lang="en-US" sz="1400" dirty="0"/>
-          </a:p>
-        </p:txBody>
-      </p:sp>
-      <p:sp>
-        <p:nvSpPr>
-          <p:cNvPr id="24" name="Text 22"/>
-          <p:cNvSpPr txBox="1"/>
-          <p:nvPr/>
-        </p:nvSpPr>
-        <p:spPr>
-          <a:xfrm>
-            <a:off x="822960" y="5532120"/>
-            <a:ext cx="4846320" cy="640080"/>
-          </a:xfrm>
-          <a:prstGeom prst="rect">
-            <a:avLst/>
-          </a:prstGeom>
-          <a:noFill/>
-          <a:ln/>
-        </p:spPr>
-        <p:txBody>
-          <a:bodyPr wrap="square" lIns="0" tIns="0" rIns="0" bIns="0" rtlCol="0" anchor="ctr"/>
-          <a:lstStyle/>
-          <a:p>
-            <a:pPr algn="l" indent="0" marL="0">
-              <a:lnSpc>
-                <a:spcPct val="125000"/>
-              </a:lnSpc>
-              <a:buNone/>
-            </a:pPr>
-            <a:r>
-              <a:rPr lang="en-US" sz="1150" dirty="0">
-                <a:solidFill>
-                  <a:srgbClr val="E5E9F0"/>
-                </a:solidFill>
-                <a:latin typeface="Calibri" pitchFamily="34" charset="0"/>
-                <a:ea typeface="Calibri" pitchFamily="34" charset="-122"/>
-                <a:cs typeface="Calibri" pitchFamily="34" charset="-120"/>
-              </a:rPr>
-              <a:t>Design, claim-based dedup implementation, workflow build, testing, ServiceNow connectivity</a:t>
-            </a:r>
-            <a:endParaRPr lang="en-US" sz="1150" dirty="0"/>
-          </a:p>
-        </p:txBody>
-      </p:sp>
-      <p:sp>
-        <p:nvSpPr>
-          <p:cNvPr id="25" name="Shape 23"/>
-          <p:cNvSpPr/>
-          <p:nvPr/>
-        </p:nvSpPr>
-        <p:spPr>
-          <a:xfrm>
-            <a:off x="6080760" y="5074920"/>
-            <a:ext cx="5532120" cy="1188720"/>
-          </a:xfrm>
-          <a:prstGeom prst="roundRect">
-            <a:avLst>
-              <a:gd name="adj" fmla="val 6154"/>
-            </a:avLst>
-          </a:prstGeom>
-          <a:solidFill>
-            <a:schemeClr val="tx2"/>
-          </a:solidFill>
-          <a:ln/>
-          <a:effectLst>
-            <a:outerShdw sx="100000" sy="100000" kx="0" ky="0" algn="bl" rotWithShape="0" blurRad="127000" dist="38100" dir="5400000">
-              <a:srgbClr val="1A1F2B">
-                <a:alpha val="18000"/>
-              </a:srgbClr>
-            </a:outerShdw>
-          </a:effectLst>
-        </p:spPr>
-      </p:sp>
-      <p:sp>
-        <p:nvSpPr>
-          <p:cNvPr id="26" name="Text 24"/>
-          <p:cNvSpPr txBox="1"/>
-          <p:nvPr/>
-        </p:nvSpPr>
-        <p:spPr>
-          <a:xfrm>
-            <a:off x="6355080" y="5212080"/>
-            <a:ext cx="5029200" cy="320040"/>
-          </a:xfrm>
-          <a:prstGeom prst="rect">
-            <a:avLst/>
-          </a:prstGeom>
-          <a:noFill/>
-          <a:ln/>
-        </p:spPr>
-        <p:txBody>
-          <a:bodyPr wrap="square" lIns="0" tIns="0" rIns="0" bIns="0" rtlCol="0" anchor="ctr"/>
-          <a:lstStyle/>
-          <a:p>
-            <a:pPr algn="l" indent="0" marL="0">
-              <a:buNone/>
-            </a:pPr>
-            <a:r>
-              <a:rPr lang="en-US" sz="1400" b="1" dirty="0">
-                <a:solidFill>
-                  <a:schemeClr val="accent3"/>
-                </a:solidFill>
-                <a:latin typeface="Cambria" pitchFamily="34" charset="0"/>
-                <a:ea typeface="Cambria" pitchFamily="34" charset="-122"/>
-                <a:cs typeface="Cambria" pitchFamily="34" charset="-120"/>
-              </a:rPr>
-              <a:t>Sanjna</a:t>
-            </a:r>
-            <a:endParaRPr lang="en-US" sz="1400" dirty="0"/>
-          </a:p>
-        </p:txBody>
-      </p:sp>
-      <p:sp>
-        <p:nvSpPr>
-          <p:cNvPr id="27" name="Text 25"/>
-          <p:cNvSpPr txBox="1"/>
-          <p:nvPr/>
-        </p:nvSpPr>
-        <p:spPr>
-          <a:xfrm>
-            <a:off x="6355080" y="5532120"/>
-            <a:ext cx="5029200" cy="640080"/>
-          </a:xfrm>
-          <a:prstGeom prst="rect">
-            <a:avLst/>
-          </a:prstGeom>
-          <a:noFill/>
-          <a:ln/>
-        </p:spPr>
-        <p:txBody>
-          <a:bodyPr wrap="square" lIns="0" tIns="0" rIns="0" bIns="0" rtlCol="0" anchor="ctr"/>
-          <a:lstStyle/>
-          <a:p>
-            <a:pPr algn="l" indent="0" marL="0">
-              <a:lnSpc>
-                <a:spcPct val="125000"/>
-              </a:lnSpc>
-              <a:buNone/>
-            </a:pPr>
-            <a:r>
-              <a:rPr lang="en-US" sz="1150" dirty="0">
-                <a:solidFill>
-                  <a:srgbClr val="E5E9F0"/>
-                </a:solidFill>
-                <a:latin typeface="Calibri" pitchFamily="34" charset="0"/>
-                <a:ea typeface="Calibri" pitchFamily="34" charset="-122"/>
-                <a:cs typeface="Calibri" pitchFamily="34" charset="-120"/>
-              </a:rPr>
-              <a:t>Gmail SMTP setup + live send test, reminder-firing validation, error-workflow delivery test</a:t>
-            </a:r>
-            <a:endParaRPr lang="en-US" sz="1150" dirty="0"/>
-          </a:p>
-        </p:txBody>
-      </p:sp>
-      <p:sp>
-        <p:nvSpPr>
           <p:cNvPr id="25" name="Slide Number Placeholder 0"/>
           <p:cNvSpPr>
             <a:spLocks noGrp="1"/>
@@ -9357,377 +9043,6 @@
               <a:t>16</a:t>
             </a:fld>
             <a:endParaRPr lang="en-US"/>
-          </a:p>
-        </p:txBody>
-      </p:sp>
-    </p:spTree>
-  </p:cSld>
-  <p:clrMapOvr>
-    <a:masterClrMapping/>
-  </p:clrMapOvr>
-</p:sld>
-</file>
-
-<file path=ppt/slides/slide17.xml><?xml version="1.0" encoding="utf-8"?>
-<p:sld xmlns:a="http://schemas.openxmlformats.org/drawingml/2006/main" xmlns:r="http://schemas.openxmlformats.org/officeDocument/2006/relationships" xmlns:p="http://schemas.openxmlformats.org/presentationml/2006/main">
-  <p:cSld name="Slide 17">
-    <p:spTree>
-      <p:nvGrpSpPr>
-        <p:cNvPr id="1" name=""/>
-        <p:cNvGrpSpPr/>
-        <p:nvPr/>
-      </p:nvGrpSpPr>
-      <p:grpSpPr>
-        <a:xfrm>
-          <a:off x="0" y="0"/>
-          <a:ext cx="0" cy="0"/>
-          <a:chOff x="0" y="0"/>
-          <a:chExt cx="0" cy="0"/>
-        </a:xfrm>
-      </p:grpSpPr>
-      <p:sp>
-        <p:nvSpPr>
-          <p:cNvPr id="2" name="Text 0"/>
-          <p:cNvSpPr/>
-          <p:nvPr>
-            <p:ph idx="100" type="title" hasCustomPrompt="1"/>
-          </p:nvPr>
-        </p:nvSpPr>
-        <p:spPr>
-          <a:xfrm>
-            <a:off x="822960" y="822960"/>
-            <a:ext cx="10515600" cy="1005840"/>
-          </a:xfrm>
-          <a:prstGeom prst="rect">
-            <a:avLst/>
-          </a:prstGeom>
-          <a:noFill/>
-          <a:ln/>
-        </p:spPr>
-        <p:txBody>
-          <a:bodyPr wrap="square" rtlCol="0"/>
-          <a:lstStyle/>
-          <a:p>
-            <a:pPr algn="l" indent="0" marL="0">
-              <a:buNone/>
-            </a:pPr>
-            <a:r>
-              <a:rPr lang="en-US" sz="3600" b="1" dirty="0">
-                <a:solidFill>
-                  <a:schemeClr val="bg1"/>
-                </a:solidFill>
-                <a:latin typeface="Cambria" pitchFamily="34" charset="0"/>
-                <a:ea typeface="Cambria" pitchFamily="34" charset="-122"/>
-                <a:cs typeface="Cambria" pitchFamily="34" charset="-120"/>
-              </a:rPr>
-              <a:t>Status &amp; Next Steps</a:t>
-            </a:r>
-            <a:endParaRPr lang="en-US" sz="3600" dirty="0"/>
-          </a:p>
-        </p:txBody>
-      </p:sp>
-      <p:sp>
-        <p:nvSpPr>
-          <p:cNvPr id="3" name="Text 1"/>
-          <p:cNvSpPr txBox="1"/>
-          <p:nvPr/>
-        </p:nvSpPr>
-        <p:spPr>
-          <a:xfrm>
-            <a:off x="822960" y="2103120"/>
-            <a:ext cx="5120640" cy="365760"/>
-          </a:xfrm>
-          <a:prstGeom prst="rect">
-            <a:avLst/>
-          </a:prstGeom>
-          <a:noFill/>
-          <a:ln/>
-        </p:spPr>
-        <p:txBody>
-          <a:bodyPr wrap="square" lIns="0" tIns="0" rIns="0" bIns="0" rtlCol="0" anchor="ctr"/>
-          <a:lstStyle/>
-          <a:p>
-            <a:pPr algn="l" indent="0" marL="0">
-              <a:buNone/>
-            </a:pPr>
-            <a:r>
-              <a:rPr lang="en-US" sz="1300" b="1" spc="200" kern="0" dirty="0">
-                <a:solidFill>
-                  <a:srgbClr val="7DD3C0"/>
-                </a:solidFill>
-                <a:latin typeface="Calibri" pitchFamily="34" charset="0"/>
-                <a:ea typeface="Calibri" pitchFamily="34" charset="-122"/>
-                <a:cs typeface="Calibri" pitchFamily="34" charset="-120"/>
-              </a:rPr>
-              <a:t>DONE</a:t>
-            </a:r>
-            <a:endParaRPr lang="en-US" sz="1300" dirty="0"/>
-          </a:p>
-        </p:txBody>
-      </p:sp>
-      <p:sp>
-        <p:nvSpPr>
-          <p:cNvPr id="4" name="Text 2"/>
-          <p:cNvSpPr txBox="1"/>
-          <p:nvPr/>
-        </p:nvSpPr>
-        <p:spPr>
-          <a:xfrm>
-            <a:off x="822960" y="2560320"/>
-            <a:ext cx="5120640" cy="2377440"/>
-          </a:xfrm>
-          <a:prstGeom prst="rect">
-            <a:avLst/>
-          </a:prstGeom>
-          <a:noFill/>
-          <a:ln/>
-        </p:spPr>
-        <p:txBody>
-          <a:bodyPr wrap="square" lIns="0" tIns="0" rIns="0" bIns="0" rtlCol="0" anchor="ctr"/>
-          <a:lstStyle/>
-          <a:p>
-            <a:pPr algn="l" marL="342900" indent="-342900">
-              <a:lnSpc>
-                <a:spcPct val="140000"/>
-              </a:lnSpc>
-              <a:spcAft>
-                <a:spcPts val="1000"/>
-              </a:spcAft>
-              <a:buSzPct val="100000"/>
-              <a:buChar char="•"/>
-            </a:pPr>
-            <a:r>
-              <a:rPr lang="en-US" sz="1450" dirty="0">
-                <a:solidFill>
-                  <a:srgbClr val="E5E9F0"/>
-                </a:solidFill>
-                <a:latin typeface="Calibri" pitchFamily="34" charset="0"/>
-                <a:ea typeface="Calibri" pitchFamily="34" charset="-122"/>
-                <a:cs typeface="Calibri" pitchFamily="34" charset="-120"/>
-              </a:rPr>
-              <a:t>Design: reminder policy + claim-based dedup</a:t>
-            </a:r>
-            <a:endParaRPr lang="en-US" sz="1450" dirty="0"/>
-          </a:p>
-          <a:p>
-            <a:pPr algn="l" marL="342900" indent="-342900">
-              <a:lnSpc>
-                <a:spcPct val="140000"/>
-              </a:lnSpc>
-              <a:spcAft>
-                <a:spcPts val="1000"/>
-              </a:spcAft>
-              <a:buSzPct val="100000"/>
-              <a:buChar char="•"/>
-            </a:pPr>
-            <a:r>
-              <a:rPr lang="en-US" sz="1450" dirty="0">
-                <a:solidFill>
-                  <a:srgbClr val="E5E9F0"/>
-                </a:solidFill>
-                <a:latin typeface="Calibri" pitchFamily="34" charset="0"/>
-                <a:ea typeface="Calibri" pitchFamily="34" charset="-122"/>
-                <a:cs typeface="Calibri" pitchFamily="34" charset="-120"/>
-              </a:rPr>
-              <a:t>All code nodes implemented and unit-tested</a:t>
-            </a:r>
-            <a:endParaRPr lang="en-US" sz="1450" dirty="0"/>
-          </a:p>
-          <a:p>
-            <a:pPr algn="l" marL="342900" indent="-342900">
-              <a:lnSpc>
-                <a:spcPct val="140000"/>
-              </a:lnSpc>
-              <a:spcAft>
-                <a:spcPts val="1000"/>
-              </a:spcAft>
-              <a:buSzPct val="100000"/>
-              <a:buChar char="•"/>
-            </a:pPr>
-            <a:r>
-              <a:rPr lang="en-US" sz="1450" dirty="0">
-                <a:solidFill>
-                  <a:srgbClr val="E5E9F0"/>
-                </a:solidFill>
-                <a:latin typeface="Calibri" pitchFamily="34" charset="0"/>
-                <a:ea typeface="Calibri" pitchFamily="34" charset="-122"/>
-                <a:cs typeface="Calibri" pitchFamily="34" charset="-120"/>
-              </a:rPr>
-              <a:t>End-to-end verified on mock ServiceNow + SMTP</a:t>
-            </a:r>
-            <a:endParaRPr lang="en-US" sz="1450" dirty="0"/>
-          </a:p>
-        </p:txBody>
-      </p:sp>
-      <p:sp>
-        <p:nvSpPr>
-          <p:cNvPr id="5" name="Text 3"/>
-          <p:cNvSpPr txBox="1"/>
-          <p:nvPr/>
-        </p:nvSpPr>
-        <p:spPr>
-          <a:xfrm>
-            <a:off x="6400800" y="2103120"/>
-            <a:ext cx="5120640" cy="365760"/>
-          </a:xfrm>
-          <a:prstGeom prst="rect">
-            <a:avLst/>
-          </a:prstGeom>
-          <a:noFill/>
-          <a:ln/>
-        </p:spPr>
-        <p:txBody>
-          <a:bodyPr wrap="square" lIns="0" tIns="0" rIns="0" bIns="0" rtlCol="0" anchor="ctr"/>
-          <a:lstStyle/>
-          <a:p>
-            <a:pPr algn="l" indent="0" marL="0">
-              <a:buNone/>
-            </a:pPr>
-            <a:r>
-              <a:rPr lang="en-US" sz="1300" b="1" spc="200" kern="0" dirty="0">
-                <a:solidFill>
-                  <a:srgbClr val="FFB86B"/>
-                </a:solidFill>
-                <a:latin typeface="Calibri" pitchFamily="34" charset="0"/>
-                <a:ea typeface="Calibri" pitchFamily="34" charset="-122"/>
-                <a:cs typeface="Calibri" pitchFamily="34" charset="-120"/>
-              </a:rPr>
-              <a:t>NEXT</a:t>
-            </a:r>
-            <a:endParaRPr lang="en-US" sz="1300" dirty="0"/>
-          </a:p>
-        </p:txBody>
-      </p:sp>
-      <p:sp>
-        <p:nvSpPr>
-          <p:cNvPr id="6" name="Text 4"/>
-          <p:cNvSpPr txBox="1"/>
-          <p:nvPr/>
-        </p:nvSpPr>
-        <p:spPr>
-          <a:xfrm>
-            <a:off x="6400800" y="2560320"/>
-            <a:ext cx="5120640" cy="2377440"/>
-          </a:xfrm>
-          <a:prstGeom prst="rect">
-            <a:avLst/>
-          </a:prstGeom>
-          <a:noFill/>
-          <a:ln/>
-        </p:spPr>
-        <p:txBody>
-          <a:bodyPr wrap="square" lIns="0" tIns="0" rIns="0" bIns="0" rtlCol="0" anchor="ctr"/>
-          <a:lstStyle/>
-          <a:p>
-            <a:pPr algn="l" marL="342900" indent="-342900">
-              <a:lnSpc>
-                <a:spcPct val="140000"/>
-              </a:lnSpc>
-              <a:spcAft>
-                <a:spcPts val="1000"/>
-              </a:spcAft>
-              <a:buSzPct val="100000"/>
-              <a:buChar char="•"/>
-            </a:pPr>
-            <a:r>
-              <a:rPr lang="en-US" sz="1450" dirty="0">
-                <a:solidFill>
-                  <a:srgbClr val="E5E9F0"/>
-                </a:solidFill>
-                <a:latin typeface="Calibri" pitchFamily="34" charset="0"/>
-                <a:ea typeface="Calibri" pitchFamily="34" charset="-122"/>
-                <a:cs typeface="Calibri" pitchFamily="34" charset="-120"/>
-              </a:rPr>
-              <a:t>Wake dev421307 and seed sample incidents</a:t>
-            </a:r>
-            <a:endParaRPr lang="en-US" sz="1450" dirty="0"/>
-          </a:p>
-          <a:p>
-            <a:pPr algn="l" marL="342900" indent="-342900">
-              <a:lnSpc>
-                <a:spcPct val="140000"/>
-              </a:lnSpc>
-              <a:spcAft>
-                <a:spcPts val="1000"/>
-              </a:spcAft>
-              <a:buSzPct val="100000"/>
-              <a:buChar char="•"/>
-            </a:pPr>
-            <a:r>
-              <a:rPr lang="en-US" sz="1450" dirty="0">
-                <a:solidFill>
-                  <a:srgbClr val="E5E9F0"/>
-                </a:solidFill>
-                <a:latin typeface="Calibri" pitchFamily="34" charset="0"/>
-                <a:ea typeface="Calibri" pitchFamily="34" charset="-122"/>
-                <a:cs typeface="Calibri" pitchFamily="34" charset="-120"/>
-              </a:rPr>
-              <a:t>Wire up Gmail SMTP, run a real send</a:t>
-            </a:r>
-            <a:endParaRPr lang="en-US" sz="1450" dirty="0"/>
-          </a:p>
-          <a:p>
-            <a:pPr algn="l" marL="342900" indent="-342900">
-              <a:lnSpc>
-                <a:spcPct val="140000"/>
-              </a:lnSpc>
-              <a:spcAft>
-                <a:spcPts val="1000"/>
-              </a:spcAft>
-              <a:buSzPct val="100000"/>
-              <a:buChar char="•"/>
-            </a:pPr>
-            <a:r>
-              <a:rPr lang="en-US" sz="1450" dirty="0">
-                <a:solidFill>
-                  <a:srgbClr val="E5E9F0"/>
-                </a:solidFill>
-                <a:latin typeface="Calibri" pitchFamily="34" charset="0"/>
-                <a:ea typeface="Calibri" pitchFamily="34" charset="-122"/>
-                <a:cs typeface="Calibri" pitchFamily="34" charset="-120"/>
-              </a:rPr>
-              <a:t>Validate a reminder firing on a real clock</a:t>
-            </a:r>
-            <a:endParaRPr lang="en-US" sz="1450" dirty="0"/>
-          </a:p>
-        </p:txBody>
-      </p:sp>
-      <p:sp>
-        <p:nvSpPr>
-          <p:cNvPr id="7" name="Text 5"/>
-          <p:cNvSpPr txBox="1"/>
-          <p:nvPr/>
-        </p:nvSpPr>
-        <p:spPr>
-          <a:xfrm>
-            <a:off x="822960" y="6035040"/>
-            <a:ext cx="9144000" cy="365760"/>
-          </a:xfrm>
-          <a:prstGeom prst="rect">
-            <a:avLst/>
-          </a:prstGeom>
-          <a:noFill/>
-          <a:ln/>
-        </p:spPr>
-        <p:txBody>
-          <a:bodyPr wrap="square" lIns="0" tIns="0" rIns="0" bIns="0" rtlCol="0" anchor="ctr"/>
-          <a:lstStyle/>
-          <a:p>
-            <a:pPr algn="l" indent="0" marL="0">
-              <a:buNone/>
-            </a:pPr>
-            <a:r>
-              <a:rPr lang="en-US" sz="1400" dirty="0">
-                <a:solidFill>
-                  <a:schemeClr val="accent1"/>
-                </a:solidFill>
-                <a:latin typeface="Courier New" pitchFamily="34" charset="0"/>
-                <a:ea typeface="Courier New" pitchFamily="34" charset="-122"/>
-                <a:cs typeface="Courier New" pitchFamily="34" charset="-120"/>
-              </a:rPr>
-              <a:t>github.com/Chethan616/n8n-epsilon</a:t>
-            </a:r>
-            <a:endParaRPr lang="en-US" sz="1400" dirty="0"/>
           </a:p>
         </p:txBody>
       </p:sp>
@@ -9874,7 +9189,7 @@
                 <a:ea typeface="Calibri" pitchFamily="34" charset="-122"/>
                 <a:cs typeface="Calibri" pitchFamily="34" charset="-120"/>
               </a:rPr>
-              <a:t>ServiceNow incidents are tracked manually today. There is no automated path from “an incident needs attention” to “the right person was told” — and once an email is sent, nothing ensures it's not sent twice, or that a still-unresolved critical incident gets a second look.</a:t>
+              <a:t>ServiceNow incidents are tracked manually today. There is no automated path from “an incident needs attention” to “the right person was told.” Once an email is sent, nothing ensures it's not sent twice, or that a still-unresolved critical incident gets a second look.</a:t>
             </a:r>
             <a:endParaRPr lang="en-US" sz="1500" dirty="0"/>
           </a:p>
@@ -10226,7 +9541,7 @@
                 <a:ea typeface="Calibri" pitchFamily="34" charset="-122"/>
                 <a:cs typeface="Calibri" pitchFamily="34" charset="-120"/>
               </a:rPr>
-              <a:t>High-priority and stale tickets get no automatic nudge when missed — and no reminder while they stay open.</a:t>
+              <a:t>High-priority and stale tickets get no automatic nudge when missed, and no reminder while they stay open.</a:t>
             </a:r>
             <a:endParaRPr lang="en-US" sz="1300" dirty="0"/>
           </a:p>
@@ -10599,7 +9914,7 @@
                 <a:ea typeface="Calibri" pitchFamily="34" charset="-122"/>
                 <a:cs typeface="Calibri" pitchFamily="34" charset="-120"/>
               </a:rPr>
-              <a:t>Every 5 minutes, n8n polls the ServiceNow Table API, evaluates each incident against alert rules, checks a claim-based dedup store, and emails the team over Gmail SMTP when a rule fires — with reminders for incidents that stay open.</a:t>
+              <a:t>Every 5 minutes, n8n polls the ServiceNow Table API, evaluates each incident against alert rules, checks a claim-based dedup store, and emails the team over Gmail SMTP when a rule fires, with reminders for incidents that stay open.</a:t>
             </a:r>
             <a:endParaRPr lang="en-US" sz="1500" dirty="0"/>
           </a:p>
@@ -10869,7 +10184,7 @@
                 <a:ea typeface="Calibri" pitchFamily="34" charset="-122"/>
                 <a:cs typeface="Calibri" pitchFamily="34" charset="-120"/>
               </a:rPr>
-              <a:t>Evaluate critical / high / stale rules, then claim the alert key before sending — crash-safe, at-least-once.</a:t>
+              <a:t>Evaluate critical / high / stale rules, then claim the alert key before sending. Crash-safe, at-least-once.</a:t>
             </a:r>
             <a:endParaRPr lang="en-US" sz="1350" dirty="0"/>
           </a:p>
@@ -11173,16 +10488,785 @@
         </p:nvSpPr>
         <p:spPr>
           <a:xfrm>
-            <a:off x="548640" y="1874520"/>
-            <a:ext cx="1920240" cy="1371600"/>
+            <a:off x="2240280" y="2263140"/>
+            <a:ext cx="137160" cy="0"/>
+          </a:xfrm>
+          <a:prstGeom prst="line">
+            <a:avLst/>
+          </a:prstGeom>
+          <a:noFill/>
+          <a:ln w="25400">
+            <a:solidFill>
+              <a:schemeClr val="accent2"/>
+            </a:solidFill>
+            <a:prstDash val="solid"/>
+            <a:tailEnd type="none"/>
+          </a:ln>
+        </p:spPr>
+      </p:sp>
+      <p:sp>
+        <p:nvSpPr>
+          <p:cNvPr id="5" name="Shape 3"/>
+          <p:cNvSpPr/>
+          <p:nvPr/>
+        </p:nvSpPr>
+        <p:spPr>
+          <a:xfrm>
+            <a:off x="2377440" y="2263140"/>
+            <a:ext cx="0" cy="662940"/>
+          </a:xfrm>
+          <a:prstGeom prst="line">
+            <a:avLst/>
+          </a:prstGeom>
+          <a:noFill/>
+          <a:ln w="25400">
+            <a:solidFill>
+              <a:schemeClr val="accent2"/>
+            </a:solidFill>
+            <a:prstDash val="solid"/>
+            <a:tailEnd type="none"/>
+          </a:ln>
+        </p:spPr>
+      </p:sp>
+      <p:sp>
+        <p:nvSpPr>
+          <p:cNvPr id="6" name="Shape 4"/>
+          <p:cNvSpPr/>
+          <p:nvPr/>
+        </p:nvSpPr>
+        <p:spPr>
+          <a:xfrm>
+            <a:off x="2377440" y="2926080"/>
+            <a:ext cx="137160" cy="0"/>
+          </a:xfrm>
+          <a:prstGeom prst="line">
+            <a:avLst/>
+          </a:prstGeom>
+          <a:noFill/>
+          <a:ln w="25400">
+            <a:solidFill>
+              <a:schemeClr val="accent2"/>
+            </a:solidFill>
+            <a:prstDash val="solid"/>
+            <a:tailEnd type="triangle"/>
+          </a:ln>
+        </p:spPr>
+      </p:sp>
+      <p:sp>
+        <p:nvSpPr>
+          <p:cNvPr id="7" name="Shape 5"/>
+          <p:cNvSpPr/>
+          <p:nvPr/>
+        </p:nvSpPr>
+        <p:spPr>
+          <a:xfrm>
+            <a:off x="2240280" y="3589020"/>
+            <a:ext cx="137160" cy="0"/>
+          </a:xfrm>
+          <a:prstGeom prst="line">
+            <a:avLst/>
+          </a:prstGeom>
+          <a:noFill/>
+          <a:ln w="25400">
+            <a:solidFill>
+              <a:schemeClr val="accent2"/>
+            </a:solidFill>
+            <a:prstDash val="solid"/>
+            <a:tailEnd type="none"/>
+          </a:ln>
+        </p:spPr>
+      </p:sp>
+      <p:sp>
+        <p:nvSpPr>
+          <p:cNvPr id="8" name="Shape 6"/>
+          <p:cNvSpPr/>
+          <p:nvPr/>
+        </p:nvSpPr>
+        <p:spPr>
+          <a:xfrm>
+            <a:off x="2377440" y="2926080"/>
+            <a:ext cx="0" cy="662940"/>
+          </a:xfrm>
+          <a:prstGeom prst="line">
+            <a:avLst/>
+          </a:prstGeom>
+          <a:noFill/>
+          <a:ln w="25400">
+            <a:solidFill>
+              <a:schemeClr val="accent2"/>
+            </a:solidFill>
+            <a:prstDash val="solid"/>
+            <a:tailEnd type="none"/>
+          </a:ln>
+        </p:spPr>
+      </p:sp>
+      <p:sp>
+        <p:nvSpPr>
+          <p:cNvPr id="9" name="Shape 7"/>
+          <p:cNvSpPr/>
+          <p:nvPr/>
+        </p:nvSpPr>
+        <p:spPr>
+          <a:xfrm>
+            <a:off x="2377440" y="2926080"/>
+            <a:ext cx="137160" cy="0"/>
+          </a:xfrm>
+          <a:prstGeom prst="line">
+            <a:avLst/>
+          </a:prstGeom>
+          <a:noFill/>
+          <a:ln w="25400">
+            <a:solidFill>
+              <a:schemeClr val="accent2"/>
+            </a:solidFill>
+            <a:prstDash val="solid"/>
+            <a:tailEnd type="triangle"/>
+          </a:ln>
+        </p:spPr>
+      </p:sp>
+      <p:sp>
+        <p:nvSpPr>
+          <p:cNvPr id="10" name="Shape 8"/>
+          <p:cNvSpPr/>
+          <p:nvPr/>
+        </p:nvSpPr>
+        <p:spPr>
+          <a:xfrm>
+            <a:off x="4069080" y="2926080"/>
+            <a:ext cx="274320" cy="0"/>
+          </a:xfrm>
+          <a:prstGeom prst="line">
+            <a:avLst/>
+          </a:prstGeom>
+          <a:noFill/>
+          <a:ln w="25400">
+            <a:solidFill>
+              <a:schemeClr val="accent2"/>
+            </a:solidFill>
+            <a:prstDash val="solid"/>
+            <a:tailEnd type="triangle"/>
+          </a:ln>
+        </p:spPr>
+      </p:sp>
+      <p:sp>
+        <p:nvSpPr>
+          <p:cNvPr id="11" name="Shape 9"/>
+          <p:cNvSpPr/>
+          <p:nvPr/>
+        </p:nvSpPr>
+        <p:spPr>
+          <a:xfrm>
+            <a:off x="5897880" y="2926080"/>
+            <a:ext cx="274320" cy="0"/>
+          </a:xfrm>
+          <a:prstGeom prst="line">
+            <a:avLst/>
+          </a:prstGeom>
+          <a:noFill/>
+          <a:ln w="25400">
+            <a:solidFill>
+              <a:schemeClr val="accent2"/>
+            </a:solidFill>
+            <a:prstDash val="solid"/>
+            <a:tailEnd type="triangle"/>
+          </a:ln>
+        </p:spPr>
+      </p:sp>
+      <p:sp>
+        <p:nvSpPr>
+          <p:cNvPr id="12" name="Shape 10"/>
+          <p:cNvSpPr/>
+          <p:nvPr/>
+        </p:nvSpPr>
+        <p:spPr>
+          <a:xfrm>
+            <a:off x="7726680" y="2926080"/>
+            <a:ext cx="274320" cy="0"/>
+          </a:xfrm>
+          <a:prstGeom prst="line">
+            <a:avLst/>
+          </a:prstGeom>
+          <a:noFill/>
+          <a:ln w="25400">
+            <a:solidFill>
+              <a:schemeClr val="accent1"/>
+            </a:solidFill>
+            <a:prstDash val="solid"/>
+            <a:tailEnd type="triangle"/>
+          </a:ln>
+        </p:spPr>
+      </p:sp>
+      <p:sp>
+        <p:nvSpPr>
+          <p:cNvPr id="13" name="Text 11"/>
+          <p:cNvSpPr txBox="1"/>
+          <p:nvPr/>
+        </p:nvSpPr>
+        <p:spPr>
+          <a:xfrm>
+            <a:off x="7223760" y="2523744"/>
+            <a:ext cx="1280160" cy="292608"/>
+          </a:xfrm>
+          <a:prstGeom prst="rect">
+            <a:avLst/>
+          </a:prstGeom>
+          <a:solidFill>
+            <a:srgbClr val="FDFDFB"/>
+          </a:solidFill>
+          <a:ln/>
+        </p:spPr>
+        <p:txBody>
+          <a:bodyPr wrap="square" lIns="0" tIns="0" rIns="0" bIns="0" rtlCol="0" anchor="ctr"/>
+          <a:lstStyle/>
+          <a:p>
+            <a:pPr algn="ctr" indent="0" marL="0">
+              <a:buNone/>
+            </a:pPr>
+            <a:r>
+              <a:rPr lang="en-US" sz="1300" b="1" dirty="0">
+                <a:solidFill>
+                  <a:schemeClr val="accent1"/>
+                </a:solidFill>
+                <a:latin typeface="Calibri" pitchFamily="34" charset="0"/>
+                <a:ea typeface="Calibri" pitchFamily="34" charset="-122"/>
+                <a:cs typeface="Calibri" pitchFamily="34" charset="-120"/>
+              </a:rPr>
+              <a:t>qualifies</a:t>
+            </a:r>
+            <a:endParaRPr lang="en-US" sz="1300" dirty="0"/>
+          </a:p>
+        </p:txBody>
+      </p:sp>
+      <p:sp>
+        <p:nvSpPr>
+          <p:cNvPr id="14" name="Shape 12"/>
+          <p:cNvSpPr/>
+          <p:nvPr/>
+        </p:nvSpPr>
+        <p:spPr>
+          <a:xfrm>
+            <a:off x="6949440" y="3520440"/>
+            <a:ext cx="0" cy="708660"/>
+          </a:xfrm>
+          <a:prstGeom prst="line">
+            <a:avLst/>
+          </a:prstGeom>
+          <a:noFill/>
+          <a:ln w="25400">
+            <a:solidFill>
+              <a:schemeClr val="accent4"/>
+            </a:solidFill>
+            <a:prstDash val="solid"/>
+            <a:tailEnd type="triangle"/>
+          </a:ln>
+        </p:spPr>
+      </p:sp>
+      <p:sp>
+        <p:nvSpPr>
+          <p:cNvPr id="15" name="Text 13"/>
+          <p:cNvSpPr txBox="1"/>
+          <p:nvPr/>
+        </p:nvSpPr>
+        <p:spPr>
+          <a:xfrm>
+            <a:off x="6812280" y="3728466"/>
+            <a:ext cx="1280160" cy="292608"/>
+          </a:xfrm>
+          <a:prstGeom prst="rect">
+            <a:avLst/>
+          </a:prstGeom>
+          <a:solidFill>
+            <a:srgbClr val="FDFDFB"/>
+          </a:solidFill>
+          <a:ln/>
+        </p:spPr>
+        <p:txBody>
+          <a:bodyPr wrap="square" lIns="0" tIns="0" rIns="0" bIns="0" rtlCol="0" anchor="ctr"/>
+          <a:lstStyle/>
+          <a:p>
+            <a:pPr algn="ctr" indent="0" marL="0">
+              <a:buNone/>
+            </a:pPr>
+            <a:r>
+              <a:rPr lang="en-US" sz="1300" b="1" dirty="0">
+                <a:solidFill>
+                  <a:schemeClr val="accent4"/>
+                </a:solidFill>
+                <a:latin typeface="Calibri" pitchFamily="34" charset="0"/>
+                <a:ea typeface="Calibri" pitchFamily="34" charset="-122"/>
+                <a:cs typeface="Calibri" pitchFamily="34" charset="-120"/>
+              </a:rPr>
+              <a:t>no match</a:t>
+            </a:r>
+            <a:endParaRPr lang="en-US" sz="1300" dirty="0"/>
+          </a:p>
+        </p:txBody>
+      </p:sp>
+      <p:sp>
+        <p:nvSpPr>
+          <p:cNvPr id="16" name="Shape 14"/>
+          <p:cNvSpPr/>
+          <p:nvPr/>
+        </p:nvSpPr>
+        <p:spPr>
+          <a:xfrm>
+            <a:off x="9555480" y="2926080"/>
+            <a:ext cx="274320" cy="0"/>
+          </a:xfrm>
+          <a:prstGeom prst="line">
+            <a:avLst/>
+          </a:prstGeom>
+          <a:noFill/>
+          <a:ln w="25400">
+            <a:solidFill>
+              <a:schemeClr val="accent1"/>
+            </a:solidFill>
+            <a:prstDash val="solid"/>
+            <a:tailEnd type="triangle"/>
+          </a:ln>
+        </p:spPr>
+      </p:sp>
+      <p:sp>
+        <p:nvSpPr>
+          <p:cNvPr id="17" name="Text 15"/>
+          <p:cNvSpPr txBox="1"/>
+          <p:nvPr/>
+        </p:nvSpPr>
+        <p:spPr>
+          <a:xfrm>
+            <a:off x="9052560" y="2523744"/>
+            <a:ext cx="1280160" cy="292608"/>
+          </a:xfrm>
+          <a:prstGeom prst="rect">
+            <a:avLst/>
+          </a:prstGeom>
+          <a:solidFill>
+            <a:srgbClr val="FDFDFB"/>
+          </a:solidFill>
+          <a:ln/>
+        </p:spPr>
+        <p:txBody>
+          <a:bodyPr wrap="square" lIns="0" tIns="0" rIns="0" bIns="0" rtlCol="0" anchor="ctr"/>
+          <a:lstStyle/>
+          <a:p>
+            <a:pPr algn="ctr" indent="0" marL="0">
+              <a:buNone/>
+            </a:pPr>
+            <a:r>
+              <a:rPr lang="en-US" sz="1300" b="1" dirty="0">
+                <a:solidFill>
+                  <a:schemeClr val="accent1"/>
+                </a:solidFill>
+                <a:latin typeface="Calibri" pitchFamily="34" charset="0"/>
+                <a:ea typeface="Calibri" pitchFamily="34" charset="-122"/>
+                <a:cs typeface="Calibri" pitchFamily="34" charset="-120"/>
+              </a:rPr>
+              <a:t>no</a:t>
+            </a:r>
+            <a:endParaRPr lang="en-US" sz="1300" dirty="0"/>
+          </a:p>
+        </p:txBody>
+      </p:sp>
+      <p:sp>
+        <p:nvSpPr>
+          <p:cNvPr id="18" name="Shape 16"/>
+          <p:cNvSpPr/>
+          <p:nvPr/>
+        </p:nvSpPr>
+        <p:spPr>
+          <a:xfrm>
+            <a:off x="8778240" y="3520440"/>
+            <a:ext cx="0" cy="228600"/>
+          </a:xfrm>
+          <a:prstGeom prst="line">
+            <a:avLst/>
+          </a:prstGeom>
+          <a:noFill/>
+          <a:ln w="25400">
+            <a:solidFill>
+              <a:schemeClr val="accent4"/>
+            </a:solidFill>
+            <a:prstDash val="solid"/>
+            <a:tailEnd type="none"/>
+          </a:ln>
+        </p:spPr>
+      </p:sp>
+      <p:sp>
+        <p:nvSpPr>
+          <p:cNvPr id="19" name="Shape 17"/>
+          <p:cNvSpPr/>
+          <p:nvPr/>
+        </p:nvSpPr>
+        <p:spPr>
+          <a:xfrm>
+            <a:off x="7955280" y="3749040"/>
+            <a:ext cx="822960" cy="0"/>
+          </a:xfrm>
+          <a:prstGeom prst="line">
+            <a:avLst/>
+          </a:prstGeom>
+          <a:noFill/>
+          <a:ln w="25400">
+            <a:solidFill>
+              <a:schemeClr val="accent4"/>
+            </a:solidFill>
+            <a:prstDash val="solid"/>
+            <a:tailEnd type="none"/>
+          </a:ln>
+        </p:spPr>
+      </p:sp>
+      <p:sp>
+        <p:nvSpPr>
+          <p:cNvPr id="20" name="Shape 18"/>
+          <p:cNvSpPr/>
+          <p:nvPr/>
+        </p:nvSpPr>
+        <p:spPr>
+          <a:xfrm>
+            <a:off x="7955280" y="3749040"/>
+            <a:ext cx="0" cy="480060"/>
+          </a:xfrm>
+          <a:prstGeom prst="line">
+            <a:avLst/>
+          </a:prstGeom>
+          <a:noFill/>
+          <a:ln w="25400">
+            <a:solidFill>
+              <a:schemeClr val="accent4"/>
+            </a:solidFill>
+            <a:prstDash val="solid"/>
+            <a:tailEnd type="triangle"/>
+          </a:ln>
+        </p:spPr>
+      </p:sp>
+      <p:sp>
+        <p:nvSpPr>
+          <p:cNvPr id="21" name="Text 19"/>
+          <p:cNvSpPr txBox="1"/>
+          <p:nvPr/>
+        </p:nvSpPr>
+        <p:spPr>
+          <a:xfrm>
+            <a:off x="8641080" y="3488436"/>
+            <a:ext cx="1280160" cy="292608"/>
+          </a:xfrm>
+          <a:prstGeom prst="rect">
+            <a:avLst/>
+          </a:prstGeom>
+          <a:solidFill>
+            <a:srgbClr val="FDFDFB"/>
+          </a:solidFill>
+          <a:ln/>
+        </p:spPr>
+        <p:txBody>
+          <a:bodyPr wrap="square" lIns="0" tIns="0" rIns="0" bIns="0" rtlCol="0" anchor="ctr"/>
+          <a:lstStyle/>
+          <a:p>
+            <a:pPr algn="ctr" indent="0" marL="0">
+              <a:buNone/>
+            </a:pPr>
+            <a:r>
+              <a:rPr lang="en-US" sz="1300" b="1" dirty="0">
+                <a:solidFill>
+                  <a:schemeClr val="accent4"/>
+                </a:solidFill>
+                <a:latin typeface="Calibri" pitchFamily="34" charset="0"/>
+                <a:ea typeface="Calibri" pitchFamily="34" charset="-122"/>
+                <a:cs typeface="Calibri" pitchFamily="34" charset="-120"/>
+              </a:rPr>
+              <a:t>yes</a:t>
+            </a:r>
+            <a:endParaRPr lang="en-US" sz="1300" dirty="0"/>
+          </a:p>
+        </p:txBody>
+      </p:sp>
+      <p:sp>
+        <p:nvSpPr>
+          <p:cNvPr id="22" name="Shape 20"/>
+          <p:cNvSpPr/>
+          <p:nvPr/>
+        </p:nvSpPr>
+        <p:spPr>
+          <a:xfrm>
+            <a:off x="10607040" y="3314700"/>
+            <a:ext cx="0" cy="891540"/>
+          </a:xfrm>
+          <a:prstGeom prst="line">
+            <a:avLst/>
+          </a:prstGeom>
+          <a:noFill/>
+          <a:ln w="25400">
+            <a:solidFill>
+              <a:schemeClr val="accent1"/>
+            </a:solidFill>
+            <a:prstDash val="solid"/>
+            <a:tailEnd type="none"/>
+          </a:ln>
+        </p:spPr>
+      </p:sp>
+      <p:sp>
+        <p:nvSpPr>
+          <p:cNvPr id="23" name="Shape 21"/>
+          <p:cNvSpPr/>
+          <p:nvPr/>
+        </p:nvSpPr>
+        <p:spPr>
+          <a:xfrm>
+            <a:off x="9692640" y="4206240"/>
+            <a:ext cx="914400" cy="0"/>
+          </a:xfrm>
+          <a:prstGeom prst="line">
+            <a:avLst/>
+          </a:prstGeom>
+          <a:noFill/>
+          <a:ln w="25400">
+            <a:solidFill>
+              <a:schemeClr val="accent1"/>
+            </a:solidFill>
+            <a:prstDash val="solid"/>
+            <a:tailEnd type="none"/>
+          </a:ln>
+        </p:spPr>
+      </p:sp>
+      <p:sp>
+        <p:nvSpPr>
+          <p:cNvPr id="24" name="Shape 22"/>
+          <p:cNvSpPr/>
+          <p:nvPr/>
+        </p:nvSpPr>
+        <p:spPr>
+          <a:xfrm>
+            <a:off x="9692640" y="4206240"/>
+            <a:ext cx="0" cy="274320"/>
+          </a:xfrm>
+          <a:prstGeom prst="line">
+            <a:avLst/>
+          </a:prstGeom>
+          <a:noFill/>
+          <a:ln w="25400">
+            <a:solidFill>
+              <a:schemeClr val="accent1"/>
+            </a:solidFill>
+            <a:prstDash val="solid"/>
+            <a:tailEnd type="triangle"/>
+          </a:ln>
+        </p:spPr>
+      </p:sp>
+      <p:sp>
+        <p:nvSpPr>
+          <p:cNvPr id="25" name="Shape 23"/>
+          <p:cNvSpPr/>
+          <p:nvPr/>
+        </p:nvSpPr>
+        <p:spPr>
+          <a:xfrm>
+            <a:off x="8778240" y="3520440"/>
+            <a:ext cx="0" cy="868680"/>
+          </a:xfrm>
+          <a:prstGeom prst="line">
+            <a:avLst/>
+          </a:prstGeom>
+          <a:noFill/>
+          <a:ln w="25400">
+            <a:solidFill>
+              <a:schemeClr val="accent4"/>
+            </a:solidFill>
+            <a:prstDash val="dash"/>
+            <a:tailEnd type="none"/>
+          </a:ln>
+        </p:spPr>
+      </p:sp>
+      <p:sp>
+        <p:nvSpPr>
+          <p:cNvPr id="26" name="Shape 24"/>
+          <p:cNvSpPr/>
+          <p:nvPr/>
+        </p:nvSpPr>
+        <p:spPr>
+          <a:xfrm>
+            <a:off x="8778240" y="4389120"/>
+            <a:ext cx="365760" cy="0"/>
+          </a:xfrm>
+          <a:prstGeom prst="line">
+            <a:avLst/>
+          </a:prstGeom>
+          <a:noFill/>
+          <a:ln w="25400">
+            <a:solidFill>
+              <a:schemeClr val="accent4"/>
+            </a:solidFill>
+            <a:prstDash val="dash"/>
+            <a:tailEnd type="none"/>
+          </a:ln>
+        </p:spPr>
+      </p:sp>
+      <p:sp>
+        <p:nvSpPr>
+          <p:cNvPr id="27" name="Shape 25"/>
+          <p:cNvSpPr/>
+          <p:nvPr/>
+        </p:nvSpPr>
+        <p:spPr>
+          <a:xfrm>
+            <a:off x="9144000" y="4389120"/>
+            <a:ext cx="0" cy="91440"/>
+          </a:xfrm>
+          <a:prstGeom prst="line">
+            <a:avLst/>
+          </a:prstGeom>
+          <a:noFill/>
+          <a:ln w="25400">
+            <a:solidFill>
+              <a:schemeClr val="accent4"/>
+            </a:solidFill>
+            <a:prstDash val="dash"/>
+            <a:tailEnd type="triangle"/>
+          </a:ln>
+        </p:spPr>
+      </p:sp>
+      <p:sp>
+        <p:nvSpPr>
+          <p:cNvPr id="28" name="Text 26"/>
+          <p:cNvSpPr txBox="1"/>
+          <p:nvPr/>
+        </p:nvSpPr>
+        <p:spPr>
+          <a:xfrm>
+            <a:off x="8732520" y="3808476"/>
+            <a:ext cx="1280160" cy="292608"/>
+          </a:xfrm>
+          <a:prstGeom prst="rect">
+            <a:avLst/>
+          </a:prstGeom>
+          <a:solidFill>
+            <a:srgbClr val="FDFDFB"/>
+          </a:solidFill>
+          <a:ln/>
+        </p:spPr>
+        <p:txBody>
+          <a:bodyPr wrap="square" lIns="0" tIns="0" rIns="0" bIns="0" rtlCol="0" anchor="ctr"/>
+          <a:lstStyle/>
+          <a:p>
+            <a:pPr algn="ctr" indent="0" marL="0">
+              <a:buNone/>
+            </a:pPr>
+            <a:r>
+              <a:rPr lang="en-US" sz="1300" b="1" dirty="0">
+                <a:solidFill>
+                  <a:schemeClr val="accent4"/>
+                </a:solidFill>
+                <a:latin typeface="Calibri" pitchFamily="34" charset="0"/>
+                <a:ea typeface="Calibri" pitchFamily="34" charset="-122"/>
+                <a:cs typeface="Calibri" pitchFamily="34" charset="-120"/>
+              </a:rPr>
+              <a:t>lookup</a:t>
+            </a:r>
+            <a:endParaRPr lang="en-US" sz="1300" dirty="0"/>
+          </a:p>
+        </p:txBody>
+      </p:sp>
+      <p:sp>
+        <p:nvSpPr>
+          <p:cNvPr id="29" name="Shape 27"/>
+          <p:cNvSpPr/>
+          <p:nvPr/>
+        </p:nvSpPr>
+        <p:spPr>
+          <a:xfrm>
+            <a:off x="685800" y="1920240"/>
+            <a:ext cx="1554480" cy="685800"/>
           </a:xfrm>
           <a:prstGeom prst="roundRect">
             <a:avLst>
-              <a:gd name="adj" fmla="val 5333"/>
+              <a:gd name="adj" fmla="val 9333"/>
             </a:avLst>
           </a:prstGeom>
           <a:solidFill>
-            <a:schemeClr val="bg1"/>
+            <a:schemeClr val="tx2"/>
+          </a:solidFill>
+          <a:ln/>
+        </p:spPr>
+      </p:sp>
+      <p:sp>
+        <p:nvSpPr>
+          <p:cNvPr id="30" name="Text 28"/>
+          <p:cNvSpPr txBox="1"/>
+          <p:nvPr/>
+        </p:nvSpPr>
+        <p:spPr>
+          <a:xfrm>
+            <a:off x="758952" y="1920240"/>
+            <a:ext cx="1408176" cy="685800"/>
+          </a:xfrm>
+          <a:prstGeom prst="rect">
+            <a:avLst/>
+          </a:prstGeom>
+          <a:noFill/>
+          <a:ln/>
+        </p:spPr>
+        <p:txBody>
+          <a:bodyPr wrap="square" lIns="0" tIns="0" rIns="0" bIns="0" rtlCol="0" anchor="ctr"/>
+          <a:lstStyle/>
+          <a:p>
+            <a:pPr algn="ctr" indent="0" marL="0">
+              <a:lnSpc>
+                <a:spcPct val="115000"/>
+              </a:lnSpc>
+              <a:buNone/>
+            </a:pPr>
+            <a:r>
+              <a:rPr lang="en-US" sz="1300" b="1" dirty="0">
+                <a:solidFill>
+                  <a:srgbClr val="FFFFFF"/>
+                </a:solidFill>
+                <a:latin typeface="Calibri" pitchFamily="34" charset="0"/>
+                <a:ea typeface="Calibri" pitchFamily="34" charset="-122"/>
+                <a:cs typeface="Calibri" pitchFamily="34" charset="-120"/>
+              </a:rPr>
+              <a:t>ServiceNow</a:t>
+            </a:r>
+            <a:endParaRPr lang="en-US" sz="1300" dirty="0"/>
+          </a:p>
+          <a:p>
+            <a:pPr algn="ctr" indent="0" marL="0">
+              <a:lnSpc>
+                <a:spcPct val="115000"/>
+              </a:lnSpc>
+              <a:buNone/>
+            </a:pPr>
+            <a:r>
+              <a:rPr lang="en-US" sz="1300" b="1" dirty="0">
+                <a:solidFill>
+                  <a:srgbClr val="FFFFFF"/>
+                </a:solidFill>
+                <a:latin typeface="Calibri" pitchFamily="34" charset="0"/>
+                <a:ea typeface="Calibri" pitchFamily="34" charset="-122"/>
+                <a:cs typeface="Calibri" pitchFamily="34" charset="-120"/>
+              </a:rPr>
+              <a:t>Incident Table</a:t>
+            </a:r>
+            <a:endParaRPr lang="en-US" sz="1300" dirty="0"/>
+          </a:p>
+        </p:txBody>
+      </p:sp>
+      <p:sp>
+        <p:nvSpPr>
+          <p:cNvPr id="31" name="Shape 29"/>
+          <p:cNvSpPr/>
+          <p:nvPr/>
+        </p:nvSpPr>
+        <p:spPr>
+          <a:xfrm>
+            <a:off x="685800" y="3246120"/>
+            <a:ext cx="1554480" cy="685800"/>
+          </a:xfrm>
+          <a:prstGeom prst="roundRect">
+            <a:avLst>
+              <a:gd name="adj" fmla="val 9333"/>
+            </a:avLst>
+          </a:prstGeom>
+          <a:solidFill>
+            <a:srgbClr val="FFFFFF"/>
           </a:solidFill>
           <a:ln w="12700">
             <a:solidFill>
@@ -11190,64 +11274,18 @@
             </a:solidFill>
             <a:prstDash val="solid"/>
           </a:ln>
-          <a:effectLst>
-            <a:outerShdw sx="100000" sy="100000" kx="0" ky="0" algn="bl" rotWithShape="0" blurRad="127000" dist="38100" dir="5400000">
-              <a:srgbClr val="1A1F2B">
-                <a:alpha val="18000"/>
-              </a:srgbClr>
-            </a:outerShdw>
-          </a:effectLst>
-        </p:spPr>
-      </p:sp>
-      <p:sp>
-        <p:nvSpPr>
-          <p:cNvPr id="5" name="Text 3"/>
+        </p:spPr>
+      </p:sp>
+      <p:sp>
+        <p:nvSpPr>
+          <p:cNvPr id="32" name="Text 30"/>
           <p:cNvSpPr txBox="1"/>
           <p:nvPr/>
         </p:nvSpPr>
         <p:spPr>
           <a:xfrm>
-            <a:off x="640080" y="2039112"/>
-            <a:ext cx="1737360" cy="457200"/>
-          </a:xfrm>
-          <a:prstGeom prst="rect">
-            <a:avLst/>
-          </a:prstGeom>
-          <a:noFill/>
-          <a:ln/>
-        </p:spPr>
-        <p:txBody>
-          <a:bodyPr wrap="square" lIns="0" tIns="0" rIns="0" bIns="0" rtlCol="0" anchor="ctr"/>
-          <a:lstStyle/>
-          <a:p>
-            <a:pPr algn="ctr" indent="0" marL="0">
-              <a:buNone/>
-            </a:pPr>
-            <a:r>
-              <a:rPr lang="en-US" sz="1500" b="1" dirty="0">
-                <a:solidFill>
-                  <a:schemeClr val="tx1"/>
-                </a:solidFill>
-                <a:latin typeface="Cambria" pitchFamily="34" charset="0"/>
-                <a:ea typeface="Cambria" pitchFamily="34" charset="-122"/>
-                <a:cs typeface="Cambria" pitchFamily="34" charset="-120"/>
-              </a:rPr>
-              <a:t>ServiceNow</a:t>
-            </a:r>
-            <a:endParaRPr lang="en-US" sz="1500" dirty="0"/>
-          </a:p>
-        </p:txBody>
-      </p:sp>
-      <p:sp>
-        <p:nvSpPr>
-          <p:cNvPr id="6" name="Text 4"/>
-          <p:cNvSpPr txBox="1"/>
-          <p:nvPr/>
-        </p:nvSpPr>
-        <p:spPr>
-          <a:xfrm>
-            <a:off x="640080" y="2496312"/>
-            <a:ext cx="1737360" cy="685800"/>
+            <a:off x="758952" y="3246120"/>
+            <a:ext cx="1408176" cy="685800"/>
           </a:xfrm>
           <a:prstGeom prst="rect">
             <a:avLst/>
@@ -11261,103 +11299,63 @@
           <a:p>
             <a:pPr algn="ctr" indent="0" marL="0">
               <a:lnSpc>
-                <a:spcPct val="120000"/>
+                <a:spcPct val="115000"/>
               </a:lnSpc>
               <a:buNone/>
             </a:pPr>
             <a:r>
-              <a:rPr lang="en-US" sz="1100" dirty="0">
-                <a:solidFill>
-                  <a:schemeClr val="accent6"/>
+              <a:rPr lang="en-US" sz="1300" b="1" dirty="0">
+                <a:solidFill>
+                  <a:schemeClr val="tx1"/>
                 </a:solidFill>
                 <a:latin typeface="Calibri" pitchFamily="34" charset="0"/>
                 <a:ea typeface="Calibri" pitchFamily="34" charset="-122"/>
                 <a:cs typeface="Calibri" pitchFamily="34" charset="-120"/>
               </a:rPr>
-              <a:t>Incident records</a:t>
-            </a:r>
-            <a:endParaRPr lang="en-US" sz="1100" dirty="0"/>
+              <a:t>Schedule Trigger</a:t>
+            </a:r>
+            <a:endParaRPr lang="en-US" sz="1300" dirty="0"/>
           </a:p>
           <a:p>
             <a:pPr algn="ctr" indent="0" marL="0">
               <a:lnSpc>
-                <a:spcPct val="120000"/>
+                <a:spcPct val="115000"/>
               </a:lnSpc>
               <a:buNone/>
             </a:pPr>
             <a:r>
-              <a:rPr lang="en-US" sz="1100" dirty="0">
-                <a:solidFill>
-                  <a:schemeClr val="accent6"/>
+              <a:rPr lang="en-US" sz="1300" b="1" dirty="0">
+                <a:solidFill>
+                  <a:schemeClr val="tx1"/>
                 </a:solidFill>
                 <a:latin typeface="Calibri" pitchFamily="34" charset="0"/>
                 <a:ea typeface="Calibri" pitchFamily="34" charset="-122"/>
                 <a:cs typeface="Calibri" pitchFamily="34" charset="-120"/>
               </a:rPr>
-              <a:t>priority, state</a:t>
-            </a:r>
-            <a:endParaRPr lang="en-US" sz="1100" dirty="0"/>
-          </a:p>
-        </p:txBody>
-      </p:sp>
-      <p:sp>
-        <p:nvSpPr>
-          <p:cNvPr id="7" name="Shape 5"/>
+              <a:t>every 5 min</a:t>
+            </a:r>
+            <a:endParaRPr lang="en-US" sz="1300" dirty="0"/>
+          </a:p>
+        </p:txBody>
+      </p:sp>
+      <p:sp>
+        <p:nvSpPr>
+          <p:cNvPr id="33" name="Shape 31"/>
           <p:cNvSpPr/>
           <p:nvPr/>
         </p:nvSpPr>
         <p:spPr>
           <a:xfrm>
-            <a:off x="548640" y="1874520"/>
-            <a:ext cx="1920240" cy="54864"/>
-          </a:xfrm>
-          <a:prstGeom prst="roundRect">
-            <a:avLst/>
-          </a:prstGeom>
-          <a:solidFill>
-            <a:schemeClr val="tx1"/>
-          </a:solidFill>
-          <a:ln/>
-        </p:spPr>
-      </p:sp>
-      <p:sp>
-        <p:nvSpPr>
-          <p:cNvPr id="8" name="Shape 6"/>
-          <p:cNvSpPr/>
-          <p:nvPr/>
-        </p:nvSpPr>
-        <p:spPr>
-          <a:xfrm>
-            <a:off x="2496312" y="2423160"/>
-            <a:ext cx="265176" cy="274320"/>
-          </a:xfrm>
-          <a:prstGeom prst="rightArrow">
-            <a:avLst/>
-          </a:prstGeom>
-          <a:solidFill>
-            <a:schemeClr val="accent4"/>
-          </a:solidFill>
-          <a:ln/>
-        </p:spPr>
-      </p:sp>
-      <p:sp>
-        <p:nvSpPr>
-          <p:cNvPr id="9" name="Shape 7"/>
-          <p:cNvSpPr/>
-          <p:nvPr/>
-        </p:nvSpPr>
-        <p:spPr>
-          <a:xfrm>
-            <a:off x="2788920" y="1874520"/>
-            <a:ext cx="1920240" cy="1371600"/>
+            <a:off x="2514600" y="2537460"/>
+            <a:ext cx="1554480" cy="777240"/>
           </a:xfrm>
           <a:prstGeom prst="roundRect">
             <a:avLst>
-              <a:gd name="adj" fmla="val 5333"/>
+              <a:gd name="adj" fmla="val 8235"/>
             </a:avLst>
           </a:prstGeom>
           <a:solidFill>
-            <a:schemeClr val="bg1"/>
+            <a:srgbClr val="FFFFFF"/>
           </a:solidFill>
           <a:ln w="12700">
             <a:solidFill>
@@ -11365,64 +11363,18 @@
             </a:solidFill>
             <a:prstDash val="solid"/>
           </a:ln>
-          <a:effectLst>
-            <a:outerShdw sx="100000" sy="100000" kx="0" ky="0" algn="bl" rotWithShape="0" blurRad="127000" dist="38100" dir="5400000">
-              <a:srgbClr val="1A1F2B">
-                <a:alpha val="18000"/>
-              </a:srgbClr>
-            </a:outerShdw>
-          </a:effectLst>
-        </p:spPr>
-      </p:sp>
-      <p:sp>
-        <p:nvSpPr>
-          <p:cNvPr id="10" name="Text 8"/>
+        </p:spPr>
+      </p:sp>
+      <p:sp>
+        <p:nvSpPr>
+          <p:cNvPr id="34" name="Text 32"/>
           <p:cNvSpPr txBox="1"/>
           <p:nvPr/>
         </p:nvSpPr>
         <p:spPr>
           <a:xfrm>
-            <a:off x="2880360" y="2039112"/>
-            <a:ext cx="1737360" cy="457200"/>
-          </a:xfrm>
-          <a:prstGeom prst="rect">
-            <a:avLst/>
-          </a:prstGeom>
-          <a:noFill/>
-          <a:ln/>
-        </p:spPr>
-        <p:txBody>
-          <a:bodyPr wrap="square" lIns="0" tIns="0" rIns="0" bIns="0" rtlCol="0" anchor="ctr"/>
-          <a:lstStyle/>
-          <a:p>
-            <a:pPr algn="ctr" indent="0" marL="0">
-              <a:buNone/>
-            </a:pPr>
-            <a:r>
-              <a:rPr lang="en-US" sz="1500" b="1" dirty="0">
-                <a:solidFill>
-                  <a:schemeClr val="tx1"/>
-                </a:solidFill>
-                <a:latin typeface="Cambria" pitchFamily="34" charset="0"/>
-                <a:ea typeface="Cambria" pitchFamily="34" charset="-122"/>
-                <a:cs typeface="Cambria" pitchFamily="34" charset="-120"/>
-              </a:rPr>
-              <a:t>n8n</a:t>
-            </a:r>
-            <a:endParaRPr lang="en-US" sz="1500" dirty="0"/>
-          </a:p>
-        </p:txBody>
-      </p:sp>
-      <p:sp>
-        <p:nvSpPr>
-          <p:cNvPr id="11" name="Text 9"/>
-          <p:cNvSpPr txBox="1"/>
-          <p:nvPr/>
-        </p:nvSpPr>
-        <p:spPr>
-          <a:xfrm>
-            <a:off x="2880360" y="2496312"/>
-            <a:ext cx="1737360" cy="685800"/>
+            <a:off x="2587752" y="2537460"/>
+            <a:ext cx="1408176" cy="777240"/>
           </a:xfrm>
           <a:prstGeom prst="rect">
             <a:avLst/>
@@ -11436,103 +11388,63 @@
           <a:p>
             <a:pPr algn="ctr" indent="0" marL="0">
               <a:lnSpc>
-                <a:spcPct val="120000"/>
+                <a:spcPct val="115000"/>
               </a:lnSpc>
               <a:buNone/>
             </a:pPr>
             <a:r>
-              <a:rPr lang="en-US" sz="1100" dirty="0">
-                <a:solidFill>
-                  <a:schemeClr val="accent6"/>
+              <a:rPr lang="en-US" sz="1300" b="1" dirty="0">
+                <a:solidFill>
+                  <a:schemeClr val="tx1"/>
                 </a:solidFill>
                 <a:latin typeface="Calibri" pitchFamily="34" charset="0"/>
                 <a:ea typeface="Calibri" pitchFamily="34" charset="-122"/>
                 <a:cs typeface="Calibri" pitchFamily="34" charset="-120"/>
               </a:rPr>
-              <a:t>Schedule + orchestration</a:t>
-            </a:r>
-            <a:endParaRPr lang="en-US" sz="1100" dirty="0"/>
+              <a:t>HTTP Request</a:t>
+            </a:r>
+            <a:endParaRPr lang="en-US" sz="1300" dirty="0"/>
           </a:p>
           <a:p>
             <a:pPr algn="ctr" indent="0" marL="0">
               <a:lnSpc>
-                <a:spcPct val="120000"/>
+                <a:spcPct val="115000"/>
               </a:lnSpc>
               <a:buNone/>
             </a:pPr>
             <a:r>
-              <a:rPr lang="en-US" sz="1100" dirty="0">
-                <a:solidFill>
-                  <a:schemeClr val="accent6"/>
+              <a:rPr lang="en-US" sz="1300" b="1" dirty="0">
+                <a:solidFill>
+                  <a:schemeClr val="tx1"/>
                 </a:solidFill>
                 <a:latin typeface="Calibri" pitchFamily="34" charset="0"/>
                 <a:ea typeface="Calibri" pitchFamily="34" charset="-122"/>
                 <a:cs typeface="Calibri" pitchFamily="34" charset="-120"/>
               </a:rPr>
-              <a:t>every 5 minutes</a:t>
-            </a:r>
-            <a:endParaRPr lang="en-US" sz="1100" dirty="0"/>
-          </a:p>
-        </p:txBody>
-      </p:sp>
-      <p:sp>
-        <p:nvSpPr>
-          <p:cNvPr id="12" name="Shape 10"/>
+              <a:t>n8n</a:t>
+            </a:r>
+            <a:endParaRPr lang="en-US" sz="1300" dirty="0"/>
+          </a:p>
+        </p:txBody>
+      </p:sp>
+      <p:sp>
+        <p:nvSpPr>
+          <p:cNvPr id="35" name="Shape 33"/>
           <p:cNvSpPr/>
           <p:nvPr/>
         </p:nvSpPr>
         <p:spPr>
           <a:xfrm>
-            <a:off x="2788920" y="1874520"/>
-            <a:ext cx="1920240" cy="54864"/>
-          </a:xfrm>
-          <a:prstGeom prst="roundRect">
-            <a:avLst/>
-          </a:prstGeom>
-          <a:solidFill>
-            <a:schemeClr val="accent2"/>
-          </a:solidFill>
-          <a:ln/>
-        </p:spPr>
-      </p:sp>
-      <p:sp>
-        <p:nvSpPr>
-          <p:cNvPr id="13" name="Shape 11"/>
-          <p:cNvSpPr/>
-          <p:nvPr/>
-        </p:nvSpPr>
-        <p:spPr>
-          <a:xfrm>
-            <a:off x="4736592" y="2423160"/>
-            <a:ext cx="265176" cy="274320"/>
-          </a:xfrm>
-          <a:prstGeom prst="rightArrow">
-            <a:avLst/>
-          </a:prstGeom>
-          <a:solidFill>
-            <a:schemeClr val="accent4"/>
-          </a:solidFill>
-          <a:ln/>
-        </p:spPr>
-      </p:sp>
-      <p:sp>
-        <p:nvSpPr>
-          <p:cNvPr id="14" name="Shape 12"/>
-          <p:cNvSpPr/>
-          <p:nvPr/>
-        </p:nvSpPr>
-        <p:spPr>
-          <a:xfrm>
-            <a:off x="5029200" y="1874520"/>
-            <a:ext cx="1920240" cy="1371600"/>
+            <a:off x="4343400" y="2537460"/>
+            <a:ext cx="1554480" cy="777240"/>
           </a:xfrm>
           <a:prstGeom prst="roundRect">
             <a:avLst>
-              <a:gd name="adj" fmla="val 5333"/>
+              <a:gd name="adj" fmla="val 8235"/>
             </a:avLst>
           </a:prstGeom>
           <a:solidFill>
-            <a:schemeClr val="bg1"/>
+            <a:srgbClr val="FFFFFF"/>
           </a:solidFill>
           <a:ln w="12700">
             <a:solidFill>
@@ -11540,64 +11452,18 @@
             </a:solidFill>
             <a:prstDash val="solid"/>
           </a:ln>
-          <a:effectLst>
-            <a:outerShdw sx="100000" sy="100000" kx="0" ky="0" algn="bl" rotWithShape="0" blurRad="127000" dist="38100" dir="5400000">
-              <a:srgbClr val="1A1F2B">
-                <a:alpha val="18000"/>
-              </a:srgbClr>
-            </a:outerShdw>
-          </a:effectLst>
-        </p:spPr>
-      </p:sp>
-      <p:sp>
-        <p:nvSpPr>
-          <p:cNvPr id="15" name="Text 13"/>
+        </p:spPr>
+      </p:sp>
+      <p:sp>
+        <p:nvSpPr>
+          <p:cNvPr id="36" name="Text 34"/>
           <p:cNvSpPr txBox="1"/>
           <p:nvPr/>
         </p:nvSpPr>
         <p:spPr>
           <a:xfrm>
-            <a:off x="5120640" y="2039112"/>
-            <a:ext cx="1737360" cy="457200"/>
-          </a:xfrm>
-          <a:prstGeom prst="rect">
-            <a:avLst/>
-          </a:prstGeom>
-          <a:noFill/>
-          <a:ln/>
-        </p:spPr>
-        <p:txBody>
-          <a:bodyPr wrap="square" lIns="0" tIns="0" rIns="0" bIns="0" rtlCol="0" anchor="ctr"/>
-          <a:lstStyle/>
-          <a:p>
-            <a:pPr algn="ctr" indent="0" marL="0">
-              <a:buNone/>
-            </a:pPr>
-            <a:r>
-              <a:rPr lang="en-US" sz="1500" b="1" dirty="0">
-                <a:solidFill>
-                  <a:schemeClr val="tx1"/>
-                </a:solidFill>
-                <a:latin typeface="Cambria" pitchFamily="34" charset="0"/>
-                <a:ea typeface="Cambria" pitchFamily="34" charset="-122"/>
-                <a:cs typeface="Cambria" pitchFamily="34" charset="-120"/>
-              </a:rPr>
-              <a:t>REST API</a:t>
-            </a:r>
-            <a:endParaRPr lang="en-US" sz="1500" dirty="0"/>
-          </a:p>
-        </p:txBody>
-      </p:sp>
-      <p:sp>
-        <p:nvSpPr>
-          <p:cNvPr id="16" name="Text 14"/>
-          <p:cNvSpPr txBox="1"/>
-          <p:nvPr/>
-        </p:nvSpPr>
-        <p:spPr>
-          <a:xfrm>
-            <a:off x="5120640" y="2496312"/>
-            <a:ext cx="1737360" cy="685800"/>
+            <a:off x="4416552" y="2537460"/>
+            <a:ext cx="1408176" cy="777240"/>
           </a:xfrm>
           <a:prstGeom prst="rect">
             <a:avLst/>
@@ -11611,103 +11477,227 @@
           <a:p>
             <a:pPr algn="ctr" indent="0" marL="0">
               <a:lnSpc>
-                <a:spcPct val="120000"/>
+                <a:spcPct val="115000"/>
               </a:lnSpc>
               <a:buNone/>
             </a:pPr>
             <a:r>
-              <a:rPr lang="en-US" sz="1100" dirty="0">
-                <a:solidFill>
-                  <a:schemeClr val="accent6"/>
+              <a:rPr lang="en-US" sz="1300" b="1" dirty="0">
+                <a:solidFill>
+                  <a:schemeClr val="tx1"/>
                 </a:solidFill>
                 <a:latin typeface="Calibri" pitchFamily="34" charset="0"/>
                 <a:ea typeface="Calibri" pitchFamily="34" charset="-122"/>
                 <a:cs typeface="Calibri" pitchFamily="34" charset="-120"/>
               </a:rPr>
-              <a:t>Authenticated GET</a:t>
-            </a:r>
-            <a:endParaRPr lang="en-US" sz="1100" dirty="0"/>
+              <a:t>Split Out</a:t>
+            </a:r>
+            <a:endParaRPr lang="en-US" sz="1300" dirty="0"/>
           </a:p>
           <a:p>
             <a:pPr algn="ctr" indent="0" marL="0">
               <a:lnSpc>
-                <a:spcPct val="120000"/>
+                <a:spcPct val="115000"/>
               </a:lnSpc>
               <a:buNone/>
             </a:pPr>
             <a:r>
-              <a:rPr lang="en-US" sz="1100" dirty="0">
-                <a:solidFill>
-                  <a:schemeClr val="accent6"/>
+              <a:rPr lang="en-US" sz="1300" b="1" dirty="0">
+                <a:solidFill>
+                  <a:schemeClr val="tx1"/>
                 </a:solidFill>
                 <a:latin typeface="Calibri" pitchFamily="34" charset="0"/>
                 <a:ea typeface="Calibri" pitchFamily="34" charset="-122"/>
                 <a:cs typeface="Calibri" pitchFamily="34" charset="-120"/>
               </a:rPr>
-              <a:t>Table API</a:t>
-            </a:r>
-            <a:endParaRPr lang="en-US" sz="1100" dirty="0"/>
-          </a:p>
-        </p:txBody>
-      </p:sp>
-      <p:sp>
-        <p:nvSpPr>
-          <p:cNvPr id="17" name="Shape 15"/>
+              <a:t>1 item / incident</a:t>
+            </a:r>
+            <a:endParaRPr lang="en-US" sz="1300" dirty="0"/>
+          </a:p>
+        </p:txBody>
+      </p:sp>
+      <p:sp>
+        <p:nvSpPr>
+          <p:cNvPr id="37" name="Shape 35"/>
           <p:cNvSpPr/>
           <p:nvPr/>
         </p:nvSpPr>
         <p:spPr>
           <a:xfrm>
-            <a:off x="5029200" y="1874520"/>
-            <a:ext cx="1920240" cy="54864"/>
-          </a:xfrm>
-          <a:prstGeom prst="roundRect">
+            <a:off x="6172200" y="2331720"/>
+            <a:ext cx="1554480" cy="1188720"/>
+          </a:xfrm>
+          <a:prstGeom prst="diamond">
             <a:avLst/>
           </a:prstGeom>
           <a:solidFill>
-            <a:schemeClr val="accent2"/>
+            <a:schemeClr val="accent1"/>
           </a:solidFill>
           <a:ln/>
         </p:spPr>
       </p:sp>
       <p:sp>
         <p:nvSpPr>
-          <p:cNvPr id="18" name="Shape 16"/>
+          <p:cNvPr id="38" name="Text 36"/>
+          <p:cNvSpPr txBox="1"/>
+          <p:nvPr/>
+        </p:nvSpPr>
+        <p:spPr>
+          <a:xfrm>
+            <a:off x="6172200" y="2331720"/>
+            <a:ext cx="1554480" cy="1188720"/>
+          </a:xfrm>
+          <a:prstGeom prst="rect">
+            <a:avLst/>
+          </a:prstGeom>
+          <a:noFill/>
+          <a:ln/>
+        </p:spPr>
+        <p:txBody>
+          <a:bodyPr wrap="square" lIns="0" tIns="0" rIns="0" bIns="0" rtlCol="0" anchor="ctr"/>
+          <a:lstStyle/>
+          <a:p>
+            <a:pPr algn="ctr" indent="0" marL="0">
+              <a:lnSpc>
+                <a:spcPct val="110000"/>
+              </a:lnSpc>
+              <a:buNone/>
+            </a:pPr>
+            <a:r>
+              <a:rPr lang="en-US" sz="1300" b="1" dirty="0">
+                <a:solidFill>
+                  <a:srgbClr val="FFFFFF"/>
+                </a:solidFill>
+                <a:latin typeface="Calibri" pitchFamily="34" charset="0"/>
+                <a:ea typeface="Calibri" pitchFamily="34" charset="-122"/>
+                <a:cs typeface="Calibri" pitchFamily="34" charset="-120"/>
+              </a:rPr>
+              <a:t>Evaluate</a:t>
+            </a:r>
+            <a:endParaRPr lang="en-US" sz="1300" dirty="0"/>
+          </a:p>
+          <a:p>
+            <a:pPr algn="ctr" indent="0" marL="0">
+              <a:lnSpc>
+                <a:spcPct val="110000"/>
+              </a:lnSpc>
+              <a:buNone/>
+            </a:pPr>
+            <a:r>
+              <a:rPr lang="en-US" sz="1300" b="1" dirty="0">
+                <a:solidFill>
+                  <a:srgbClr val="FFFFFF"/>
+                </a:solidFill>
+                <a:latin typeface="Calibri" pitchFamily="34" charset="0"/>
+                <a:ea typeface="Calibri" pitchFamily="34" charset="-122"/>
+                <a:cs typeface="Calibri" pitchFamily="34" charset="-120"/>
+              </a:rPr>
+              <a:t>rules</a:t>
+            </a:r>
+            <a:endParaRPr lang="en-US" sz="1300" dirty="0"/>
+          </a:p>
+        </p:txBody>
+      </p:sp>
+      <p:sp>
+        <p:nvSpPr>
+          <p:cNvPr id="39" name="Shape 37"/>
           <p:cNvSpPr/>
           <p:nvPr/>
         </p:nvSpPr>
         <p:spPr>
           <a:xfrm>
-            <a:off x="6976872" y="2423160"/>
-            <a:ext cx="265176" cy="274320"/>
-          </a:xfrm>
-          <a:prstGeom prst="rightArrow">
+            <a:off x="8001000" y="2331720"/>
+            <a:ext cx="1554480" cy="1188720"/>
+          </a:xfrm>
+          <a:prstGeom prst="diamond">
             <a:avLst/>
           </a:prstGeom>
           <a:solidFill>
-            <a:schemeClr val="accent4"/>
+            <a:schemeClr val="accent1"/>
           </a:solidFill>
           <a:ln/>
         </p:spPr>
       </p:sp>
       <p:sp>
         <p:nvSpPr>
-          <p:cNvPr id="19" name="Shape 17"/>
+          <p:cNvPr id="40" name="Text 38"/>
+          <p:cNvSpPr txBox="1"/>
+          <p:nvPr/>
+        </p:nvSpPr>
+        <p:spPr>
+          <a:xfrm>
+            <a:off x="8001000" y="2331720"/>
+            <a:ext cx="1554480" cy="1188720"/>
+          </a:xfrm>
+          <a:prstGeom prst="rect">
+            <a:avLst/>
+          </a:prstGeom>
+          <a:noFill/>
+          <a:ln/>
+        </p:spPr>
+        <p:txBody>
+          <a:bodyPr wrap="square" lIns="0" tIns="0" rIns="0" bIns="0" rtlCol="0" anchor="ctr"/>
+          <a:lstStyle/>
+          <a:p>
+            <a:pPr algn="ctr" indent="0" marL="0">
+              <a:lnSpc>
+                <a:spcPct val="110000"/>
+              </a:lnSpc>
+              <a:buNone/>
+            </a:pPr>
+            <a:r>
+              <a:rPr lang="en-US" sz="1300" b="1" dirty="0">
+                <a:solidFill>
+                  <a:srgbClr val="FFFFFF"/>
+                </a:solidFill>
+                <a:latin typeface="Calibri" pitchFamily="34" charset="0"/>
+                <a:ea typeface="Calibri" pitchFamily="34" charset="-122"/>
+                <a:cs typeface="Calibri" pitchFamily="34" charset="-120"/>
+              </a:rPr>
+              <a:t>Already</a:t>
+            </a:r>
+            <a:endParaRPr lang="en-US" sz="1300" dirty="0"/>
+          </a:p>
+          <a:p>
+            <a:pPr algn="ctr" indent="0" marL="0">
+              <a:lnSpc>
+                <a:spcPct val="110000"/>
+              </a:lnSpc>
+              <a:buNone/>
+            </a:pPr>
+            <a:r>
+              <a:rPr lang="en-US" sz="1300" b="1" dirty="0">
+                <a:solidFill>
+                  <a:srgbClr val="FFFFFF"/>
+                </a:solidFill>
+                <a:latin typeface="Calibri" pitchFamily="34" charset="0"/>
+                <a:ea typeface="Calibri" pitchFamily="34" charset="-122"/>
+                <a:cs typeface="Calibri" pitchFamily="34" charset="-120"/>
+              </a:rPr>
+              <a:t>notified?</a:t>
+            </a:r>
+            <a:endParaRPr lang="en-US" sz="1300" dirty="0"/>
+          </a:p>
+        </p:txBody>
+      </p:sp>
+      <p:sp>
+        <p:nvSpPr>
+          <p:cNvPr id="41" name="Shape 39"/>
           <p:cNvSpPr/>
           <p:nvPr/>
         </p:nvSpPr>
         <p:spPr>
           <a:xfrm>
-            <a:off x="7269480" y="1874520"/>
-            <a:ext cx="1920240" cy="1371600"/>
+            <a:off x="6766560" y="4229100"/>
+            <a:ext cx="1463040" cy="685800"/>
           </a:xfrm>
           <a:prstGeom prst="roundRect">
             <a:avLst>
-              <a:gd name="adj" fmla="val 5333"/>
+              <a:gd name="adj" fmla="val 9333"/>
             </a:avLst>
           </a:prstGeom>
           <a:solidFill>
-            <a:schemeClr val="bg1"/>
+            <a:srgbClr val="FFFFFF"/>
           </a:solidFill>
           <a:ln w="12700">
             <a:solidFill>
@@ -11715,81 +11705,18 @@
             </a:solidFill>
             <a:prstDash val="solid"/>
           </a:ln>
-          <a:effectLst>
-            <a:outerShdw sx="100000" sy="100000" kx="0" ky="0" algn="bl" rotWithShape="0" blurRad="127000" dist="38100" dir="5400000">
-              <a:srgbClr val="1A1F2B">
-                <a:alpha val="18000"/>
-              </a:srgbClr>
-            </a:outerShdw>
-          </a:effectLst>
-        </p:spPr>
-      </p:sp>
-      <p:sp>
-        <p:nvSpPr>
-          <p:cNvPr id="20" name="Text 18"/>
+        </p:spPr>
+      </p:sp>
+      <p:sp>
+        <p:nvSpPr>
+          <p:cNvPr id="42" name="Text 40"/>
           <p:cNvSpPr txBox="1"/>
           <p:nvPr/>
         </p:nvSpPr>
         <p:spPr>
           <a:xfrm>
-            <a:off x="7360920" y="2039112"/>
-            <a:ext cx="1737360" cy="457200"/>
-          </a:xfrm>
-          <a:prstGeom prst="rect">
-            <a:avLst/>
-          </a:prstGeom>
-          <a:noFill/>
-          <a:ln/>
-        </p:spPr>
-        <p:txBody>
-          <a:bodyPr wrap="square" lIns="0" tIns="0" rIns="0" bIns="0" rtlCol="0" anchor="ctr"/>
-          <a:lstStyle/>
-          <a:p>
-            <a:pPr algn="ctr" indent="0" marL="0">
-              <a:buNone/>
-            </a:pPr>
-            <a:r>
-              <a:rPr lang="en-US" sz="1500" b="1" dirty="0">
-                <a:solidFill>
-                  <a:schemeClr val="tx1"/>
-                </a:solidFill>
-                <a:latin typeface="Cambria" pitchFamily="34" charset="0"/>
-                <a:ea typeface="Cambria" pitchFamily="34" charset="-122"/>
-                <a:cs typeface="Cambria" pitchFamily="34" charset="-120"/>
-              </a:rPr>
-              <a:t>Evaluate +</a:t>
-            </a:r>
-            <a:endParaRPr lang="en-US" sz="1500" dirty="0"/>
-          </a:p>
-          <a:p>
-            <a:pPr algn="ctr" indent="0" marL="0">
-              <a:buNone/>
-            </a:pPr>
-            <a:r>
-              <a:rPr lang="en-US" sz="1500" b="1" dirty="0">
-                <a:solidFill>
-                  <a:schemeClr val="tx1"/>
-                </a:solidFill>
-                <a:latin typeface="Cambria" pitchFamily="34" charset="0"/>
-                <a:ea typeface="Cambria" pitchFamily="34" charset="-122"/>
-                <a:cs typeface="Cambria" pitchFamily="34" charset="-120"/>
-              </a:rPr>
-              <a:t>Claim</a:t>
-            </a:r>
-            <a:endParaRPr lang="en-US" sz="1500" dirty="0"/>
-          </a:p>
-        </p:txBody>
-      </p:sp>
-      <p:sp>
-        <p:nvSpPr>
-          <p:cNvPr id="21" name="Text 19"/>
-          <p:cNvSpPr txBox="1"/>
-          <p:nvPr/>
-        </p:nvSpPr>
-        <p:spPr>
-          <a:xfrm>
-            <a:off x="7360920" y="2496312"/>
-            <a:ext cx="1737360" cy="685800"/>
+            <a:off x="6839712" y="4229100"/>
+            <a:ext cx="1316736" cy="685800"/>
           </a:xfrm>
           <a:prstGeom prst="rect">
             <a:avLst/>
@@ -11803,12 +11730,12 @@
           <a:p>
             <a:pPr algn="ctr" indent="0" marL="0">
               <a:lnSpc>
-                <a:spcPct val="120000"/>
+                <a:spcPct val="115000"/>
               </a:lnSpc>
               <a:buNone/>
             </a:pPr>
             <a:r>
-              <a:rPr lang="en-US" sz="1100" dirty="0">
+              <a:rPr lang="en-US" sz="1300" b="1" dirty="0">
                 <a:solidFill>
                   <a:schemeClr val="accent6"/>
                 </a:solidFill>
@@ -11816,90 +11743,30 @@
                 <a:ea typeface="Calibri" pitchFamily="34" charset="-122"/>
                 <a:cs typeface="Calibri" pitchFamily="34" charset="-120"/>
               </a:rPr>
-              <a:t>Critical / high / stale</a:t>
-            </a:r>
-            <a:endParaRPr lang="en-US" sz="1100" dirty="0"/>
-          </a:p>
-          <a:p>
-            <a:pPr algn="ctr" indent="0" marL="0">
-              <a:lnSpc>
-                <a:spcPct val="120000"/>
-              </a:lnSpc>
-              <a:buNone/>
-            </a:pPr>
-            <a:r>
-              <a:rPr lang="en-US" sz="1100" dirty="0">
-                <a:solidFill>
-                  <a:schemeClr val="accent6"/>
-                </a:solidFill>
-                <a:latin typeface="Calibri" pitchFamily="34" charset="0"/>
-                <a:ea typeface="Calibri" pitchFamily="34" charset="-122"/>
-                <a:cs typeface="Calibri" pitchFamily="34" charset="-120"/>
-              </a:rPr>
-              <a:t>+ dedup store</a:t>
-            </a:r>
-            <a:endParaRPr lang="en-US" sz="1100" dirty="0"/>
-          </a:p>
-        </p:txBody>
-      </p:sp>
-      <p:sp>
-        <p:nvSpPr>
-          <p:cNvPr id="22" name="Shape 20"/>
+              <a:t>Skip</a:t>
+            </a:r>
+            <a:endParaRPr lang="en-US" sz="1300" dirty="0"/>
+          </a:p>
+        </p:txBody>
+      </p:sp>
+      <p:sp>
+        <p:nvSpPr>
+          <p:cNvPr id="43" name="Shape 41"/>
           <p:cNvSpPr/>
           <p:nvPr/>
         </p:nvSpPr>
         <p:spPr>
           <a:xfrm>
-            <a:off x="7269480" y="1874520"/>
-            <a:ext cx="1920240" cy="54864"/>
-          </a:xfrm>
-          <a:prstGeom prst="roundRect">
-            <a:avLst/>
-          </a:prstGeom>
-          <a:solidFill>
-            <a:schemeClr val="accent1"/>
-          </a:solidFill>
-          <a:ln/>
-        </p:spPr>
-      </p:sp>
-      <p:sp>
-        <p:nvSpPr>
-          <p:cNvPr id="23" name="Shape 21"/>
-          <p:cNvSpPr/>
-          <p:nvPr/>
-        </p:nvSpPr>
-        <p:spPr>
-          <a:xfrm>
-            <a:off x="9217152" y="2423160"/>
-            <a:ext cx="265176" cy="274320"/>
-          </a:xfrm>
-          <a:prstGeom prst="rightArrow">
-            <a:avLst/>
-          </a:prstGeom>
-          <a:solidFill>
-            <a:schemeClr val="accent4"/>
-          </a:solidFill>
-          <a:ln/>
-        </p:spPr>
-      </p:sp>
-      <p:sp>
-        <p:nvSpPr>
-          <p:cNvPr id="24" name="Shape 22"/>
-          <p:cNvSpPr/>
-          <p:nvPr/>
-        </p:nvSpPr>
-        <p:spPr>
-          <a:xfrm>
-            <a:off x="9509760" y="1874520"/>
-            <a:ext cx="1920240" cy="1371600"/>
+            <a:off x="9829800" y="2537460"/>
+            <a:ext cx="1554480" cy="777240"/>
           </a:xfrm>
           <a:prstGeom prst="roundRect">
             <a:avLst>
-              <a:gd name="adj" fmla="val 5333"/>
+              <a:gd name="adj" fmla="val 8235"/>
             </a:avLst>
           </a:prstGeom>
           <a:solidFill>
-            <a:schemeClr val="bg1"/>
+            <a:srgbClr val="FFFFFF"/>
           </a:solidFill>
           <a:ln w="12700">
             <a:solidFill>
@@ -11907,64 +11774,18 @@
             </a:solidFill>
             <a:prstDash val="solid"/>
           </a:ln>
-          <a:effectLst>
-            <a:outerShdw sx="100000" sy="100000" kx="0" ky="0" algn="bl" rotWithShape="0" blurRad="127000" dist="38100" dir="5400000">
-              <a:srgbClr val="1A1F2B">
-                <a:alpha val="18000"/>
-              </a:srgbClr>
-            </a:outerShdw>
-          </a:effectLst>
-        </p:spPr>
-      </p:sp>
-      <p:sp>
-        <p:nvSpPr>
-          <p:cNvPr id="25" name="Text 23"/>
+        </p:spPr>
+      </p:sp>
+      <p:sp>
+        <p:nvSpPr>
+          <p:cNvPr id="44" name="Text 42"/>
           <p:cNvSpPr txBox="1"/>
           <p:nvPr/>
         </p:nvSpPr>
         <p:spPr>
           <a:xfrm>
-            <a:off x="9601200" y="2039112"/>
-            <a:ext cx="1737360" cy="457200"/>
-          </a:xfrm>
-          <a:prstGeom prst="rect">
-            <a:avLst/>
-          </a:prstGeom>
-          <a:noFill/>
-          <a:ln/>
-        </p:spPr>
-        <p:txBody>
-          <a:bodyPr wrap="square" lIns="0" tIns="0" rIns="0" bIns="0" rtlCol="0" anchor="ctr"/>
-          <a:lstStyle/>
-          <a:p>
-            <a:pPr algn="ctr" indent="0" marL="0">
-              <a:buNone/>
-            </a:pPr>
-            <a:r>
-              <a:rPr lang="en-US" sz="1500" b="1" dirty="0">
-                <a:solidFill>
-                  <a:schemeClr val="tx1"/>
-                </a:solidFill>
-                <a:latin typeface="Cambria" pitchFamily="34" charset="0"/>
-                <a:ea typeface="Cambria" pitchFamily="34" charset="-122"/>
-                <a:cs typeface="Cambria" pitchFamily="34" charset="-120"/>
-              </a:rPr>
-              <a:t>Gmail SMTP</a:t>
-            </a:r>
-            <a:endParaRPr lang="en-US" sz="1500" dirty="0"/>
-          </a:p>
-        </p:txBody>
-      </p:sp>
-      <p:sp>
-        <p:nvSpPr>
-          <p:cNvPr id="26" name="Text 24"/>
-          <p:cNvSpPr txBox="1"/>
-          <p:nvPr/>
-        </p:nvSpPr>
-        <p:spPr>
-          <a:xfrm>
-            <a:off x="9601200" y="2496312"/>
-            <a:ext cx="1737360" cy="685800"/>
+            <a:off x="9902952" y="2537460"/>
+            <a:ext cx="1408176" cy="777240"/>
           </a:xfrm>
           <a:prstGeom prst="rect">
             <a:avLst/>
@@ -11978,143 +11799,77 @@
           <a:p>
             <a:pPr algn="ctr" indent="0" marL="0">
               <a:lnSpc>
-                <a:spcPct val="120000"/>
+                <a:spcPct val="115000"/>
               </a:lnSpc>
               <a:buNone/>
             </a:pPr>
             <a:r>
-              <a:rPr lang="en-US" sz="1100" dirty="0">
-                <a:solidFill>
-                  <a:schemeClr val="accent6"/>
+              <a:rPr lang="en-US" sz="1300" b="1" dirty="0">
+                <a:solidFill>
+                  <a:schemeClr val="tx1"/>
                 </a:solidFill>
                 <a:latin typeface="Calibri" pitchFamily="34" charset="0"/>
                 <a:ea typeface="Calibri" pitchFamily="34" charset="-122"/>
                 <a:cs typeface="Calibri" pitchFamily="34" charset="-120"/>
               </a:rPr>
-              <a:t>Structured alert</a:t>
-            </a:r>
-            <a:endParaRPr lang="en-US" sz="1100" dirty="0"/>
+              <a:t>Send Email</a:t>
+            </a:r>
+            <a:endParaRPr lang="en-US" sz="1300" dirty="0"/>
           </a:p>
           <a:p>
             <a:pPr algn="ctr" indent="0" marL="0">
               <a:lnSpc>
-                <a:spcPct val="120000"/>
+                <a:spcPct val="115000"/>
               </a:lnSpc>
               <a:buNone/>
             </a:pPr>
             <a:r>
-              <a:rPr lang="en-US" sz="1100" dirty="0">
-                <a:solidFill>
-                  <a:schemeClr val="accent6"/>
+              <a:rPr lang="en-US" sz="1300" b="1" dirty="0">
+                <a:solidFill>
+                  <a:schemeClr val="tx1"/>
                 </a:solidFill>
                 <a:latin typeface="Calibri" pitchFamily="34" charset="0"/>
                 <a:ea typeface="Calibri" pitchFamily="34" charset="-122"/>
                 <a:cs typeface="Calibri" pitchFamily="34" charset="-120"/>
               </a:rPr>
-              <a:t>email</a:t>
-            </a:r>
-            <a:endParaRPr lang="en-US" sz="1100" dirty="0"/>
-          </a:p>
-        </p:txBody>
-      </p:sp>
-      <p:sp>
-        <p:nvSpPr>
-          <p:cNvPr id="27" name="Shape 25"/>
+              <a:t>Gmail SMTP</a:t>
+            </a:r>
+            <a:endParaRPr lang="en-US" sz="1300" dirty="0"/>
+          </a:p>
+        </p:txBody>
+      </p:sp>
+      <p:sp>
+        <p:nvSpPr>
+          <p:cNvPr id="45" name="Shape 43"/>
           <p:cNvSpPr/>
           <p:nvPr/>
         </p:nvSpPr>
         <p:spPr>
           <a:xfrm>
-            <a:off x="9509760" y="1874520"/>
-            <a:ext cx="1920240" cy="54864"/>
-          </a:xfrm>
-          <a:prstGeom prst="roundRect">
-            <a:avLst/>
-          </a:prstGeom>
-          <a:solidFill>
-            <a:schemeClr val="accent1"/>
-          </a:solidFill>
-          <a:ln/>
-        </p:spPr>
-      </p:sp>
-      <p:sp>
-        <p:nvSpPr>
-          <p:cNvPr id="28" name="Shape 26"/>
-          <p:cNvSpPr/>
-          <p:nvPr/>
-        </p:nvSpPr>
-        <p:spPr>
-          <a:xfrm>
-            <a:off x="3931920" y="3931920"/>
-            <a:ext cx="4297680" cy="1371600"/>
+            <a:off x="8503920" y="4480560"/>
+            <a:ext cx="2377440" cy="914400"/>
           </a:xfrm>
           <a:prstGeom prst="roundRect">
             <a:avLst>
-              <a:gd name="adj" fmla="val 5333"/>
+              <a:gd name="adj" fmla="val 7000"/>
             </a:avLst>
           </a:prstGeom>
           <a:solidFill>
             <a:schemeClr val="tx2"/>
           </a:solidFill>
           <a:ln/>
-          <a:effectLst>
-            <a:outerShdw sx="100000" sy="100000" kx="0" ky="0" algn="bl" rotWithShape="0" blurRad="127000" dist="38100" dir="5400000">
-              <a:srgbClr val="1A1F2B">
-                <a:alpha val="18000"/>
-              </a:srgbClr>
-            </a:outerShdw>
-          </a:effectLst>
-        </p:spPr>
-      </p:sp>
-      <p:sp>
-        <p:nvSpPr>
-          <p:cNvPr id="29" name="Text 27"/>
+        </p:spPr>
+      </p:sp>
+      <p:sp>
+        <p:nvSpPr>
+          <p:cNvPr id="46" name="Text 44"/>
           <p:cNvSpPr txBox="1"/>
           <p:nvPr/>
         </p:nvSpPr>
         <p:spPr>
           <a:xfrm>
-            <a:off x="4206240" y="4114800"/>
-            <a:ext cx="3749040" cy="365760"/>
-          </a:xfrm>
-          <a:prstGeom prst="rect">
-            <a:avLst/>
-          </a:prstGeom>
-          <a:noFill/>
-          <a:ln/>
-        </p:spPr>
-        <p:txBody>
-          <a:bodyPr wrap="square" lIns="0" tIns="0" rIns="0" bIns="0" rtlCol="0" anchor="ctr"/>
-          <a:lstStyle/>
-          <a:p>
-            <a:pPr algn="ctr" indent="0" marL="0">
-              <a:buNone/>
-            </a:pPr>
-            <a:r>
-              <a:rPr lang="en-US" sz="1500" b="1" dirty="0">
-                <a:solidFill>
-                  <a:srgbClr val="FFFFFF"/>
-                </a:solidFill>
-                <a:latin typeface="Cambria" pitchFamily="34" charset="0"/>
-                <a:ea typeface="Cambria" pitchFamily="34" charset="-122"/>
-                <a:cs typeface="Cambria" pitchFamily="34" charset="-120"/>
-              </a:rPr>
-              <a:t>Alert State Store</a:t>
-            </a:r>
-            <a:endParaRPr lang="en-US" sz="1500" dirty="0"/>
-          </a:p>
-        </p:txBody>
-      </p:sp>
-      <p:sp>
-        <p:nvSpPr>
-          <p:cNvPr id="30" name="Text 28"/>
-          <p:cNvSpPr txBox="1"/>
-          <p:nvPr/>
-        </p:nvSpPr>
-        <p:spPr>
-          <a:xfrm>
-            <a:off x="4206240" y="4526280"/>
-            <a:ext cx="3749040" cy="640080"/>
+            <a:off x="8577072" y="4480560"/>
+            <a:ext cx="2231136" cy="914400"/>
           </a:xfrm>
           <a:prstGeom prst="rect">
             <a:avLst/>
@@ -12128,83 +11883,79 @@
           <a:p>
             <a:pPr algn="ctr" indent="0" marL="0">
               <a:lnSpc>
-                <a:spcPct val="130000"/>
+                <a:spcPct val="115000"/>
               </a:lnSpc>
               <a:buNone/>
             </a:pPr>
             <a:r>
-              <a:rPr lang="en-US" sz="1100" dirty="0">
-                <a:solidFill>
-                  <a:srgbClr val="AEB8C9"/>
+              <a:rPr lang="en-US" sz="1300" b="1" dirty="0">
+                <a:solidFill>
+                  <a:srgbClr val="FFFFFF"/>
                 </a:solidFill>
                 <a:latin typeface="Calibri" pitchFamily="34" charset="0"/>
                 <a:ea typeface="Calibri" pitchFamily="34" charset="-122"/>
                 <a:cs typeface="Calibri" pitchFamily="34" charset="-120"/>
               </a:rPr>
-              <a:t>key = incident + alert type  →  status, claimed_at, last_notified_at, incident_state</a:t>
-            </a:r>
-            <a:endParaRPr lang="en-US" sz="1100" dirty="0"/>
-          </a:p>
-        </p:txBody>
-      </p:sp>
-      <p:sp>
-        <p:nvSpPr>
-          <p:cNvPr id="31" name="Shape 29"/>
-          <p:cNvSpPr/>
-          <p:nvPr/>
-        </p:nvSpPr>
-        <p:spPr>
-          <a:xfrm>
-            <a:off x="6080760" y="3246120"/>
-            <a:ext cx="0" cy="685800"/>
-          </a:xfrm>
-          <a:prstGeom prst="line">
-            <a:avLst/>
-          </a:prstGeom>
-          <a:noFill/>
-          <a:ln w="25400">
-            <a:solidFill>
-              <a:schemeClr val="accent1"/>
-            </a:solidFill>
-            <a:prstDash val="dash"/>
-            <a:tailEnd type="triangle"/>
-          </a:ln>
-        </p:spPr>
-      </p:sp>
-      <p:sp>
-        <p:nvSpPr>
-          <p:cNvPr id="32" name="Text 30"/>
-          <p:cNvSpPr txBox="1"/>
-          <p:nvPr/>
-        </p:nvSpPr>
-        <p:spPr>
-          <a:xfrm>
-            <a:off x="548640" y="6035040"/>
-            <a:ext cx="11064240" cy="365760"/>
-          </a:xfrm>
-          <a:prstGeom prst="rect">
-            <a:avLst/>
-          </a:prstGeom>
-          <a:noFill/>
-          <a:ln/>
-        </p:spPr>
-        <p:txBody>
-          <a:bodyPr wrap="square" lIns="0" tIns="0" rIns="0" bIns="0" rtlCol="0" anchor="ctr"/>
-          <a:lstStyle/>
-          <a:p>
-            <a:pPr algn="l" indent="0" marL="0">
-              <a:buNone/>
-            </a:pPr>
-            <a:r>
-              <a:rPr lang="en-US" sz="1200" i="1" dirty="0">
-                <a:solidFill>
-                  <a:schemeClr val="accent4"/>
+              <a:t>Alert State Store</a:t>
+            </a:r>
+            <a:endParaRPr lang="en-US" sz="1300" dirty="0"/>
+          </a:p>
+          <a:p>
+            <a:pPr algn="ctr" indent="0" marL="0">
+              <a:lnSpc>
+                <a:spcPct val="115000"/>
+              </a:lnSpc>
+              <a:buNone/>
+            </a:pPr>
+            <a:r>
+              <a:rPr lang="en-US" sz="1300" b="1" dirty="0">
+                <a:solidFill>
+                  <a:srgbClr val="FFFFFF"/>
                 </a:solidFill>
                 <a:latin typeface="Calibri" pitchFamily="34" charset="0"/>
                 <a:ea typeface="Calibri" pitchFamily="34" charset="-122"/>
                 <a:cs typeface="Calibri" pitchFamily="34" charset="-120"/>
               </a:rPr>
-              <a:t>Execution logs and error handling (retries, visible failures) apply at every step.</a:t>
+              <a:t>incident + alert type</a:t>
+            </a:r>
+            <a:endParaRPr lang="en-US" sz="1300" dirty="0"/>
+          </a:p>
+        </p:txBody>
+      </p:sp>
+      <p:sp>
+        <p:nvSpPr>
+          <p:cNvPr id="47" name="Text 45"/>
+          <p:cNvSpPr txBox="1"/>
+          <p:nvPr/>
+        </p:nvSpPr>
+        <p:spPr>
+          <a:xfrm>
+            <a:off x="548640" y="5989320"/>
+            <a:ext cx="11064240" cy="365760"/>
+          </a:xfrm>
+          <a:prstGeom prst="rect">
+            <a:avLst/>
+          </a:prstGeom>
+          <a:noFill/>
+          <a:ln/>
+        </p:spPr>
+        <p:txBody>
+          <a:bodyPr wrap="square" lIns="0" tIns="0" rIns="0" bIns="0" rtlCol="0" anchor="ctr"/>
+          <a:lstStyle/>
+          <a:p>
+            <a:pPr algn="l" indent="0" marL="0">
+              <a:buNone/>
+            </a:pPr>
+            <a:r>
+              <a:rPr lang="en-US" sz="1200" i="1" dirty="0">
+                <a:solidFill>
+                  <a:schemeClr val="accent4"/>
+                </a:solidFill>
+                <a:latin typeface="Calibri" pitchFamily="34" charset="0"/>
+                <a:ea typeface="Calibri" pitchFamily="34" charset="-122"/>
+                <a:cs typeface="Calibri" pitchFamily="34" charset="-120"/>
+              </a:rPr>
+              <a:t>Dashed line: the dedup check's lookup against the Alert State Store before deciding to send.</a:t>
             </a:r>
             <a:endParaRPr lang="en-US" sz="1200" dirty="0"/>
           </a:p>
@@ -12496,7 +12247,7 @@
                 <a:ea typeface="Calibri" pitchFamily="34" charset="-122"/>
                 <a:cs typeface="Calibri" pitchFamily="34" charset="-120"/>
               </a:rPr>
-              <a:t>Incident source — Table API, personal developer instance</a:t>
+              <a:t>Incident source: Table API, personal developer instance</a:t>
             </a:r>
             <a:endParaRPr lang="en-US" sz="1200" dirty="0"/>
           </a:p>
@@ -12633,7 +12384,7 @@
                 <a:ea typeface="Calibri" pitchFamily="34" charset="-122"/>
                 <a:cs typeface="Calibri" pitchFamily="34" charset="-120"/>
               </a:rPr>
-              <a:t>Self-hosted orchestration — Schedule, HTTP, Code, IF nodes</a:t>
+              <a:t>Self-hosted orchestration: Schedule, HTTP, Code, IF nodes</a:t>
             </a:r>
             <a:endParaRPr lang="en-US" sz="1200" dirty="0"/>
           </a:p>
@@ -13044,7 +12795,7 @@
                 <a:ea typeface="Calibri" pitchFamily="34" charset="-122"/>
                 <a:cs typeface="Calibri" pitchFamily="34" charset="-120"/>
               </a:rPr>
-              <a:t>Persistent dedup store — survives restarts on active workflows</a:t>
+              <a:t>Persistent dedup store, survives restarts on active workflows</a:t>
             </a:r>
             <a:endParaRPr lang="en-US" sz="1200" dirty="0"/>
           </a:p>
@@ -13223,7 +12974,7 @@
                 <a:ea typeface="Calibri" pitchFamily="34" charset="-122"/>
                 <a:cs typeface="Calibri" pitchFamily="34" charset="-120"/>
               </a:rPr>
-              <a:t>Why Gmail, not Teams: Teams alerts need a Microsoft Entra client ID and secret — unavailable on personal or student accounts.</a:t>
+              <a:t>Why Gmail, not Teams: Teams alerts need a Microsoft Entra client ID and secret, unavailable on personal or student accounts.</a:t>
             </a:r>
             <a:endParaRPr lang="en-US" sz="1150" dirty="0"/>
           </a:p>
@@ -13769,7 +13520,7 @@
                           <a:ea typeface="Calibri" pitchFamily="34" charset="-122"/>
                           <a:cs typeface="Calibri" pitchFamily="34" charset="-120"/>
                         </a:rPr>
-                        <a:t>Priority 1 — Critical</a:t>
+                        <a:t>Priority 1 - Critical</a:t>
                       </a:r>
                       <a:endParaRPr lang="en-US" sz="1350" dirty="0">
                         <a:latin typeface="Calibri" charset="0"/>
@@ -14031,7 +13782,7 @@
                           <a:ea typeface="Calibri" pitchFamily="34" charset="-122"/>
                           <a:cs typeface="Calibri" pitchFamily="34" charset="-120"/>
                         </a:rPr>
-                        <a:t>Priority 2 — High</a:t>
+                        <a:t>Priority 2 - High</a:t>
                       </a:r>
                       <a:endParaRPr lang="en-US" sz="1350" dirty="0">
                         <a:latin typeface="Calibri" charset="0"/>
@@ -14672,7 +14423,7 @@
                 <a:ea typeface="Calibri" pitchFamily="34" charset="-122"/>
                 <a:cs typeface="Calibri" pitchFamily="34" charset="-120"/>
               </a:rPr>
-              <a:t>A resolved/closed incident (states 6/7/8) is excluded, so reminders stop as soon as it's closed — and start fresh if it's reopened.</a:t>
+              <a:t>A resolved/closed incident (states 6/7/8) is excluded, so reminders stop as soon as it's closed, and start fresh if it's reopened.</a:t>
             </a:r>
             <a:endParaRPr lang="en-US" sz="1150" dirty="0"/>
           </a:p>
@@ -15328,7 +15079,7 @@
                 <a:ea typeface="Calibri" pitchFamily="34" charset="-122"/>
                 <a:cs typeface="Calibri" pitchFamily="34" charset="-120"/>
               </a:rPr>
-              <a:t>TTL lock — stops overlapping runs</a:t>
+              <a:t>TTL lock stops overlapping runs</a:t>
             </a:r>
             <a:endParaRPr lang="en-US" sz="1050" dirty="0"/>
           </a:p>
@@ -16776,7 +16527,7 @@
                 <a:ea typeface="Calibri" pitchFamily="34" charset="-122"/>
                 <a:cs typeface="Calibri" pitchFamily="34" charset="-120"/>
               </a:rPr>
-              <a:t>01  —  RELIABILITY ENGINEERING</a:t>
+              <a:t>01 · RELIABILITY ENGINEERING</a:t>
             </a:r>
             <a:endParaRPr lang="en-US" sz="1400" dirty="0"/>
           </a:p>
@@ -17007,7 +16758,7 @@
                 <a:ea typeface="Calibri" pitchFamily="34" charset="-122"/>
                 <a:cs typeface="Calibri" pitchFamily="34" charset="-120"/>
               </a:rPr>
-              <a:t>A naive design emails the alert first, then records that it was sent. If the workflow crashes or the save step fails in between, the next run has no record of the send — and resends it.</a:t>
+              <a:t>A naive design emails the alert first, then records that it was sent. If the workflow crashes or the save step fails in between, the next run has no record of the send, and resends it.</a:t>
             </a:r>
             <a:endParaRPr lang="en-US" sz="1500" dirty="0"/>
           </a:p>

--- a/n8n-epsilon-detailed.pptx
+++ b/n8n-epsilon-detailed.pptx
@@ -21,9 +21,11 @@
     <p:sldId id="269" r:id="rId15"/>
     <p:sldId id="270" r:id="rId16"/>
     <p:sldId id="271" r:id="rId17"/>
+    <p:sldId id="272" r:id="rId18"/>
+    <p:sldId id="273" r:id="rId19"/>
   </p:sldIdLst>
   <p:notesMasterIdLst>
-    <p:notesMasterId r:id="rId18"/>
+    <p:notesMasterId r:id="rId20"/>
   </p:notesMasterIdLst>
   <p:sldSz cx="12192000" cy="6858000"/>
   <p:notesSz cx="6858000" cy="12192000"/>
@@ -122,48 +124,54 @@
   <p:extLst>
     <p:ext uri="{521415D9-36F7-43E2-AB2F-B90AF26B5E84}">
       <p14:sectionLst xmlns:p14="http://schemas.microsoft.com/office/powerpoint/2010/main">
-        <p14:section name="Title" id="{79bef504-c25c-d523-ce70-fb699dab4941}">
+        <p14:section name="Title" id="{139c69fd-f968-e223-f586-ad01923921d3}">
           <p14:sldIdLst>
             <p14:sldId id="256"/>
           </p14:sldIdLst>
         </p14:section>
-        <p14:section name="Overview" id="{674ff281-ff4e-f735-9162-42788e9e337b}">
+        <p14:section name="Overview" id="{0d57b266-616e-167c-7fce-a8cddc9d46f8}">
           <p14:sldIdLst>
             <p14:sldId id="257"/>
             <p14:sldId id="258"/>
           </p14:sldIdLst>
         </p14:section>
-        <p14:section name="Architecture" id="{6ab84a24-34bb-a220-5380-67002fb7715e}">
+        <p14:section name="Architecture" id="{172d912e-9df9-6c25-9c73-69453eacd038}">
           <p14:sldIdLst>
             <p14:sldId id="259"/>
             <p14:sldId id="260"/>
           </p14:sldIdLst>
         </p14:section>
-        <p14:section name="Logic" id="{77511e09-5c96-a583-5172-29b040438071}">
+        <p14:section name="Logic" id="{333f03b9-0834-7af6-e2d9-0604ab579450}">
           <p14:sldIdLst>
             <p14:sldId id="261"/>
           </p14:sldIdLst>
         </p14:section>
-        <p14:section name="Pipeline" id="{480717bc-cc4b-f816-00bf-35be864b09ea}">
+        <p14:section name="Pipeline" id="{0491a843-9780-bb4e-e718-d476169036ce}">
           <p14:sldIdLst>
             <p14:sldId id="262"/>
           </p14:sldIdLst>
         </p14:section>
-        <p14:section name="Reliability" id="{545f2a04-1370-964a-d7b5-e93f33405250}">
+        <p14:section name="RestApi" id="{89655295-1fee-fbbc-6353-aae8a533f03f}">
           <p14:sldIdLst>
             <p14:sldId id="263"/>
             <p14:sldId id="264"/>
             <p14:sldId id="265"/>
+          </p14:sldIdLst>
+        </p14:section>
+        <p14:section name="Reliability" id="{b103373e-7289-c91e-5fee-2ead839fc83b}">
+          <p14:sldIdLst>
             <p14:sldId id="266"/>
             <p14:sldId id="267"/>
             <p14:sldId id="268"/>
-          </p14:sldIdLst>
-        </p14:section>
-        <p14:section name="Delivery" id="{1c02ff88-90c6-4db7-ce90-3dd9a93e27e9}">
-          <p14:sldIdLst>
             <p14:sldId id="269"/>
             <p14:sldId id="270"/>
             <p14:sldId id="271"/>
+          </p14:sldIdLst>
+        </p14:section>
+        <p14:section name="Delivery" id="{0881d30b-2a0d-6f6e-810e-7a29de008016}">
+          <p14:sldIdLst>
+            <p14:sldId id="272"/>
+            <p14:sldId id="273"/>
           </p14:sldIdLst>
         </p14:section>
       </p14:sectionLst>
@@ -1210,6 +1218,182 @@
             <a:fld id="{F7021451-1387-4CA6-816F-3879F97B5CBC}" type="slidenum">
               <a:rPr lang="en-US"/>
               <a:t>16</a:t>
+            </a:fld>
+            <a:endParaRPr lang="en-US"/>
+          </a:p>
+        </p:txBody>
+      </p:sp>
+    </p:spTree>
+    <p:extLst>
+      <p:ext uri="{BB962C8B-B14F-4D97-AF65-F5344CB8AC3E}">
+        <p14:creationId xmlns:p14="http://schemas.microsoft.com/office/powerpoint/2010/main" val="1024086991"/>
+      </p:ext>
+    </p:extLst>
+  </p:cSld>
+  <p:clrMapOvr>
+    <a:masterClrMapping/>
+  </p:clrMapOvr>
+</p:notes>
+</file>
+
+<file path=ppt/notesSlides/notesSlide17.xml><?xml version="1.0" encoding="utf-8"?>
+<p:notes xmlns:a="http://schemas.openxmlformats.org/drawingml/2006/main" xmlns:r="http://schemas.openxmlformats.org/officeDocument/2006/relationships" xmlns:p="http://schemas.openxmlformats.org/presentationml/2006/main">
+  <p:cSld>
+    <p:spTree>
+      <p:nvGrpSpPr>
+        <p:cNvPr id="1" name=""/>
+        <p:cNvGrpSpPr/>
+        <p:nvPr/>
+      </p:nvGrpSpPr>
+      <p:grpSpPr>
+        <a:xfrm>
+          <a:off x="0" y="0"/>
+          <a:ext cx="0" cy="0"/>
+          <a:chOff x="0" y="0"/>
+          <a:chExt cx="0" cy="0"/>
+        </a:xfrm>
+      </p:grpSpPr>
+      <p:sp>
+        <p:nvSpPr>
+          <p:cNvPr id="2" name="Slide Image Placeholder 1"/>
+          <p:cNvSpPr>
+            <a:spLocks noGrp="1" noRot="1" noChangeAspect="1"/>
+          </p:cNvSpPr>
+          <p:nvPr>
+            <p:ph type="sldImg"/>
+          </p:nvPr>
+        </p:nvSpPr>
+        <p:spPr/>
+      </p:sp>
+      <p:sp>
+        <p:nvSpPr>
+          <p:cNvPr id="3" name="Notes Placeholder 2"/>
+          <p:cNvSpPr>
+            <a:spLocks noGrp="1"/>
+          </p:cNvSpPr>
+          <p:nvPr>
+            <p:ph type="body" idx="1"/>
+          </p:nvPr>
+        </p:nvSpPr>
+        <p:spPr/>
+        <p:txBody>
+          <a:bodyPr/>
+          <a:lstStyle/>
+          <a:p>
+            <a:r>
+              <a:rPr lang="en-US" dirty="0"/>
+              <a:t/>
+            </a:r>
+            <a:endParaRPr lang="en-US" dirty="0"/>
+          </a:p>
+        </p:txBody>
+      </p:sp>
+      <p:sp>
+        <p:nvSpPr>
+          <p:cNvPr id="4" name="Slide Number Placeholder 3"/>
+          <p:cNvSpPr>
+            <a:spLocks noGrp="1"/>
+          </p:cNvSpPr>
+          <p:nvPr>
+            <p:ph type="sldNum" sz="quarter" idx="10"/>
+          </p:nvPr>
+        </p:nvSpPr>
+        <p:spPr/>
+        <p:txBody>
+          <a:bodyPr/>
+          <a:lstStyle/>
+          <a:p>
+            <a:fld id="{F7021451-1387-4CA6-816F-3879F97B5CBC}" type="slidenum">
+              <a:rPr lang="en-US"/>
+              <a:t>17</a:t>
+            </a:fld>
+            <a:endParaRPr lang="en-US"/>
+          </a:p>
+        </p:txBody>
+      </p:sp>
+    </p:spTree>
+    <p:extLst>
+      <p:ext uri="{BB962C8B-B14F-4D97-AF65-F5344CB8AC3E}">
+        <p14:creationId xmlns:p14="http://schemas.microsoft.com/office/powerpoint/2010/main" val="1024086991"/>
+      </p:ext>
+    </p:extLst>
+  </p:cSld>
+  <p:clrMapOvr>
+    <a:masterClrMapping/>
+  </p:clrMapOvr>
+</p:notes>
+</file>
+
+<file path=ppt/notesSlides/notesSlide18.xml><?xml version="1.0" encoding="utf-8"?>
+<p:notes xmlns:a="http://schemas.openxmlformats.org/drawingml/2006/main" xmlns:r="http://schemas.openxmlformats.org/officeDocument/2006/relationships" xmlns:p="http://schemas.openxmlformats.org/presentationml/2006/main">
+  <p:cSld>
+    <p:spTree>
+      <p:nvGrpSpPr>
+        <p:cNvPr id="1" name=""/>
+        <p:cNvGrpSpPr/>
+        <p:nvPr/>
+      </p:nvGrpSpPr>
+      <p:grpSpPr>
+        <a:xfrm>
+          <a:off x="0" y="0"/>
+          <a:ext cx="0" cy="0"/>
+          <a:chOff x="0" y="0"/>
+          <a:chExt cx="0" cy="0"/>
+        </a:xfrm>
+      </p:grpSpPr>
+      <p:sp>
+        <p:nvSpPr>
+          <p:cNvPr id="2" name="Slide Image Placeholder 1"/>
+          <p:cNvSpPr>
+            <a:spLocks noGrp="1" noRot="1" noChangeAspect="1"/>
+          </p:cNvSpPr>
+          <p:nvPr>
+            <p:ph type="sldImg"/>
+          </p:nvPr>
+        </p:nvSpPr>
+        <p:spPr/>
+      </p:sp>
+      <p:sp>
+        <p:nvSpPr>
+          <p:cNvPr id="3" name="Notes Placeholder 2"/>
+          <p:cNvSpPr>
+            <a:spLocks noGrp="1"/>
+          </p:cNvSpPr>
+          <p:nvPr>
+            <p:ph type="body" idx="1"/>
+          </p:nvPr>
+        </p:nvSpPr>
+        <p:spPr/>
+        <p:txBody>
+          <a:bodyPr/>
+          <a:lstStyle/>
+          <a:p>
+            <a:r>
+              <a:rPr lang="en-US" dirty="0"/>
+              <a:t/>
+            </a:r>
+            <a:endParaRPr lang="en-US" dirty="0"/>
+          </a:p>
+        </p:txBody>
+      </p:sp>
+      <p:sp>
+        <p:nvSpPr>
+          <p:cNvPr id="4" name="Slide Number Placeholder 3"/>
+          <p:cNvSpPr>
+            <a:spLocks noGrp="1"/>
+          </p:cNvSpPr>
+          <p:nvPr>
+            <p:ph type="sldNum" sz="quarter" idx="10"/>
+          </p:nvPr>
+        </p:nvSpPr>
+        <p:spPr/>
+        <p:txBody>
+          <a:bodyPr/>
+          <a:lstStyle/>
+          <a:p>
+            <a:fld id="{F7021451-1387-4CA6-816F-3879F97B5CBC}" type="slidenum">
+              <a:rPr lang="en-US"/>
+              <a:t>18</a:t>
             </a:fld>
             <a:endParaRPr lang="en-US"/>
           </a:p>
@@ -3104,7 +3288,7 @@
                 <a:ea typeface="Calibri" pitchFamily="34" charset="-122"/>
                 <a:cs typeface="Calibri" pitchFamily="34" charset="-120"/>
               </a:rPr>
-              <a:t>THE FIX</a:t>
+              <a:t>REST API</a:t>
             </a:r>
             <a:endParaRPr lang="en-US" sz="1300" dirty="0"/>
           </a:p>
@@ -3145,7 +3329,7 @@
                 <a:ea typeface="Cambria" pitchFamily="34" charset="-122"/>
                 <a:cs typeface="Cambria" pitchFamily="34" charset="-120"/>
               </a:rPr>
-              <a:t>Claim before you send</a:t>
+              <a:t>Creating incidents: POST</a:t>
             </a:r>
             <a:endParaRPr lang="en-US" sz="3200" dirty="0"/>
           </a:p>
@@ -3153,41 +3337,14 @@
       </p:sp>
       <p:sp>
         <p:nvSpPr>
-          <p:cNvPr id="4" name="Shape 2"/>
-          <p:cNvSpPr/>
+          <p:cNvPr id="4" name="Text 2"/>
+          <p:cNvSpPr txBox="1"/>
           <p:nvPr/>
         </p:nvSpPr>
         <p:spPr>
           <a:xfrm>
             <a:off x="548640" y="1691640"/>
-            <a:ext cx="2606040" cy="502920"/>
-          </a:xfrm>
-          <a:prstGeom prst="roundRect">
-            <a:avLst>
-              <a:gd name="adj" fmla="val 49091"/>
-            </a:avLst>
-          </a:prstGeom>
-          <a:solidFill>
-            <a:schemeClr val="bg2"/>
-          </a:solidFill>
-          <a:ln w="12700">
-            <a:solidFill>
-              <a:schemeClr val="accent5"/>
-            </a:solidFill>
-            <a:prstDash val="solid"/>
-          </a:ln>
-        </p:spPr>
-      </p:sp>
-      <p:sp>
-        <p:nvSpPr>
-          <p:cNvPr id="5" name="Text 3"/>
-          <p:cNvSpPr txBox="1"/>
-          <p:nvPr/>
-        </p:nvSpPr>
-        <p:spPr>
-          <a:xfrm>
-            <a:off x="548640" y="1691640"/>
-            <a:ext cx="2606040" cy="502920"/>
+            <a:ext cx="11064240" cy="457200"/>
           </a:xfrm>
           <a:prstGeom prst="rect">
             <a:avLst/>
@@ -3197,325 +3354,6 @@
         </p:spPr>
         <p:txBody>
           <a:bodyPr wrap="square" lIns="0" tIns="0" rIns="0" bIns="0" rtlCol="0" anchor="ctr"/>
-          <a:lstStyle/>
-          <a:p>
-            <a:pPr algn="ctr" indent="0" marL="0">
-              <a:buNone/>
-            </a:pPr>
-            <a:r>
-              <a:rPr lang="en-US" sz="1250" b="1" dirty="0">
-                <a:solidFill>
-                  <a:schemeClr val="tx1"/>
-                </a:solidFill>
-                <a:latin typeface="Calibri" pitchFamily="34" charset="0"/>
-                <a:ea typeface="Calibri" pitchFamily="34" charset="-122"/>
-                <a:cs typeface="Calibri" pitchFamily="34" charset="-120"/>
-              </a:rPr>
-              <a:t>1. Look up</a:t>
-            </a:r>
-            <a:endParaRPr lang="en-US" sz="1250" dirty="0"/>
-          </a:p>
-        </p:txBody>
-      </p:sp>
-      <p:sp>
-        <p:nvSpPr>
-          <p:cNvPr id="6" name="Shape 4"/>
-          <p:cNvSpPr/>
-          <p:nvPr/>
-        </p:nvSpPr>
-        <p:spPr>
-          <a:xfrm>
-            <a:off x="3163824" y="1810512"/>
-            <a:ext cx="146304" cy="274320"/>
-          </a:xfrm>
-          <a:prstGeom prst="rightArrow">
-            <a:avLst/>
-          </a:prstGeom>
-          <a:solidFill>
-            <a:schemeClr val="accent4"/>
-          </a:solidFill>
-          <a:ln/>
-        </p:spPr>
-      </p:sp>
-      <p:sp>
-        <p:nvSpPr>
-          <p:cNvPr id="7" name="Shape 5"/>
-          <p:cNvSpPr/>
-          <p:nvPr/>
-        </p:nvSpPr>
-        <p:spPr>
-          <a:xfrm>
-            <a:off x="3319272" y="1691640"/>
-            <a:ext cx="2606040" cy="502920"/>
-          </a:xfrm>
-          <a:prstGeom prst="roundRect">
-            <a:avLst>
-              <a:gd name="adj" fmla="val 49091"/>
-            </a:avLst>
-          </a:prstGeom>
-          <a:solidFill>
-            <a:schemeClr val="accent1"/>
-          </a:solidFill>
-          <a:ln w="12700">
-            <a:solidFill>
-              <a:schemeClr val="accent5"/>
-            </a:solidFill>
-            <a:prstDash val="solid"/>
-          </a:ln>
-        </p:spPr>
-      </p:sp>
-      <p:sp>
-        <p:nvSpPr>
-          <p:cNvPr id="8" name="Text 6"/>
-          <p:cNvSpPr txBox="1"/>
-          <p:nvPr/>
-        </p:nvSpPr>
-        <p:spPr>
-          <a:xfrm>
-            <a:off x="3319272" y="1691640"/>
-            <a:ext cx="2606040" cy="502920"/>
-          </a:xfrm>
-          <a:prstGeom prst="rect">
-            <a:avLst/>
-          </a:prstGeom>
-          <a:noFill/>
-          <a:ln/>
-        </p:spPr>
-        <p:txBody>
-          <a:bodyPr wrap="square" lIns="0" tIns="0" rIns="0" bIns="0" rtlCol="0" anchor="ctr"/>
-          <a:lstStyle/>
-          <a:p>
-            <a:pPr algn="ctr" indent="0" marL="0">
-              <a:buNone/>
-            </a:pPr>
-            <a:r>
-              <a:rPr lang="en-US" sz="1250" b="1" dirty="0">
-                <a:solidFill>
-                  <a:srgbClr val="FFFFFF"/>
-                </a:solidFill>
-                <a:latin typeface="Calibri" pitchFamily="34" charset="0"/>
-                <a:ea typeface="Calibri" pitchFamily="34" charset="-122"/>
-                <a:cs typeface="Calibri" pitchFamily="34" charset="-120"/>
-              </a:rPr>
-              <a:t>2. Claim (pending)</a:t>
-            </a:r>
-            <a:endParaRPr lang="en-US" sz="1250" dirty="0"/>
-          </a:p>
-        </p:txBody>
-      </p:sp>
-      <p:sp>
-        <p:nvSpPr>
-          <p:cNvPr id="9" name="Shape 7"/>
-          <p:cNvSpPr/>
-          <p:nvPr/>
-        </p:nvSpPr>
-        <p:spPr>
-          <a:xfrm>
-            <a:off x="5934456" y="1810512"/>
-            <a:ext cx="146304" cy="274320"/>
-          </a:xfrm>
-          <a:prstGeom prst="rightArrow">
-            <a:avLst/>
-          </a:prstGeom>
-          <a:solidFill>
-            <a:schemeClr val="accent4"/>
-          </a:solidFill>
-          <a:ln/>
-        </p:spPr>
-      </p:sp>
-      <p:sp>
-        <p:nvSpPr>
-          <p:cNvPr id="10" name="Shape 8"/>
-          <p:cNvSpPr/>
-          <p:nvPr/>
-        </p:nvSpPr>
-        <p:spPr>
-          <a:xfrm>
-            <a:off x="6089904" y="1691640"/>
-            <a:ext cx="2606040" cy="502920"/>
-          </a:xfrm>
-          <a:prstGeom prst="roundRect">
-            <a:avLst>
-              <a:gd name="adj" fmla="val 49091"/>
-            </a:avLst>
-          </a:prstGeom>
-          <a:solidFill>
-            <a:schemeClr val="bg2"/>
-          </a:solidFill>
-          <a:ln w="12700">
-            <a:solidFill>
-              <a:schemeClr val="accent5"/>
-            </a:solidFill>
-            <a:prstDash val="solid"/>
-          </a:ln>
-        </p:spPr>
-      </p:sp>
-      <p:sp>
-        <p:nvSpPr>
-          <p:cNvPr id="11" name="Text 9"/>
-          <p:cNvSpPr txBox="1"/>
-          <p:nvPr/>
-        </p:nvSpPr>
-        <p:spPr>
-          <a:xfrm>
-            <a:off x="6089904" y="1691640"/>
-            <a:ext cx="2606040" cy="502920"/>
-          </a:xfrm>
-          <a:prstGeom prst="rect">
-            <a:avLst/>
-          </a:prstGeom>
-          <a:noFill/>
-          <a:ln/>
-        </p:spPr>
-        <p:txBody>
-          <a:bodyPr wrap="square" lIns="0" tIns="0" rIns="0" bIns="0" rtlCol="0" anchor="ctr"/>
-          <a:lstStyle/>
-          <a:p>
-            <a:pPr algn="ctr" indent="0" marL="0">
-              <a:buNone/>
-            </a:pPr>
-            <a:r>
-              <a:rPr lang="en-US" sz="1250" b="1" dirty="0">
-                <a:solidFill>
-                  <a:schemeClr val="tx1"/>
-                </a:solidFill>
-                <a:latin typeface="Calibri" pitchFamily="34" charset="0"/>
-                <a:ea typeface="Calibri" pitchFamily="34" charset="-122"/>
-                <a:cs typeface="Calibri" pitchFamily="34" charset="-120"/>
-              </a:rPr>
-              <a:t>3. Send</a:t>
-            </a:r>
-            <a:endParaRPr lang="en-US" sz="1250" dirty="0"/>
-          </a:p>
-        </p:txBody>
-      </p:sp>
-      <p:sp>
-        <p:nvSpPr>
-          <p:cNvPr id="12" name="Shape 10"/>
-          <p:cNvSpPr/>
-          <p:nvPr/>
-        </p:nvSpPr>
-        <p:spPr>
-          <a:xfrm>
-            <a:off x="8705088" y="1810512"/>
-            <a:ext cx="146304" cy="274320"/>
-          </a:xfrm>
-          <a:prstGeom prst="rightArrow">
-            <a:avLst/>
-          </a:prstGeom>
-          <a:solidFill>
-            <a:schemeClr val="accent4"/>
-          </a:solidFill>
-          <a:ln/>
-        </p:spPr>
-      </p:sp>
-      <p:sp>
-        <p:nvSpPr>
-          <p:cNvPr id="13" name="Shape 11"/>
-          <p:cNvSpPr/>
-          <p:nvPr/>
-        </p:nvSpPr>
-        <p:spPr>
-          <a:xfrm>
-            <a:off x="8860536" y="1691640"/>
-            <a:ext cx="2606040" cy="502920"/>
-          </a:xfrm>
-          <a:prstGeom prst="roundRect">
-            <a:avLst>
-              <a:gd name="adj" fmla="val 49091"/>
-            </a:avLst>
-          </a:prstGeom>
-          <a:solidFill>
-            <a:schemeClr val="bg2"/>
-          </a:solidFill>
-          <a:ln w="12700">
-            <a:solidFill>
-              <a:schemeClr val="accent5"/>
-            </a:solidFill>
-            <a:prstDash val="solid"/>
-          </a:ln>
-        </p:spPr>
-      </p:sp>
-      <p:sp>
-        <p:nvSpPr>
-          <p:cNvPr id="14" name="Text 12"/>
-          <p:cNvSpPr txBox="1"/>
-          <p:nvPr/>
-        </p:nvSpPr>
-        <p:spPr>
-          <a:xfrm>
-            <a:off x="8860536" y="1691640"/>
-            <a:ext cx="2606040" cy="502920"/>
-          </a:xfrm>
-          <a:prstGeom prst="rect">
-            <a:avLst/>
-          </a:prstGeom>
-          <a:noFill/>
-          <a:ln/>
-        </p:spPr>
-        <p:txBody>
-          <a:bodyPr wrap="square" lIns="0" tIns="0" rIns="0" bIns="0" rtlCol="0" anchor="ctr"/>
-          <a:lstStyle/>
-          <a:p>
-            <a:pPr algn="ctr" indent="0" marL="0">
-              <a:buNone/>
-            </a:pPr>
-            <a:r>
-              <a:rPr lang="en-US" sz="1250" b="1" dirty="0">
-                <a:solidFill>
-                  <a:schemeClr val="tx1"/>
-                </a:solidFill>
-                <a:latin typeface="Calibri" pitchFamily="34" charset="0"/>
-                <a:ea typeface="Calibri" pitchFamily="34" charset="-122"/>
-                <a:cs typeface="Calibri" pitchFamily="34" charset="-120"/>
-              </a:rPr>
-              <a:t>4. Resolve (sent/failed)</a:t>
-            </a:r>
-            <a:endParaRPr lang="en-US" sz="1250" dirty="0"/>
-          </a:p>
-        </p:txBody>
-      </p:sp>
-      <p:sp>
-        <p:nvSpPr>
-          <p:cNvPr id="15" name="Shape 13"/>
-          <p:cNvSpPr/>
-          <p:nvPr/>
-        </p:nvSpPr>
-        <p:spPr>
-          <a:xfrm>
-            <a:off x="548640" y="2468880"/>
-            <a:ext cx="5760720" cy="3566160"/>
-          </a:xfrm>
-          <a:prstGeom prst="roundRect">
-            <a:avLst>
-              <a:gd name="adj" fmla="val 1795"/>
-            </a:avLst>
-          </a:prstGeom>
-          <a:solidFill>
-            <a:schemeClr val="tx2"/>
-          </a:solidFill>
-          <a:ln/>
-        </p:spPr>
-      </p:sp>
-      <p:sp>
-        <p:nvSpPr>
-          <p:cNvPr id="16" name="Text 14"/>
-          <p:cNvSpPr txBox="1"/>
-          <p:nvPr/>
-        </p:nvSpPr>
-        <p:spPr>
-          <a:xfrm>
-            <a:off x="822960" y="2697480"/>
-            <a:ext cx="5212080" cy="3108960"/>
-          </a:xfrm>
-          <a:prstGeom prst="rect">
-            <a:avLst/>
-          </a:prstGeom>
-          <a:noFill/>
-          <a:ln/>
-        </p:spPr>
-        <p:txBody>
-          <a:bodyPr wrap="square" lIns="0" tIns="0" rIns="0" bIns="0" rtlCol="0" anchor="t"/>
           <a:lstStyle/>
           <a:p>
             <a:pPr algn="l" indent="0" marL="0">
@@ -3525,18 +3363,62 @@
               <a:buNone/>
             </a:pPr>
             <a:r>
-              <a:rPr lang="en-US" sz="1300" dirty="0">
-                <a:solidFill>
-                  <a:srgbClr val="7DD3C0"/>
-                </a:solidFill>
-                <a:latin typeface="Courier New" pitchFamily="34" charset="0"/>
-                <a:ea typeface="Courier New" pitchFamily="34" charset="-122"/>
-                <a:cs typeface="Courier New" pitchFamily="34" charset="-120"/>
-              </a:rPr>
-              <a:t>// lookup.js: is this key eligible to send?</a:t>
-            </a:r>
-            <a:endParaRPr lang="en-US" sz="1300" dirty="0"/>
-          </a:p>
+              <a:rPr lang="en-US" sz="1400" dirty="0">
+                <a:solidFill>
+                  <a:schemeClr val="accent6"/>
+                </a:solidFill>
+                <a:latin typeface="Calibri" pitchFamily="34" charset="0"/>
+                <a:ea typeface="Calibri" pitchFamily="34" charset="-122"/>
+                <a:cs typeface="Calibri" pitchFamily="34" charset="-120"/>
+              </a:rPr>
+              <a:t>Same endpoint, same Basic Auth, only the HTTP verb and the body change. Our test incidents were created this way.</a:t>
+            </a:r>
+            <a:endParaRPr lang="en-US" sz="1400" dirty="0"/>
+          </a:p>
+        </p:txBody>
+      </p:sp>
+      <p:sp>
+        <p:nvSpPr>
+          <p:cNvPr id="5" name="Shape 3"/>
+          <p:cNvSpPr/>
+          <p:nvPr/>
+        </p:nvSpPr>
+        <p:spPr>
+          <a:xfrm>
+            <a:off x="548640" y="2240280"/>
+            <a:ext cx="11064240" cy="1828800"/>
+          </a:xfrm>
+          <a:prstGeom prst="roundRect">
+            <a:avLst>
+              <a:gd name="adj" fmla="val 3500"/>
+            </a:avLst>
+          </a:prstGeom>
+          <a:solidFill>
+            <a:schemeClr val="tx2"/>
+          </a:solidFill>
+          <a:ln/>
+        </p:spPr>
+      </p:sp>
+      <p:sp>
+        <p:nvSpPr>
+          <p:cNvPr id="6" name="Text 4"/>
+          <p:cNvSpPr txBox="1"/>
+          <p:nvPr/>
+        </p:nvSpPr>
+        <p:spPr>
+          <a:xfrm>
+            <a:off x="822960" y="2468880"/>
+            <a:ext cx="10515600" cy="1371600"/>
+          </a:xfrm>
+          <a:prstGeom prst="rect">
+            <a:avLst/>
+          </a:prstGeom>
+          <a:noFill/>
+          <a:ln/>
+        </p:spPr>
+        <p:txBody>
+          <a:bodyPr wrap="square" lIns="0" tIns="0" rIns="0" bIns="0" rtlCol="0" anchor="t"/>
+          <a:lstStyle/>
           <a:p>
             <a:pPr algn="l" indent="0" marL="0">
               <a:lnSpc>
@@ -3547,13 +3429,13 @@
             <a:r>
               <a:rPr lang="en-US" sz="1300" dirty="0">
                 <a:solidFill>
-                  <a:srgbClr val="E5E9F0"/>
+                  <a:srgbClr val="7DD3C0"/>
                 </a:solidFill>
                 <a:latin typeface="Courier New" pitchFamily="34" charset="0"/>
                 <a:ea typeface="Courier New" pitchFamily="34" charset="-122"/>
                 <a:cs typeface="Courier New" pitchFamily="34" charset="-120"/>
               </a:rPr>
-              <a:t>if (!rec) eligible = true;</a:t>
+              <a:t>POST https://dev353134.service-now.com/api/now/table/incident</a:t>
             </a:r>
             <a:endParaRPr lang="en-US" sz="1300" dirty="0"/>
           </a:p>
@@ -3573,7 +3455,7 @@
                 <a:ea typeface="Courier New" pitchFamily="34" charset="-122"/>
                 <a:cs typeface="Courier New" pitchFamily="34" charset="-120"/>
               </a:rPr>
-              <a:t>else if (rec.status === 'pending') eligible = false;</a:t>
+              <a:t>{</a:t>
             </a:r>
             <a:endParaRPr lang="en-US" sz="1300" dirty="0"/>
           </a:p>
@@ -3593,7 +3475,7 @@
                 <a:ea typeface="Courier New" pitchFamily="34" charset="-122"/>
                 <a:cs typeface="Courier New" pitchFamily="34" charset="-120"/>
               </a:rPr>
-              <a:t>else if (rec.status === 'failed') eligible = true;</a:t>
+              <a:t>  "short_description": "Production application unavailable",</a:t>
             </a:r>
             <a:endParaRPr lang="en-US" sz="1300" dirty="0"/>
           </a:p>
@@ -3613,7 +3495,7 @@
                 <a:ea typeface="Courier New" pitchFamily="34" charset="-122"/>
                 <a:cs typeface="Courier New" pitchFamily="34" charset="-120"/>
               </a:rPr>
-              <a:t>else if (rec.incident_state !== j.stateValue)</a:t>
+              <a:t>  "urgency": "1",</a:t>
             </a:r>
             <a:endParaRPr lang="en-US" sz="1300" dirty="0"/>
           </a:p>
@@ -3633,7 +3515,7 @@
                 <a:ea typeface="Courier New" pitchFamily="34" charset="-122"/>
                 <a:cs typeface="Courier New" pitchFamily="34" charset="-120"/>
               </a:rPr>
-              <a:t>  eligible = true;              // e.g. reopened</a:t>
+              <a:t>  "impact": "1"</a:t>
             </a:r>
             <a:endParaRPr lang="en-US" sz="1300" dirty="0"/>
           </a:p>
@@ -3653,97 +3535,32 @@
                 <a:ea typeface="Courier New" pitchFamily="34" charset="-122"/>
                 <a:cs typeface="Courier New" pitchFamily="34" charset="-120"/>
               </a:rPr>
-              <a:t>else if (rec.status === 'sent' &amp;&amp;</a:t>
+              <a:t>}</a:t>
             </a:r>
             <a:endParaRPr lang="en-US" sz="1300" dirty="0"/>
           </a:p>
-          <a:p>
-            <a:pPr algn="l" indent="0" marL="0">
-              <a:lnSpc>
-                <a:spcPct val="125000"/>
-              </a:lnSpc>
-              <a:buNone/>
-            </a:pPr>
-            <a:r>
-              <a:rPr lang="en-US" sz="1300" dirty="0">
-                <a:solidFill>
-                  <a:srgbClr val="E5E9F0"/>
-                </a:solidFill>
-                <a:latin typeface="Courier New" pitchFamily="34" charset="0"/>
-                <a:ea typeface="Courier New" pitchFamily="34" charset="-122"/>
-                <a:cs typeface="Courier New" pitchFamily="34" charset="-120"/>
-              </a:rPr>
-              <a:t>    now - rec.last_notified_at &gt;= intervalMs) {</a:t>
-            </a:r>
-            <a:endParaRPr lang="en-US" sz="1300" dirty="0"/>
-          </a:p>
-          <a:p>
-            <a:pPr algn="l" indent="0" marL="0">
-              <a:lnSpc>
-                <a:spcPct val="125000"/>
-              </a:lnSpc>
-              <a:buNone/>
-            </a:pPr>
-            <a:r>
-              <a:rPr lang="en-US" sz="1300" dirty="0">
-                <a:solidFill>
-                  <a:srgbClr val="E5E9F0"/>
-                </a:solidFill>
-                <a:latin typeface="Courier New" pitchFamily="34" charset="0"/>
-                <a:ea typeface="Courier New" pitchFamily="34" charset="-122"/>
-                <a:cs typeface="Courier New" pitchFamily="34" charset="-120"/>
-              </a:rPr>
-              <a:t>  eligible = true; isReminder = true;</a:t>
-            </a:r>
-            <a:endParaRPr lang="en-US" sz="1300" dirty="0"/>
-          </a:p>
-          <a:p>
-            <a:pPr algn="l" indent="0" marL="0">
-              <a:lnSpc>
-                <a:spcPct val="125000"/>
-              </a:lnSpc>
-              <a:buNone/>
-            </a:pPr>
-            <a:r>
-              <a:rPr lang="en-US" sz="1300" dirty="0">
-                <a:solidFill>
-                  <a:srgbClr val="E5E9F0"/>
-                </a:solidFill>
-                <a:latin typeface="Courier New" pitchFamily="34" charset="0"/>
-                <a:ea typeface="Courier New" pitchFamily="34" charset="-122"/>
-                <a:cs typeface="Courier New" pitchFamily="34" charset="-120"/>
-              </a:rPr>
-              <a:t>}</a:t>
-            </a:r>
-            <a:endParaRPr lang="en-US" sz="1300" dirty="0"/>
-          </a:p>
-        </p:txBody>
-      </p:sp>
-      <p:sp>
-        <p:nvSpPr>
-          <p:cNvPr id="17" name="Shape 15"/>
+        </p:txBody>
+      </p:sp>
+      <p:sp>
+        <p:nvSpPr>
+          <p:cNvPr id="7" name="Shape 5"/>
           <p:cNvSpPr/>
           <p:nvPr/>
         </p:nvSpPr>
         <p:spPr>
           <a:xfrm>
-            <a:off x="6309360" y="2468880"/>
-            <a:ext cx="5303520" cy="1600200"/>
+            <a:off x="548640" y="4251960"/>
+            <a:ext cx="11064240" cy="1097280"/>
           </a:xfrm>
           <a:prstGeom prst="roundRect">
             <a:avLst>
-              <a:gd name="adj" fmla="val 4571"/>
+              <a:gd name="adj" fmla="val 6667"/>
             </a:avLst>
           </a:prstGeom>
           <a:solidFill>
-            <a:schemeClr val="bg1"/>
+            <a:schemeClr val="tx2"/>
           </a:solidFill>
-          <a:ln w="12700">
-            <a:solidFill>
-              <a:schemeClr val="accent5"/>
-            </a:solidFill>
-            <a:prstDash val="solid"/>
-          </a:ln>
+          <a:ln/>
           <a:effectLst>
             <a:outerShdw sx="100000" sy="100000" kx="0" ky="0" algn="bl" rotWithShape="0" blurRad="127000" dist="38100" dir="5400000">
               <a:srgbClr val="1A1F2B">
@@ -3755,14 +3572,14 @@
       </p:sp>
       <p:sp>
         <p:nvSpPr>
-          <p:cNvPr id="18" name="Text 16"/>
+          <p:cNvPr id="8" name="Text 6"/>
           <p:cNvSpPr txBox="1"/>
           <p:nvPr/>
         </p:nvSpPr>
         <p:spPr>
           <a:xfrm>
-            <a:off x="6537960" y="2615184"/>
-            <a:ext cx="4846320" cy="320040"/>
+            <a:off x="822960" y="4407408"/>
+            <a:ext cx="10515600" cy="320040"/>
           </a:xfrm>
           <a:prstGeom prst="rect">
             <a:avLst/>
@@ -3778,69 +3595,30 @@
               <a:buNone/>
             </a:pPr>
             <a:r>
-              <a:rPr lang="en-US" sz="1300" b="1" dirty="0">
-                <a:solidFill>
-                  <a:schemeClr val="tx1"/>
+              <a:rPr lang="en-US" sz="1400" b="1" dirty="0">
+                <a:solidFill>
+                  <a:schemeClr val="accent1"/>
                 </a:solidFill>
                 <a:latin typeface="Calibri" pitchFamily="34" charset="0"/>
                 <a:ea typeface="Calibri" pitchFamily="34" charset="-122"/>
                 <a:cs typeface="Calibri" pitchFamily="34" charset="-120"/>
               </a:rPr>
-              <a:t>claim.js: written before the send</a:t>
-            </a:r>
-            <a:endParaRPr lang="en-US" sz="1300" dirty="0"/>
-          </a:p>
-        </p:txBody>
-      </p:sp>
-      <p:sp>
-        <p:nvSpPr>
-          <p:cNvPr id="19" name="Text 17"/>
+              <a:t>Priority isn’t a field you set directly</a:t>
+            </a:r>
+            <a:endParaRPr lang="en-US" sz="1400" dirty="0"/>
+          </a:p>
+        </p:txBody>
+      </p:sp>
+      <p:sp>
+        <p:nvSpPr>
+          <p:cNvPr id="9" name="Text 7"/>
           <p:cNvSpPr txBox="1"/>
           <p:nvPr/>
         </p:nvSpPr>
         <p:spPr>
           <a:xfrm>
-            <a:off x="6537960" y="2926080"/>
-            <a:ext cx="4846320" cy="457200"/>
-          </a:xfrm>
-          <a:prstGeom prst="rect">
-            <a:avLst/>
-          </a:prstGeom>
-          <a:noFill/>
-          <a:ln/>
-        </p:spPr>
-        <p:txBody>
-          <a:bodyPr wrap="square" lIns="0" tIns="0" rIns="0" bIns="0" rtlCol="0" anchor="ctr"/>
-          <a:lstStyle/>
-          <a:p>
-            <a:pPr algn="l" indent="0" marL="0">
-              <a:buNone/>
-            </a:pPr>
-            <a:r>
-              <a:rPr lang="en-US" sz="1200" dirty="0">
-                <a:solidFill>
-                  <a:schemeClr val="accent2"/>
-                </a:solidFill>
-                <a:latin typeface="Courier New" pitchFamily="34" charset="0"/>
-                <a:ea typeface="Courier New" pitchFamily="34" charset="-122"/>
-                <a:cs typeface="Courier New" pitchFamily="34" charset="-120"/>
-              </a:rPr>
-              <a:t>sd.alerts[key] = { status: 'pending', claimed_at: now, incident_state }</a:t>
-            </a:r>
-            <a:endParaRPr lang="en-US" sz="1200" dirty="0"/>
-          </a:p>
-        </p:txBody>
-      </p:sp>
-      <p:sp>
-        <p:nvSpPr>
-          <p:cNvPr id="20" name="Text 18"/>
-          <p:cNvSpPr txBox="1"/>
-          <p:nvPr/>
-        </p:nvSpPr>
-        <p:spPr>
-          <a:xfrm>
-            <a:off x="6537960" y="3429000"/>
-            <a:ext cx="4846320" cy="548640"/>
+            <a:off x="822960" y="4773168"/>
+            <a:ext cx="10515600" cy="502920"/>
           </a:xfrm>
           <a:prstGeom prst="rect">
             <a:avLst/>
@@ -3859,64 +3637,30 @@
               <a:buNone/>
             </a:pPr>
             <a:r>
-              <a:rPr lang="en-US" sz="1200" dirty="0">
-                <a:solidFill>
-                  <a:schemeClr val="accent6"/>
+              <a:rPr lang="en-US" sz="1250" dirty="0">
+                <a:solidFill>
+                  <a:srgbClr val="E5E9F0"/>
                 </a:solidFill>
                 <a:latin typeface="Calibri" pitchFamily="34" charset="0"/>
                 <a:ea typeface="Calibri" pitchFamily="34" charset="-122"/>
                 <a:cs typeface="Calibri" pitchFamily="34" charset="-120"/>
               </a:rPr>
-              <a:t>This record is what survives a crash. The next run finds it, not silence.</a:t>
-            </a:r>
-            <a:endParaRPr lang="en-US" sz="1200" dirty="0"/>
-          </a:p>
-        </p:txBody>
-      </p:sp>
-      <p:sp>
-        <p:nvSpPr>
-          <p:cNvPr id="21" name="Shape 19"/>
-          <p:cNvSpPr/>
-          <p:nvPr/>
-        </p:nvSpPr>
-        <p:spPr>
-          <a:xfrm>
-            <a:off x="6309360" y="4343400"/>
-            <a:ext cx="5303520" cy="1691640"/>
-          </a:xfrm>
-          <a:prstGeom prst="roundRect">
-            <a:avLst>
-              <a:gd name="adj" fmla="val 4324"/>
-            </a:avLst>
-          </a:prstGeom>
-          <a:solidFill>
-            <a:schemeClr val="bg1"/>
-          </a:solidFill>
-          <a:ln w="12700">
-            <a:solidFill>
-              <a:schemeClr val="accent5"/>
-            </a:solidFill>
-            <a:prstDash val="solid"/>
-          </a:ln>
-          <a:effectLst>
-            <a:outerShdw sx="100000" sy="100000" kx="0" ky="0" algn="bl" rotWithShape="0" blurRad="127000" dist="38100" dir="5400000">
-              <a:srgbClr val="1A1F2B">
-                <a:alpha val="18000"/>
-              </a:srgbClr>
-            </a:outerShdw>
-          </a:effectLst>
-        </p:spPr>
-      </p:sp>
-      <p:sp>
-        <p:nvSpPr>
-          <p:cNvPr id="22" name="Text 20"/>
+              <a:t>ServiceNow calculates it from Impact × Urgency via its own matrix. impact=1, urgency=1 → priority 1 (Critical). impact=1, urgency=2 → priority 2 (High). Sending “priority” directly in the body is silently ignored.</a:t>
+            </a:r>
+            <a:endParaRPr lang="en-US" sz="1250" dirty="0"/>
+          </a:p>
+        </p:txBody>
+      </p:sp>
+      <p:sp>
+        <p:nvSpPr>
+          <p:cNvPr id="10" name="Text 8"/>
           <p:cNvSpPr txBox="1"/>
           <p:nvPr/>
         </p:nvSpPr>
         <p:spPr>
           <a:xfrm>
-            <a:off x="6537960" y="4507992"/>
-            <a:ext cx="4846320" cy="320040"/>
+            <a:off x="548640" y="5532120"/>
+            <a:ext cx="11064240" cy="548640"/>
           </a:xfrm>
           <a:prstGeom prst="rect">
             <a:avLst/>
@@ -3928,63 +3672,6 @@
           <a:bodyPr wrap="square" lIns="0" tIns="0" rIns="0" bIns="0" rtlCol="0" anchor="ctr"/>
           <a:lstStyle/>
           <a:p>
-            <a:pPr algn="l" indent="0" marL="0">
-              <a:buNone/>
-            </a:pPr>
-            <a:r>
-              <a:rPr lang="en-US" sz="1300" b="1" dirty="0">
-                <a:solidFill>
-                  <a:schemeClr val="tx1"/>
-                </a:solidFill>
-                <a:latin typeface="Calibri" pitchFamily="34" charset="0"/>
-                <a:ea typeface="Calibri" pitchFamily="34" charset="-122"/>
-                <a:cs typeface="Calibri" pitchFamily="34" charset="-120"/>
-              </a:rPr>
-              <a:t>Self-healing safeguards</a:t>
-            </a:r>
-            <a:endParaRPr lang="en-US" sz="1300" dirty="0"/>
-          </a:p>
-        </p:txBody>
-      </p:sp>
-      <p:sp>
-        <p:nvSpPr>
-          <p:cNvPr id="23" name="Text 21"/>
-          <p:cNvSpPr txBox="1"/>
-          <p:nvPr/>
-        </p:nvSpPr>
-        <p:spPr>
-          <a:xfrm>
-            <a:off x="6537960" y="4846320"/>
-            <a:ext cx="4846320" cy="1097280"/>
-          </a:xfrm>
-          <a:prstGeom prst="rect">
-            <a:avLst/>
-          </a:prstGeom>
-          <a:noFill/>
-          <a:ln/>
-        </p:spPr>
-        <p:txBody>
-          <a:bodyPr wrap="square" lIns="0" tIns="0" rIns="0" bIns="0" rtlCol="0" anchor="ctr"/>
-          <a:lstStyle/>
-          <a:p>
-            <a:pPr algn="l" marL="342900" indent="-342900">
-              <a:lnSpc>
-                <a:spcPct val="130000"/>
-              </a:lnSpc>
-              <a:buSzPct val="100000"/>
-              <a:buChar char="•"/>
-            </a:pPr>
-            <a:r>
-              <a:rPr lang="en-US" sz="1200" b="1" dirty="0">
-                <a:solidFill>
-                  <a:schemeClr val="accent6"/>
-                </a:solidFill>
-                <a:latin typeface="Calibri" pitchFamily="34" charset="0"/>
-                <a:ea typeface="Calibri" pitchFamily="34" charset="-122"/>
-                <a:cs typeface="Calibri" pitchFamily="34" charset="-120"/>
-              </a:rPr>
-              <a:t>Stale-claim recovery</a:t>
-            </a:r>
             <a:pPr algn="l" indent="0" marL="0">
               <a:lnSpc>
                 <a:spcPct val="130000"/>
@@ -3992,97 +3679,17 @@
               <a:buNone/>
             </a:pPr>
             <a:r>
-              <a:rPr lang="en-US" sz="1200" dirty="0">
-                <a:solidFill>
-                  <a:schemeClr val="accent6"/>
+              <a:rPr lang="en-US" sz="1250" i="1" dirty="0">
+                <a:solidFill>
+                  <a:schemeClr val="accent4"/>
                 </a:solidFill>
                 <a:latin typeface="Calibri" pitchFamily="34" charset="0"/>
                 <a:ea typeface="Calibri" pitchFamily="34" charset="-122"/>
                 <a:cs typeface="Calibri" pitchFamily="34" charset="-120"/>
               </a:rPr>
-              <a:t>: a “pending” older than 10 min is reset to retryable.</a:t>
-            </a:r>
-            <a:endParaRPr lang="en-US" sz="1200" dirty="0"/>
-          </a:p>
-          <a:p>
-            <a:pPr algn="l" marL="342900" indent="-342900">
-              <a:lnSpc>
-                <a:spcPct val="130000"/>
-              </a:lnSpc>
-              <a:buSzPct val="100000"/>
-              <a:buChar char="•"/>
-            </a:pPr>
-            <a:r>
-              <a:rPr lang="en-US" sz="1200" b="1" dirty="0">
-                <a:solidFill>
-                  <a:schemeClr val="accent6"/>
-                </a:solidFill>
-                <a:latin typeface="Calibri" pitchFamily="34" charset="0"/>
-                <a:ea typeface="Calibri" pitchFamily="34" charset="-122"/>
-                <a:cs typeface="Calibri" pitchFamily="34" charset="-120"/>
-              </a:rPr>
-              <a:t>Run lock</a:t>
-            </a:r>
-            <a:pPr algn="l" indent="0" marL="0">
-              <a:lnSpc>
-                <a:spcPct val="130000"/>
-              </a:lnSpc>
-              <a:buNone/>
-            </a:pPr>
-            <a:r>
-              <a:rPr lang="en-US" sz="1200" dirty="0">
-                <a:solidFill>
-                  <a:schemeClr val="accent6"/>
-                </a:solidFill>
-                <a:latin typeface="Calibri" pitchFamily="34" charset="0"/>
-                <a:ea typeface="Calibri" pitchFamily="34" charset="-122"/>
-                <a:cs typeface="Calibri" pitchFamily="34" charset="-120"/>
-              </a:rPr>
-              <a:t>: a TTL lock stops two runs from racing to claim the same key.</a:t>
-            </a:r>
-            <a:endParaRPr lang="en-US" sz="1200" dirty="0"/>
-          </a:p>
-        </p:txBody>
-      </p:sp>
-      <p:sp>
-        <p:nvSpPr>
-          <p:cNvPr id="24" name="Text 22"/>
-          <p:cNvSpPr txBox="1"/>
-          <p:nvPr/>
-        </p:nvSpPr>
-        <p:spPr>
-          <a:xfrm>
-            <a:off x="548640" y="6080760"/>
-            <a:ext cx="11064240" cy="411480"/>
-          </a:xfrm>
-          <a:prstGeom prst="rect">
-            <a:avLst/>
-          </a:prstGeom>
-          <a:noFill/>
-          <a:ln/>
-        </p:spPr>
-        <p:txBody>
-          <a:bodyPr wrap="square" lIns="0" tIns="0" rIns="0" bIns="0" rtlCol="0" anchor="ctr"/>
-          <a:lstStyle/>
-          <a:p>
-            <a:pPr algn="l" indent="0" marL="0">
-              <a:lnSpc>
-                <a:spcPct val="120000"/>
-              </a:lnSpc>
-              <a:buNone/>
-            </a:pPr>
-            <a:r>
-              <a:rPr lang="en-US" sz="1150" i="1" dirty="0">
-                <a:solidFill>
-                  <a:schemeClr val="accent4"/>
-                </a:solidFill>
-                <a:latin typeface="Calibri" pitchFamily="34" charset="0"/>
-                <a:ea typeface="Calibri" pitchFamily="34" charset="-122"/>
-                <a:cs typeface="Calibri" pitchFamily="34" charset="-120"/>
-              </a:rPr>
-              <a:t>At-least-once delivery: a narrow-window duplicate is possible; a missed critical alert is not. Plain SMTP can't guarantee exactly-once. This is the right tradeoff.</a:t>
-            </a:r>
-            <a:endParaRPr lang="en-US" sz="1150" dirty="0"/>
+              <a:t>Resolving a test incident is a second call: PATCH the same record with state=6 and a valid close_code (looked up from that instance's own choice list via /api/now/table/sys_choice).</a:t>
+            </a:r>
+            <a:endParaRPr lang="en-US" sz="1250" dirty="0"/>
           </a:p>
         </p:txBody>
       </p:sp>
@@ -4162,6 +3769,152 @@
       <p:sp>
         <p:nvSpPr>
           <p:cNvPr id="2" name="Text 0"/>
+          <p:cNvSpPr txBox="1"/>
+          <p:nvPr/>
+        </p:nvSpPr>
+        <p:spPr>
+          <a:xfrm>
+            <a:off x="822960" y="2011680"/>
+            <a:ext cx="9144000" cy="365760"/>
+          </a:xfrm>
+          <a:prstGeom prst="rect">
+            <a:avLst/>
+          </a:prstGeom>
+          <a:noFill/>
+          <a:ln/>
+        </p:spPr>
+        <p:txBody>
+          <a:bodyPr wrap="square" lIns="0" tIns="0" rIns="0" bIns="0" rtlCol="0" anchor="ctr"/>
+          <a:lstStyle/>
+          <a:p>
+            <a:pPr algn="l" indent="0" marL="0">
+              <a:buNone/>
+            </a:pPr>
+            <a:r>
+              <a:rPr lang="en-US" sz="1400" b="1" spc="200" kern="0" dirty="0">
+                <a:solidFill>
+                  <a:schemeClr val="accent1"/>
+                </a:solidFill>
+                <a:latin typeface="Calibri" pitchFamily="34" charset="0"/>
+                <a:ea typeface="Calibri" pitchFamily="34" charset="-122"/>
+                <a:cs typeface="Calibri" pitchFamily="34" charset="-120"/>
+              </a:rPr>
+              <a:t>02 · RELIABILITY ENGINEERING</a:t>
+            </a:r>
+            <a:endParaRPr lang="en-US" sz="1400" dirty="0"/>
+          </a:p>
+        </p:txBody>
+      </p:sp>
+      <p:sp>
+        <p:nvSpPr>
+          <p:cNvPr id="3" name="Text 0"/>
+          <p:cNvSpPr/>
+          <p:nvPr>
+            <p:ph idx="100" type="title" hasCustomPrompt="1"/>
+          </p:nvPr>
+        </p:nvSpPr>
+        <p:spPr>
+          <a:xfrm>
+            <a:off x="822960" y="2743200"/>
+            <a:ext cx="10515600" cy="1463040"/>
+          </a:xfrm>
+          <a:prstGeom prst="rect">
+            <a:avLst/>
+          </a:prstGeom>
+          <a:noFill/>
+          <a:ln/>
+        </p:spPr>
+        <p:txBody>
+          <a:bodyPr wrap="square" rtlCol="0"/>
+          <a:lstStyle/>
+          <a:p>
+            <a:pPr algn="l" indent="0" marL="0">
+              <a:buNone/>
+            </a:pPr>
+            <a:r>
+              <a:rPr lang="en-US" sz="4000" b="1" dirty="0">
+                <a:solidFill>
+                  <a:schemeClr val="bg1"/>
+                </a:solidFill>
+                <a:latin typeface="Cambria" pitchFamily="34" charset="0"/>
+                <a:ea typeface="Cambria" pitchFamily="34" charset="-122"/>
+                <a:cs typeface="Cambria" pitchFamily="34" charset="-120"/>
+              </a:rPr>
+              <a:t>Reminders, dedup, and crash-safe delivery</a:t>
+            </a:r>
+            <a:endParaRPr lang="en-US" sz="4000" dirty="0"/>
+          </a:p>
+        </p:txBody>
+      </p:sp>
+      <p:sp>
+        <p:nvSpPr>
+          <p:cNvPr id="4" name="Text 0"/>
+          <p:cNvSpPr/>
+          <p:nvPr>
+            <p:ph idx="101" type="body" hasCustomPrompt="1"/>
+          </p:nvPr>
+        </p:nvSpPr>
+        <p:spPr>
+          <a:xfrm>
+            <a:off x="822960" y="4160520"/>
+            <a:ext cx="9601200" cy="1097280"/>
+          </a:xfrm>
+          <a:prstGeom prst="rect">
+            <a:avLst/>
+          </a:prstGeom>
+          <a:noFill/>
+          <a:ln/>
+        </p:spPr>
+        <p:txBody>
+          <a:bodyPr wrap="square" rtlCol="0"/>
+          <a:lstStyle/>
+          <a:p>
+            <a:pPr algn="l" indent="0" marL="0">
+              <a:buNone/>
+            </a:pPr>
+            <a:r>
+              <a:rPr lang="en-US" sz="1600" dirty="0">
+                <a:solidFill>
+                  <a:srgbClr val="AEB8C9"/>
+                </a:solidFill>
+                <a:latin typeface="Calibri" pitchFamily="34" charset="0"/>
+                <a:ea typeface="Calibri" pitchFamily="34" charset="-122"/>
+                <a:cs typeface="Calibri" pitchFamily="34" charset="-120"/>
+              </a:rPr>
+              <a:t>How the workflow avoids two failure modes: forgetting an incident that stays critical, and duplicating an alert if it crashes mid-send.</a:t>
+            </a:r>
+            <a:endParaRPr lang="en-US" sz="1600" dirty="0"/>
+          </a:p>
+        </p:txBody>
+      </p:sp>
+    </p:spTree>
+  </p:cSld>
+  <p:clrMapOvr>
+    <a:masterClrMapping/>
+  </p:clrMapOvr>
+</p:sld>
+</file>
+
+<file path=ppt/slides/slide12.xml><?xml version="1.0" encoding="utf-8"?>
+<p:sld xmlns:a="http://schemas.openxmlformats.org/drawingml/2006/main" xmlns:r="http://schemas.openxmlformats.org/officeDocument/2006/relationships" xmlns:p="http://schemas.openxmlformats.org/presentationml/2006/main">
+  <p:cSld name="Slide 12">
+    <p:spTree>
+      <p:nvGrpSpPr>
+        <p:cNvPr id="1" name=""/>
+        <p:cNvGrpSpPr/>
+        <p:nvPr/>
+      </p:nvGrpSpPr>
+      <p:grpSpPr>
+        <a:xfrm>
+          <a:off x="0" y="0"/>
+          <a:ext cx="0" cy="0"/>
+          <a:chOff x="0" y="0"/>
+          <a:chExt cx="0" cy="0"/>
+        </a:xfrm>
+      </p:grpSpPr>
+      <p:sp>
+        <p:nvSpPr>
+          <p:cNvPr id="2" name="Text 0"/>
           <p:cNvSpPr/>
           <p:nvPr>
             <p:ph idx="100" type="body" hasCustomPrompt="1"/>
@@ -4194,7 +3947,7 @@
                 <a:ea typeface="Calibri" pitchFamily="34" charset="-122"/>
                 <a:cs typeface="Calibri" pitchFamily="34" charset="-120"/>
               </a:rPr>
-              <a:t>REMINDER POLICY</a:t>
+              <a:t>THE PROBLEM</a:t>
             </a:r>
             <a:endParaRPr lang="en-US" sz="1300" dirty="0"/>
           </a:p>
@@ -4235,6 +3988,1712 @@
                 <a:ea typeface="Cambria" pitchFamily="34" charset="-122"/>
                 <a:cs typeface="Cambria" pitchFamily="34" charset="-120"/>
               </a:rPr>
+              <a:t>Send-then-save can duplicate an alert</a:t>
+            </a:r>
+            <a:endParaRPr lang="en-US" sz="3200" dirty="0"/>
+          </a:p>
+        </p:txBody>
+      </p:sp>
+      <p:sp>
+        <p:nvSpPr>
+          <p:cNvPr id="4" name="Text 2"/>
+          <p:cNvSpPr txBox="1"/>
+          <p:nvPr/>
+        </p:nvSpPr>
+        <p:spPr>
+          <a:xfrm>
+            <a:off x="548640" y="1691640"/>
+            <a:ext cx="11064240" cy="822960"/>
+          </a:xfrm>
+          <a:prstGeom prst="rect">
+            <a:avLst/>
+          </a:prstGeom>
+          <a:noFill/>
+          <a:ln/>
+        </p:spPr>
+        <p:txBody>
+          <a:bodyPr wrap="square" lIns="0" tIns="0" rIns="0" bIns="0" rtlCol="0" anchor="ctr"/>
+          <a:lstStyle/>
+          <a:p>
+            <a:pPr algn="l" indent="0" marL="0">
+              <a:lnSpc>
+                <a:spcPct val="130000"/>
+              </a:lnSpc>
+              <a:buNone/>
+            </a:pPr>
+            <a:r>
+              <a:rPr lang="en-US" sz="1500" dirty="0">
+                <a:solidFill>
+                  <a:schemeClr val="accent6"/>
+                </a:solidFill>
+                <a:latin typeface="Calibri" pitchFamily="34" charset="0"/>
+                <a:ea typeface="Calibri" pitchFamily="34" charset="-122"/>
+                <a:cs typeface="Calibri" pitchFamily="34" charset="-120"/>
+              </a:rPr>
+              <a:t>A naive design emails the alert first, then records that it was sent. If the workflow crashes or the save step fails in between, the next run has no record of the send, and resends it.</a:t>
+            </a:r>
+            <a:endParaRPr lang="en-US" sz="1500" dirty="0"/>
+          </a:p>
+        </p:txBody>
+      </p:sp>
+      <p:sp>
+        <p:nvSpPr>
+          <p:cNvPr id="5" name="Shape 3"/>
+          <p:cNvSpPr/>
+          <p:nvPr/>
+        </p:nvSpPr>
+        <p:spPr>
+          <a:xfrm>
+            <a:off x="548640" y="2834640"/>
+            <a:ext cx="3291840" cy="1737360"/>
+          </a:xfrm>
+          <a:prstGeom prst="roundRect">
+            <a:avLst>
+              <a:gd name="adj" fmla="val 4211"/>
+            </a:avLst>
+          </a:prstGeom>
+          <a:solidFill>
+            <a:schemeClr val="bg1"/>
+          </a:solidFill>
+          <a:ln w="12700">
+            <a:solidFill>
+              <a:schemeClr val="accent5"/>
+            </a:solidFill>
+            <a:prstDash val="solid"/>
+          </a:ln>
+          <a:effectLst>
+            <a:outerShdw sx="100000" sy="100000" kx="0" ky="0" algn="bl" rotWithShape="0" blurRad="127000" dist="38100" dir="5400000">
+              <a:srgbClr val="1A1F2B">
+                <a:alpha val="18000"/>
+              </a:srgbClr>
+            </a:outerShdw>
+          </a:effectLst>
+        </p:spPr>
+      </p:sp>
+      <p:sp>
+        <p:nvSpPr>
+          <p:cNvPr id="6" name="Text 4"/>
+          <p:cNvSpPr txBox="1"/>
+          <p:nvPr/>
+        </p:nvSpPr>
+        <p:spPr>
+          <a:xfrm>
+            <a:off x="777240" y="3063240"/>
+            <a:ext cx="2834640" cy="411480"/>
+          </a:xfrm>
+          <a:prstGeom prst="rect">
+            <a:avLst/>
+          </a:prstGeom>
+          <a:noFill/>
+          <a:ln/>
+        </p:spPr>
+        <p:txBody>
+          <a:bodyPr wrap="square" lIns="0" tIns="0" rIns="0" bIns="0" rtlCol="0" anchor="ctr"/>
+          <a:lstStyle/>
+          <a:p>
+            <a:pPr algn="l" indent="0" marL="0">
+              <a:buNone/>
+            </a:pPr>
+            <a:r>
+              <a:rPr lang="en-US" sz="1600" b="1" dirty="0">
+                <a:solidFill>
+                  <a:schemeClr val="tx1"/>
+                </a:solidFill>
+                <a:latin typeface="Cambria" pitchFamily="34" charset="0"/>
+                <a:ea typeface="Cambria" pitchFamily="34" charset="-122"/>
+                <a:cs typeface="Cambria" pitchFamily="34" charset="-120"/>
+              </a:rPr>
+              <a:t>Send email</a:t>
+            </a:r>
+            <a:endParaRPr lang="en-US" sz="1600" dirty="0"/>
+          </a:p>
+        </p:txBody>
+      </p:sp>
+      <p:sp>
+        <p:nvSpPr>
+          <p:cNvPr id="7" name="Text 5"/>
+          <p:cNvSpPr txBox="1"/>
+          <p:nvPr/>
+        </p:nvSpPr>
+        <p:spPr>
+          <a:xfrm>
+            <a:off x="777240" y="3566160"/>
+            <a:ext cx="2834640" cy="822960"/>
+          </a:xfrm>
+          <a:prstGeom prst="rect">
+            <a:avLst/>
+          </a:prstGeom>
+          <a:noFill/>
+          <a:ln/>
+        </p:spPr>
+        <p:txBody>
+          <a:bodyPr wrap="square" lIns="0" tIns="0" rIns="0" bIns="0" rtlCol="0" anchor="ctr"/>
+          <a:lstStyle/>
+          <a:p>
+            <a:pPr algn="l" indent="0" marL="0">
+              <a:lnSpc>
+                <a:spcPct val="125000"/>
+              </a:lnSpc>
+              <a:buNone/>
+            </a:pPr>
+            <a:r>
+              <a:rPr lang="en-US" sz="1250" dirty="0">
+                <a:solidFill>
+                  <a:schemeClr val="accent6"/>
+                </a:solidFill>
+                <a:latin typeface="Calibri" pitchFamily="34" charset="0"/>
+                <a:ea typeface="Calibri" pitchFamily="34" charset="-122"/>
+                <a:cs typeface="Calibri" pitchFamily="34" charset="-120"/>
+              </a:rPr>
+              <a:t>INC0010042:critical delivered</a:t>
+            </a:r>
+            <a:endParaRPr lang="en-US" sz="1250" dirty="0"/>
+          </a:p>
+        </p:txBody>
+      </p:sp>
+      <p:sp>
+        <p:nvSpPr>
+          <p:cNvPr id="8" name="Shape 6"/>
+          <p:cNvSpPr/>
+          <p:nvPr/>
+        </p:nvSpPr>
+        <p:spPr>
+          <a:xfrm>
+            <a:off x="3895344" y="3566160"/>
+            <a:ext cx="301752" cy="274320"/>
+          </a:xfrm>
+          <a:prstGeom prst="rightArrow">
+            <a:avLst/>
+          </a:prstGeom>
+          <a:solidFill>
+            <a:schemeClr val="accent4"/>
+          </a:solidFill>
+          <a:ln/>
+        </p:spPr>
+      </p:sp>
+      <p:sp>
+        <p:nvSpPr>
+          <p:cNvPr id="9" name="Shape 7"/>
+          <p:cNvSpPr/>
+          <p:nvPr/>
+        </p:nvSpPr>
+        <p:spPr>
+          <a:xfrm>
+            <a:off x="4251960" y="2834640"/>
+            <a:ext cx="3291840" cy="1737360"/>
+          </a:xfrm>
+          <a:prstGeom prst="roundRect">
+            <a:avLst>
+              <a:gd name="adj" fmla="val 4211"/>
+            </a:avLst>
+          </a:prstGeom>
+          <a:solidFill>
+            <a:schemeClr val="bg1"/>
+          </a:solidFill>
+          <a:ln w="12700">
+            <a:solidFill>
+              <a:schemeClr val="accent5"/>
+            </a:solidFill>
+            <a:prstDash val="solid"/>
+          </a:ln>
+          <a:effectLst>
+            <a:outerShdw sx="100000" sy="100000" kx="0" ky="0" algn="bl" rotWithShape="0" blurRad="127000" dist="38100" dir="5400000">
+              <a:srgbClr val="1A1F2B">
+                <a:alpha val="18000"/>
+              </a:srgbClr>
+            </a:outerShdw>
+          </a:effectLst>
+        </p:spPr>
+      </p:sp>
+      <p:sp>
+        <p:nvSpPr>
+          <p:cNvPr id="10" name="Text 8"/>
+          <p:cNvSpPr txBox="1"/>
+          <p:nvPr/>
+        </p:nvSpPr>
+        <p:spPr>
+          <a:xfrm>
+            <a:off x="4480560" y="3063240"/>
+            <a:ext cx="2834640" cy="411480"/>
+          </a:xfrm>
+          <a:prstGeom prst="rect">
+            <a:avLst/>
+          </a:prstGeom>
+          <a:noFill/>
+          <a:ln/>
+        </p:spPr>
+        <p:txBody>
+          <a:bodyPr wrap="square" lIns="0" tIns="0" rIns="0" bIns="0" rtlCol="0" anchor="ctr"/>
+          <a:lstStyle/>
+          <a:p>
+            <a:pPr algn="l" indent="0" marL="0">
+              <a:buNone/>
+            </a:pPr>
+            <a:r>
+              <a:rPr lang="en-US" sz="1600" b="1" dirty="0">
+                <a:solidFill>
+                  <a:schemeClr val="tx1"/>
+                </a:solidFill>
+                <a:latin typeface="Cambria" pitchFamily="34" charset="0"/>
+                <a:ea typeface="Cambria" pitchFamily="34" charset="-122"/>
+                <a:cs typeface="Cambria" pitchFamily="34" charset="-120"/>
+              </a:rPr>
+              <a:t>⚠ Crash</a:t>
+            </a:r>
+            <a:endParaRPr lang="en-US" sz="1600" dirty="0"/>
+          </a:p>
+        </p:txBody>
+      </p:sp>
+      <p:sp>
+        <p:nvSpPr>
+          <p:cNvPr id="11" name="Text 9"/>
+          <p:cNvSpPr txBox="1"/>
+          <p:nvPr/>
+        </p:nvSpPr>
+        <p:spPr>
+          <a:xfrm>
+            <a:off x="4480560" y="3566160"/>
+            <a:ext cx="2834640" cy="822960"/>
+          </a:xfrm>
+          <a:prstGeom prst="rect">
+            <a:avLst/>
+          </a:prstGeom>
+          <a:noFill/>
+          <a:ln/>
+        </p:spPr>
+        <p:txBody>
+          <a:bodyPr wrap="square" lIns="0" tIns="0" rIns="0" bIns="0" rtlCol="0" anchor="ctr"/>
+          <a:lstStyle/>
+          <a:p>
+            <a:pPr algn="l" indent="0" marL="0">
+              <a:lnSpc>
+                <a:spcPct val="125000"/>
+              </a:lnSpc>
+              <a:buNone/>
+            </a:pPr>
+            <a:r>
+              <a:rPr lang="en-US" sz="1250" dirty="0">
+                <a:solidFill>
+                  <a:schemeClr val="accent6"/>
+                </a:solidFill>
+                <a:latin typeface="Calibri" pitchFamily="34" charset="0"/>
+                <a:ea typeface="Calibri" pitchFamily="34" charset="-122"/>
+                <a:cs typeface="Calibri" pitchFamily="34" charset="-120"/>
+              </a:rPr>
+              <a:t>Workflow dies before saving state</a:t>
+            </a:r>
+            <a:endParaRPr lang="en-US" sz="1250" dirty="0"/>
+          </a:p>
+        </p:txBody>
+      </p:sp>
+      <p:sp>
+        <p:nvSpPr>
+          <p:cNvPr id="12" name="Shape 10"/>
+          <p:cNvSpPr/>
+          <p:nvPr/>
+        </p:nvSpPr>
+        <p:spPr>
+          <a:xfrm>
+            <a:off x="7598664" y="3566160"/>
+            <a:ext cx="301752" cy="274320"/>
+          </a:xfrm>
+          <a:prstGeom prst="rightArrow">
+            <a:avLst/>
+          </a:prstGeom>
+          <a:solidFill>
+            <a:schemeClr val="accent4"/>
+          </a:solidFill>
+          <a:ln/>
+        </p:spPr>
+      </p:sp>
+      <p:sp>
+        <p:nvSpPr>
+          <p:cNvPr id="13" name="Shape 11"/>
+          <p:cNvSpPr/>
+          <p:nvPr/>
+        </p:nvSpPr>
+        <p:spPr>
+          <a:xfrm>
+            <a:off x="7955280" y="2834640"/>
+            <a:ext cx="3291840" cy="1737360"/>
+          </a:xfrm>
+          <a:prstGeom prst="roundRect">
+            <a:avLst>
+              <a:gd name="adj" fmla="val 4211"/>
+            </a:avLst>
+          </a:prstGeom>
+          <a:solidFill>
+            <a:schemeClr val="tx2"/>
+          </a:solidFill>
+          <a:ln/>
+          <a:effectLst>
+            <a:outerShdw sx="100000" sy="100000" kx="0" ky="0" algn="bl" rotWithShape="0" blurRad="127000" dist="38100" dir="5400000">
+              <a:srgbClr val="1A1F2B">
+                <a:alpha val="18000"/>
+              </a:srgbClr>
+            </a:outerShdw>
+          </a:effectLst>
+        </p:spPr>
+      </p:sp>
+      <p:sp>
+        <p:nvSpPr>
+          <p:cNvPr id="14" name="Text 12"/>
+          <p:cNvSpPr txBox="1"/>
+          <p:nvPr/>
+        </p:nvSpPr>
+        <p:spPr>
+          <a:xfrm>
+            <a:off x="8183880" y="3063240"/>
+            <a:ext cx="2834640" cy="411480"/>
+          </a:xfrm>
+          <a:prstGeom prst="rect">
+            <a:avLst/>
+          </a:prstGeom>
+          <a:noFill/>
+          <a:ln/>
+        </p:spPr>
+        <p:txBody>
+          <a:bodyPr wrap="square" lIns="0" tIns="0" rIns="0" bIns="0" rtlCol="0" anchor="ctr"/>
+          <a:lstStyle/>
+          <a:p>
+            <a:pPr algn="l" indent="0" marL="0">
+              <a:buNone/>
+            </a:pPr>
+            <a:r>
+              <a:rPr lang="en-US" sz="1600" b="1" dirty="0">
+                <a:solidFill>
+                  <a:srgbClr val="FFFFFF"/>
+                </a:solidFill>
+                <a:latin typeface="Cambria" pitchFamily="34" charset="0"/>
+                <a:ea typeface="Cambria" pitchFamily="34" charset="-122"/>
+                <a:cs typeface="Cambria" pitchFamily="34" charset="-120"/>
+              </a:rPr>
+              <a:t>Next run</a:t>
+            </a:r>
+            <a:endParaRPr lang="en-US" sz="1600" dirty="0"/>
+          </a:p>
+        </p:txBody>
+      </p:sp>
+      <p:sp>
+        <p:nvSpPr>
+          <p:cNvPr id="15" name="Text 13"/>
+          <p:cNvSpPr txBox="1"/>
+          <p:nvPr/>
+        </p:nvSpPr>
+        <p:spPr>
+          <a:xfrm>
+            <a:off x="8183880" y="3566160"/>
+            <a:ext cx="2834640" cy="822960"/>
+          </a:xfrm>
+          <a:prstGeom prst="rect">
+            <a:avLst/>
+          </a:prstGeom>
+          <a:noFill/>
+          <a:ln/>
+        </p:spPr>
+        <p:txBody>
+          <a:bodyPr wrap="square" lIns="0" tIns="0" rIns="0" bIns="0" rtlCol="0" anchor="ctr"/>
+          <a:lstStyle/>
+          <a:p>
+            <a:pPr algn="l" indent="0" marL="0">
+              <a:lnSpc>
+                <a:spcPct val="125000"/>
+              </a:lnSpc>
+              <a:buNone/>
+            </a:pPr>
+            <a:r>
+              <a:rPr lang="en-US" sz="1250" dirty="0">
+                <a:solidFill>
+                  <a:srgbClr val="AEB8C9"/>
+                </a:solidFill>
+                <a:latin typeface="Calibri" pitchFamily="34" charset="0"/>
+                <a:ea typeface="Calibri" pitchFamily="34" charset="-122"/>
+                <a:cs typeface="Calibri" pitchFamily="34" charset="-120"/>
+              </a:rPr>
+              <a:t>No record found → sends again</a:t>
+            </a:r>
+            <a:endParaRPr lang="en-US" sz="1250" dirty="0"/>
+          </a:p>
+        </p:txBody>
+      </p:sp>
+      <p:sp>
+        <p:nvSpPr>
+          <p:cNvPr id="16" name="Text 14"/>
+          <p:cNvSpPr txBox="1"/>
+          <p:nvPr/>
+        </p:nvSpPr>
+        <p:spPr>
+          <a:xfrm>
+            <a:off x="548640" y="5029200"/>
+            <a:ext cx="11064240" cy="457200"/>
+          </a:xfrm>
+          <a:prstGeom prst="rect">
+            <a:avLst/>
+          </a:prstGeom>
+          <a:noFill/>
+          <a:ln/>
+        </p:spPr>
+        <p:txBody>
+          <a:bodyPr wrap="square" lIns="0" tIns="0" rIns="0" bIns="0" rtlCol="0" anchor="ctr"/>
+          <a:lstStyle/>
+          <a:p>
+            <a:pPr algn="l" indent="0" marL="0">
+              <a:buNone/>
+            </a:pPr>
+            <a:r>
+              <a:rPr lang="en-US" sz="1300" i="1" dirty="0">
+                <a:solidFill>
+                  <a:schemeClr val="accent4"/>
+                </a:solidFill>
+                <a:latin typeface="Calibri" pitchFamily="34" charset="0"/>
+                <a:ea typeface="Calibri" pitchFamily="34" charset="-122"/>
+                <a:cs typeface="Calibri" pitchFamily="34" charset="-120"/>
+              </a:rPr>
+              <a:t>Why ordinary SMTP can't fix this: there is no transaction spanning “send an email” and “write a database row.” One of them has to come first.</a:t>
+            </a:r>
+            <a:endParaRPr lang="en-US" sz="1300" dirty="0"/>
+          </a:p>
+        </p:txBody>
+      </p:sp>
+      <p:sp>
+        <p:nvSpPr>
+          <p:cNvPr id="25" name="Slide Number Placeholder 0"/>
+          <p:cNvSpPr>
+            <a:spLocks noGrp="1"/>
+          </p:cNvSpPr>
+          <p:nvPr>
+            <p:ph type="sldNum" sz="quarter" idx="4294967295"/>
+          </p:nvPr>
+        </p:nvSpPr>
+        <p:spPr>
+          <a:xfrm>
+            <a:off x="11430000" y="6510528"/>
+            <a:ext cx="800000" cy="300000"/>
+          </a:xfrm>
+          <a:prstGeom prst="rect">
+            <a:avLst/>
+          </a:prstGeom>
+          <a:extLst>
+            <a:ext uri="{C572A759-6A51-4108-AA02-DFA0A04FC94B}">
+              <ma14:wrappingTextBoxFlag xmlns:ma14="http://schemas.microsoft.com/office/mac/drawingml/2011/main" val="0"/>
+            </a:ext>
+          </a:extLst>
+        </p:spPr>
+        <p:txBody>
+          <a:bodyPr/>
+          <a:lstStyle>
+            <a:lvl1pPr>
+              <a:defRPr sz="1000">
+                <a:solidFill>
+                  <a:schemeClr val="accent4"/>
+                </a:solidFill>
+                <a:latin typeface="Calibri"/>
+                <a:ea typeface="Calibri"/>
+                <a:cs typeface="Calibri"/>
+              </a:defRPr>
+            </a:lvl1pPr>
+          </a:lstStyle>
+          <a:p>
+            <a:pPr algn="l"/>
+            <a:fld id="{F7021451-1387-4CA6-816F-3879F97B5CBC}" type="slidenum">
+              <a:rPr b="0" lang="en-US"/>
+              <a:t>12</a:t>
+            </a:fld>
+            <a:endParaRPr lang="en-US"/>
+          </a:p>
+        </p:txBody>
+      </p:sp>
+    </p:spTree>
+  </p:cSld>
+  <p:clrMapOvr>
+    <a:masterClrMapping/>
+  </p:clrMapOvr>
+</p:sld>
+</file>
+
+<file path=ppt/slides/slide13.xml><?xml version="1.0" encoding="utf-8"?>
+<p:sld xmlns:a="http://schemas.openxmlformats.org/drawingml/2006/main" xmlns:r="http://schemas.openxmlformats.org/officeDocument/2006/relationships" xmlns:p="http://schemas.openxmlformats.org/presentationml/2006/main">
+  <p:cSld name="Slide 13">
+    <p:spTree>
+      <p:nvGrpSpPr>
+        <p:cNvPr id="1" name=""/>
+        <p:cNvGrpSpPr/>
+        <p:nvPr/>
+      </p:nvGrpSpPr>
+      <p:grpSpPr>
+        <a:xfrm>
+          <a:off x="0" y="0"/>
+          <a:ext cx="0" cy="0"/>
+          <a:chOff x="0" y="0"/>
+          <a:chExt cx="0" cy="0"/>
+        </a:xfrm>
+      </p:grpSpPr>
+      <p:sp>
+        <p:nvSpPr>
+          <p:cNvPr id="2" name="Text 0"/>
+          <p:cNvSpPr/>
+          <p:nvPr>
+            <p:ph idx="100" type="body" hasCustomPrompt="1"/>
+          </p:nvPr>
+        </p:nvSpPr>
+        <p:spPr>
+          <a:xfrm>
+            <a:off x="548640" y="384048"/>
+            <a:ext cx="9144000" cy="320040"/>
+          </a:xfrm>
+          <a:prstGeom prst="rect">
+            <a:avLst/>
+          </a:prstGeom>
+          <a:noFill/>
+          <a:ln/>
+        </p:spPr>
+        <p:txBody>
+          <a:bodyPr wrap="square" rtlCol="0"/>
+          <a:lstStyle/>
+          <a:p>
+            <a:pPr algn="l" indent="0" marL="0">
+              <a:buNone/>
+            </a:pPr>
+            <a:r>
+              <a:rPr lang="en-US" sz="1300" b="1" spc="200" kern="0" dirty="0">
+                <a:solidFill>
+                  <a:schemeClr val="accent2"/>
+                </a:solidFill>
+                <a:latin typeface="Calibri" pitchFamily="34" charset="0"/>
+                <a:ea typeface="Calibri" pitchFamily="34" charset="-122"/>
+                <a:cs typeface="Calibri" pitchFamily="34" charset="-120"/>
+              </a:rPr>
+              <a:t>THE FIX</a:t>
+            </a:r>
+            <a:endParaRPr lang="en-US" sz="1300" dirty="0"/>
+          </a:p>
+        </p:txBody>
+      </p:sp>
+      <p:sp>
+        <p:nvSpPr>
+          <p:cNvPr id="3" name="Text 0"/>
+          <p:cNvSpPr/>
+          <p:nvPr>
+            <p:ph idx="101" type="title" hasCustomPrompt="1"/>
+          </p:nvPr>
+        </p:nvSpPr>
+        <p:spPr>
+          <a:xfrm>
+            <a:off x="548640" y="713232"/>
+            <a:ext cx="11064240" cy="777240"/>
+          </a:xfrm>
+          <a:prstGeom prst="rect">
+            <a:avLst/>
+          </a:prstGeom>
+          <a:noFill/>
+          <a:ln/>
+        </p:spPr>
+        <p:txBody>
+          <a:bodyPr wrap="square" rtlCol="0"/>
+          <a:lstStyle/>
+          <a:p>
+            <a:pPr algn="l" indent="0" marL="0">
+              <a:buNone/>
+            </a:pPr>
+            <a:r>
+              <a:rPr lang="en-US" sz="3200" b="1" dirty="0">
+                <a:solidFill>
+                  <a:schemeClr val="tx1"/>
+                </a:solidFill>
+                <a:latin typeface="Cambria" pitchFamily="34" charset="0"/>
+                <a:ea typeface="Cambria" pitchFamily="34" charset="-122"/>
+                <a:cs typeface="Cambria" pitchFamily="34" charset="-120"/>
+              </a:rPr>
+              <a:t>Claim before you send</a:t>
+            </a:r>
+            <a:endParaRPr lang="en-US" sz="3200" dirty="0"/>
+          </a:p>
+        </p:txBody>
+      </p:sp>
+      <p:sp>
+        <p:nvSpPr>
+          <p:cNvPr id="4" name="Shape 2"/>
+          <p:cNvSpPr/>
+          <p:nvPr/>
+        </p:nvSpPr>
+        <p:spPr>
+          <a:xfrm>
+            <a:off x="548640" y="1691640"/>
+            <a:ext cx="2606040" cy="502920"/>
+          </a:xfrm>
+          <a:prstGeom prst="roundRect">
+            <a:avLst>
+              <a:gd name="adj" fmla="val 49091"/>
+            </a:avLst>
+          </a:prstGeom>
+          <a:solidFill>
+            <a:schemeClr val="bg2"/>
+          </a:solidFill>
+          <a:ln w="12700">
+            <a:solidFill>
+              <a:schemeClr val="accent5"/>
+            </a:solidFill>
+            <a:prstDash val="solid"/>
+          </a:ln>
+        </p:spPr>
+      </p:sp>
+      <p:sp>
+        <p:nvSpPr>
+          <p:cNvPr id="5" name="Text 3"/>
+          <p:cNvSpPr txBox="1"/>
+          <p:nvPr/>
+        </p:nvSpPr>
+        <p:spPr>
+          <a:xfrm>
+            <a:off x="548640" y="1691640"/>
+            <a:ext cx="2606040" cy="502920"/>
+          </a:xfrm>
+          <a:prstGeom prst="rect">
+            <a:avLst/>
+          </a:prstGeom>
+          <a:noFill/>
+          <a:ln/>
+        </p:spPr>
+        <p:txBody>
+          <a:bodyPr wrap="square" lIns="0" tIns="0" rIns="0" bIns="0" rtlCol="0" anchor="ctr"/>
+          <a:lstStyle/>
+          <a:p>
+            <a:pPr algn="ctr" indent="0" marL="0">
+              <a:buNone/>
+            </a:pPr>
+            <a:r>
+              <a:rPr lang="en-US" sz="1250" b="1" dirty="0">
+                <a:solidFill>
+                  <a:schemeClr val="tx1"/>
+                </a:solidFill>
+                <a:latin typeface="Calibri" pitchFamily="34" charset="0"/>
+                <a:ea typeface="Calibri" pitchFamily="34" charset="-122"/>
+                <a:cs typeface="Calibri" pitchFamily="34" charset="-120"/>
+              </a:rPr>
+              <a:t>1. Look up</a:t>
+            </a:r>
+            <a:endParaRPr lang="en-US" sz="1250" dirty="0"/>
+          </a:p>
+        </p:txBody>
+      </p:sp>
+      <p:sp>
+        <p:nvSpPr>
+          <p:cNvPr id="6" name="Shape 4"/>
+          <p:cNvSpPr/>
+          <p:nvPr/>
+        </p:nvSpPr>
+        <p:spPr>
+          <a:xfrm>
+            <a:off x="3163824" y="1810512"/>
+            <a:ext cx="146304" cy="274320"/>
+          </a:xfrm>
+          <a:prstGeom prst="rightArrow">
+            <a:avLst/>
+          </a:prstGeom>
+          <a:solidFill>
+            <a:schemeClr val="accent4"/>
+          </a:solidFill>
+          <a:ln/>
+        </p:spPr>
+      </p:sp>
+      <p:sp>
+        <p:nvSpPr>
+          <p:cNvPr id="7" name="Shape 5"/>
+          <p:cNvSpPr/>
+          <p:nvPr/>
+        </p:nvSpPr>
+        <p:spPr>
+          <a:xfrm>
+            <a:off x="3319272" y="1691640"/>
+            <a:ext cx="2606040" cy="502920"/>
+          </a:xfrm>
+          <a:prstGeom prst="roundRect">
+            <a:avLst>
+              <a:gd name="adj" fmla="val 49091"/>
+            </a:avLst>
+          </a:prstGeom>
+          <a:solidFill>
+            <a:schemeClr val="accent1"/>
+          </a:solidFill>
+          <a:ln w="12700">
+            <a:solidFill>
+              <a:schemeClr val="accent5"/>
+            </a:solidFill>
+            <a:prstDash val="solid"/>
+          </a:ln>
+        </p:spPr>
+      </p:sp>
+      <p:sp>
+        <p:nvSpPr>
+          <p:cNvPr id="8" name="Text 6"/>
+          <p:cNvSpPr txBox="1"/>
+          <p:nvPr/>
+        </p:nvSpPr>
+        <p:spPr>
+          <a:xfrm>
+            <a:off x="3319272" y="1691640"/>
+            <a:ext cx="2606040" cy="502920"/>
+          </a:xfrm>
+          <a:prstGeom prst="rect">
+            <a:avLst/>
+          </a:prstGeom>
+          <a:noFill/>
+          <a:ln/>
+        </p:spPr>
+        <p:txBody>
+          <a:bodyPr wrap="square" lIns="0" tIns="0" rIns="0" bIns="0" rtlCol="0" anchor="ctr"/>
+          <a:lstStyle/>
+          <a:p>
+            <a:pPr algn="ctr" indent="0" marL="0">
+              <a:buNone/>
+            </a:pPr>
+            <a:r>
+              <a:rPr lang="en-US" sz="1250" b="1" dirty="0">
+                <a:solidFill>
+                  <a:srgbClr val="FFFFFF"/>
+                </a:solidFill>
+                <a:latin typeface="Calibri" pitchFamily="34" charset="0"/>
+                <a:ea typeface="Calibri" pitchFamily="34" charset="-122"/>
+                <a:cs typeface="Calibri" pitchFamily="34" charset="-120"/>
+              </a:rPr>
+              <a:t>2. Claim (pending)</a:t>
+            </a:r>
+            <a:endParaRPr lang="en-US" sz="1250" dirty="0"/>
+          </a:p>
+        </p:txBody>
+      </p:sp>
+      <p:sp>
+        <p:nvSpPr>
+          <p:cNvPr id="9" name="Shape 7"/>
+          <p:cNvSpPr/>
+          <p:nvPr/>
+        </p:nvSpPr>
+        <p:spPr>
+          <a:xfrm>
+            <a:off x="5934456" y="1810512"/>
+            <a:ext cx="146304" cy="274320"/>
+          </a:xfrm>
+          <a:prstGeom prst="rightArrow">
+            <a:avLst/>
+          </a:prstGeom>
+          <a:solidFill>
+            <a:schemeClr val="accent4"/>
+          </a:solidFill>
+          <a:ln/>
+        </p:spPr>
+      </p:sp>
+      <p:sp>
+        <p:nvSpPr>
+          <p:cNvPr id="10" name="Shape 8"/>
+          <p:cNvSpPr/>
+          <p:nvPr/>
+        </p:nvSpPr>
+        <p:spPr>
+          <a:xfrm>
+            <a:off x="6089904" y="1691640"/>
+            <a:ext cx="2606040" cy="502920"/>
+          </a:xfrm>
+          <a:prstGeom prst="roundRect">
+            <a:avLst>
+              <a:gd name="adj" fmla="val 49091"/>
+            </a:avLst>
+          </a:prstGeom>
+          <a:solidFill>
+            <a:schemeClr val="bg2"/>
+          </a:solidFill>
+          <a:ln w="12700">
+            <a:solidFill>
+              <a:schemeClr val="accent5"/>
+            </a:solidFill>
+            <a:prstDash val="solid"/>
+          </a:ln>
+        </p:spPr>
+      </p:sp>
+      <p:sp>
+        <p:nvSpPr>
+          <p:cNvPr id="11" name="Text 9"/>
+          <p:cNvSpPr txBox="1"/>
+          <p:nvPr/>
+        </p:nvSpPr>
+        <p:spPr>
+          <a:xfrm>
+            <a:off x="6089904" y="1691640"/>
+            <a:ext cx="2606040" cy="502920"/>
+          </a:xfrm>
+          <a:prstGeom prst="rect">
+            <a:avLst/>
+          </a:prstGeom>
+          <a:noFill/>
+          <a:ln/>
+        </p:spPr>
+        <p:txBody>
+          <a:bodyPr wrap="square" lIns="0" tIns="0" rIns="0" bIns="0" rtlCol="0" anchor="ctr"/>
+          <a:lstStyle/>
+          <a:p>
+            <a:pPr algn="ctr" indent="0" marL="0">
+              <a:buNone/>
+            </a:pPr>
+            <a:r>
+              <a:rPr lang="en-US" sz="1250" b="1" dirty="0">
+                <a:solidFill>
+                  <a:schemeClr val="tx1"/>
+                </a:solidFill>
+                <a:latin typeface="Calibri" pitchFamily="34" charset="0"/>
+                <a:ea typeface="Calibri" pitchFamily="34" charset="-122"/>
+                <a:cs typeface="Calibri" pitchFamily="34" charset="-120"/>
+              </a:rPr>
+              <a:t>3. Send</a:t>
+            </a:r>
+            <a:endParaRPr lang="en-US" sz="1250" dirty="0"/>
+          </a:p>
+        </p:txBody>
+      </p:sp>
+      <p:sp>
+        <p:nvSpPr>
+          <p:cNvPr id="12" name="Shape 10"/>
+          <p:cNvSpPr/>
+          <p:nvPr/>
+        </p:nvSpPr>
+        <p:spPr>
+          <a:xfrm>
+            <a:off x="8705088" y="1810512"/>
+            <a:ext cx="146304" cy="274320"/>
+          </a:xfrm>
+          <a:prstGeom prst="rightArrow">
+            <a:avLst/>
+          </a:prstGeom>
+          <a:solidFill>
+            <a:schemeClr val="accent4"/>
+          </a:solidFill>
+          <a:ln/>
+        </p:spPr>
+      </p:sp>
+      <p:sp>
+        <p:nvSpPr>
+          <p:cNvPr id="13" name="Shape 11"/>
+          <p:cNvSpPr/>
+          <p:nvPr/>
+        </p:nvSpPr>
+        <p:spPr>
+          <a:xfrm>
+            <a:off x="8860536" y="1691640"/>
+            <a:ext cx="2606040" cy="502920"/>
+          </a:xfrm>
+          <a:prstGeom prst="roundRect">
+            <a:avLst>
+              <a:gd name="adj" fmla="val 49091"/>
+            </a:avLst>
+          </a:prstGeom>
+          <a:solidFill>
+            <a:schemeClr val="bg2"/>
+          </a:solidFill>
+          <a:ln w="12700">
+            <a:solidFill>
+              <a:schemeClr val="accent5"/>
+            </a:solidFill>
+            <a:prstDash val="solid"/>
+          </a:ln>
+        </p:spPr>
+      </p:sp>
+      <p:sp>
+        <p:nvSpPr>
+          <p:cNvPr id="14" name="Text 12"/>
+          <p:cNvSpPr txBox="1"/>
+          <p:nvPr/>
+        </p:nvSpPr>
+        <p:spPr>
+          <a:xfrm>
+            <a:off x="8860536" y="1691640"/>
+            <a:ext cx="2606040" cy="502920"/>
+          </a:xfrm>
+          <a:prstGeom prst="rect">
+            <a:avLst/>
+          </a:prstGeom>
+          <a:noFill/>
+          <a:ln/>
+        </p:spPr>
+        <p:txBody>
+          <a:bodyPr wrap="square" lIns="0" tIns="0" rIns="0" bIns="0" rtlCol="0" anchor="ctr"/>
+          <a:lstStyle/>
+          <a:p>
+            <a:pPr algn="ctr" indent="0" marL="0">
+              <a:buNone/>
+            </a:pPr>
+            <a:r>
+              <a:rPr lang="en-US" sz="1250" b="1" dirty="0">
+                <a:solidFill>
+                  <a:schemeClr val="tx1"/>
+                </a:solidFill>
+                <a:latin typeface="Calibri" pitchFamily="34" charset="0"/>
+                <a:ea typeface="Calibri" pitchFamily="34" charset="-122"/>
+                <a:cs typeface="Calibri" pitchFamily="34" charset="-120"/>
+              </a:rPr>
+              <a:t>4. Resolve (sent/failed)</a:t>
+            </a:r>
+            <a:endParaRPr lang="en-US" sz="1250" dirty="0"/>
+          </a:p>
+        </p:txBody>
+      </p:sp>
+      <p:sp>
+        <p:nvSpPr>
+          <p:cNvPr id="15" name="Shape 13"/>
+          <p:cNvSpPr/>
+          <p:nvPr/>
+        </p:nvSpPr>
+        <p:spPr>
+          <a:xfrm>
+            <a:off x="548640" y="2468880"/>
+            <a:ext cx="5760720" cy="3566160"/>
+          </a:xfrm>
+          <a:prstGeom prst="roundRect">
+            <a:avLst>
+              <a:gd name="adj" fmla="val 1795"/>
+            </a:avLst>
+          </a:prstGeom>
+          <a:solidFill>
+            <a:schemeClr val="tx2"/>
+          </a:solidFill>
+          <a:ln/>
+        </p:spPr>
+      </p:sp>
+      <p:sp>
+        <p:nvSpPr>
+          <p:cNvPr id="16" name="Text 14"/>
+          <p:cNvSpPr txBox="1"/>
+          <p:nvPr/>
+        </p:nvSpPr>
+        <p:spPr>
+          <a:xfrm>
+            <a:off x="822960" y="2697480"/>
+            <a:ext cx="5212080" cy="3108960"/>
+          </a:xfrm>
+          <a:prstGeom prst="rect">
+            <a:avLst/>
+          </a:prstGeom>
+          <a:noFill/>
+          <a:ln/>
+        </p:spPr>
+        <p:txBody>
+          <a:bodyPr wrap="square" lIns="0" tIns="0" rIns="0" bIns="0" rtlCol="0" anchor="t"/>
+          <a:lstStyle/>
+          <a:p>
+            <a:pPr algn="l" indent="0" marL="0">
+              <a:lnSpc>
+                <a:spcPct val="125000"/>
+              </a:lnSpc>
+              <a:buNone/>
+            </a:pPr>
+            <a:r>
+              <a:rPr lang="en-US" sz="1300" dirty="0">
+                <a:solidFill>
+                  <a:srgbClr val="7DD3C0"/>
+                </a:solidFill>
+                <a:latin typeface="Courier New" pitchFamily="34" charset="0"/>
+                <a:ea typeface="Courier New" pitchFamily="34" charset="-122"/>
+                <a:cs typeface="Courier New" pitchFamily="34" charset="-120"/>
+              </a:rPr>
+              <a:t>// lookup.js: is this key eligible to send?</a:t>
+            </a:r>
+            <a:endParaRPr lang="en-US" sz="1300" dirty="0"/>
+          </a:p>
+          <a:p>
+            <a:pPr algn="l" indent="0" marL="0">
+              <a:lnSpc>
+                <a:spcPct val="125000"/>
+              </a:lnSpc>
+              <a:buNone/>
+            </a:pPr>
+            <a:r>
+              <a:rPr lang="en-US" sz="1300" dirty="0">
+                <a:solidFill>
+                  <a:srgbClr val="E5E9F0"/>
+                </a:solidFill>
+                <a:latin typeface="Courier New" pitchFamily="34" charset="0"/>
+                <a:ea typeface="Courier New" pitchFamily="34" charset="-122"/>
+                <a:cs typeface="Courier New" pitchFamily="34" charset="-120"/>
+              </a:rPr>
+              <a:t>if (!rec) eligible = true;</a:t>
+            </a:r>
+            <a:endParaRPr lang="en-US" sz="1300" dirty="0"/>
+          </a:p>
+          <a:p>
+            <a:pPr algn="l" indent="0" marL="0">
+              <a:lnSpc>
+                <a:spcPct val="125000"/>
+              </a:lnSpc>
+              <a:buNone/>
+            </a:pPr>
+            <a:r>
+              <a:rPr lang="en-US" sz="1300" dirty="0">
+                <a:solidFill>
+                  <a:srgbClr val="E5E9F0"/>
+                </a:solidFill>
+                <a:latin typeface="Courier New" pitchFamily="34" charset="0"/>
+                <a:ea typeface="Courier New" pitchFamily="34" charset="-122"/>
+                <a:cs typeface="Courier New" pitchFamily="34" charset="-120"/>
+              </a:rPr>
+              <a:t>else if (rec.status === 'pending') eligible = false;</a:t>
+            </a:r>
+            <a:endParaRPr lang="en-US" sz="1300" dirty="0"/>
+          </a:p>
+          <a:p>
+            <a:pPr algn="l" indent="0" marL="0">
+              <a:lnSpc>
+                <a:spcPct val="125000"/>
+              </a:lnSpc>
+              <a:buNone/>
+            </a:pPr>
+            <a:r>
+              <a:rPr lang="en-US" sz="1300" dirty="0">
+                <a:solidFill>
+                  <a:srgbClr val="E5E9F0"/>
+                </a:solidFill>
+                <a:latin typeface="Courier New" pitchFamily="34" charset="0"/>
+                <a:ea typeface="Courier New" pitchFamily="34" charset="-122"/>
+                <a:cs typeface="Courier New" pitchFamily="34" charset="-120"/>
+              </a:rPr>
+              <a:t>else if (rec.status === 'failed') eligible = true;</a:t>
+            </a:r>
+            <a:endParaRPr lang="en-US" sz="1300" dirty="0"/>
+          </a:p>
+          <a:p>
+            <a:pPr algn="l" indent="0" marL="0">
+              <a:lnSpc>
+                <a:spcPct val="125000"/>
+              </a:lnSpc>
+              <a:buNone/>
+            </a:pPr>
+            <a:r>
+              <a:rPr lang="en-US" sz="1300" dirty="0">
+                <a:solidFill>
+                  <a:srgbClr val="E5E9F0"/>
+                </a:solidFill>
+                <a:latin typeface="Courier New" pitchFamily="34" charset="0"/>
+                <a:ea typeface="Courier New" pitchFamily="34" charset="-122"/>
+                <a:cs typeface="Courier New" pitchFamily="34" charset="-120"/>
+              </a:rPr>
+              <a:t>else if (rec.incident_state !== j.stateValue)</a:t>
+            </a:r>
+            <a:endParaRPr lang="en-US" sz="1300" dirty="0"/>
+          </a:p>
+          <a:p>
+            <a:pPr algn="l" indent="0" marL="0">
+              <a:lnSpc>
+                <a:spcPct val="125000"/>
+              </a:lnSpc>
+              <a:buNone/>
+            </a:pPr>
+            <a:r>
+              <a:rPr lang="en-US" sz="1300" dirty="0">
+                <a:solidFill>
+                  <a:srgbClr val="E5E9F0"/>
+                </a:solidFill>
+                <a:latin typeface="Courier New" pitchFamily="34" charset="0"/>
+                <a:ea typeface="Courier New" pitchFamily="34" charset="-122"/>
+                <a:cs typeface="Courier New" pitchFamily="34" charset="-120"/>
+              </a:rPr>
+              <a:t>  eligible = true;              // e.g. reopened</a:t>
+            </a:r>
+            <a:endParaRPr lang="en-US" sz="1300" dirty="0"/>
+          </a:p>
+          <a:p>
+            <a:pPr algn="l" indent="0" marL="0">
+              <a:lnSpc>
+                <a:spcPct val="125000"/>
+              </a:lnSpc>
+              <a:buNone/>
+            </a:pPr>
+            <a:r>
+              <a:rPr lang="en-US" sz="1300" dirty="0">
+                <a:solidFill>
+                  <a:srgbClr val="E5E9F0"/>
+                </a:solidFill>
+                <a:latin typeface="Courier New" pitchFamily="34" charset="0"/>
+                <a:ea typeface="Courier New" pitchFamily="34" charset="-122"/>
+                <a:cs typeface="Courier New" pitchFamily="34" charset="-120"/>
+              </a:rPr>
+              <a:t>else if (rec.status === 'sent' &amp;&amp;</a:t>
+            </a:r>
+            <a:endParaRPr lang="en-US" sz="1300" dirty="0"/>
+          </a:p>
+          <a:p>
+            <a:pPr algn="l" indent="0" marL="0">
+              <a:lnSpc>
+                <a:spcPct val="125000"/>
+              </a:lnSpc>
+              <a:buNone/>
+            </a:pPr>
+            <a:r>
+              <a:rPr lang="en-US" sz="1300" dirty="0">
+                <a:solidFill>
+                  <a:srgbClr val="E5E9F0"/>
+                </a:solidFill>
+                <a:latin typeface="Courier New" pitchFamily="34" charset="0"/>
+                <a:ea typeface="Courier New" pitchFamily="34" charset="-122"/>
+                <a:cs typeface="Courier New" pitchFamily="34" charset="-120"/>
+              </a:rPr>
+              <a:t>    now - rec.last_notified_at &gt;= intervalMs) {</a:t>
+            </a:r>
+            <a:endParaRPr lang="en-US" sz="1300" dirty="0"/>
+          </a:p>
+          <a:p>
+            <a:pPr algn="l" indent="0" marL="0">
+              <a:lnSpc>
+                <a:spcPct val="125000"/>
+              </a:lnSpc>
+              <a:buNone/>
+            </a:pPr>
+            <a:r>
+              <a:rPr lang="en-US" sz="1300" dirty="0">
+                <a:solidFill>
+                  <a:srgbClr val="E5E9F0"/>
+                </a:solidFill>
+                <a:latin typeface="Courier New" pitchFamily="34" charset="0"/>
+                <a:ea typeface="Courier New" pitchFamily="34" charset="-122"/>
+                <a:cs typeface="Courier New" pitchFamily="34" charset="-120"/>
+              </a:rPr>
+              <a:t>  eligible = true; isReminder = true;</a:t>
+            </a:r>
+            <a:endParaRPr lang="en-US" sz="1300" dirty="0"/>
+          </a:p>
+          <a:p>
+            <a:pPr algn="l" indent="0" marL="0">
+              <a:lnSpc>
+                <a:spcPct val="125000"/>
+              </a:lnSpc>
+              <a:buNone/>
+            </a:pPr>
+            <a:r>
+              <a:rPr lang="en-US" sz="1300" dirty="0">
+                <a:solidFill>
+                  <a:srgbClr val="E5E9F0"/>
+                </a:solidFill>
+                <a:latin typeface="Courier New" pitchFamily="34" charset="0"/>
+                <a:ea typeface="Courier New" pitchFamily="34" charset="-122"/>
+                <a:cs typeface="Courier New" pitchFamily="34" charset="-120"/>
+              </a:rPr>
+              <a:t>}</a:t>
+            </a:r>
+            <a:endParaRPr lang="en-US" sz="1300" dirty="0"/>
+          </a:p>
+        </p:txBody>
+      </p:sp>
+      <p:sp>
+        <p:nvSpPr>
+          <p:cNvPr id="17" name="Shape 15"/>
+          <p:cNvSpPr/>
+          <p:nvPr/>
+        </p:nvSpPr>
+        <p:spPr>
+          <a:xfrm>
+            <a:off x="6309360" y="2468880"/>
+            <a:ext cx="5303520" cy="1600200"/>
+          </a:xfrm>
+          <a:prstGeom prst="roundRect">
+            <a:avLst>
+              <a:gd name="adj" fmla="val 4571"/>
+            </a:avLst>
+          </a:prstGeom>
+          <a:solidFill>
+            <a:schemeClr val="bg1"/>
+          </a:solidFill>
+          <a:ln w="12700">
+            <a:solidFill>
+              <a:schemeClr val="accent5"/>
+            </a:solidFill>
+            <a:prstDash val="solid"/>
+          </a:ln>
+          <a:effectLst>
+            <a:outerShdw sx="100000" sy="100000" kx="0" ky="0" algn="bl" rotWithShape="0" blurRad="127000" dist="38100" dir="5400000">
+              <a:srgbClr val="1A1F2B">
+                <a:alpha val="18000"/>
+              </a:srgbClr>
+            </a:outerShdw>
+          </a:effectLst>
+        </p:spPr>
+      </p:sp>
+      <p:sp>
+        <p:nvSpPr>
+          <p:cNvPr id="18" name="Text 16"/>
+          <p:cNvSpPr txBox="1"/>
+          <p:nvPr/>
+        </p:nvSpPr>
+        <p:spPr>
+          <a:xfrm>
+            <a:off x="6537960" y="2615184"/>
+            <a:ext cx="4846320" cy="320040"/>
+          </a:xfrm>
+          <a:prstGeom prst="rect">
+            <a:avLst/>
+          </a:prstGeom>
+          <a:noFill/>
+          <a:ln/>
+        </p:spPr>
+        <p:txBody>
+          <a:bodyPr wrap="square" lIns="0" tIns="0" rIns="0" bIns="0" rtlCol="0" anchor="ctr"/>
+          <a:lstStyle/>
+          <a:p>
+            <a:pPr algn="l" indent="0" marL="0">
+              <a:buNone/>
+            </a:pPr>
+            <a:r>
+              <a:rPr lang="en-US" sz="1300" b="1" dirty="0">
+                <a:solidFill>
+                  <a:schemeClr val="tx1"/>
+                </a:solidFill>
+                <a:latin typeface="Calibri" pitchFamily="34" charset="0"/>
+                <a:ea typeface="Calibri" pitchFamily="34" charset="-122"/>
+                <a:cs typeface="Calibri" pitchFamily="34" charset="-120"/>
+              </a:rPr>
+              <a:t>claim.js: written before the send</a:t>
+            </a:r>
+            <a:endParaRPr lang="en-US" sz="1300" dirty="0"/>
+          </a:p>
+        </p:txBody>
+      </p:sp>
+      <p:sp>
+        <p:nvSpPr>
+          <p:cNvPr id="19" name="Text 17"/>
+          <p:cNvSpPr txBox="1"/>
+          <p:nvPr/>
+        </p:nvSpPr>
+        <p:spPr>
+          <a:xfrm>
+            <a:off x="6537960" y="2926080"/>
+            <a:ext cx="4846320" cy="457200"/>
+          </a:xfrm>
+          <a:prstGeom prst="rect">
+            <a:avLst/>
+          </a:prstGeom>
+          <a:noFill/>
+          <a:ln/>
+        </p:spPr>
+        <p:txBody>
+          <a:bodyPr wrap="square" lIns="0" tIns="0" rIns="0" bIns="0" rtlCol="0" anchor="ctr"/>
+          <a:lstStyle/>
+          <a:p>
+            <a:pPr algn="l" indent="0" marL="0">
+              <a:buNone/>
+            </a:pPr>
+            <a:r>
+              <a:rPr lang="en-US" sz="1200" dirty="0">
+                <a:solidFill>
+                  <a:schemeClr val="accent2"/>
+                </a:solidFill>
+                <a:latin typeface="Courier New" pitchFamily="34" charset="0"/>
+                <a:ea typeface="Courier New" pitchFamily="34" charset="-122"/>
+                <a:cs typeface="Courier New" pitchFamily="34" charset="-120"/>
+              </a:rPr>
+              <a:t>sd.alerts[key] = { status: 'pending', claimed_at: now, incident_state }</a:t>
+            </a:r>
+            <a:endParaRPr lang="en-US" sz="1200" dirty="0"/>
+          </a:p>
+        </p:txBody>
+      </p:sp>
+      <p:sp>
+        <p:nvSpPr>
+          <p:cNvPr id="20" name="Text 18"/>
+          <p:cNvSpPr txBox="1"/>
+          <p:nvPr/>
+        </p:nvSpPr>
+        <p:spPr>
+          <a:xfrm>
+            <a:off x="6537960" y="3429000"/>
+            <a:ext cx="4846320" cy="548640"/>
+          </a:xfrm>
+          <a:prstGeom prst="rect">
+            <a:avLst/>
+          </a:prstGeom>
+          <a:noFill/>
+          <a:ln/>
+        </p:spPr>
+        <p:txBody>
+          <a:bodyPr wrap="square" lIns="0" tIns="0" rIns="0" bIns="0" rtlCol="0" anchor="ctr"/>
+          <a:lstStyle/>
+          <a:p>
+            <a:pPr algn="l" indent="0" marL="0">
+              <a:lnSpc>
+                <a:spcPct val="125000"/>
+              </a:lnSpc>
+              <a:buNone/>
+            </a:pPr>
+            <a:r>
+              <a:rPr lang="en-US" sz="1200" dirty="0">
+                <a:solidFill>
+                  <a:schemeClr val="accent6"/>
+                </a:solidFill>
+                <a:latin typeface="Calibri" pitchFamily="34" charset="0"/>
+                <a:ea typeface="Calibri" pitchFamily="34" charset="-122"/>
+                <a:cs typeface="Calibri" pitchFamily="34" charset="-120"/>
+              </a:rPr>
+              <a:t>This record is what survives a crash. The next run finds it, not silence.</a:t>
+            </a:r>
+            <a:endParaRPr lang="en-US" sz="1200" dirty="0"/>
+          </a:p>
+        </p:txBody>
+      </p:sp>
+      <p:sp>
+        <p:nvSpPr>
+          <p:cNvPr id="21" name="Shape 19"/>
+          <p:cNvSpPr/>
+          <p:nvPr/>
+        </p:nvSpPr>
+        <p:spPr>
+          <a:xfrm>
+            <a:off x="6309360" y="4343400"/>
+            <a:ext cx="5303520" cy="1691640"/>
+          </a:xfrm>
+          <a:prstGeom prst="roundRect">
+            <a:avLst>
+              <a:gd name="adj" fmla="val 4324"/>
+            </a:avLst>
+          </a:prstGeom>
+          <a:solidFill>
+            <a:schemeClr val="bg1"/>
+          </a:solidFill>
+          <a:ln w="12700">
+            <a:solidFill>
+              <a:schemeClr val="accent5"/>
+            </a:solidFill>
+            <a:prstDash val="solid"/>
+          </a:ln>
+          <a:effectLst>
+            <a:outerShdw sx="100000" sy="100000" kx="0" ky="0" algn="bl" rotWithShape="0" blurRad="127000" dist="38100" dir="5400000">
+              <a:srgbClr val="1A1F2B">
+                <a:alpha val="18000"/>
+              </a:srgbClr>
+            </a:outerShdw>
+          </a:effectLst>
+        </p:spPr>
+      </p:sp>
+      <p:sp>
+        <p:nvSpPr>
+          <p:cNvPr id="22" name="Text 20"/>
+          <p:cNvSpPr txBox="1"/>
+          <p:nvPr/>
+        </p:nvSpPr>
+        <p:spPr>
+          <a:xfrm>
+            <a:off x="6537960" y="4507992"/>
+            <a:ext cx="4846320" cy="320040"/>
+          </a:xfrm>
+          <a:prstGeom prst="rect">
+            <a:avLst/>
+          </a:prstGeom>
+          <a:noFill/>
+          <a:ln/>
+        </p:spPr>
+        <p:txBody>
+          <a:bodyPr wrap="square" lIns="0" tIns="0" rIns="0" bIns="0" rtlCol="0" anchor="ctr"/>
+          <a:lstStyle/>
+          <a:p>
+            <a:pPr algn="l" indent="0" marL="0">
+              <a:buNone/>
+            </a:pPr>
+            <a:r>
+              <a:rPr lang="en-US" sz="1300" b="1" dirty="0">
+                <a:solidFill>
+                  <a:schemeClr val="tx1"/>
+                </a:solidFill>
+                <a:latin typeface="Calibri" pitchFamily="34" charset="0"/>
+                <a:ea typeface="Calibri" pitchFamily="34" charset="-122"/>
+                <a:cs typeface="Calibri" pitchFamily="34" charset="-120"/>
+              </a:rPr>
+              <a:t>Self-healing safeguards</a:t>
+            </a:r>
+            <a:endParaRPr lang="en-US" sz="1300" dirty="0"/>
+          </a:p>
+        </p:txBody>
+      </p:sp>
+      <p:sp>
+        <p:nvSpPr>
+          <p:cNvPr id="23" name="Text 21"/>
+          <p:cNvSpPr txBox="1"/>
+          <p:nvPr/>
+        </p:nvSpPr>
+        <p:spPr>
+          <a:xfrm>
+            <a:off x="6537960" y="4846320"/>
+            <a:ext cx="4846320" cy="1097280"/>
+          </a:xfrm>
+          <a:prstGeom prst="rect">
+            <a:avLst/>
+          </a:prstGeom>
+          <a:noFill/>
+          <a:ln/>
+        </p:spPr>
+        <p:txBody>
+          <a:bodyPr wrap="square" lIns="0" tIns="0" rIns="0" bIns="0" rtlCol="0" anchor="ctr"/>
+          <a:lstStyle/>
+          <a:p>
+            <a:pPr algn="l" marL="342900" indent="-342900">
+              <a:lnSpc>
+                <a:spcPct val="130000"/>
+              </a:lnSpc>
+              <a:buSzPct val="100000"/>
+              <a:buChar char="•"/>
+            </a:pPr>
+            <a:r>
+              <a:rPr lang="en-US" sz="1200" b="1" dirty="0">
+                <a:solidFill>
+                  <a:schemeClr val="accent6"/>
+                </a:solidFill>
+                <a:latin typeface="Calibri" pitchFamily="34" charset="0"/>
+                <a:ea typeface="Calibri" pitchFamily="34" charset="-122"/>
+                <a:cs typeface="Calibri" pitchFamily="34" charset="-120"/>
+              </a:rPr>
+              <a:t>Stale-claim recovery</a:t>
+            </a:r>
+            <a:pPr algn="l" indent="0" marL="0">
+              <a:lnSpc>
+                <a:spcPct val="130000"/>
+              </a:lnSpc>
+              <a:buNone/>
+            </a:pPr>
+            <a:r>
+              <a:rPr lang="en-US" sz="1200" dirty="0">
+                <a:solidFill>
+                  <a:schemeClr val="accent6"/>
+                </a:solidFill>
+                <a:latin typeface="Calibri" pitchFamily="34" charset="0"/>
+                <a:ea typeface="Calibri" pitchFamily="34" charset="-122"/>
+                <a:cs typeface="Calibri" pitchFamily="34" charset="-120"/>
+              </a:rPr>
+              <a:t>: a “pending” older than 10 min is reset to retryable.</a:t>
+            </a:r>
+            <a:endParaRPr lang="en-US" sz="1200" dirty="0"/>
+          </a:p>
+          <a:p>
+            <a:pPr algn="l" marL="342900" indent="-342900">
+              <a:lnSpc>
+                <a:spcPct val="130000"/>
+              </a:lnSpc>
+              <a:buSzPct val="100000"/>
+              <a:buChar char="•"/>
+            </a:pPr>
+            <a:r>
+              <a:rPr lang="en-US" sz="1200" b="1" dirty="0">
+                <a:solidFill>
+                  <a:schemeClr val="accent6"/>
+                </a:solidFill>
+                <a:latin typeface="Calibri" pitchFamily="34" charset="0"/>
+                <a:ea typeface="Calibri" pitchFamily="34" charset="-122"/>
+                <a:cs typeface="Calibri" pitchFamily="34" charset="-120"/>
+              </a:rPr>
+              <a:t>Run lock</a:t>
+            </a:r>
+            <a:pPr algn="l" indent="0" marL="0">
+              <a:lnSpc>
+                <a:spcPct val="130000"/>
+              </a:lnSpc>
+              <a:buNone/>
+            </a:pPr>
+            <a:r>
+              <a:rPr lang="en-US" sz="1200" dirty="0">
+                <a:solidFill>
+                  <a:schemeClr val="accent6"/>
+                </a:solidFill>
+                <a:latin typeface="Calibri" pitchFamily="34" charset="0"/>
+                <a:ea typeface="Calibri" pitchFamily="34" charset="-122"/>
+                <a:cs typeface="Calibri" pitchFamily="34" charset="-120"/>
+              </a:rPr>
+              <a:t>: a TTL lock stops two runs from racing to claim the same key.</a:t>
+            </a:r>
+            <a:endParaRPr lang="en-US" sz="1200" dirty="0"/>
+          </a:p>
+        </p:txBody>
+      </p:sp>
+      <p:sp>
+        <p:nvSpPr>
+          <p:cNvPr id="24" name="Text 22"/>
+          <p:cNvSpPr txBox="1"/>
+          <p:nvPr/>
+        </p:nvSpPr>
+        <p:spPr>
+          <a:xfrm>
+            <a:off x="548640" y="6080760"/>
+            <a:ext cx="11064240" cy="411480"/>
+          </a:xfrm>
+          <a:prstGeom prst="rect">
+            <a:avLst/>
+          </a:prstGeom>
+          <a:noFill/>
+          <a:ln/>
+        </p:spPr>
+        <p:txBody>
+          <a:bodyPr wrap="square" lIns="0" tIns="0" rIns="0" bIns="0" rtlCol="0" anchor="ctr"/>
+          <a:lstStyle/>
+          <a:p>
+            <a:pPr algn="l" indent="0" marL="0">
+              <a:lnSpc>
+                <a:spcPct val="120000"/>
+              </a:lnSpc>
+              <a:buNone/>
+            </a:pPr>
+            <a:r>
+              <a:rPr lang="en-US" sz="1150" i="1" dirty="0">
+                <a:solidFill>
+                  <a:schemeClr val="accent4"/>
+                </a:solidFill>
+                <a:latin typeface="Calibri" pitchFamily="34" charset="0"/>
+                <a:ea typeface="Calibri" pitchFamily="34" charset="-122"/>
+                <a:cs typeface="Calibri" pitchFamily="34" charset="-120"/>
+              </a:rPr>
+              <a:t>At-least-once delivery: a narrow-window duplicate is possible; a missed critical alert is not. Plain SMTP can't guarantee exactly-once. This is the right tradeoff.</a:t>
+            </a:r>
+            <a:endParaRPr lang="en-US" sz="1150" dirty="0"/>
+          </a:p>
+        </p:txBody>
+      </p:sp>
+      <p:sp>
+        <p:nvSpPr>
+          <p:cNvPr id="25" name="Slide Number Placeholder 0"/>
+          <p:cNvSpPr>
+            <a:spLocks noGrp="1"/>
+          </p:cNvSpPr>
+          <p:nvPr>
+            <p:ph type="sldNum" sz="quarter" idx="4294967295"/>
+          </p:nvPr>
+        </p:nvSpPr>
+        <p:spPr>
+          <a:xfrm>
+            <a:off x="11430000" y="6510528"/>
+            <a:ext cx="800000" cy="300000"/>
+          </a:xfrm>
+          <a:prstGeom prst="rect">
+            <a:avLst/>
+          </a:prstGeom>
+          <a:extLst>
+            <a:ext uri="{C572A759-6A51-4108-AA02-DFA0A04FC94B}">
+              <ma14:wrappingTextBoxFlag xmlns:ma14="http://schemas.microsoft.com/office/mac/drawingml/2011/main" val="0"/>
+            </a:ext>
+          </a:extLst>
+        </p:spPr>
+        <p:txBody>
+          <a:bodyPr/>
+          <a:lstStyle>
+            <a:lvl1pPr>
+              <a:defRPr sz="1000">
+                <a:solidFill>
+                  <a:schemeClr val="accent4"/>
+                </a:solidFill>
+                <a:latin typeface="Calibri"/>
+                <a:ea typeface="Calibri"/>
+                <a:cs typeface="Calibri"/>
+              </a:defRPr>
+            </a:lvl1pPr>
+          </a:lstStyle>
+          <a:p>
+            <a:pPr algn="l"/>
+            <a:fld id="{F7021451-1387-4CA6-816F-3879F97B5CBC}" type="slidenum">
+              <a:rPr b="0" lang="en-US"/>
+              <a:t>13</a:t>
+            </a:fld>
+            <a:endParaRPr lang="en-US"/>
+          </a:p>
+        </p:txBody>
+      </p:sp>
+    </p:spTree>
+  </p:cSld>
+  <p:clrMapOvr>
+    <a:masterClrMapping/>
+  </p:clrMapOvr>
+</p:sld>
+</file>
+
+<file path=ppt/slides/slide14.xml><?xml version="1.0" encoding="utf-8"?>
+<p:sld xmlns:a="http://schemas.openxmlformats.org/drawingml/2006/main" xmlns:r="http://schemas.openxmlformats.org/officeDocument/2006/relationships" xmlns:p="http://schemas.openxmlformats.org/presentationml/2006/main">
+  <p:cSld name="Slide 14">
+    <p:spTree>
+      <p:nvGrpSpPr>
+        <p:cNvPr id="1" name=""/>
+        <p:cNvGrpSpPr/>
+        <p:nvPr/>
+      </p:nvGrpSpPr>
+      <p:grpSpPr>
+        <a:xfrm>
+          <a:off x="0" y="0"/>
+          <a:ext cx="0" cy="0"/>
+          <a:chOff x="0" y="0"/>
+          <a:chExt cx="0" cy="0"/>
+        </a:xfrm>
+      </p:grpSpPr>
+      <p:sp>
+        <p:nvSpPr>
+          <p:cNvPr id="2" name="Text 0"/>
+          <p:cNvSpPr/>
+          <p:nvPr>
+            <p:ph idx="100" type="body" hasCustomPrompt="1"/>
+          </p:nvPr>
+        </p:nvSpPr>
+        <p:spPr>
+          <a:xfrm>
+            <a:off x="548640" y="384048"/>
+            <a:ext cx="9144000" cy="320040"/>
+          </a:xfrm>
+          <a:prstGeom prst="rect">
+            <a:avLst/>
+          </a:prstGeom>
+          <a:noFill/>
+          <a:ln/>
+        </p:spPr>
+        <p:txBody>
+          <a:bodyPr wrap="square" rtlCol="0"/>
+          <a:lstStyle/>
+          <a:p>
+            <a:pPr algn="l" indent="0" marL="0">
+              <a:buNone/>
+            </a:pPr>
+            <a:r>
+              <a:rPr lang="en-US" sz="1300" b="1" spc="200" kern="0" dirty="0">
+                <a:solidFill>
+                  <a:schemeClr val="accent2"/>
+                </a:solidFill>
+                <a:latin typeface="Calibri" pitchFamily="34" charset="0"/>
+                <a:ea typeface="Calibri" pitchFamily="34" charset="-122"/>
+                <a:cs typeface="Calibri" pitchFamily="34" charset="-120"/>
+              </a:rPr>
+              <a:t>REMINDER POLICY</a:t>
+            </a:r>
+            <a:endParaRPr lang="en-US" sz="1300" dirty="0"/>
+          </a:p>
+        </p:txBody>
+      </p:sp>
+      <p:sp>
+        <p:nvSpPr>
+          <p:cNvPr id="3" name="Text 0"/>
+          <p:cNvSpPr/>
+          <p:nvPr>
+            <p:ph idx="101" type="title" hasCustomPrompt="1"/>
+          </p:nvPr>
+        </p:nvSpPr>
+        <p:spPr>
+          <a:xfrm>
+            <a:off x="548640" y="713232"/>
+            <a:ext cx="11064240" cy="777240"/>
+          </a:xfrm>
+          <a:prstGeom prst="rect">
+            <a:avLst/>
+          </a:prstGeom>
+          <a:noFill/>
+          <a:ln/>
+        </p:spPr>
+        <p:txBody>
+          <a:bodyPr wrap="square" rtlCol="0"/>
+          <a:lstStyle/>
+          <a:p>
+            <a:pPr algn="l" indent="0" marL="0">
+              <a:buNone/>
+            </a:pPr>
+            <a:r>
+              <a:rPr lang="en-US" sz="3200" b="1" dirty="0">
+                <a:solidFill>
+                  <a:schemeClr val="tx1"/>
+                </a:solidFill>
+                <a:latin typeface="Cambria" pitchFamily="34" charset="0"/>
+                <a:ea typeface="Cambria" pitchFamily="34" charset="-122"/>
+                <a:cs typeface="Cambria" pitchFamily="34" charset="-120"/>
+              </a:rPr>
               <a:t>An active critical incident isn't ignored forever</a:t>
             </a:r>
             <a:endParaRPr lang="en-US" sz="3200" dirty="0"/>
@@ -4243,7 +5702,7 @@
       </p:sp>
       <p:graphicFrame>
         <p:nvGraphicFramePr>
-          <p:cNvPr id="12" name="Table 0"/>
+          <p:cNvPr id="15" name="Table 0"/>
           <p:cNvGraphicFramePr>
             <a:graphicFrameLocks noGrp="1"/>
           </p:cNvGraphicFramePr>
@@ -5457,7 +6916,7 @@
             <a:pPr algn="l"/>
             <a:fld id="{F7021451-1387-4CA6-816F-3879F97B5CBC}" type="slidenum">
               <a:rPr b="0" lang="en-US"/>
-              <a:t>11</a:t>
+              <a:t>14</a:t>
             </a:fld>
             <a:endParaRPr lang="en-US"/>
           </a:p>
@@ -5471,9 +6930,9 @@
 </p:sld>
 </file>
 
-<file path=ppt/slides/slide12.xml><?xml version="1.0" encoding="utf-8"?>
+<file path=ppt/slides/slide15.xml><?xml version="1.0" encoding="utf-8"?>
 <p:sld xmlns:a="http://schemas.openxmlformats.org/drawingml/2006/main" xmlns:r="http://schemas.openxmlformats.org/officeDocument/2006/relationships" xmlns:p="http://schemas.openxmlformats.org/presentationml/2006/main">
-  <p:cSld name="Slide 12">
+  <p:cSld name="Slide 15">
     <p:spTree>
       <p:nvGrpSpPr>
         <p:cNvPr id="1" name=""/>
@@ -5572,7 +7031,7 @@
       </p:sp>
       <p:graphicFrame>
         <p:nvGraphicFramePr>
-          <p:cNvPr id="13" name="Table 0"/>
+          <p:cNvPr id="16" name="Table 0"/>
           <p:cNvGraphicFramePr>
             <a:graphicFrameLocks noGrp="1"/>
           </p:cNvGraphicFramePr>
@@ -6876,1385 +8335,6 @@
             <a:pPr algn="l"/>
             <a:fld id="{F7021451-1387-4CA6-816F-3879F97B5CBC}" type="slidenum">
               <a:rPr b="0" lang="en-US"/>
-              <a:t>12</a:t>
-            </a:fld>
-            <a:endParaRPr lang="en-US"/>
-          </a:p>
-        </p:txBody>
-      </p:sp>
-    </p:spTree>
-  </p:cSld>
-  <p:clrMapOvr>
-    <a:masterClrMapping/>
-  </p:clrMapOvr>
-</p:sld>
-</file>
-
-<file path=ppt/slides/slide13.xml><?xml version="1.0" encoding="utf-8"?>
-<p:sld xmlns:a="http://schemas.openxmlformats.org/drawingml/2006/main" xmlns:r="http://schemas.openxmlformats.org/officeDocument/2006/relationships" xmlns:p="http://schemas.openxmlformats.org/presentationml/2006/main">
-  <p:cSld name="Slide 13">
-    <p:spTree>
-      <p:nvGrpSpPr>
-        <p:cNvPr id="1" name=""/>
-        <p:cNvGrpSpPr/>
-        <p:nvPr/>
-      </p:nvGrpSpPr>
-      <p:grpSpPr>
-        <a:xfrm>
-          <a:off x="0" y="0"/>
-          <a:ext cx="0" cy="0"/>
-          <a:chOff x="0" y="0"/>
-          <a:chExt cx="0" cy="0"/>
-        </a:xfrm>
-      </p:grpSpPr>
-      <p:sp>
-        <p:nvSpPr>
-          <p:cNvPr id="2" name="Text 0"/>
-          <p:cNvSpPr/>
-          <p:nvPr>
-            <p:ph idx="100" type="body" hasCustomPrompt="1"/>
-          </p:nvPr>
-        </p:nvSpPr>
-        <p:spPr>
-          <a:xfrm>
-            <a:off x="548640" y="384048"/>
-            <a:ext cx="9144000" cy="320040"/>
-          </a:xfrm>
-          <a:prstGeom prst="rect">
-            <a:avLst/>
-          </a:prstGeom>
-          <a:noFill/>
-          <a:ln/>
-        </p:spPr>
-        <p:txBody>
-          <a:bodyPr wrap="square" rtlCol="0"/>
-          <a:lstStyle/>
-          <a:p>
-            <a:pPr algn="l" indent="0" marL="0">
-              <a:buNone/>
-            </a:pPr>
-            <a:r>
-              <a:rPr lang="en-US" sz="1300" b="1" spc="200" kern="0" dirty="0">
-                <a:solidFill>
-                  <a:schemeClr val="accent2"/>
-                </a:solidFill>
-                <a:latin typeface="Calibri" pitchFamily="34" charset="0"/>
-                <a:ea typeface="Calibri" pitchFamily="34" charset="-122"/>
-                <a:cs typeface="Calibri" pitchFamily="34" charset="-120"/>
-              </a:rPr>
-              <a:t>EXAMPLE</a:t>
-            </a:r>
-            <a:endParaRPr lang="en-US" sz="1300" dirty="0"/>
-          </a:p>
-        </p:txBody>
-      </p:sp>
-      <p:sp>
-        <p:nvSpPr>
-          <p:cNvPr id="3" name="Text 0"/>
-          <p:cNvSpPr/>
-          <p:nvPr>
-            <p:ph idx="101" type="title" hasCustomPrompt="1"/>
-          </p:nvPr>
-        </p:nvSpPr>
-        <p:spPr>
-          <a:xfrm>
-            <a:off x="548640" y="713232"/>
-            <a:ext cx="11064240" cy="777240"/>
-          </a:xfrm>
-          <a:prstGeom prst="rect">
-            <a:avLst/>
-          </a:prstGeom>
-          <a:noFill/>
-          <a:ln/>
-        </p:spPr>
-        <p:txBody>
-          <a:bodyPr wrap="square" rtlCol="0"/>
-          <a:lstStyle/>
-          <a:p>
-            <a:pPr algn="l" indent="0" marL="0">
-              <a:buNone/>
-            </a:pPr>
-            <a:r>
-              <a:rPr lang="en-US" sz="3200" b="1" dirty="0">
-                <a:solidFill>
-                  <a:schemeClr val="tx1"/>
-                </a:solidFill>
-                <a:latin typeface="Cambria" pitchFamily="34" charset="0"/>
-                <a:ea typeface="Cambria" pitchFamily="34" charset="-122"/>
-                <a:cs typeface="Cambria" pitchFamily="34" charset="-120"/>
-              </a:rPr>
-              <a:t>What the team actually receives</a:t>
-            </a:r>
-            <a:endParaRPr lang="en-US" sz="3200" dirty="0"/>
-          </a:p>
-        </p:txBody>
-      </p:sp>
-      <p:sp>
-        <p:nvSpPr>
-          <p:cNvPr id="4" name="Shape 2"/>
-          <p:cNvSpPr/>
-          <p:nvPr/>
-        </p:nvSpPr>
-        <p:spPr>
-          <a:xfrm>
-            <a:off x="548640" y="1737360"/>
-            <a:ext cx="11064240" cy="4297680"/>
-          </a:xfrm>
-          <a:prstGeom prst="roundRect">
-            <a:avLst>
-              <a:gd name="adj" fmla="val 1702"/>
-            </a:avLst>
-          </a:prstGeom>
-          <a:solidFill>
-            <a:schemeClr val="bg1"/>
-          </a:solidFill>
-          <a:ln w="12700">
-            <a:solidFill>
-              <a:schemeClr val="accent5"/>
-            </a:solidFill>
-            <a:prstDash val="solid"/>
-          </a:ln>
-          <a:effectLst>
-            <a:outerShdw sx="100000" sy="100000" kx="0" ky="0" algn="bl" rotWithShape="0" blurRad="127000" dist="38100" dir="5400000">
-              <a:srgbClr val="1A1F2B">
-                <a:alpha val="18000"/>
-              </a:srgbClr>
-            </a:outerShdw>
-          </a:effectLst>
-        </p:spPr>
-      </p:sp>
-      <p:sp>
-        <p:nvSpPr>
-          <p:cNvPr id="5" name="Shape 3"/>
-          <p:cNvSpPr/>
-          <p:nvPr/>
-        </p:nvSpPr>
-        <p:spPr>
-          <a:xfrm>
-            <a:off x="548640" y="1737360"/>
-            <a:ext cx="11064240" cy="502920"/>
-          </a:xfrm>
-          <a:prstGeom prst="roundRect">
-            <a:avLst>
-              <a:gd name="adj" fmla="val 9091"/>
-            </a:avLst>
-          </a:prstGeom>
-          <a:solidFill>
-            <a:schemeClr val="accent1"/>
-          </a:solidFill>
-          <a:ln/>
-        </p:spPr>
-      </p:sp>
-      <p:sp>
-        <p:nvSpPr>
-          <p:cNvPr id="6" name="Text 4"/>
-          <p:cNvSpPr txBox="1"/>
-          <p:nvPr/>
-        </p:nvSpPr>
-        <p:spPr>
-          <a:xfrm>
-            <a:off x="822960" y="1737360"/>
-            <a:ext cx="10515600" cy="502920"/>
-          </a:xfrm>
-          <a:prstGeom prst="rect">
-            <a:avLst/>
-          </a:prstGeom>
-          <a:noFill/>
-          <a:ln/>
-        </p:spPr>
-        <p:txBody>
-          <a:bodyPr wrap="square" lIns="0" tIns="0" rIns="0" bIns="0" rtlCol="0" anchor="ctr"/>
-          <a:lstStyle/>
-          <a:p>
-            <a:pPr algn="l" indent="0" marL="0">
-              <a:buNone/>
-            </a:pPr>
-            <a:r>
-              <a:rPr lang="en-US" sz="1400" b="1" dirty="0">
-                <a:solidFill>
-                  <a:srgbClr val="FFFFFF"/>
-                </a:solidFill>
-                <a:latin typeface="Calibri" pitchFamily="34" charset="0"/>
-                <a:ea typeface="Calibri" pitchFamily="34" charset="-122"/>
-                <a:cs typeface="Calibri" pitchFamily="34" charset="-120"/>
-              </a:rPr>
-              <a:t>[CRITICAL INCIDENT]  INC0010042 - Production application unavailable</a:t>
-            </a:r>
-            <a:endParaRPr lang="en-US" sz="1400" dirty="0"/>
-          </a:p>
-        </p:txBody>
-      </p:sp>
-      <p:sp>
-        <p:nvSpPr>
-          <p:cNvPr id="7" name="Text 5"/>
-          <p:cNvSpPr txBox="1"/>
-          <p:nvPr/>
-        </p:nvSpPr>
-        <p:spPr>
-          <a:xfrm>
-            <a:off x="868680" y="2423160"/>
-            <a:ext cx="10424160" cy="3429000"/>
-          </a:xfrm>
-          <a:prstGeom prst="rect">
-            <a:avLst/>
-          </a:prstGeom>
-          <a:noFill/>
-          <a:ln/>
-        </p:spPr>
-        <p:txBody>
-          <a:bodyPr wrap="square" lIns="0" tIns="0" rIns="0" bIns="0" rtlCol="0" anchor="ctr"/>
-          <a:lstStyle/>
-          <a:p>
-            <a:pPr algn="l" indent="0" marL="0">
-              <a:lnSpc>
-                <a:spcPct val="120000"/>
-              </a:lnSpc>
-              <a:buNone/>
-            </a:pPr>
-            <a:r>
-              <a:rPr lang="en-US" sz="1300" dirty="0">
-                <a:solidFill>
-                  <a:schemeClr val="tx1"/>
-                </a:solidFill>
-                <a:latin typeface="Courier New" pitchFamily="34" charset="0"/>
-                <a:ea typeface="Courier New" pitchFamily="34" charset="-122"/>
-                <a:cs typeface="Courier New" pitchFamily="34" charset="-120"/>
-              </a:rPr>
-              <a:t>Hello Team,</a:t>
-            </a:r>
-            <a:endParaRPr lang="en-US" sz="1300" dirty="0"/>
-          </a:p>
-          <a:p>
-            <a:pPr algn="l" indent="0" marL="0">
-              <a:lnSpc>
-                <a:spcPct val="120000"/>
-              </a:lnSpc>
-              <a:buNone/>
-            </a:pPr>
-            <a:endParaRPr lang="en-US" sz="1300" dirty="0"/>
-          </a:p>
-          <a:p>
-            <a:pPr algn="l" indent="0" marL="0">
-              <a:lnSpc>
-                <a:spcPct val="120000"/>
-              </a:lnSpc>
-              <a:buNone/>
-            </a:pPr>
-            <a:r>
-              <a:rPr lang="en-US" sz="1300" dirty="0">
-                <a:solidFill>
-                  <a:schemeClr val="tx1"/>
-                </a:solidFill>
-                <a:latin typeface="Courier New" pitchFamily="34" charset="0"/>
-                <a:ea typeface="Courier New" pitchFamily="34" charset="-122"/>
-                <a:cs typeface="Courier New" pitchFamily="34" charset="-120"/>
-              </a:rPr>
-              <a:t>A critical incident has been detected in ServiceNow.</a:t>
-            </a:r>
-            <a:endParaRPr lang="en-US" sz="1300" dirty="0"/>
-          </a:p>
-          <a:p>
-            <a:pPr algn="l" indent="0" marL="0">
-              <a:lnSpc>
-                <a:spcPct val="120000"/>
-              </a:lnSpc>
-              <a:buNone/>
-            </a:pPr>
-            <a:endParaRPr lang="en-US" sz="1300" dirty="0"/>
-          </a:p>
-          <a:p>
-            <a:pPr algn="l" indent="0" marL="0">
-              <a:lnSpc>
-                <a:spcPct val="120000"/>
-              </a:lnSpc>
-              <a:buNone/>
-            </a:pPr>
-            <a:r>
-              <a:rPr lang="en-US" sz="1300" dirty="0">
-                <a:solidFill>
-                  <a:schemeClr val="tx1"/>
-                </a:solidFill>
-                <a:latin typeface="Courier New" pitchFamily="34" charset="0"/>
-                <a:ea typeface="Courier New" pitchFamily="34" charset="-122"/>
-                <a:cs typeface="Courier New" pitchFamily="34" charset="-120"/>
-              </a:rPr>
-              <a:t>  Incident:       INC0010042</a:t>
-            </a:r>
-            <a:endParaRPr lang="en-US" sz="1300" dirty="0"/>
-          </a:p>
-          <a:p>
-            <a:pPr algn="l" indent="0" marL="0">
-              <a:lnSpc>
-                <a:spcPct val="120000"/>
-              </a:lnSpc>
-              <a:buNone/>
-            </a:pPr>
-            <a:r>
-              <a:rPr lang="en-US" sz="1300" dirty="0">
-                <a:solidFill>
-                  <a:schemeClr val="tx1"/>
-                </a:solidFill>
-                <a:latin typeface="Courier New" pitchFamily="34" charset="0"/>
-                <a:ea typeface="Courier New" pitchFamily="34" charset="-122"/>
-                <a:cs typeface="Courier New" pitchFamily="34" charset="-120"/>
-              </a:rPr>
-              <a:t>  Priority:       1 - Critical</a:t>
-            </a:r>
-            <a:endParaRPr lang="en-US" sz="1300" dirty="0"/>
-          </a:p>
-          <a:p>
-            <a:pPr algn="l" indent="0" marL="0">
-              <a:lnSpc>
-                <a:spcPct val="120000"/>
-              </a:lnSpc>
-              <a:buNone/>
-            </a:pPr>
-            <a:r>
-              <a:rPr lang="en-US" sz="1300" dirty="0">
-                <a:solidFill>
-                  <a:schemeClr val="tx1"/>
-                </a:solidFill>
-                <a:latin typeface="Courier New" pitchFamily="34" charset="0"/>
-                <a:ea typeface="Courier New" pitchFamily="34" charset="-122"/>
-                <a:cs typeface="Courier New" pitchFamily="34" charset="-120"/>
-              </a:rPr>
-              <a:t>  Status:         In Progress</a:t>
-            </a:r>
-            <a:endParaRPr lang="en-US" sz="1300" dirty="0"/>
-          </a:p>
-          <a:p>
-            <a:pPr algn="l" indent="0" marL="0">
-              <a:lnSpc>
-                <a:spcPct val="120000"/>
-              </a:lnSpc>
-              <a:buNone/>
-            </a:pPr>
-            <a:r>
-              <a:rPr lang="en-US" sz="1300" dirty="0">
-                <a:solidFill>
-                  <a:schemeClr val="tx1"/>
-                </a:solidFill>
-                <a:latin typeface="Courier New" pitchFamily="34" charset="0"/>
-                <a:ea typeface="Courier New" pitchFamily="34" charset="-122"/>
-                <a:cs typeface="Courier New" pitchFamily="34" charset="-120"/>
-              </a:rPr>
-              <a:t>  Assigned to:    Example User</a:t>
-            </a:r>
-            <a:endParaRPr lang="en-US" sz="1300" dirty="0"/>
-          </a:p>
-          <a:p>
-            <a:pPr algn="l" indent="0" marL="0">
-              <a:lnSpc>
-                <a:spcPct val="120000"/>
-              </a:lnSpc>
-              <a:buNone/>
-            </a:pPr>
-            <a:r>
-              <a:rPr lang="en-US" sz="1300" dirty="0">
-                <a:solidFill>
-                  <a:schemeClr val="tx1"/>
-                </a:solidFill>
-                <a:latin typeface="Courier New" pitchFamily="34" charset="0"/>
-                <a:ea typeface="Courier New" pitchFamily="34" charset="-122"/>
-                <a:cs typeface="Courier New" pitchFamily="34" charset="-120"/>
-              </a:rPr>
-              <a:t>  Description:    Production application unavailable</a:t>
-            </a:r>
-            <a:endParaRPr lang="en-US" sz="1300" dirty="0"/>
-          </a:p>
-          <a:p>
-            <a:pPr algn="l" indent="0" marL="0">
-              <a:lnSpc>
-                <a:spcPct val="120000"/>
-              </a:lnSpc>
-              <a:buNone/>
-            </a:pPr>
-            <a:r>
-              <a:rPr lang="en-US" sz="1300" dirty="0">
-                <a:solidFill>
-                  <a:schemeClr val="tx1"/>
-                </a:solidFill>
-                <a:latin typeface="Courier New" pitchFamily="34" charset="0"/>
-                <a:ea typeface="Courier New" pitchFamily="34" charset="-122"/>
-                <a:cs typeface="Courier New" pitchFamily="34" charset="-120"/>
-              </a:rPr>
-              <a:t>  Last updated:   2026-10-25 09:58 UTC</a:t>
-            </a:r>
-            <a:endParaRPr lang="en-US" sz="1300" dirty="0"/>
-          </a:p>
-          <a:p>
-            <a:pPr algn="l" indent="0" marL="0">
-              <a:lnSpc>
-                <a:spcPct val="120000"/>
-              </a:lnSpc>
-              <a:buNone/>
-            </a:pPr>
-            <a:endParaRPr lang="en-US" sz="1300" dirty="0"/>
-          </a:p>
-          <a:p>
-            <a:pPr algn="l" indent="0" marL="0">
-              <a:lnSpc>
-                <a:spcPct val="120000"/>
-              </a:lnSpc>
-              <a:buNone/>
-            </a:pPr>
-            <a:r>
-              <a:rPr lang="en-US" sz="1300" dirty="0">
-                <a:solidFill>
-                  <a:schemeClr val="tx1"/>
-                </a:solidFill>
-                <a:latin typeface="Courier New" pitchFamily="34" charset="0"/>
-                <a:ea typeface="Courier New" pitchFamily="34" charset="-122"/>
-                <a:cs typeface="Courier New" pitchFamily="34" charset="-120"/>
-              </a:rPr>
-              <a:t>Please investigate this incident as soon as possible.</a:t>
-            </a:r>
-            <a:endParaRPr lang="en-US" sz="1300" dirty="0"/>
-          </a:p>
-          <a:p>
-            <a:pPr algn="l" indent="0" marL="0">
-              <a:lnSpc>
-                <a:spcPct val="120000"/>
-              </a:lnSpc>
-              <a:buNone/>
-            </a:pPr>
-            <a:r>
-              <a:rPr lang="en-US" sz="1300" dirty="0">
-                <a:solidFill>
-                  <a:schemeClr val="tx1"/>
-                </a:solidFill>
-                <a:latin typeface="Courier New" pitchFamily="34" charset="0"/>
-                <a:ea typeface="Courier New" pitchFamily="34" charset="-122"/>
-                <a:cs typeface="Courier New" pitchFamily="34" charset="-120"/>
-              </a:rPr>
-              <a:t>View incident: https://dev421307.service-now.com/nav_to.do?...</a:t>
-            </a:r>
-            <a:endParaRPr lang="en-US" sz="1300" dirty="0"/>
-          </a:p>
-        </p:txBody>
-      </p:sp>
-      <p:sp>
-        <p:nvSpPr>
-          <p:cNvPr id="8" name="Text 6"/>
-          <p:cNvSpPr txBox="1"/>
-          <p:nvPr/>
-        </p:nvSpPr>
-        <p:spPr>
-          <a:xfrm>
-            <a:off x="548640" y="6172200"/>
-            <a:ext cx="11064240" cy="365760"/>
-          </a:xfrm>
-          <a:prstGeom prst="rect">
-            <a:avLst/>
-          </a:prstGeom>
-          <a:noFill/>
-          <a:ln/>
-        </p:spPr>
-        <p:txBody>
-          <a:bodyPr wrap="square" lIns="0" tIns="0" rIns="0" bIns="0" rtlCol="0" anchor="ctr"/>
-          <a:lstStyle/>
-          <a:p>
-            <a:pPr algn="l" indent="0" marL="0">
-              <a:buNone/>
-            </a:pPr>
-            <a:r>
-              <a:rPr lang="en-US" sz="1200" i="1" dirty="0">
-                <a:solidFill>
-                  <a:schemeClr val="accent4"/>
-                </a:solidFill>
-                <a:latin typeface="Calibri" pitchFamily="34" charset="0"/>
-                <a:ea typeface="Calibri" pitchFamily="34" charset="-122"/>
-                <a:cs typeface="Calibri" pitchFamily="34" charset="-120"/>
-              </a:rPr>
-              <a:t>A reminder reuses this template with a [REMINDER] subject prefix and a one-line note that the incident is still unresolved.</a:t>
-            </a:r>
-            <a:endParaRPr lang="en-US" sz="1200" dirty="0"/>
-          </a:p>
-        </p:txBody>
-      </p:sp>
-      <p:sp>
-        <p:nvSpPr>
-          <p:cNvPr id="25" name="Slide Number Placeholder 0"/>
-          <p:cNvSpPr>
-            <a:spLocks noGrp="1"/>
-          </p:cNvSpPr>
-          <p:nvPr>
-            <p:ph type="sldNum" sz="quarter" idx="4294967295"/>
-          </p:nvPr>
-        </p:nvSpPr>
-        <p:spPr>
-          <a:xfrm>
-            <a:off x="11430000" y="6510528"/>
-            <a:ext cx="800000" cy="300000"/>
-          </a:xfrm>
-          <a:prstGeom prst="rect">
-            <a:avLst/>
-          </a:prstGeom>
-          <a:extLst>
-            <a:ext uri="{C572A759-6A51-4108-AA02-DFA0A04FC94B}">
-              <ma14:wrappingTextBoxFlag xmlns:ma14="http://schemas.microsoft.com/office/mac/drawingml/2011/main" val="0"/>
-            </a:ext>
-          </a:extLst>
-        </p:spPr>
-        <p:txBody>
-          <a:bodyPr/>
-          <a:lstStyle>
-            <a:lvl1pPr>
-              <a:defRPr sz="1000">
-                <a:solidFill>
-                  <a:schemeClr val="accent4"/>
-                </a:solidFill>
-                <a:latin typeface="Calibri"/>
-                <a:ea typeface="Calibri"/>
-                <a:cs typeface="Calibri"/>
-              </a:defRPr>
-            </a:lvl1pPr>
-          </a:lstStyle>
-          <a:p>
-            <a:pPr algn="l"/>
-            <a:fld id="{F7021451-1387-4CA6-816F-3879F97B5CBC}" type="slidenum">
-              <a:rPr b="0" lang="en-US"/>
-              <a:t>13</a:t>
-            </a:fld>
-            <a:endParaRPr lang="en-US"/>
-          </a:p>
-        </p:txBody>
-      </p:sp>
-    </p:spTree>
-  </p:cSld>
-  <p:clrMapOvr>
-    <a:masterClrMapping/>
-  </p:clrMapOvr>
-</p:sld>
-</file>
-
-<file path=ppt/slides/slide14.xml><?xml version="1.0" encoding="utf-8"?>
-<p:sld xmlns:a="http://schemas.openxmlformats.org/drawingml/2006/main" xmlns:r="http://schemas.openxmlformats.org/officeDocument/2006/relationships" xmlns:p="http://schemas.openxmlformats.org/presentationml/2006/main">
-  <p:cSld name="Slide 14">
-    <p:spTree>
-      <p:nvGrpSpPr>
-        <p:cNvPr id="1" name=""/>
-        <p:cNvGrpSpPr/>
-        <p:nvPr/>
-      </p:nvGrpSpPr>
-      <p:grpSpPr>
-        <a:xfrm>
-          <a:off x="0" y="0"/>
-          <a:ext cx="0" cy="0"/>
-          <a:chOff x="0" y="0"/>
-          <a:chExt cx="0" cy="0"/>
-        </a:xfrm>
-      </p:grpSpPr>
-      <p:sp>
-        <p:nvSpPr>
-          <p:cNvPr id="2" name="Text 0"/>
-          <p:cNvSpPr txBox="1"/>
-          <p:nvPr/>
-        </p:nvSpPr>
-        <p:spPr>
-          <a:xfrm>
-            <a:off x="822960" y="2011680"/>
-            <a:ext cx="9144000" cy="365760"/>
-          </a:xfrm>
-          <a:prstGeom prst="rect">
-            <a:avLst/>
-          </a:prstGeom>
-          <a:noFill/>
-          <a:ln/>
-        </p:spPr>
-        <p:txBody>
-          <a:bodyPr wrap="square" lIns="0" tIns="0" rIns="0" bIns="0" rtlCol="0" anchor="ctr"/>
-          <a:lstStyle/>
-          <a:p>
-            <a:pPr algn="l" indent="0" marL="0">
-              <a:buNone/>
-            </a:pPr>
-            <a:r>
-              <a:rPr lang="en-US" sz="1400" b="1" spc="200" kern="0" dirty="0">
-                <a:solidFill>
-                  <a:schemeClr val="accent1"/>
-                </a:solidFill>
-                <a:latin typeface="Calibri" pitchFamily="34" charset="0"/>
-                <a:ea typeface="Calibri" pitchFamily="34" charset="-122"/>
-                <a:cs typeface="Calibri" pitchFamily="34" charset="-120"/>
-              </a:rPr>
-              <a:t>02 · TESTING &amp; DELIVERY</a:t>
-            </a:r>
-            <a:endParaRPr lang="en-US" sz="1400" dirty="0"/>
-          </a:p>
-        </p:txBody>
-      </p:sp>
-      <p:sp>
-        <p:nvSpPr>
-          <p:cNvPr id="3" name="Text 0"/>
-          <p:cNvSpPr/>
-          <p:nvPr>
-            <p:ph idx="100" type="title" hasCustomPrompt="1"/>
-          </p:nvPr>
-        </p:nvSpPr>
-        <p:spPr>
-          <a:xfrm>
-            <a:off x="822960" y="2743200"/>
-            <a:ext cx="10515600" cy="1463040"/>
-          </a:xfrm>
-          <a:prstGeom prst="rect">
-            <a:avLst/>
-          </a:prstGeom>
-          <a:noFill/>
-          <a:ln/>
-        </p:spPr>
-        <p:txBody>
-          <a:bodyPr wrap="square" rtlCol="0"/>
-          <a:lstStyle/>
-          <a:p>
-            <a:pPr algn="l" indent="0" marL="0">
-              <a:buNone/>
-            </a:pPr>
-            <a:r>
-              <a:rPr lang="en-US" sz="4000" b="1" dirty="0">
-                <a:solidFill>
-                  <a:schemeClr val="bg1"/>
-                </a:solidFill>
-                <a:latin typeface="Cambria" pitchFamily="34" charset="0"/>
-                <a:ea typeface="Cambria" pitchFamily="34" charset="-122"/>
-                <a:cs typeface="Cambria" pitchFamily="34" charset="-120"/>
-              </a:rPr>
-              <a:t>Proving it works, and where it lives</a:t>
-            </a:r>
-            <a:endParaRPr lang="en-US" sz="4000" dirty="0"/>
-          </a:p>
-        </p:txBody>
-      </p:sp>
-      <p:sp>
-        <p:nvSpPr>
-          <p:cNvPr id="4" name="Text 0"/>
-          <p:cNvSpPr/>
-          <p:nvPr>
-            <p:ph idx="101" type="body" hasCustomPrompt="1"/>
-          </p:nvPr>
-        </p:nvSpPr>
-        <p:spPr>
-          <a:xfrm>
-            <a:off x="822960" y="4160520"/>
-            <a:ext cx="9601200" cy="1097280"/>
-          </a:xfrm>
-          <a:prstGeom prst="rect">
-            <a:avLst/>
-          </a:prstGeom>
-          <a:noFill/>
-          <a:ln/>
-        </p:spPr>
-        <p:txBody>
-          <a:bodyPr wrap="square" rtlCol="0"/>
-          <a:lstStyle/>
-          <a:p>
-            <a:pPr algn="l" indent="0" marL="0">
-              <a:buNone/>
-            </a:pPr>
-            <a:r>
-              <a:rPr lang="en-US" sz="1600" dirty="0">
-                <a:solidFill>
-                  <a:srgbClr val="AEB8C9"/>
-                </a:solidFill>
-                <a:latin typeface="Calibri" pitchFamily="34" charset="0"/>
-                <a:ea typeface="Calibri" pitchFamily="34" charset="-122"/>
-                <a:cs typeface="Calibri" pitchFamily="34" charset="-120"/>
-              </a:rPr>
-              <a:t>Unit tests on the dedup logic, an end-to-end run against a mock ServiceNow and SMTP sink, and a public GitHub repo with everything documented.</a:t>
-            </a:r>
-            <a:endParaRPr lang="en-US" sz="1600" dirty="0"/>
-          </a:p>
-        </p:txBody>
-      </p:sp>
-    </p:spTree>
-  </p:cSld>
-  <p:clrMapOvr>
-    <a:masterClrMapping/>
-  </p:clrMapOvr>
-</p:sld>
-</file>
-
-<file path=ppt/slides/slide15.xml><?xml version="1.0" encoding="utf-8"?>
-<p:sld xmlns:a="http://schemas.openxmlformats.org/drawingml/2006/main" xmlns:r="http://schemas.openxmlformats.org/officeDocument/2006/relationships" xmlns:p="http://schemas.openxmlformats.org/presentationml/2006/main">
-  <p:cSld name="Slide 15">
-    <p:spTree>
-      <p:nvGrpSpPr>
-        <p:cNvPr id="1" name=""/>
-        <p:cNvGrpSpPr/>
-        <p:nvPr/>
-      </p:nvGrpSpPr>
-      <p:grpSpPr>
-        <a:xfrm>
-          <a:off x="0" y="0"/>
-          <a:ext cx="0" cy="0"/>
-          <a:chOff x="0" y="0"/>
-          <a:chExt cx="0" cy="0"/>
-        </a:xfrm>
-      </p:grpSpPr>
-      <p:sp>
-        <p:nvSpPr>
-          <p:cNvPr id="2" name="Text 0"/>
-          <p:cNvSpPr/>
-          <p:nvPr>
-            <p:ph idx="100" type="body" hasCustomPrompt="1"/>
-          </p:nvPr>
-        </p:nvSpPr>
-        <p:spPr>
-          <a:xfrm>
-            <a:off x="548640" y="384048"/>
-            <a:ext cx="9144000" cy="320040"/>
-          </a:xfrm>
-          <a:prstGeom prst="rect">
-            <a:avLst/>
-          </a:prstGeom>
-          <a:noFill/>
-          <a:ln/>
-        </p:spPr>
-        <p:txBody>
-          <a:bodyPr wrap="square" rtlCol="0"/>
-          <a:lstStyle/>
-          <a:p>
-            <a:pPr algn="l" indent="0" marL="0">
-              <a:buNone/>
-            </a:pPr>
-            <a:r>
-              <a:rPr lang="en-US" sz="1300" b="1" spc="200" kern="0" dirty="0">
-                <a:solidFill>
-                  <a:schemeClr val="accent2"/>
-                </a:solidFill>
-                <a:latin typeface="Calibri" pitchFamily="34" charset="0"/>
-                <a:ea typeface="Calibri" pitchFamily="34" charset="-122"/>
-                <a:cs typeface="Calibri" pitchFamily="34" charset="-120"/>
-              </a:rPr>
-              <a:t>TESTING</a:t>
-            </a:r>
-            <a:endParaRPr lang="en-US" sz="1300" dirty="0"/>
-          </a:p>
-        </p:txBody>
-      </p:sp>
-      <p:sp>
-        <p:nvSpPr>
-          <p:cNvPr id="3" name="Text 0"/>
-          <p:cNvSpPr/>
-          <p:nvPr>
-            <p:ph idx="101" type="title" hasCustomPrompt="1"/>
-          </p:nvPr>
-        </p:nvSpPr>
-        <p:spPr>
-          <a:xfrm>
-            <a:off x="548640" y="713232"/>
-            <a:ext cx="11064240" cy="777240"/>
-          </a:xfrm>
-          <a:prstGeom prst="rect">
-            <a:avLst/>
-          </a:prstGeom>
-          <a:noFill/>
-          <a:ln/>
-        </p:spPr>
-        <p:txBody>
-          <a:bodyPr wrap="square" rtlCol="0"/>
-          <a:lstStyle/>
-          <a:p>
-            <a:pPr algn="l" indent="0" marL="0">
-              <a:buNone/>
-            </a:pPr>
-            <a:r>
-              <a:rPr lang="en-US" sz="3200" b="1" dirty="0">
-                <a:solidFill>
-                  <a:schemeClr val="tx1"/>
-                </a:solidFill>
-                <a:latin typeface="Cambria" pitchFamily="34" charset="0"/>
-                <a:ea typeface="Cambria" pitchFamily="34" charset="-122"/>
-                <a:cs typeface="Cambria" pitchFamily="34" charset="-120"/>
-              </a:rPr>
-              <a:t>Verified without touching production data</a:t>
-            </a:r>
-            <a:endParaRPr lang="en-US" sz="3200" dirty="0"/>
-          </a:p>
-        </p:txBody>
-      </p:sp>
-      <p:sp>
-        <p:nvSpPr>
-          <p:cNvPr id="4" name="Shape 2"/>
-          <p:cNvSpPr/>
-          <p:nvPr/>
-        </p:nvSpPr>
-        <p:spPr>
-          <a:xfrm>
-            <a:off x="548640" y="1737360"/>
-            <a:ext cx="5349240" cy="3200400"/>
-          </a:xfrm>
-          <a:prstGeom prst="roundRect">
-            <a:avLst>
-              <a:gd name="adj" fmla="val 2286"/>
-            </a:avLst>
-          </a:prstGeom>
-          <a:solidFill>
-            <a:schemeClr val="bg1"/>
-          </a:solidFill>
-          <a:ln w="12700">
-            <a:solidFill>
-              <a:schemeClr val="accent5"/>
-            </a:solidFill>
-            <a:prstDash val="solid"/>
-          </a:ln>
-          <a:effectLst>
-            <a:outerShdw sx="100000" sy="100000" kx="0" ky="0" algn="bl" rotWithShape="0" blurRad="127000" dist="38100" dir="5400000">
-              <a:srgbClr val="1A1F2B">
-                <a:alpha val="18000"/>
-              </a:srgbClr>
-            </a:outerShdw>
-          </a:effectLst>
-        </p:spPr>
-      </p:sp>
-      <p:sp>
-        <p:nvSpPr>
-          <p:cNvPr id="5" name="Text 3"/>
-          <p:cNvSpPr txBox="1"/>
-          <p:nvPr/>
-        </p:nvSpPr>
-        <p:spPr>
-          <a:xfrm>
-            <a:off x="822960" y="1920240"/>
-            <a:ext cx="4846320" cy="365760"/>
-          </a:xfrm>
-          <a:prstGeom prst="rect">
-            <a:avLst/>
-          </a:prstGeom>
-          <a:noFill/>
-          <a:ln/>
-        </p:spPr>
-        <p:txBody>
-          <a:bodyPr wrap="square" lIns="0" tIns="0" rIns="0" bIns="0" rtlCol="0" anchor="ctr"/>
-          <a:lstStyle/>
-          <a:p>
-            <a:pPr algn="l" indent="0" marL="0">
-              <a:buNone/>
-            </a:pPr>
-            <a:r>
-              <a:rPr lang="en-US" sz="1500" b="1" dirty="0">
-                <a:solidFill>
-                  <a:schemeClr val="accent3"/>
-                </a:solidFill>
-                <a:latin typeface="Cambria" pitchFamily="34" charset="0"/>
-                <a:ea typeface="Cambria" pitchFamily="34" charset="-122"/>
-                <a:cs typeface="Cambria" pitchFamily="34" charset="-120"/>
-              </a:rPr>
-              <a:t>Unit tests: 13/13 passing</a:t>
-            </a:r>
-            <a:endParaRPr lang="en-US" sz="1500" dirty="0"/>
-          </a:p>
-        </p:txBody>
-      </p:sp>
-      <p:sp>
-        <p:nvSpPr>
-          <p:cNvPr id="6" name="Text 4"/>
-          <p:cNvSpPr txBox="1"/>
-          <p:nvPr/>
-        </p:nvSpPr>
-        <p:spPr>
-          <a:xfrm>
-            <a:off x="822960" y="2377440"/>
-            <a:ext cx="4846320" cy="2423160"/>
-          </a:xfrm>
-          <a:prstGeom prst="rect">
-            <a:avLst/>
-          </a:prstGeom>
-          <a:noFill/>
-          <a:ln/>
-        </p:spPr>
-        <p:txBody>
-          <a:bodyPr wrap="square" lIns="0" tIns="0" rIns="0" bIns="0" rtlCol="0" anchor="ctr"/>
-          <a:lstStyle/>
-          <a:p>
-            <a:pPr algn="l" marL="342900" indent="-342900">
-              <a:lnSpc>
-                <a:spcPct val="130000"/>
-              </a:lnSpc>
-              <a:spcAft>
-                <a:spcPts val="600"/>
-              </a:spcAft>
-              <a:buSzPct val="100000"/>
-              <a:buChar char="✓"/>
-            </a:pPr>
-            <a:r>
-              <a:rPr lang="en-US" sz="1150" dirty="0">
-                <a:solidFill>
-                  <a:schemeClr val="accent6"/>
-                </a:solidFill>
-                <a:latin typeface="Calibri" pitchFamily="34" charset="0"/>
-                <a:ea typeface="Calibri" pitchFamily="34" charset="-122"/>
-                <a:cs typeface="Calibri" pitchFamily="34" charset="-120"/>
-              </a:rPr>
-              <a:t>Rule logic: critical / high / stale / resolved classification</a:t>
-            </a:r>
-            <a:endParaRPr lang="en-US" sz="1150" dirty="0"/>
-          </a:p>
-          <a:p>
-            <a:pPr algn="l" marL="342900" indent="-342900">
-              <a:lnSpc>
-                <a:spcPct val="130000"/>
-              </a:lnSpc>
-              <a:spcAft>
-                <a:spcPts val="600"/>
-              </a:spcAft>
-              <a:buSzPct val="100000"/>
-              <a:buChar char="✓"/>
-            </a:pPr>
-            <a:r>
-              <a:rPr lang="en-US" sz="1150" dirty="0">
-                <a:solidFill>
-                  <a:schemeClr val="accent6"/>
-                </a:solidFill>
-                <a:latin typeface="Calibri" pitchFamily="34" charset="0"/>
-                <a:ea typeface="Calibri" pitchFamily="34" charset="-122"/>
-                <a:cs typeface="Calibri" pitchFamily="34" charset="-120"/>
-              </a:rPr>
-              <a:t>Run lock: blocks within TTL, allows after expiry</a:t>
-            </a:r>
-            <a:endParaRPr lang="en-US" sz="1150" dirty="0"/>
-          </a:p>
-          <a:p>
-            <a:pPr algn="l" marL="342900" indent="-342900">
-              <a:lnSpc>
-                <a:spcPct val="130000"/>
-              </a:lnSpc>
-              <a:spcAft>
-                <a:spcPts val="600"/>
-              </a:spcAft>
-              <a:buSzPct val="100000"/>
-              <a:buChar char="✓"/>
-            </a:pPr>
-            <a:r>
-              <a:rPr lang="en-US" sz="1150" dirty="0">
-                <a:solidFill>
-                  <a:schemeClr val="accent6"/>
-                </a:solidFill>
-                <a:latin typeface="Calibri" pitchFamily="34" charset="0"/>
-                <a:ea typeface="Calibri" pitchFamily="34" charset="-122"/>
-                <a:cs typeface="Calibri" pitchFamily="34" charset="-120"/>
-              </a:rPr>
-              <a:t>Stale-claim recovery: abandoned claims reset to retryable</a:t>
-            </a:r>
-            <a:endParaRPr lang="en-US" sz="1150" dirty="0"/>
-          </a:p>
-          <a:p>
-            <a:pPr algn="l" marL="342900" indent="-342900">
-              <a:lnSpc>
-                <a:spcPct val="130000"/>
-              </a:lnSpc>
-              <a:spcAft>
-                <a:spcPts val="600"/>
-              </a:spcAft>
-              <a:buSzPct val="100000"/>
-              <a:buChar char="✓"/>
-            </a:pPr>
-            <a:r>
-              <a:rPr lang="en-US" sz="1150" dirty="0">
-                <a:solidFill>
-                  <a:schemeClr val="accent6"/>
-                </a:solidFill>
-                <a:latin typeface="Calibri" pitchFamily="34" charset="0"/>
-                <a:ea typeface="Calibri" pitchFamily="34" charset="-122"/>
-                <a:cs typeface="Calibri" pitchFamily="34" charset="-120"/>
-              </a:rPr>
-              <a:t>Lookup: skip, retry, reminder-due, and reopen cases</a:t>
-            </a:r>
-            <a:endParaRPr lang="en-US" sz="1150" dirty="0"/>
-          </a:p>
-          <a:p>
-            <a:pPr algn="l" marL="342900" indent="-342900">
-              <a:lnSpc>
-                <a:spcPct val="130000"/>
-              </a:lnSpc>
-              <a:spcAft>
-                <a:spcPts val="600"/>
-              </a:spcAft>
-              <a:buSzPct val="100000"/>
-              <a:buChar char="✓"/>
-            </a:pPr>
-            <a:r>
-              <a:rPr lang="en-US" sz="1150" dirty="0">
-                <a:solidFill>
-                  <a:schemeClr val="accent6"/>
-                </a:solidFill>
-                <a:latin typeface="Calibri" pitchFamily="34" charset="0"/>
-                <a:ea typeface="Calibri" pitchFamily="34" charset="-122"/>
-                <a:cs typeface="Calibri" pitchFamily="34" charset="-120"/>
-              </a:rPr>
-              <a:t>Claim: every eligible item marked pending before send</a:t>
-            </a:r>
-            <a:endParaRPr lang="en-US" sz="1150" dirty="0"/>
-          </a:p>
-          <a:p>
-            <a:pPr algn="l" marL="342900" indent="-342900">
-              <a:lnSpc>
-                <a:spcPct val="130000"/>
-              </a:lnSpc>
-              <a:spcAft>
-                <a:spcPts val="600"/>
-              </a:spcAft>
-              <a:buSzPct val="100000"/>
-              <a:buChar char="✓"/>
-            </a:pPr>
-            <a:r>
-              <a:rPr lang="en-US" sz="1150" dirty="0">
-                <a:solidFill>
-                  <a:schemeClr val="accent6"/>
-                </a:solidFill>
-                <a:latin typeface="Calibri" pitchFamily="34" charset="0"/>
-                <a:ea typeface="Calibri" pitchFamily="34" charset="-122"/>
-                <a:cs typeface="Calibri" pitchFamily="34" charset="-120"/>
-              </a:rPr>
-              <a:t>Resolve: success → sent, failure → failed, error raised</a:t>
-            </a:r>
-            <a:endParaRPr lang="en-US" sz="1150" dirty="0"/>
-          </a:p>
-          <a:p>
-            <a:pPr algn="l" marL="342900" indent="-342900">
-              <a:lnSpc>
-                <a:spcPct val="130000"/>
-              </a:lnSpc>
-              <a:spcAft>
-                <a:spcPts val="600"/>
-              </a:spcAft>
-              <a:buSzPct val="100000"/>
-              <a:buChar char="✓"/>
-            </a:pPr>
-            <a:r>
-              <a:rPr lang="en-US" sz="1150" dirty="0">
-                <a:solidFill>
-                  <a:schemeClr val="accent6"/>
-                </a:solidFill>
-                <a:latin typeface="Calibri" pitchFamily="34" charset="0"/>
-                <a:ea typeface="Calibri" pitchFamily="34" charset="-122"/>
-                <a:cs typeface="Calibri" pitchFamily="34" charset="-120"/>
-              </a:rPr>
-              <a:t>Two-run integration: run 2 sends nothing new right after run 1</a:t>
-            </a:r>
-            <a:endParaRPr lang="en-US" sz="1150" dirty="0"/>
-          </a:p>
-        </p:txBody>
-      </p:sp>
-      <p:sp>
-        <p:nvSpPr>
-          <p:cNvPr id="7" name="Shape 5"/>
-          <p:cNvSpPr/>
-          <p:nvPr/>
-        </p:nvSpPr>
-        <p:spPr>
-          <a:xfrm>
-            <a:off x="6080760" y="1737360"/>
-            <a:ext cx="5532120" cy="3200400"/>
-          </a:xfrm>
-          <a:prstGeom prst="roundRect">
-            <a:avLst>
-              <a:gd name="adj" fmla="val 2286"/>
-            </a:avLst>
-          </a:prstGeom>
-          <a:solidFill>
-            <a:schemeClr val="tx2"/>
-          </a:solidFill>
-          <a:ln/>
-          <a:effectLst>
-            <a:outerShdw sx="100000" sy="100000" kx="0" ky="0" algn="bl" rotWithShape="0" blurRad="127000" dist="38100" dir="5400000">
-              <a:srgbClr val="1A1F2B">
-                <a:alpha val="18000"/>
-              </a:srgbClr>
-            </a:outerShdw>
-          </a:effectLst>
-        </p:spPr>
-      </p:sp>
-      <p:sp>
-        <p:nvSpPr>
-          <p:cNvPr id="8" name="Text 6"/>
-          <p:cNvSpPr txBox="1"/>
-          <p:nvPr/>
-        </p:nvSpPr>
-        <p:spPr>
-          <a:xfrm>
-            <a:off x="6355080" y="1920240"/>
-            <a:ext cx="4983480" cy="365760"/>
-          </a:xfrm>
-          <a:prstGeom prst="rect">
-            <a:avLst/>
-          </a:prstGeom>
-          <a:noFill/>
-          <a:ln/>
-        </p:spPr>
-        <p:txBody>
-          <a:bodyPr wrap="square" lIns="0" tIns="0" rIns="0" bIns="0" rtlCol="0" anchor="ctr"/>
-          <a:lstStyle/>
-          <a:p>
-            <a:pPr algn="l" indent="0" marL="0">
-              <a:buNone/>
-            </a:pPr>
-            <a:r>
-              <a:rPr lang="en-US" sz="1500" b="1" dirty="0">
-                <a:solidFill>
-                  <a:srgbClr val="FFFFFF"/>
-                </a:solidFill>
-                <a:latin typeface="Cambria" pitchFamily="34" charset="0"/>
-                <a:ea typeface="Cambria" pitchFamily="34" charset="-122"/>
-                <a:cs typeface="Cambria" pitchFamily="34" charset="-120"/>
-              </a:rPr>
-              <a:t>End-to-end (mock ServiceNow + SMTP sink)</a:t>
-            </a:r>
-            <a:endParaRPr lang="en-US" sz="1500" dirty="0"/>
-          </a:p>
-        </p:txBody>
-      </p:sp>
-      <p:sp>
-        <p:nvSpPr>
-          <p:cNvPr id="9" name="Text 7"/>
-          <p:cNvSpPr txBox="1"/>
-          <p:nvPr/>
-        </p:nvSpPr>
-        <p:spPr>
-          <a:xfrm>
-            <a:off x="6355080" y="2377440"/>
-            <a:ext cx="4983480" cy="2423160"/>
-          </a:xfrm>
-          <a:prstGeom prst="rect">
-            <a:avLst/>
-          </a:prstGeom>
-          <a:noFill/>
-          <a:ln/>
-        </p:spPr>
-        <p:txBody>
-          <a:bodyPr wrap="square" lIns="0" tIns="0" rIns="0" bIns="0" rtlCol="0" anchor="ctr"/>
-          <a:lstStyle/>
-          <a:p>
-            <a:pPr algn="l" indent="0" marL="0">
-              <a:lnSpc>
-                <a:spcPct val="135000"/>
-              </a:lnSpc>
-              <a:buNone/>
-            </a:pPr>
-            <a:r>
-              <a:rPr lang="en-US" sz="1300" b="1" dirty="0">
-                <a:solidFill>
-                  <a:schemeClr val="accent1"/>
-                </a:solidFill>
-                <a:latin typeface="Calibri" pitchFamily="34" charset="0"/>
-                <a:ea typeface="Calibri" pitchFamily="34" charset="-122"/>
-                <a:cs typeface="Calibri" pitchFamily="34" charset="-120"/>
-              </a:rPr>
-              <a:t>Run 1  </a:t>
-            </a:r>
-            <a:pPr algn="l" indent="0" marL="0">
-              <a:lnSpc>
-                <a:spcPct val="135000"/>
-              </a:lnSpc>
-              <a:buNone/>
-            </a:pPr>
-            <a:r>
-              <a:rPr lang="en-US" sz="1300" dirty="0">
-                <a:solidFill>
-                  <a:srgbClr val="E5E9F0"/>
-                </a:solidFill>
-                <a:latin typeface="Calibri" pitchFamily="34" charset="0"/>
-                <a:ea typeface="Calibri" pitchFamily="34" charset="-122"/>
-                <a:cs typeface="Calibri" pitchFamily="34" charset="-120"/>
-              </a:rPr>
-              <a:t>: 5 mock incidents in → 3 emails out (critical, high, stale). Moderate and resolved incidents produced none.
-</a:t>
-            </a:r>
-            <a:pPr algn="l" indent="0" marL="0">
-              <a:lnSpc>
-                <a:spcPct val="135000"/>
-              </a:lnSpc>
-              <a:buNone/>
-            </a:pPr>
-            <a:r>
-              <a:rPr lang="en-US" sz="1300" b="1" dirty="0">
-                <a:solidFill>
-                  <a:schemeClr val="accent1"/>
-                </a:solidFill>
-                <a:latin typeface="Calibri" pitchFamily="34" charset="0"/>
-                <a:ea typeface="Calibri" pitchFamily="34" charset="-122"/>
-                <a:cs typeface="Calibri" pitchFamily="34" charset="-120"/>
-              </a:rPr>
-              <a:t>Run 2  </a:t>
-            </a:r>
-            <a:pPr algn="l" indent="0" marL="0">
-              <a:lnSpc>
-                <a:spcPct val="135000"/>
-              </a:lnSpc>
-              <a:buNone/>
-            </a:pPr>
-            <a:r>
-              <a:rPr lang="en-US" sz="1300" dirty="0">
-                <a:solidFill>
-                  <a:srgbClr val="E5E9F0"/>
-                </a:solidFill>
-                <a:latin typeface="Calibri" pitchFamily="34" charset="0"/>
-                <a:ea typeface="Calibri" pitchFamily="34" charset="-122"/>
-                <a:cs typeface="Calibri" pitchFamily="34" charset="-120"/>
-              </a:rPr>
-              <a:t>: same static data, run immediately after → 0 new emails. All three keys correctly recognized as already sent.</a:t>
-            </a:r>
-            <a:endParaRPr lang="en-US" sz="1300" dirty="0"/>
-          </a:p>
-        </p:txBody>
-      </p:sp>
-      <p:sp>
-        <p:nvSpPr>
-          <p:cNvPr id="10" name="Shape 8"/>
-          <p:cNvSpPr/>
-          <p:nvPr/>
-        </p:nvSpPr>
-        <p:spPr>
-          <a:xfrm>
-            <a:off x="548640" y="5120640"/>
-            <a:ext cx="11064240" cy="1005840"/>
-          </a:xfrm>
-          <a:prstGeom prst="roundRect">
-            <a:avLst>
-              <a:gd name="adj" fmla="val 7273"/>
-            </a:avLst>
-          </a:prstGeom>
-          <a:solidFill>
-            <a:schemeClr val="bg1"/>
-          </a:solidFill>
-          <a:ln w="12700">
-            <a:solidFill>
-              <a:schemeClr val="accent5"/>
-            </a:solidFill>
-            <a:prstDash val="solid"/>
-          </a:ln>
-          <a:effectLst>
-            <a:outerShdw sx="100000" sy="100000" kx="0" ky="0" algn="bl" rotWithShape="0" blurRad="127000" dist="38100" dir="5400000">
-              <a:srgbClr val="1A1F2B">
-                <a:alpha val="18000"/>
-              </a:srgbClr>
-            </a:outerShdw>
-          </a:effectLst>
-        </p:spPr>
-      </p:sp>
-      <p:sp>
-        <p:nvSpPr>
-          <p:cNvPr id="11" name="Text 9"/>
-          <p:cNvSpPr txBox="1"/>
-          <p:nvPr/>
-        </p:nvSpPr>
-        <p:spPr>
-          <a:xfrm>
-            <a:off x="822960" y="5257800"/>
-            <a:ext cx="3017520" cy="274320"/>
-          </a:xfrm>
-          <a:prstGeom prst="rect">
-            <a:avLst/>
-          </a:prstGeom>
-          <a:noFill/>
-          <a:ln/>
-        </p:spPr>
-        <p:txBody>
-          <a:bodyPr wrap="square" lIns="0" tIns="0" rIns="0" bIns="0" rtlCol="0" anchor="ctr"/>
-          <a:lstStyle/>
-          <a:p>
-            <a:pPr algn="l" indent="0" marL="0">
-              <a:buNone/>
-            </a:pPr>
-            <a:r>
-              <a:rPr lang="en-US" sz="1200" b="1" dirty="0">
-                <a:solidFill>
-                  <a:schemeClr val="accent1"/>
-                </a:solidFill>
-                <a:latin typeface="Calibri" pitchFamily="34" charset="0"/>
-                <a:ea typeface="Calibri" pitchFamily="34" charset="-122"/>
-                <a:cs typeface="Calibri" pitchFamily="34" charset="-120"/>
-              </a:rPr>
-              <a:t>Not yet tested: needs live credentials</a:t>
-            </a:r>
-            <a:endParaRPr lang="en-US" sz="1200" dirty="0"/>
-          </a:p>
-        </p:txBody>
-      </p:sp>
-      <p:sp>
-        <p:nvSpPr>
-          <p:cNvPr id="12" name="Text 10"/>
-          <p:cNvSpPr txBox="1"/>
-          <p:nvPr/>
-        </p:nvSpPr>
-        <p:spPr>
-          <a:xfrm>
-            <a:off x="822960" y="5532120"/>
-            <a:ext cx="10515600" cy="457200"/>
-          </a:xfrm>
-          <a:prstGeom prst="rect">
-            <a:avLst/>
-          </a:prstGeom>
-          <a:noFill/>
-          <a:ln/>
-        </p:spPr>
-        <p:txBody>
-          <a:bodyPr wrap="square" lIns="0" tIns="0" rIns="0" bIns="0" rtlCol="0" anchor="ctr"/>
-          <a:lstStyle/>
-          <a:p>
-            <a:pPr algn="l" indent="0" marL="0">
-              <a:lnSpc>
-                <a:spcPct val="125000"/>
-              </a:lnSpc>
-              <a:buNone/>
-            </a:pPr>
-            <a:r>
-              <a:rPr lang="en-US" sz="1200" dirty="0">
-                <a:solidFill>
-                  <a:schemeClr val="accent6"/>
-                </a:solidFill>
-                <a:latin typeface="Calibri" pitchFamily="34" charset="0"/>
-                <a:ea typeface="Calibri" pitchFamily="34" charset="-122"/>
-                <a:cs typeface="Calibri" pitchFamily="34" charset="-120"/>
-              </a:rPr>
-              <a:t>Live ServiceNow connectivity (instance hibernating)  ·  real Gmail SMTP delivery  ·  reminder firing on a real clock  ·  error-workflow delivery</a:t>
-            </a:r>
-            <a:endParaRPr lang="en-US" sz="1200" dirty="0"/>
-          </a:p>
-        </p:txBody>
-      </p:sp>
-      <p:sp>
-        <p:nvSpPr>
-          <p:cNvPr id="25" name="Slide Number Placeholder 0"/>
-          <p:cNvSpPr>
-            <a:spLocks noGrp="1"/>
-          </p:cNvSpPr>
-          <p:nvPr>
-            <p:ph type="sldNum" sz="quarter" idx="4294967295"/>
-          </p:nvPr>
-        </p:nvSpPr>
-        <p:spPr>
-          <a:xfrm>
-            <a:off x="11430000" y="6510528"/>
-            <a:ext cx="800000" cy="300000"/>
-          </a:xfrm>
-          <a:prstGeom prst="rect">
-            <a:avLst/>
-          </a:prstGeom>
-          <a:extLst>
-            <a:ext uri="{C572A759-6A51-4108-AA02-DFA0A04FC94B}">
-              <ma14:wrappingTextBoxFlag xmlns:ma14="http://schemas.microsoft.com/office/mac/drawingml/2011/main" val="0"/>
-            </a:ext>
-          </a:extLst>
-        </p:spPr>
-        <p:txBody>
-          <a:bodyPr/>
-          <a:lstStyle>
-            <a:lvl1pPr>
-              <a:defRPr sz="1000">
-                <a:solidFill>
-                  <a:schemeClr val="accent4"/>
-                </a:solidFill>
-                <a:latin typeface="Calibri"/>
-                <a:ea typeface="Calibri"/>
-                <a:cs typeface="Calibri"/>
-              </a:defRPr>
-            </a:lvl1pPr>
-          </a:lstStyle>
-          <a:p>
-            <a:pPr algn="l"/>
-            <a:fld id="{F7021451-1387-4CA6-816F-3879F97B5CBC}" type="slidenum">
-              <a:rPr b="0" lang="en-US"/>
               <a:t>15</a:t>
             </a:fld>
             <a:endParaRPr lang="en-US"/>
@@ -8321,7 +8401,7 @@
                 <a:ea typeface="Calibri" pitchFamily="34" charset="-122"/>
                 <a:cs typeface="Calibri" pitchFamily="34" charset="-120"/>
               </a:rPr>
-              <a:t>REPOSITORY</a:t>
+              <a:t>EXAMPLE</a:t>
             </a:r>
             <a:endParaRPr lang="en-US" sz="1300" dirty="0"/>
           </a:p>
@@ -8362,7 +8442,7 @@
                 <a:ea typeface="Cambria" pitchFamily="34" charset="-122"/>
                 <a:cs typeface="Cambria" pitchFamily="34" charset="-120"/>
               </a:rPr>
-              <a:t>github.com/Chethan616/n8n-epsilon  ·  public</a:t>
+              <a:t>What the team actually receives</a:t>
             </a:r>
             <a:endParaRPr lang="en-US" sz="3200" dirty="0"/>
           </a:p>
@@ -8376,12 +8456,12 @@
         </p:nvSpPr>
         <p:spPr>
           <a:xfrm>
-            <a:off x="548640" y="1783080"/>
-            <a:ext cx="5349240" cy="868680"/>
+            <a:off x="548640" y="1737360"/>
+            <a:ext cx="11064240" cy="4297680"/>
           </a:xfrm>
           <a:prstGeom prst="roundRect">
             <a:avLst>
-              <a:gd name="adj" fmla="val 8421"/>
+              <a:gd name="adj" fmla="val 1702"/>
             </a:avLst>
           </a:prstGeom>
           <a:solidFill>
@@ -8393,18 +8473,47 @@
             </a:solidFill>
             <a:prstDash val="solid"/>
           </a:ln>
-        </p:spPr>
-      </p:sp>
-      <p:sp>
-        <p:nvSpPr>
-          <p:cNvPr id="5" name="Text 3"/>
+          <a:effectLst>
+            <a:outerShdw sx="100000" sy="100000" kx="0" ky="0" algn="bl" rotWithShape="0" blurRad="127000" dist="38100" dir="5400000">
+              <a:srgbClr val="1A1F2B">
+                <a:alpha val="18000"/>
+              </a:srgbClr>
+            </a:outerShdw>
+          </a:effectLst>
+        </p:spPr>
+      </p:sp>
+      <p:sp>
+        <p:nvSpPr>
+          <p:cNvPr id="5" name="Shape 3"/>
+          <p:cNvSpPr/>
+          <p:nvPr/>
+        </p:nvSpPr>
+        <p:spPr>
+          <a:xfrm>
+            <a:off x="548640" y="1737360"/>
+            <a:ext cx="11064240" cy="502920"/>
+          </a:xfrm>
+          <a:prstGeom prst="roundRect">
+            <a:avLst>
+              <a:gd name="adj" fmla="val 9091"/>
+            </a:avLst>
+          </a:prstGeom>
+          <a:solidFill>
+            <a:schemeClr val="accent1"/>
+          </a:solidFill>
+          <a:ln/>
+        </p:spPr>
+      </p:sp>
+      <p:sp>
+        <p:nvSpPr>
+          <p:cNvPr id="6" name="Text 4"/>
           <p:cNvSpPr txBox="1"/>
           <p:nvPr/>
         </p:nvSpPr>
         <p:spPr>
           <a:xfrm>
-            <a:off x="777240" y="1874520"/>
-            <a:ext cx="4892040" cy="320040"/>
+            <a:off x="822960" y="1737360"/>
+            <a:ext cx="10515600" cy="502920"/>
           </a:xfrm>
           <a:prstGeom prst="rect">
             <a:avLst/>
@@ -8420,30 +8529,279 @@
               <a:buNone/>
             </a:pPr>
             <a:r>
-              <a:rPr lang="en-US" sz="1300" b="1" dirty="0">
-                <a:solidFill>
-                  <a:schemeClr val="accent2"/>
+              <a:rPr lang="en-US" sz="1400" b="1" dirty="0">
+                <a:solidFill>
+                  <a:srgbClr val="FFFFFF"/>
+                </a:solidFill>
+                <a:latin typeface="Calibri" pitchFamily="34" charset="0"/>
+                <a:ea typeface="Calibri" pitchFamily="34" charset="-122"/>
+                <a:cs typeface="Calibri" pitchFamily="34" charset="-120"/>
+              </a:rPr>
+              <a:t>[CRITICAL INCIDENT]  INC0010042 - Production application unavailable</a:t>
+            </a:r>
+            <a:endParaRPr lang="en-US" sz="1400" dirty="0"/>
+          </a:p>
+        </p:txBody>
+      </p:sp>
+      <p:sp>
+        <p:nvSpPr>
+          <p:cNvPr id="7" name="Text 5"/>
+          <p:cNvSpPr txBox="1"/>
+          <p:nvPr/>
+        </p:nvSpPr>
+        <p:spPr>
+          <a:xfrm>
+            <a:off x="868680" y="2423160"/>
+            <a:ext cx="10424160" cy="3429000"/>
+          </a:xfrm>
+          <a:prstGeom prst="rect">
+            <a:avLst/>
+          </a:prstGeom>
+          <a:noFill/>
+          <a:ln/>
+        </p:spPr>
+        <p:txBody>
+          <a:bodyPr wrap="square" lIns="0" tIns="0" rIns="0" bIns="0" rtlCol="0" anchor="ctr"/>
+          <a:lstStyle/>
+          <a:p>
+            <a:pPr algn="l" indent="0" marL="0">
+              <a:lnSpc>
+                <a:spcPct val="120000"/>
+              </a:lnSpc>
+              <a:buNone/>
+            </a:pPr>
+            <a:r>
+              <a:rPr lang="en-US" sz="1300" dirty="0">
+                <a:solidFill>
+                  <a:schemeClr val="tx1"/>
                 </a:solidFill>
                 <a:latin typeface="Courier New" pitchFamily="34" charset="0"/>
                 <a:ea typeface="Courier New" pitchFamily="34" charset="-122"/>
                 <a:cs typeface="Courier New" pitchFamily="34" charset="-120"/>
               </a:rPr>
-              <a:t>README.md</a:t>
+              <a:t>Hello Team,</a:t>
             </a:r>
             <a:endParaRPr lang="en-US" sz="1300" dirty="0"/>
           </a:p>
-        </p:txBody>
-      </p:sp>
-      <p:sp>
-        <p:nvSpPr>
-          <p:cNvPr id="6" name="Text 4"/>
+          <a:p>
+            <a:pPr algn="l" indent="0" marL="0">
+              <a:lnSpc>
+                <a:spcPct val="120000"/>
+              </a:lnSpc>
+              <a:buNone/>
+            </a:pPr>
+            <a:endParaRPr lang="en-US" sz="1300" dirty="0"/>
+          </a:p>
+          <a:p>
+            <a:pPr algn="l" indent="0" marL="0">
+              <a:lnSpc>
+                <a:spcPct val="120000"/>
+              </a:lnSpc>
+              <a:buNone/>
+            </a:pPr>
+            <a:r>
+              <a:rPr lang="en-US" sz="1300" dirty="0">
+                <a:solidFill>
+                  <a:schemeClr val="tx1"/>
+                </a:solidFill>
+                <a:latin typeface="Courier New" pitchFamily="34" charset="0"/>
+                <a:ea typeface="Courier New" pitchFamily="34" charset="-122"/>
+                <a:cs typeface="Courier New" pitchFamily="34" charset="-120"/>
+              </a:rPr>
+              <a:t>A critical incident has been detected in ServiceNow.</a:t>
+            </a:r>
+            <a:endParaRPr lang="en-US" sz="1300" dirty="0"/>
+          </a:p>
+          <a:p>
+            <a:pPr algn="l" indent="0" marL="0">
+              <a:lnSpc>
+                <a:spcPct val="120000"/>
+              </a:lnSpc>
+              <a:buNone/>
+            </a:pPr>
+            <a:endParaRPr lang="en-US" sz="1300" dirty="0"/>
+          </a:p>
+          <a:p>
+            <a:pPr algn="l" indent="0" marL="0">
+              <a:lnSpc>
+                <a:spcPct val="120000"/>
+              </a:lnSpc>
+              <a:buNone/>
+            </a:pPr>
+            <a:r>
+              <a:rPr lang="en-US" sz="1300" dirty="0">
+                <a:solidFill>
+                  <a:schemeClr val="tx1"/>
+                </a:solidFill>
+                <a:latin typeface="Courier New" pitchFamily="34" charset="0"/>
+                <a:ea typeface="Courier New" pitchFamily="34" charset="-122"/>
+                <a:cs typeface="Courier New" pitchFamily="34" charset="-120"/>
+              </a:rPr>
+              <a:t>  Incident:       INC0010042</a:t>
+            </a:r>
+            <a:endParaRPr lang="en-US" sz="1300" dirty="0"/>
+          </a:p>
+          <a:p>
+            <a:pPr algn="l" indent="0" marL="0">
+              <a:lnSpc>
+                <a:spcPct val="120000"/>
+              </a:lnSpc>
+              <a:buNone/>
+            </a:pPr>
+            <a:r>
+              <a:rPr lang="en-US" sz="1300" dirty="0">
+                <a:solidFill>
+                  <a:schemeClr val="tx1"/>
+                </a:solidFill>
+                <a:latin typeface="Courier New" pitchFamily="34" charset="0"/>
+                <a:ea typeface="Courier New" pitchFamily="34" charset="-122"/>
+                <a:cs typeface="Courier New" pitchFamily="34" charset="-120"/>
+              </a:rPr>
+              <a:t>  Priority:       1 - Critical</a:t>
+            </a:r>
+            <a:endParaRPr lang="en-US" sz="1300" dirty="0"/>
+          </a:p>
+          <a:p>
+            <a:pPr algn="l" indent="0" marL="0">
+              <a:lnSpc>
+                <a:spcPct val="120000"/>
+              </a:lnSpc>
+              <a:buNone/>
+            </a:pPr>
+            <a:r>
+              <a:rPr lang="en-US" sz="1300" dirty="0">
+                <a:solidFill>
+                  <a:schemeClr val="tx1"/>
+                </a:solidFill>
+                <a:latin typeface="Courier New" pitchFamily="34" charset="0"/>
+                <a:ea typeface="Courier New" pitchFamily="34" charset="-122"/>
+                <a:cs typeface="Courier New" pitchFamily="34" charset="-120"/>
+              </a:rPr>
+              <a:t>  Status:         In Progress</a:t>
+            </a:r>
+            <a:endParaRPr lang="en-US" sz="1300" dirty="0"/>
+          </a:p>
+          <a:p>
+            <a:pPr algn="l" indent="0" marL="0">
+              <a:lnSpc>
+                <a:spcPct val="120000"/>
+              </a:lnSpc>
+              <a:buNone/>
+            </a:pPr>
+            <a:r>
+              <a:rPr lang="en-US" sz="1300" dirty="0">
+                <a:solidFill>
+                  <a:schemeClr val="tx1"/>
+                </a:solidFill>
+                <a:latin typeface="Courier New" pitchFamily="34" charset="0"/>
+                <a:ea typeface="Courier New" pitchFamily="34" charset="-122"/>
+                <a:cs typeface="Courier New" pitchFamily="34" charset="-120"/>
+              </a:rPr>
+              <a:t>  Assigned to:    Example User</a:t>
+            </a:r>
+            <a:endParaRPr lang="en-US" sz="1300" dirty="0"/>
+          </a:p>
+          <a:p>
+            <a:pPr algn="l" indent="0" marL="0">
+              <a:lnSpc>
+                <a:spcPct val="120000"/>
+              </a:lnSpc>
+              <a:buNone/>
+            </a:pPr>
+            <a:r>
+              <a:rPr lang="en-US" sz="1300" dirty="0">
+                <a:solidFill>
+                  <a:schemeClr val="tx1"/>
+                </a:solidFill>
+                <a:latin typeface="Courier New" pitchFamily="34" charset="0"/>
+                <a:ea typeface="Courier New" pitchFamily="34" charset="-122"/>
+                <a:cs typeface="Courier New" pitchFamily="34" charset="-120"/>
+              </a:rPr>
+              <a:t>  Description:    Production application unavailable</a:t>
+            </a:r>
+            <a:endParaRPr lang="en-US" sz="1300" dirty="0"/>
+          </a:p>
+          <a:p>
+            <a:pPr algn="l" indent="0" marL="0">
+              <a:lnSpc>
+                <a:spcPct val="120000"/>
+              </a:lnSpc>
+              <a:buNone/>
+            </a:pPr>
+            <a:r>
+              <a:rPr lang="en-US" sz="1300" dirty="0">
+                <a:solidFill>
+                  <a:schemeClr val="tx1"/>
+                </a:solidFill>
+                <a:latin typeface="Courier New" pitchFamily="34" charset="0"/>
+                <a:ea typeface="Courier New" pitchFamily="34" charset="-122"/>
+                <a:cs typeface="Courier New" pitchFamily="34" charset="-120"/>
+              </a:rPr>
+              <a:t>  Last updated:   2026-10-25 09:58 UTC</a:t>
+            </a:r>
+            <a:endParaRPr lang="en-US" sz="1300" dirty="0"/>
+          </a:p>
+          <a:p>
+            <a:pPr algn="l" indent="0" marL="0">
+              <a:lnSpc>
+                <a:spcPct val="120000"/>
+              </a:lnSpc>
+              <a:buNone/>
+            </a:pPr>
+            <a:endParaRPr lang="en-US" sz="1300" dirty="0"/>
+          </a:p>
+          <a:p>
+            <a:pPr algn="l" indent="0" marL="0">
+              <a:lnSpc>
+                <a:spcPct val="120000"/>
+              </a:lnSpc>
+              <a:buNone/>
+            </a:pPr>
+            <a:r>
+              <a:rPr lang="en-US" sz="1300" dirty="0">
+                <a:solidFill>
+                  <a:schemeClr val="tx1"/>
+                </a:solidFill>
+                <a:latin typeface="Courier New" pitchFamily="34" charset="0"/>
+                <a:ea typeface="Courier New" pitchFamily="34" charset="-122"/>
+                <a:cs typeface="Courier New" pitchFamily="34" charset="-120"/>
+              </a:rPr>
+              <a:t>Please investigate this incident as soon as possible.</a:t>
+            </a:r>
+            <a:endParaRPr lang="en-US" sz="1300" dirty="0"/>
+          </a:p>
+          <a:p>
+            <a:pPr algn="l" indent="0" marL="0">
+              <a:lnSpc>
+                <a:spcPct val="120000"/>
+              </a:lnSpc>
+              <a:buNone/>
+            </a:pPr>
+            <a:r>
+              <a:rPr lang="en-US" sz="1300" dirty="0">
+                <a:solidFill>
+                  <a:schemeClr val="tx1"/>
+                </a:solidFill>
+                <a:latin typeface="Courier New" pitchFamily="34" charset="0"/>
+                <a:ea typeface="Courier New" pitchFamily="34" charset="-122"/>
+                <a:cs typeface="Courier New" pitchFamily="34" charset="-120"/>
+              </a:rPr>
+              <a:t>View incident: https://dev421307.service-now.com/nav_to.do?...</a:t>
+            </a:r>
+            <a:endParaRPr lang="en-US" sz="1300" dirty="0"/>
+          </a:p>
+        </p:txBody>
+      </p:sp>
+      <p:sp>
+        <p:nvSpPr>
+          <p:cNvPr id="8" name="Text 6"/>
           <p:cNvSpPr txBox="1"/>
           <p:nvPr/>
         </p:nvSpPr>
         <p:spPr>
           <a:xfrm>
-            <a:off x="777240" y="2221992"/>
-            <a:ext cx="4892040" cy="365760"/>
+            <a:off x="548640" y="6172200"/>
+            <a:ext cx="11064240" cy="365760"/>
           </a:xfrm>
           <a:prstGeom prst="rect">
             <a:avLst/>
@@ -8459,29 +8817,330 @@
               <a:buNone/>
             </a:pPr>
             <a:r>
-              <a:rPr lang="en-US" sz="1150" dirty="0">
-                <a:solidFill>
-                  <a:schemeClr val="accent6"/>
+              <a:rPr lang="en-US" sz="1200" i="1" dirty="0">
+                <a:solidFill>
+                  <a:schemeClr val="accent4"/>
                 </a:solidFill>
                 <a:latin typeface="Calibri" pitchFamily="34" charset="0"/>
                 <a:ea typeface="Calibri" pitchFamily="34" charset="-122"/>
                 <a:cs typeface="Calibri" pitchFamily="34" charset="-120"/>
               </a:rPr>
-              <a:t>Overview, architecture diagram, setup</a:t>
-            </a:r>
-            <a:endParaRPr lang="en-US" sz="1150" dirty="0"/>
-          </a:p>
-        </p:txBody>
-      </p:sp>
-      <p:sp>
-        <p:nvSpPr>
-          <p:cNvPr id="7" name="Shape 5"/>
+              <a:t>A reminder reuses this template with a [REMINDER] subject prefix and a one-line note that the incident is still unresolved.</a:t>
+            </a:r>
+            <a:endParaRPr lang="en-US" sz="1200" dirty="0"/>
+          </a:p>
+        </p:txBody>
+      </p:sp>
+      <p:sp>
+        <p:nvSpPr>
+          <p:cNvPr id="25" name="Slide Number Placeholder 0"/>
+          <p:cNvSpPr>
+            <a:spLocks noGrp="1"/>
+          </p:cNvSpPr>
+          <p:nvPr>
+            <p:ph type="sldNum" sz="quarter" idx="4294967295"/>
+          </p:nvPr>
+        </p:nvSpPr>
+        <p:spPr>
+          <a:xfrm>
+            <a:off x="11430000" y="6510528"/>
+            <a:ext cx="800000" cy="300000"/>
+          </a:xfrm>
+          <a:prstGeom prst="rect">
+            <a:avLst/>
+          </a:prstGeom>
+          <a:extLst>
+            <a:ext uri="{C572A759-6A51-4108-AA02-DFA0A04FC94B}">
+              <ma14:wrappingTextBoxFlag xmlns:ma14="http://schemas.microsoft.com/office/mac/drawingml/2011/main" val="0"/>
+            </a:ext>
+          </a:extLst>
+        </p:spPr>
+        <p:txBody>
+          <a:bodyPr/>
+          <a:lstStyle>
+            <a:lvl1pPr>
+              <a:defRPr sz="1000">
+                <a:solidFill>
+                  <a:schemeClr val="accent4"/>
+                </a:solidFill>
+                <a:latin typeface="Calibri"/>
+                <a:ea typeface="Calibri"/>
+                <a:cs typeface="Calibri"/>
+              </a:defRPr>
+            </a:lvl1pPr>
+          </a:lstStyle>
+          <a:p>
+            <a:pPr algn="l"/>
+            <a:fld id="{F7021451-1387-4CA6-816F-3879F97B5CBC}" type="slidenum">
+              <a:rPr b="0" lang="en-US"/>
+              <a:t>16</a:t>
+            </a:fld>
+            <a:endParaRPr lang="en-US"/>
+          </a:p>
+        </p:txBody>
+      </p:sp>
+    </p:spTree>
+  </p:cSld>
+  <p:clrMapOvr>
+    <a:masterClrMapping/>
+  </p:clrMapOvr>
+</p:sld>
+</file>
+
+<file path=ppt/slides/slide17.xml><?xml version="1.0" encoding="utf-8"?>
+<p:sld xmlns:a="http://schemas.openxmlformats.org/drawingml/2006/main" xmlns:r="http://schemas.openxmlformats.org/officeDocument/2006/relationships" xmlns:p="http://schemas.openxmlformats.org/presentationml/2006/main">
+  <p:cSld name="Slide 17">
+    <p:spTree>
+      <p:nvGrpSpPr>
+        <p:cNvPr id="1" name=""/>
+        <p:cNvGrpSpPr/>
+        <p:nvPr/>
+      </p:nvGrpSpPr>
+      <p:grpSpPr>
+        <a:xfrm>
+          <a:off x="0" y="0"/>
+          <a:ext cx="0" cy="0"/>
+          <a:chOff x="0" y="0"/>
+          <a:chExt cx="0" cy="0"/>
+        </a:xfrm>
+      </p:grpSpPr>
+      <p:sp>
+        <p:nvSpPr>
+          <p:cNvPr id="2" name="Text 0"/>
+          <p:cNvSpPr txBox="1"/>
+          <p:nvPr/>
+        </p:nvSpPr>
+        <p:spPr>
+          <a:xfrm>
+            <a:off x="822960" y="2011680"/>
+            <a:ext cx="9144000" cy="365760"/>
+          </a:xfrm>
+          <a:prstGeom prst="rect">
+            <a:avLst/>
+          </a:prstGeom>
+          <a:noFill/>
+          <a:ln/>
+        </p:spPr>
+        <p:txBody>
+          <a:bodyPr wrap="square" lIns="0" tIns="0" rIns="0" bIns="0" rtlCol="0" anchor="ctr"/>
+          <a:lstStyle/>
+          <a:p>
+            <a:pPr algn="l" indent="0" marL="0">
+              <a:buNone/>
+            </a:pPr>
+            <a:r>
+              <a:rPr lang="en-US" sz="1400" b="1" spc="200" kern="0" dirty="0">
+                <a:solidFill>
+                  <a:schemeClr val="accent1"/>
+                </a:solidFill>
+                <a:latin typeface="Calibri" pitchFamily="34" charset="0"/>
+                <a:ea typeface="Calibri" pitchFamily="34" charset="-122"/>
+                <a:cs typeface="Calibri" pitchFamily="34" charset="-120"/>
+              </a:rPr>
+              <a:t>03 · DELIVERY</a:t>
+            </a:r>
+            <a:endParaRPr lang="en-US" sz="1400" dirty="0"/>
+          </a:p>
+        </p:txBody>
+      </p:sp>
+      <p:sp>
+        <p:nvSpPr>
+          <p:cNvPr id="3" name="Text 0"/>
           <p:cNvSpPr/>
-          <p:nvPr/>
-        </p:nvSpPr>
-        <p:spPr>
-          <a:xfrm>
-            <a:off x="6263640" y="1783080"/>
+          <p:nvPr>
+            <p:ph idx="100" type="title" hasCustomPrompt="1"/>
+          </p:nvPr>
+        </p:nvSpPr>
+        <p:spPr>
+          <a:xfrm>
+            <a:off x="822960" y="2743200"/>
+            <a:ext cx="10515600" cy="1463040"/>
+          </a:xfrm>
+          <a:prstGeom prst="rect">
+            <a:avLst/>
+          </a:prstGeom>
+          <a:noFill/>
+          <a:ln/>
+        </p:spPr>
+        <p:txBody>
+          <a:bodyPr wrap="square" rtlCol="0"/>
+          <a:lstStyle/>
+          <a:p>
+            <a:pPr algn="l" indent="0" marL="0">
+              <a:buNone/>
+            </a:pPr>
+            <a:r>
+              <a:rPr lang="en-US" sz="4000" b="1" dirty="0">
+                <a:solidFill>
+                  <a:schemeClr val="bg1"/>
+                </a:solidFill>
+                <a:latin typeface="Cambria" pitchFamily="34" charset="0"/>
+                <a:ea typeface="Cambria" pitchFamily="34" charset="-122"/>
+                <a:cs typeface="Cambria" pitchFamily="34" charset="-120"/>
+              </a:rPr>
+              <a:t>Where it all lives</a:t>
+            </a:r>
+            <a:endParaRPr lang="en-US" sz="4000" dirty="0"/>
+          </a:p>
+        </p:txBody>
+      </p:sp>
+      <p:sp>
+        <p:nvSpPr>
+          <p:cNvPr id="4" name="Text 0"/>
+          <p:cNvSpPr/>
+          <p:nvPr>
+            <p:ph idx="101" type="body" hasCustomPrompt="1"/>
+          </p:nvPr>
+        </p:nvSpPr>
+        <p:spPr>
+          <a:xfrm>
+            <a:off x="822960" y="4160520"/>
+            <a:ext cx="9601200" cy="1097280"/>
+          </a:xfrm>
+          <a:prstGeom prst="rect">
+            <a:avLst/>
+          </a:prstGeom>
+          <a:noFill/>
+          <a:ln/>
+        </p:spPr>
+        <p:txBody>
+          <a:bodyPr wrap="square" rtlCol="0"/>
+          <a:lstStyle/>
+          <a:p>
+            <a:pPr algn="l" indent="0" marL="0">
+              <a:buNone/>
+            </a:pPr>
+            <a:r>
+              <a:rPr lang="en-US" sz="1600" dirty="0">
+                <a:solidFill>
+                  <a:srgbClr val="AEB8C9"/>
+                </a:solidFill>
+                <a:latin typeface="Calibri" pitchFamily="34" charset="0"/>
+                <a:ea typeface="Calibri" pitchFamily="34" charset="-122"/>
+                <a:cs typeface="Calibri" pitchFamily="34" charset="-120"/>
+              </a:rPr>
+              <a:t>A public GitHub repo with the workflow, the design docs, and everything needed to run it.</a:t>
+            </a:r>
+            <a:endParaRPr lang="en-US" sz="1600" dirty="0"/>
+          </a:p>
+        </p:txBody>
+      </p:sp>
+    </p:spTree>
+  </p:cSld>
+  <p:clrMapOvr>
+    <a:masterClrMapping/>
+  </p:clrMapOvr>
+</p:sld>
+</file>
+
+<file path=ppt/slides/slide18.xml><?xml version="1.0" encoding="utf-8"?>
+<p:sld xmlns:a="http://schemas.openxmlformats.org/drawingml/2006/main" xmlns:r="http://schemas.openxmlformats.org/officeDocument/2006/relationships" xmlns:p="http://schemas.openxmlformats.org/presentationml/2006/main">
+  <p:cSld name="Slide 18">
+    <p:spTree>
+      <p:nvGrpSpPr>
+        <p:cNvPr id="1" name=""/>
+        <p:cNvGrpSpPr/>
+        <p:nvPr/>
+      </p:nvGrpSpPr>
+      <p:grpSpPr>
+        <a:xfrm>
+          <a:off x="0" y="0"/>
+          <a:ext cx="0" cy="0"/>
+          <a:chOff x="0" y="0"/>
+          <a:chExt cx="0" cy="0"/>
+        </a:xfrm>
+      </p:grpSpPr>
+      <p:sp>
+        <p:nvSpPr>
+          <p:cNvPr id="2" name="Text 0"/>
+          <p:cNvSpPr/>
+          <p:nvPr>
+            <p:ph idx="100" type="body" hasCustomPrompt="1"/>
+          </p:nvPr>
+        </p:nvSpPr>
+        <p:spPr>
+          <a:xfrm>
+            <a:off x="548640" y="384048"/>
+            <a:ext cx="9144000" cy="320040"/>
+          </a:xfrm>
+          <a:prstGeom prst="rect">
+            <a:avLst/>
+          </a:prstGeom>
+          <a:noFill/>
+          <a:ln/>
+        </p:spPr>
+        <p:txBody>
+          <a:bodyPr wrap="square" rtlCol="0"/>
+          <a:lstStyle/>
+          <a:p>
+            <a:pPr algn="l" indent="0" marL="0">
+              <a:buNone/>
+            </a:pPr>
+            <a:r>
+              <a:rPr lang="en-US" sz="1300" b="1" spc="200" kern="0" dirty="0">
+                <a:solidFill>
+                  <a:schemeClr val="accent2"/>
+                </a:solidFill>
+                <a:latin typeface="Calibri" pitchFamily="34" charset="0"/>
+                <a:ea typeface="Calibri" pitchFamily="34" charset="-122"/>
+                <a:cs typeface="Calibri" pitchFamily="34" charset="-120"/>
+              </a:rPr>
+              <a:t>REPOSITORY</a:t>
+            </a:r>
+            <a:endParaRPr lang="en-US" sz="1300" dirty="0"/>
+          </a:p>
+        </p:txBody>
+      </p:sp>
+      <p:sp>
+        <p:nvSpPr>
+          <p:cNvPr id="3" name="Text 0"/>
+          <p:cNvSpPr/>
+          <p:nvPr>
+            <p:ph idx="101" type="title" hasCustomPrompt="1"/>
+          </p:nvPr>
+        </p:nvSpPr>
+        <p:spPr>
+          <a:xfrm>
+            <a:off x="548640" y="713232"/>
+            <a:ext cx="11064240" cy="777240"/>
+          </a:xfrm>
+          <a:prstGeom prst="rect">
+            <a:avLst/>
+          </a:prstGeom>
+          <a:noFill/>
+          <a:ln/>
+        </p:spPr>
+        <p:txBody>
+          <a:bodyPr wrap="square" rtlCol="0"/>
+          <a:lstStyle/>
+          <a:p>
+            <a:pPr algn="l" indent="0" marL="0">
+              <a:buNone/>
+            </a:pPr>
+            <a:r>
+              <a:rPr lang="en-US" sz="3200" b="1" dirty="0">
+                <a:solidFill>
+                  <a:schemeClr val="tx1"/>
+                </a:solidFill>
+                <a:latin typeface="Cambria" pitchFamily="34" charset="0"/>
+                <a:ea typeface="Cambria" pitchFamily="34" charset="-122"/>
+                <a:cs typeface="Cambria" pitchFamily="34" charset="-120"/>
+              </a:rPr>
+              <a:t>github.com/Chethan616/n8n-epsilon  ·  public</a:t>
+            </a:r>
+            <a:endParaRPr lang="en-US" sz="3200" dirty="0"/>
+          </a:p>
+        </p:txBody>
+      </p:sp>
+      <p:sp>
+        <p:nvSpPr>
+          <p:cNvPr id="4" name="Shape 2"/>
+          <p:cNvSpPr/>
+          <p:nvPr/>
+        </p:nvSpPr>
+        <p:spPr>
+          <a:xfrm>
+            <a:off x="548640" y="1783080"/>
             <a:ext cx="5349240" cy="868680"/>
           </a:xfrm>
           <a:prstGeom prst="roundRect">
@@ -8502,13 +9161,13 @@
       </p:sp>
       <p:sp>
         <p:nvSpPr>
-          <p:cNvPr id="8" name="Text 6"/>
+          <p:cNvPr id="5" name="Text 3"/>
           <p:cNvSpPr txBox="1"/>
           <p:nvPr/>
         </p:nvSpPr>
         <p:spPr>
           <a:xfrm>
-            <a:off x="6492240" y="1874520"/>
+            <a:off x="777240" y="1874520"/>
             <a:ext cx="4892040" cy="320040"/>
           </a:xfrm>
           <a:prstGeom prst="rect">
@@ -8533,7 +9192,7 @@
                 <a:ea typeface="Courier New" pitchFamily="34" charset="-122"/>
                 <a:cs typeface="Courier New" pitchFamily="34" charset="-120"/>
               </a:rPr>
-              <a:t>plan.md</a:t>
+              <a:t>README.md</a:t>
             </a:r>
             <a:endParaRPr lang="en-US" sz="1300" dirty="0"/>
           </a:p>
@@ -8541,13 +9200,13 @@
       </p:sp>
       <p:sp>
         <p:nvSpPr>
-          <p:cNvPr id="9" name="Text 7"/>
+          <p:cNvPr id="6" name="Text 4"/>
           <p:cNvSpPr txBox="1"/>
           <p:nvPr/>
         </p:nvSpPr>
         <p:spPr>
           <a:xfrm>
-            <a:off x="6492240" y="2221992"/>
+            <a:off x="777240" y="2221992"/>
             <a:ext cx="4892040" cy="365760"/>
           </a:xfrm>
           <a:prstGeom prst="rect">
@@ -8572,7 +9231,7 @@
                 <a:ea typeface="Calibri" pitchFamily="34" charset="-122"/>
                 <a:cs typeface="Calibri" pitchFamily="34" charset="-120"/>
               </a:rPr>
-              <a:t>Reminder + claim-based design, task split</a:t>
+              <a:t>Overview, architecture diagram, setup</a:t>
             </a:r>
             <a:endParaRPr lang="en-US" sz="1150" dirty="0"/>
           </a:p>
@@ -8580,13 +9239,13 @@
       </p:sp>
       <p:sp>
         <p:nvSpPr>
-          <p:cNvPr id="10" name="Shape 8"/>
+          <p:cNvPr id="7" name="Shape 5"/>
           <p:cNvSpPr/>
           <p:nvPr/>
         </p:nvSpPr>
         <p:spPr>
           <a:xfrm>
-            <a:off x="548640" y="2816352"/>
+            <a:off x="6263640" y="1783080"/>
             <a:ext cx="5349240" cy="868680"/>
           </a:xfrm>
           <a:prstGeom prst="roundRect">
@@ -8607,13 +9266,13 @@
       </p:sp>
       <p:sp>
         <p:nvSpPr>
-          <p:cNvPr id="11" name="Text 9"/>
+          <p:cNvPr id="8" name="Text 6"/>
           <p:cNvSpPr txBox="1"/>
           <p:nvPr/>
         </p:nvSpPr>
         <p:spPr>
           <a:xfrm>
-            <a:off x="777240" y="2907792"/>
+            <a:off x="6492240" y="1874520"/>
             <a:ext cx="4892040" cy="320040"/>
           </a:xfrm>
           <a:prstGeom prst="rect">
@@ -8638,7 +9297,7 @@
                 <a:ea typeface="Courier New" pitchFamily="34" charset="-122"/>
                 <a:cs typeface="Courier New" pitchFamily="34" charset="-120"/>
               </a:rPr>
-              <a:t>docs/architecture.md</a:t>
+              <a:t>plan.md</a:t>
             </a:r>
             <a:endParaRPr lang="en-US" sz="1300" dirty="0"/>
           </a:p>
@@ -8646,13 +9305,13 @@
       </p:sp>
       <p:sp>
         <p:nvSpPr>
-          <p:cNvPr id="12" name="Text 10"/>
+          <p:cNvPr id="9" name="Text 7"/>
           <p:cNvSpPr txBox="1"/>
           <p:nvPr/>
         </p:nvSpPr>
         <p:spPr>
           <a:xfrm>
-            <a:off x="777240" y="3255264"/>
+            <a:off x="6492240" y="2221992"/>
             <a:ext cx="4892040" cy="365760"/>
           </a:xfrm>
           <a:prstGeom prst="rect">
@@ -8677,7 +9336,7 @@
                 <a:ea typeface="Calibri" pitchFamily="34" charset="-122"/>
                 <a:cs typeface="Calibri" pitchFamily="34" charset="-120"/>
               </a:rPr>
-              <a:t>Full design doc</a:t>
+              <a:t>Reminder + claim-based design, task split</a:t>
             </a:r>
             <a:endParaRPr lang="en-US" sz="1150" dirty="0"/>
           </a:p>
@@ -8685,13 +9344,13 @@
       </p:sp>
       <p:sp>
         <p:nvSpPr>
-          <p:cNvPr id="13" name="Shape 11"/>
+          <p:cNvPr id="10" name="Shape 8"/>
           <p:cNvSpPr/>
           <p:nvPr/>
         </p:nvSpPr>
         <p:spPr>
           <a:xfrm>
-            <a:off x="6263640" y="2816352"/>
+            <a:off x="548640" y="2816352"/>
             <a:ext cx="5349240" cy="868680"/>
           </a:xfrm>
           <a:prstGeom prst="roundRect">
@@ -8712,13 +9371,13 @@
       </p:sp>
       <p:sp>
         <p:nvSpPr>
-          <p:cNvPr id="14" name="Text 12"/>
+          <p:cNvPr id="11" name="Text 9"/>
           <p:cNvSpPr txBox="1"/>
           <p:nvPr/>
         </p:nvSpPr>
         <p:spPr>
           <a:xfrm>
-            <a:off x="6492240" y="2907792"/>
+            <a:off x="777240" y="2907792"/>
             <a:ext cx="4892040" cy="320040"/>
           </a:xfrm>
           <a:prstGeom prst="rect">
@@ -8743,7 +9402,7 @@
                 <a:ea typeface="Courier New" pitchFamily="34" charset="-122"/>
                 <a:cs typeface="Courier New" pitchFamily="34" charset="-120"/>
               </a:rPr>
-              <a:t>docs/test-results.md</a:t>
+              <a:t>docs/architecture.md</a:t>
             </a:r>
             <a:endParaRPr lang="en-US" sz="1300" dirty="0"/>
           </a:p>
@@ -8751,13 +9410,13 @@
       </p:sp>
       <p:sp>
         <p:nvSpPr>
-          <p:cNvPr id="15" name="Text 13"/>
+          <p:cNvPr id="12" name="Text 10"/>
           <p:cNvSpPr txBox="1"/>
           <p:nvPr/>
         </p:nvSpPr>
         <p:spPr>
           <a:xfrm>
-            <a:off x="6492240" y="3255264"/>
+            <a:off x="777240" y="3255264"/>
             <a:ext cx="4892040" cy="365760"/>
           </a:xfrm>
           <a:prstGeom prst="rect">
@@ -8782,7 +9441,7 @@
                 <a:ea typeface="Calibri" pitchFamily="34" charset="-122"/>
                 <a:cs typeface="Calibri" pitchFamily="34" charset="-120"/>
               </a:rPr>
-              <a:t>Unit + end-to-end results</a:t>
+              <a:t>Full design doc</a:t>
             </a:r>
             <a:endParaRPr lang="en-US" sz="1150" dirty="0"/>
           </a:p>
@@ -8790,13 +9449,13 @@
       </p:sp>
       <p:sp>
         <p:nvSpPr>
-          <p:cNvPr id="16" name="Shape 14"/>
+          <p:cNvPr id="13" name="Shape 11"/>
           <p:cNvSpPr/>
           <p:nvPr/>
         </p:nvSpPr>
         <p:spPr>
           <a:xfrm>
-            <a:off x="548640" y="3849624"/>
+            <a:off x="6263640" y="2816352"/>
             <a:ext cx="5349240" cy="868680"/>
           </a:xfrm>
           <a:prstGeom prst="roundRect">
@@ -8817,13 +9476,13 @@
       </p:sp>
       <p:sp>
         <p:nvSpPr>
-          <p:cNvPr id="17" name="Text 15"/>
+          <p:cNvPr id="14" name="Text 12"/>
           <p:cNvSpPr txBox="1"/>
           <p:nvPr/>
         </p:nvSpPr>
         <p:spPr>
           <a:xfrm>
-            <a:off x="777240" y="3941064"/>
+            <a:off x="6492240" y="2907792"/>
             <a:ext cx="4892040" cy="320040"/>
           </a:xfrm>
           <a:prstGeom prst="rect">
@@ -8848,7 +9507,7 @@
                 <a:ea typeface="Courier New" pitchFamily="34" charset="-122"/>
                 <a:cs typeface="Courier New" pitchFamily="34" charset="-120"/>
               </a:rPr>
-              <a:t>workflows/*.json</a:t>
+              <a:t>docs/test-results.md</a:t>
             </a:r>
             <a:endParaRPr lang="en-US" sz="1300" dirty="0"/>
           </a:p>
@@ -8856,13 +9515,13 @@
       </p:sp>
       <p:sp>
         <p:nvSpPr>
-          <p:cNvPr id="18" name="Text 16"/>
+          <p:cNvPr id="15" name="Text 13"/>
           <p:cNvSpPr txBox="1"/>
           <p:nvPr/>
         </p:nvSpPr>
         <p:spPr>
           <a:xfrm>
-            <a:off x="777240" y="4288536"/>
+            <a:off x="6492240" y="3255264"/>
             <a:ext cx="4892040" cy="365760"/>
           </a:xfrm>
           <a:prstGeom prst="rect">
@@ -8887,7 +9546,7 @@
                 <a:ea typeface="Calibri" pitchFamily="34" charset="-122"/>
                 <a:cs typeface="Calibri" pitchFamily="34" charset="-120"/>
               </a:rPr>
-              <a:t>Importable n8n workflow + error handler</a:t>
+              <a:t>Unit + end-to-end results</a:t>
             </a:r>
             <a:endParaRPr lang="en-US" sz="1150" dirty="0"/>
           </a:p>
@@ -8895,13 +9554,13 @@
       </p:sp>
       <p:sp>
         <p:nvSpPr>
-          <p:cNvPr id="19" name="Shape 17"/>
+          <p:cNvPr id="16" name="Shape 14"/>
           <p:cNvSpPr/>
           <p:nvPr/>
         </p:nvSpPr>
         <p:spPr>
           <a:xfrm>
-            <a:off x="6263640" y="3849624"/>
+            <a:off x="548640" y="3849624"/>
             <a:ext cx="5349240" cy="868680"/>
           </a:xfrm>
           <a:prstGeom prst="roundRect">
@@ -8922,6 +9581,111 @@
       </p:sp>
       <p:sp>
         <p:nvSpPr>
+          <p:cNvPr id="17" name="Text 15"/>
+          <p:cNvSpPr txBox="1"/>
+          <p:nvPr/>
+        </p:nvSpPr>
+        <p:spPr>
+          <a:xfrm>
+            <a:off x="777240" y="3941064"/>
+            <a:ext cx="4892040" cy="320040"/>
+          </a:xfrm>
+          <a:prstGeom prst="rect">
+            <a:avLst/>
+          </a:prstGeom>
+          <a:noFill/>
+          <a:ln/>
+        </p:spPr>
+        <p:txBody>
+          <a:bodyPr wrap="square" lIns="0" tIns="0" rIns="0" bIns="0" rtlCol="0" anchor="ctr"/>
+          <a:lstStyle/>
+          <a:p>
+            <a:pPr algn="l" indent="0" marL="0">
+              <a:buNone/>
+            </a:pPr>
+            <a:r>
+              <a:rPr lang="en-US" sz="1300" b="1" dirty="0">
+                <a:solidFill>
+                  <a:schemeClr val="accent2"/>
+                </a:solidFill>
+                <a:latin typeface="Courier New" pitchFamily="34" charset="0"/>
+                <a:ea typeface="Courier New" pitchFamily="34" charset="-122"/>
+                <a:cs typeface="Courier New" pitchFamily="34" charset="-120"/>
+              </a:rPr>
+              <a:t>workflows/*.json</a:t>
+            </a:r>
+            <a:endParaRPr lang="en-US" sz="1300" dirty="0"/>
+          </a:p>
+        </p:txBody>
+      </p:sp>
+      <p:sp>
+        <p:nvSpPr>
+          <p:cNvPr id="18" name="Text 16"/>
+          <p:cNvSpPr txBox="1"/>
+          <p:nvPr/>
+        </p:nvSpPr>
+        <p:spPr>
+          <a:xfrm>
+            <a:off x="777240" y="4288536"/>
+            <a:ext cx="4892040" cy="365760"/>
+          </a:xfrm>
+          <a:prstGeom prst="rect">
+            <a:avLst/>
+          </a:prstGeom>
+          <a:noFill/>
+          <a:ln/>
+        </p:spPr>
+        <p:txBody>
+          <a:bodyPr wrap="square" lIns="0" tIns="0" rIns="0" bIns="0" rtlCol="0" anchor="ctr"/>
+          <a:lstStyle/>
+          <a:p>
+            <a:pPr algn="l" indent="0" marL="0">
+              <a:buNone/>
+            </a:pPr>
+            <a:r>
+              <a:rPr lang="en-US" sz="1150" dirty="0">
+                <a:solidFill>
+                  <a:schemeClr val="accent6"/>
+                </a:solidFill>
+                <a:latin typeface="Calibri" pitchFamily="34" charset="0"/>
+                <a:ea typeface="Calibri" pitchFamily="34" charset="-122"/>
+                <a:cs typeface="Calibri" pitchFamily="34" charset="-120"/>
+              </a:rPr>
+              <a:t>Importable n8n workflow + error handler</a:t>
+            </a:r>
+            <a:endParaRPr lang="en-US" sz="1150" dirty="0"/>
+          </a:p>
+        </p:txBody>
+      </p:sp>
+      <p:sp>
+        <p:nvSpPr>
+          <p:cNvPr id="19" name="Shape 17"/>
+          <p:cNvSpPr/>
+          <p:nvPr/>
+        </p:nvSpPr>
+        <p:spPr>
+          <a:xfrm>
+            <a:off x="6263640" y="3849624"/>
+            <a:ext cx="5349240" cy="868680"/>
+          </a:xfrm>
+          <a:prstGeom prst="roundRect">
+            <a:avLst>
+              <a:gd name="adj" fmla="val 8421"/>
+            </a:avLst>
+          </a:prstGeom>
+          <a:solidFill>
+            <a:schemeClr val="bg1"/>
+          </a:solidFill>
+          <a:ln w="12700">
+            <a:solidFill>
+              <a:schemeClr val="accent5"/>
+            </a:solidFill>
+            <a:prstDash val="solid"/>
+          </a:ln>
+        </p:spPr>
+      </p:sp>
+      <p:sp>
+        <p:nvSpPr>
           <p:cNvPr id="20" name="Text 18"/>
           <p:cNvSpPr txBox="1"/>
           <p:nvPr/>
@@ -9040,7 +9804,7 @@
             <a:pPr algn="l"/>
             <a:fld id="{F7021451-1387-4CA6-816F-3879F97B5CBC}" type="slidenum">
               <a:rPr b="0" lang="en-US"/>
-              <a:t>16</a:t>
+              <a:t>18</a:t>
             </a:fld>
             <a:endParaRPr lang="en-US"/>
           </a:p>
@@ -16527,7 +17291,7 @@
                 <a:ea typeface="Calibri" pitchFamily="34" charset="-122"/>
                 <a:cs typeface="Calibri" pitchFamily="34" charset="-120"/>
               </a:rPr>
-              <a:t>01 · RELIABILITY ENGINEERING</a:t>
+              <a:t>01 · REST API INTEGRATION</a:t>
             </a:r>
             <a:endParaRPr lang="en-US" sz="1400" dirty="0"/>
           </a:p>
@@ -16568,7 +17332,7 @@
                 <a:ea typeface="Cambria" pitchFamily="34" charset="-122"/>
                 <a:cs typeface="Cambria" pitchFamily="34" charset="-120"/>
               </a:rPr>
-              <a:t>Reminders, dedup, and crash-safe delivery</a:t>
+              <a:t>Talking to ServiceNow over REST</a:t>
             </a:r>
             <a:endParaRPr lang="en-US" sz="4000" dirty="0"/>
           </a:p>
@@ -16609,7 +17373,7 @@
                 <a:ea typeface="Calibri" pitchFamily="34" charset="-122"/>
                 <a:cs typeface="Calibri" pitchFamily="34" charset="-120"/>
               </a:rPr>
-              <a:t>How the workflow avoids two failure modes: forgetting an incident that stays critical, and duplicating an alert if it crashes mid-send.</a:t>
+              <a:t>Every incident the workflow sees comes through one HTTP endpoint, and the test data was created through that same endpoint.</a:t>
             </a:r>
             <a:endParaRPr lang="en-US" sz="1600" dirty="0"/>
           </a:p>
@@ -16675,7 +17439,7 @@
                 <a:ea typeface="Calibri" pitchFamily="34" charset="-122"/>
                 <a:cs typeface="Calibri" pitchFamily="34" charset="-120"/>
               </a:rPr>
-              <a:t>THE PROBLEM</a:t>
+              <a:t>REST API</a:t>
             </a:r>
             <a:endParaRPr lang="en-US" sz="1300" dirty="0"/>
           </a:p>
@@ -16716,7 +17480,7 @@
                 <a:ea typeface="Cambria" pitchFamily="34" charset="-122"/>
                 <a:cs typeface="Cambria" pitchFamily="34" charset="-120"/>
               </a:rPr>
-              <a:t>Send-then-save can duplicate an alert</a:t>
+              <a:t>Retrieving incidents: GET</a:t>
             </a:r>
             <a:endParaRPr lang="en-US" sz="3200" dirty="0"/>
           </a:p>
@@ -16724,90 +17488,36 @@
       </p:sp>
       <p:sp>
         <p:nvSpPr>
-          <p:cNvPr id="4" name="Text 2"/>
-          <p:cNvSpPr txBox="1"/>
-          <p:nvPr/>
-        </p:nvSpPr>
-        <p:spPr>
-          <a:xfrm>
-            <a:off x="548640" y="1691640"/>
-            <a:ext cx="11064240" cy="822960"/>
-          </a:xfrm>
-          <a:prstGeom prst="rect">
-            <a:avLst/>
-          </a:prstGeom>
-          <a:noFill/>
-          <a:ln/>
-        </p:spPr>
-        <p:txBody>
-          <a:bodyPr wrap="square" lIns="0" tIns="0" rIns="0" bIns="0" rtlCol="0" anchor="ctr"/>
-          <a:lstStyle/>
-          <a:p>
-            <a:pPr algn="l" indent="0" marL="0">
-              <a:lnSpc>
-                <a:spcPct val="130000"/>
-              </a:lnSpc>
-              <a:buNone/>
-            </a:pPr>
-            <a:r>
-              <a:rPr lang="en-US" sz="1500" dirty="0">
-                <a:solidFill>
-                  <a:schemeClr val="accent6"/>
-                </a:solidFill>
-                <a:latin typeface="Calibri" pitchFamily="34" charset="0"/>
-                <a:ea typeface="Calibri" pitchFamily="34" charset="-122"/>
-                <a:cs typeface="Calibri" pitchFamily="34" charset="-120"/>
-              </a:rPr>
-              <a:t>A naive design emails the alert first, then records that it was sent. If the workflow crashes or the save step fails in between, the next run has no record of the send, and resends it.</a:t>
-            </a:r>
-            <a:endParaRPr lang="en-US" sz="1500" dirty="0"/>
-          </a:p>
-        </p:txBody>
-      </p:sp>
-      <p:sp>
-        <p:nvSpPr>
-          <p:cNvPr id="5" name="Shape 3"/>
+          <p:cNvPr id="4" name="Shape 2"/>
           <p:cNvSpPr/>
           <p:nvPr/>
         </p:nvSpPr>
         <p:spPr>
           <a:xfrm>
-            <a:off x="548640" y="2834640"/>
-            <a:ext cx="3291840" cy="1737360"/>
+            <a:off x="548640" y="1600200"/>
+            <a:ext cx="11064240" cy="1874520"/>
           </a:xfrm>
           <a:prstGeom prst="roundRect">
             <a:avLst>
-              <a:gd name="adj" fmla="val 4211"/>
+              <a:gd name="adj" fmla="val 3415"/>
             </a:avLst>
           </a:prstGeom>
           <a:solidFill>
-            <a:schemeClr val="bg1"/>
+            <a:schemeClr val="tx2"/>
           </a:solidFill>
-          <a:ln w="12700">
-            <a:solidFill>
-              <a:schemeClr val="accent5"/>
-            </a:solidFill>
-            <a:prstDash val="solid"/>
-          </a:ln>
-          <a:effectLst>
-            <a:outerShdw sx="100000" sy="100000" kx="0" ky="0" algn="bl" rotWithShape="0" blurRad="127000" dist="38100" dir="5400000">
-              <a:srgbClr val="1A1F2B">
-                <a:alpha val="18000"/>
-              </a:srgbClr>
-            </a:outerShdw>
-          </a:effectLst>
-        </p:spPr>
-      </p:sp>
-      <p:sp>
-        <p:nvSpPr>
-          <p:cNvPr id="6" name="Text 4"/>
+          <a:ln/>
+        </p:spPr>
+      </p:sp>
+      <p:sp>
+        <p:nvSpPr>
+          <p:cNvPr id="5" name="Text 3"/>
           <p:cNvSpPr txBox="1"/>
           <p:nvPr/>
         </p:nvSpPr>
         <p:spPr>
           <a:xfrm>
-            <a:off x="777240" y="3063240"/>
-            <a:ext cx="2834640" cy="411480"/>
+            <a:off x="822960" y="1828800"/>
+            <a:ext cx="10515600" cy="1417320"/>
           </a:xfrm>
           <a:prstGeom prst="rect">
             <a:avLst/>
@@ -16816,46 +17526,7 @@
           <a:ln/>
         </p:spPr>
         <p:txBody>
-          <a:bodyPr wrap="square" lIns="0" tIns="0" rIns="0" bIns="0" rtlCol="0" anchor="ctr"/>
-          <a:lstStyle/>
-          <a:p>
-            <a:pPr algn="l" indent="0" marL="0">
-              <a:buNone/>
-            </a:pPr>
-            <a:r>
-              <a:rPr lang="en-US" sz="1600" b="1" dirty="0">
-                <a:solidFill>
-                  <a:schemeClr val="tx1"/>
-                </a:solidFill>
-                <a:latin typeface="Cambria" pitchFamily="34" charset="0"/>
-                <a:ea typeface="Cambria" pitchFamily="34" charset="-122"/>
-                <a:cs typeface="Cambria" pitchFamily="34" charset="-120"/>
-              </a:rPr>
-              <a:t>Send email</a:t>
-            </a:r>
-            <a:endParaRPr lang="en-US" sz="1600" dirty="0"/>
-          </a:p>
-        </p:txBody>
-      </p:sp>
-      <p:sp>
-        <p:nvSpPr>
-          <p:cNvPr id="7" name="Text 5"/>
-          <p:cNvSpPr txBox="1"/>
-          <p:nvPr/>
-        </p:nvSpPr>
-        <p:spPr>
-          <a:xfrm>
-            <a:off x="777240" y="3566160"/>
-            <a:ext cx="2834640" cy="822960"/>
-          </a:xfrm>
-          <a:prstGeom prst="rect">
-            <a:avLst/>
-          </a:prstGeom>
-          <a:noFill/>
-          <a:ln/>
-        </p:spPr>
-        <p:txBody>
-          <a:bodyPr wrap="square" lIns="0" tIns="0" rIns="0" bIns="0" rtlCol="0" anchor="ctr"/>
+          <a:bodyPr wrap="square" lIns="0" tIns="0" rIns="0" bIns="0" rtlCol="0" anchor="t"/>
           <a:lstStyle/>
           <a:p>
             <a:pPr algn="l" indent="0" marL="0">
@@ -16865,133 +17536,18 @@
               <a:buNone/>
             </a:pPr>
             <a:r>
-              <a:rPr lang="en-US" sz="1250" dirty="0">
-                <a:solidFill>
-                  <a:schemeClr val="accent6"/>
-                </a:solidFill>
-                <a:latin typeface="Calibri" pitchFamily="34" charset="0"/>
-                <a:ea typeface="Calibri" pitchFamily="34" charset="-122"/>
-                <a:cs typeface="Calibri" pitchFamily="34" charset="-120"/>
-              </a:rPr>
-              <a:t>INC0010042:critical delivered</a:t>
-            </a:r>
-            <a:endParaRPr lang="en-US" sz="1250" dirty="0"/>
-          </a:p>
-        </p:txBody>
-      </p:sp>
-      <p:sp>
-        <p:nvSpPr>
-          <p:cNvPr id="8" name="Shape 6"/>
-          <p:cNvSpPr/>
-          <p:nvPr/>
-        </p:nvSpPr>
-        <p:spPr>
-          <a:xfrm>
-            <a:off x="3895344" y="3566160"/>
-            <a:ext cx="301752" cy="274320"/>
-          </a:xfrm>
-          <a:prstGeom prst="rightArrow">
-            <a:avLst/>
-          </a:prstGeom>
-          <a:solidFill>
-            <a:schemeClr val="accent4"/>
-          </a:solidFill>
-          <a:ln/>
-        </p:spPr>
-      </p:sp>
-      <p:sp>
-        <p:nvSpPr>
-          <p:cNvPr id="9" name="Shape 7"/>
-          <p:cNvSpPr/>
-          <p:nvPr/>
-        </p:nvSpPr>
-        <p:spPr>
-          <a:xfrm>
-            <a:off x="4251960" y="2834640"/>
-            <a:ext cx="3291840" cy="1737360"/>
-          </a:xfrm>
-          <a:prstGeom prst="roundRect">
-            <a:avLst>
-              <a:gd name="adj" fmla="val 4211"/>
-            </a:avLst>
-          </a:prstGeom>
-          <a:solidFill>
-            <a:schemeClr val="bg1"/>
-          </a:solidFill>
-          <a:ln w="12700">
-            <a:solidFill>
-              <a:schemeClr val="accent5"/>
-            </a:solidFill>
-            <a:prstDash val="solid"/>
-          </a:ln>
-          <a:effectLst>
-            <a:outerShdw sx="100000" sy="100000" kx="0" ky="0" algn="bl" rotWithShape="0" blurRad="127000" dist="38100" dir="5400000">
-              <a:srgbClr val="1A1F2B">
-                <a:alpha val="18000"/>
-              </a:srgbClr>
-            </a:outerShdw>
-          </a:effectLst>
-        </p:spPr>
-      </p:sp>
-      <p:sp>
-        <p:nvSpPr>
-          <p:cNvPr id="10" name="Text 8"/>
-          <p:cNvSpPr txBox="1"/>
-          <p:nvPr/>
-        </p:nvSpPr>
-        <p:spPr>
-          <a:xfrm>
-            <a:off x="4480560" y="3063240"/>
-            <a:ext cx="2834640" cy="411480"/>
-          </a:xfrm>
-          <a:prstGeom prst="rect">
-            <a:avLst/>
-          </a:prstGeom>
-          <a:noFill/>
-          <a:ln/>
-        </p:spPr>
-        <p:txBody>
-          <a:bodyPr wrap="square" lIns="0" tIns="0" rIns="0" bIns="0" rtlCol="0" anchor="ctr"/>
-          <a:lstStyle/>
-          <a:p>
-            <a:pPr algn="l" indent="0" marL="0">
-              <a:buNone/>
-            </a:pPr>
-            <a:r>
-              <a:rPr lang="en-US" sz="1600" b="1" dirty="0">
-                <a:solidFill>
-                  <a:schemeClr val="tx1"/>
-                </a:solidFill>
-                <a:latin typeface="Cambria" pitchFamily="34" charset="0"/>
-                <a:ea typeface="Cambria" pitchFamily="34" charset="-122"/>
-                <a:cs typeface="Cambria" pitchFamily="34" charset="-120"/>
-              </a:rPr>
-              <a:t>⚠ Crash</a:t>
-            </a:r>
-            <a:endParaRPr lang="en-US" sz="1600" dirty="0"/>
-          </a:p>
-        </p:txBody>
-      </p:sp>
-      <p:sp>
-        <p:nvSpPr>
-          <p:cNvPr id="11" name="Text 9"/>
-          <p:cNvSpPr txBox="1"/>
-          <p:nvPr/>
-        </p:nvSpPr>
-        <p:spPr>
-          <a:xfrm>
-            <a:off x="4480560" y="3566160"/>
-            <a:ext cx="2834640" cy="822960"/>
-          </a:xfrm>
-          <a:prstGeom prst="rect">
-            <a:avLst/>
-          </a:prstGeom>
-          <a:noFill/>
-          <a:ln/>
-        </p:spPr>
-        <p:txBody>
-          <a:bodyPr wrap="square" lIns="0" tIns="0" rIns="0" bIns="0" rtlCol="0" anchor="ctr"/>
-          <a:lstStyle/>
+              <a:rPr lang="en-US" sz="1300" dirty="0">
+                <a:solidFill>
+                  <a:srgbClr val="7DD3C0"/>
+                </a:solidFill>
+                <a:latin typeface="Courier New" pitchFamily="34" charset="0"/>
+                <a:ea typeface="Courier New" pitchFamily="34" charset="-122"/>
+                <a:cs typeface="Courier New" pitchFamily="34" charset="-120"/>
+              </a:rPr>
+              <a:t>GET https://dev353134.service-now.com/api/now/table/incident</a:t>
+            </a:r>
+            <a:endParaRPr lang="en-US" sz="1300" dirty="0"/>
+          </a:p>
           <a:p>
             <a:pPr algn="l" indent="0" marL="0">
               <a:lnSpc>
@@ -17000,128 +17556,18 @@
               <a:buNone/>
             </a:pPr>
             <a:r>
-              <a:rPr lang="en-US" sz="1250" dirty="0">
-                <a:solidFill>
-                  <a:schemeClr val="accent6"/>
-                </a:solidFill>
-                <a:latin typeface="Calibri" pitchFamily="34" charset="0"/>
-                <a:ea typeface="Calibri" pitchFamily="34" charset="-122"/>
-                <a:cs typeface="Calibri" pitchFamily="34" charset="-120"/>
-              </a:rPr>
-              <a:t>Workflow dies before saving state</a:t>
-            </a:r>
-            <a:endParaRPr lang="en-US" sz="1250" dirty="0"/>
-          </a:p>
-        </p:txBody>
-      </p:sp>
-      <p:sp>
-        <p:nvSpPr>
-          <p:cNvPr id="12" name="Shape 10"/>
-          <p:cNvSpPr/>
-          <p:nvPr/>
-        </p:nvSpPr>
-        <p:spPr>
-          <a:xfrm>
-            <a:off x="7598664" y="3566160"/>
-            <a:ext cx="301752" cy="274320"/>
-          </a:xfrm>
-          <a:prstGeom prst="rightArrow">
-            <a:avLst/>
-          </a:prstGeom>
-          <a:solidFill>
-            <a:schemeClr val="accent4"/>
-          </a:solidFill>
-          <a:ln/>
-        </p:spPr>
-      </p:sp>
-      <p:sp>
-        <p:nvSpPr>
-          <p:cNvPr id="13" name="Shape 11"/>
-          <p:cNvSpPr/>
-          <p:nvPr/>
-        </p:nvSpPr>
-        <p:spPr>
-          <a:xfrm>
-            <a:off x="7955280" y="2834640"/>
-            <a:ext cx="3291840" cy="1737360"/>
-          </a:xfrm>
-          <a:prstGeom prst="roundRect">
-            <a:avLst>
-              <a:gd name="adj" fmla="val 4211"/>
-            </a:avLst>
-          </a:prstGeom>
-          <a:solidFill>
-            <a:schemeClr val="tx2"/>
-          </a:solidFill>
-          <a:ln/>
-          <a:effectLst>
-            <a:outerShdw sx="100000" sy="100000" kx="0" ky="0" algn="bl" rotWithShape="0" blurRad="127000" dist="38100" dir="5400000">
-              <a:srgbClr val="1A1F2B">
-                <a:alpha val="18000"/>
-              </a:srgbClr>
-            </a:outerShdw>
-          </a:effectLst>
-        </p:spPr>
-      </p:sp>
-      <p:sp>
-        <p:nvSpPr>
-          <p:cNvPr id="14" name="Text 12"/>
-          <p:cNvSpPr txBox="1"/>
-          <p:nvPr/>
-        </p:nvSpPr>
-        <p:spPr>
-          <a:xfrm>
-            <a:off x="8183880" y="3063240"/>
-            <a:ext cx="2834640" cy="411480"/>
-          </a:xfrm>
-          <a:prstGeom prst="rect">
-            <a:avLst/>
-          </a:prstGeom>
-          <a:noFill/>
-          <a:ln/>
-        </p:spPr>
-        <p:txBody>
-          <a:bodyPr wrap="square" lIns="0" tIns="0" rIns="0" bIns="0" rtlCol="0" anchor="ctr"/>
-          <a:lstStyle/>
-          <a:p>
-            <a:pPr algn="l" indent="0" marL="0">
-              <a:buNone/>
-            </a:pPr>
-            <a:r>
-              <a:rPr lang="en-US" sz="1600" b="1" dirty="0">
-                <a:solidFill>
-                  <a:srgbClr val="FFFFFF"/>
-                </a:solidFill>
-                <a:latin typeface="Cambria" pitchFamily="34" charset="0"/>
-                <a:ea typeface="Cambria" pitchFamily="34" charset="-122"/>
-                <a:cs typeface="Cambria" pitchFamily="34" charset="-120"/>
-              </a:rPr>
-              <a:t>Next run</a:t>
-            </a:r>
-            <a:endParaRPr lang="en-US" sz="1600" dirty="0"/>
-          </a:p>
-        </p:txBody>
-      </p:sp>
-      <p:sp>
-        <p:nvSpPr>
-          <p:cNvPr id="15" name="Text 13"/>
-          <p:cNvSpPr txBox="1"/>
-          <p:nvPr/>
-        </p:nvSpPr>
-        <p:spPr>
-          <a:xfrm>
-            <a:off x="8183880" y="3566160"/>
-            <a:ext cx="2834640" cy="822960"/>
-          </a:xfrm>
-          <a:prstGeom prst="rect">
-            <a:avLst/>
-          </a:prstGeom>
-          <a:noFill/>
-          <a:ln/>
-        </p:spPr>
-        <p:txBody>
-          <a:bodyPr wrap="square" lIns="0" tIns="0" rIns="0" bIns="0" rtlCol="0" anchor="ctr"/>
-          <a:lstStyle/>
+              <a:rPr lang="en-US" sz="1300" dirty="0">
+                <a:solidFill>
+                  <a:srgbClr val="E5E9F0"/>
+                </a:solidFill>
+                <a:latin typeface="Courier New" pitchFamily="34" charset="0"/>
+                <a:ea typeface="Courier New" pitchFamily="34" charset="-122"/>
+                <a:cs typeface="Courier New" pitchFamily="34" charset="-120"/>
+              </a:rPr>
+              <a:t>  ?sysparm_query=stateNOT IN6,7,8^ORDERBYDESCsys_updated_on</a:t>
+            </a:r>
+            <a:endParaRPr lang="en-US" sz="1300" dirty="0"/>
+          </a:p>
           <a:p>
             <a:pPr algn="l" indent="0" marL="0">
               <a:lnSpc>
@@ -17130,56 +17576,1144 @@
               <a:buNone/>
             </a:pPr>
             <a:r>
-              <a:rPr lang="en-US" sz="1250" dirty="0">
-                <a:solidFill>
-                  <a:srgbClr val="AEB8C9"/>
+              <a:rPr lang="en-US" sz="1300" dirty="0">
+                <a:solidFill>
+                  <a:srgbClr val="E5E9F0"/>
+                </a:solidFill>
+                <a:latin typeface="Courier New" pitchFamily="34" charset="0"/>
+                <a:ea typeface="Courier New" pitchFamily="34" charset="-122"/>
+                <a:cs typeface="Courier New" pitchFamily="34" charset="-120"/>
+              </a:rPr>
+              <a:t>  &amp;sysparm_fields=sys_id,number,priority,state,short_description,...</a:t>
+            </a:r>
+            <a:endParaRPr lang="en-US" sz="1300" dirty="0"/>
+          </a:p>
+          <a:p>
+            <a:pPr algn="l" indent="0" marL="0">
+              <a:lnSpc>
+                <a:spcPct val="125000"/>
+              </a:lnSpc>
+              <a:buNone/>
+            </a:pPr>
+            <a:r>
+              <a:rPr lang="en-US" sz="1300" dirty="0">
+                <a:solidFill>
+                  <a:srgbClr val="E5E9F0"/>
+                </a:solidFill>
+                <a:latin typeface="Courier New" pitchFamily="34" charset="0"/>
+                <a:ea typeface="Courier New" pitchFamily="34" charset="-122"/>
+                <a:cs typeface="Courier New" pitchFamily="34" charset="-120"/>
+              </a:rPr>
+              <a:t>  &amp;sysparm_display_value=all</a:t>
+            </a:r>
+            <a:endParaRPr lang="en-US" sz="1300" dirty="0"/>
+          </a:p>
+          <a:p>
+            <a:pPr algn="l" indent="0" marL="0">
+              <a:lnSpc>
+                <a:spcPct val="125000"/>
+              </a:lnSpc>
+              <a:buNone/>
+            </a:pPr>
+            <a:r>
+              <a:rPr lang="en-US" sz="1300" dirty="0">
+                <a:solidFill>
+                  <a:srgbClr val="E5E9F0"/>
+                </a:solidFill>
+                <a:latin typeface="Courier New" pitchFamily="34" charset="0"/>
+                <a:ea typeface="Courier New" pitchFamily="34" charset="-122"/>
+                <a:cs typeface="Courier New" pitchFamily="34" charset="-120"/>
+              </a:rPr>
+              <a:t>  &amp;sysparm_limit=200</a:t>
+            </a:r>
+            <a:endParaRPr lang="en-US" sz="1300" dirty="0"/>
+          </a:p>
+          <a:p>
+            <a:pPr algn="l" indent="0" marL="0">
+              <a:lnSpc>
+                <a:spcPct val="125000"/>
+              </a:lnSpc>
+              <a:buNone/>
+            </a:pPr>
+            <a:r>
+              <a:rPr lang="en-US" sz="1300" dirty="0">
+                <a:solidFill>
+                  <a:srgbClr val="E5E9F0"/>
+                </a:solidFill>
+                <a:latin typeface="Courier New" pitchFamily="34" charset="0"/>
+                <a:ea typeface="Courier New" pitchFamily="34" charset="-122"/>
+                <a:cs typeface="Courier New" pitchFamily="34" charset="-120"/>
+              </a:rPr>
+              <a:t>Header: Authorization: Basic &lt;base64 of user:pass&gt;</a:t>
+            </a:r>
+            <a:endParaRPr lang="en-US" sz="1300" dirty="0"/>
+          </a:p>
+        </p:txBody>
+      </p:sp>
+      <p:graphicFrame>
+        <p:nvGraphicFramePr>
+          <p:cNvPr id="10" name="Table 0"/>
+          <p:cNvGraphicFramePr>
+            <a:graphicFrameLocks noGrp="1"/>
+          </p:cNvGraphicFramePr>
+          <p:nvPr>
+            <p:extLst>
+              <p:ext uri="{D42A27DB-BD31-4B8C-83A1-F6EECF244321}">
+                <p14:modId xmlns:p14="http://schemas.microsoft.com/office/powerpoint/2010/main" val="1579011935"/>
+              </p:ext>
+            </p:extLst>
+          </p:nvPr>
+        </p:nvGraphicFramePr>
+        <p:xfrm>
+          <a:off x="548640" y="3611880"/>
+          <a:ext cx="11064240" cy="2103120"/>
+        </p:xfrm>
+        <a:graphic>
+          <a:graphicData uri="http://schemas.openxmlformats.org/drawingml/2006/table">
+            <a:tbl>
+              <a:tblPr/>
+              <a:tblGrid>
+                <a:gridCol w="2834640"/>
+                <a:gridCol w="3108960"/>
+                <a:gridCol w="5120640"/>
+              </a:tblGrid>
+              <a:tr h="420624">
+                <a:tc>
+                  <a:txBody>
+                    <a:bodyPr/>
+                    <a:lstStyle/>
+                    <a:p>
+                      <a:pPr indent="0" marL="0">
+                        <a:buNone/>
+                      </a:pPr>
+                      <a:r>
+                        <a:rPr lang="en-US" sz="1250" b="1" dirty="0">
+                          <a:solidFill>
+                            <a:srgbClr val="FFFFFF"/>
+                          </a:solidFill>
+                          <a:latin typeface="Calibri" pitchFamily="34" charset="0"/>
+                          <a:ea typeface="Calibri" pitchFamily="34" charset="-122"/>
+                          <a:cs typeface="Calibri" pitchFamily="34" charset="-120"/>
+                        </a:rPr>
+                        <a:t>Query parameter</a:t>
+                      </a:r>
+                      <a:endParaRPr lang="en-US" sz="1250" dirty="0">
+                        <a:latin typeface="Calibri" charset="0"/>
+                        <a:ea typeface="Calibri" charset="0"/>
+                        <a:cs typeface="Calibri" charset="0"/>
+                      </a:endParaRPr>
+                    </a:p>
+                  </a:txBody>
+                  <a:tcPr marL="91440" marR="91440" marT="45720" marB="45720" anchor="ctr">
+                    <a:lnL w="12700" cap="flat" cmpd="sng" algn="ctr">
+                      <a:solidFill>
+                        <a:schemeClr val="accent5"/>
+                      </a:solidFill>
+                      <a:prstDash val="solid"/>
+                      <a:round/>
+                      <a:headEnd type="none" w="med" len="med"/>
+                      <a:tailEnd type="none" w="med" len="med"/>
+                    </a:lnL>
+                    <a:lnR w="12700" cap="flat" cmpd="sng" algn="ctr">
+                      <a:solidFill>
+                        <a:schemeClr val="accent5"/>
+                      </a:solidFill>
+                      <a:prstDash val="solid"/>
+                      <a:round/>
+                      <a:headEnd type="none" w="med" len="med"/>
+                      <a:tailEnd type="none" w="med" len="med"/>
+                    </a:lnR>
+                    <a:lnT w="12700" cap="flat" cmpd="sng" algn="ctr">
+                      <a:solidFill>
+                        <a:schemeClr val="accent5"/>
+                      </a:solidFill>
+                      <a:prstDash val="solid"/>
+                      <a:round/>
+                      <a:headEnd type="none" w="med" len="med"/>
+                      <a:tailEnd type="none" w="med" len="med"/>
+                    </a:lnT>
+                    <a:lnB w="12700" cap="flat" cmpd="sng" algn="ctr">
+                      <a:solidFill>
+                        <a:schemeClr val="accent5"/>
+                      </a:solidFill>
+                      <a:prstDash val="solid"/>
+                      <a:round/>
+                      <a:headEnd type="none" w="med" len="med"/>
+                      <a:tailEnd type="none" w="med" len="med"/>
+                    </a:lnB>
+                    <a:solidFill>
+                      <a:schemeClr val="tx1"/>
+                    </a:solidFill>
+                  </a:tcPr>
+                </a:tc>
+                <a:tc>
+                  <a:txBody>
+                    <a:bodyPr/>
+                    <a:lstStyle/>
+                    <a:p>
+                      <a:pPr indent="0" marL="0">
+                        <a:buNone/>
+                      </a:pPr>
+                      <a:r>
+                        <a:rPr lang="en-US" sz="1250" b="1" dirty="0">
+                          <a:solidFill>
+                            <a:srgbClr val="FFFFFF"/>
+                          </a:solidFill>
+                          <a:latin typeface="Calibri" pitchFamily="34" charset="0"/>
+                          <a:ea typeface="Calibri" pitchFamily="34" charset="-122"/>
+                          <a:cs typeface="Calibri" pitchFamily="34" charset="-120"/>
+                        </a:rPr>
+                        <a:t>Value used</a:t>
+                      </a:r>
+                      <a:endParaRPr lang="en-US" sz="1250" dirty="0">
+                        <a:latin typeface="Calibri" charset="0"/>
+                        <a:ea typeface="Calibri" charset="0"/>
+                        <a:cs typeface="Calibri" charset="0"/>
+                      </a:endParaRPr>
+                    </a:p>
+                  </a:txBody>
+                  <a:tcPr marL="91440" marR="91440" marT="45720" marB="45720" anchor="ctr">
+                    <a:lnL w="12700" cap="flat" cmpd="sng" algn="ctr">
+                      <a:solidFill>
+                        <a:schemeClr val="accent5"/>
+                      </a:solidFill>
+                      <a:prstDash val="solid"/>
+                      <a:round/>
+                      <a:headEnd type="none" w="med" len="med"/>
+                      <a:tailEnd type="none" w="med" len="med"/>
+                    </a:lnL>
+                    <a:lnR w="12700" cap="flat" cmpd="sng" algn="ctr">
+                      <a:solidFill>
+                        <a:schemeClr val="accent5"/>
+                      </a:solidFill>
+                      <a:prstDash val="solid"/>
+                      <a:round/>
+                      <a:headEnd type="none" w="med" len="med"/>
+                      <a:tailEnd type="none" w="med" len="med"/>
+                    </a:lnR>
+                    <a:lnT w="12700" cap="flat" cmpd="sng" algn="ctr">
+                      <a:solidFill>
+                        <a:schemeClr val="accent5"/>
+                      </a:solidFill>
+                      <a:prstDash val="solid"/>
+                      <a:round/>
+                      <a:headEnd type="none" w="med" len="med"/>
+                      <a:tailEnd type="none" w="med" len="med"/>
+                    </a:lnT>
+                    <a:lnB w="12700" cap="flat" cmpd="sng" algn="ctr">
+                      <a:solidFill>
+                        <a:schemeClr val="accent5"/>
+                      </a:solidFill>
+                      <a:prstDash val="solid"/>
+                      <a:round/>
+                      <a:headEnd type="none" w="med" len="med"/>
+                      <a:tailEnd type="none" w="med" len="med"/>
+                    </a:lnB>
+                    <a:solidFill>
+                      <a:schemeClr val="tx1"/>
+                    </a:solidFill>
+                  </a:tcPr>
+                </a:tc>
+                <a:tc>
+                  <a:txBody>
+                    <a:bodyPr/>
+                    <a:lstStyle/>
+                    <a:p>
+                      <a:pPr indent="0" marL="0">
+                        <a:buNone/>
+                      </a:pPr>
+                      <a:r>
+                        <a:rPr lang="en-US" sz="1250" b="1" dirty="0">
+                          <a:solidFill>
+                            <a:srgbClr val="FFFFFF"/>
+                          </a:solidFill>
+                          <a:latin typeface="Calibri" pitchFamily="34" charset="0"/>
+                          <a:ea typeface="Calibri" pitchFamily="34" charset="-122"/>
+                          <a:cs typeface="Calibri" pitchFamily="34" charset="-120"/>
+                        </a:rPr>
+                        <a:t>Why</a:t>
+                      </a:r>
+                      <a:endParaRPr lang="en-US" sz="1250" dirty="0">
+                        <a:latin typeface="Calibri" charset="0"/>
+                        <a:ea typeface="Calibri" charset="0"/>
+                        <a:cs typeface="Calibri" charset="0"/>
+                      </a:endParaRPr>
+                    </a:p>
+                  </a:txBody>
+                  <a:tcPr marL="91440" marR="91440" marT="45720" marB="45720" anchor="ctr">
+                    <a:lnL w="12700" cap="flat" cmpd="sng" algn="ctr">
+                      <a:solidFill>
+                        <a:schemeClr val="accent5"/>
+                      </a:solidFill>
+                      <a:prstDash val="solid"/>
+                      <a:round/>
+                      <a:headEnd type="none" w="med" len="med"/>
+                      <a:tailEnd type="none" w="med" len="med"/>
+                    </a:lnL>
+                    <a:lnR w="12700" cap="flat" cmpd="sng" algn="ctr">
+                      <a:solidFill>
+                        <a:schemeClr val="accent5"/>
+                      </a:solidFill>
+                      <a:prstDash val="solid"/>
+                      <a:round/>
+                      <a:headEnd type="none" w="med" len="med"/>
+                      <a:tailEnd type="none" w="med" len="med"/>
+                    </a:lnR>
+                    <a:lnT w="12700" cap="flat" cmpd="sng" algn="ctr">
+                      <a:solidFill>
+                        <a:schemeClr val="accent5"/>
+                      </a:solidFill>
+                      <a:prstDash val="solid"/>
+                      <a:round/>
+                      <a:headEnd type="none" w="med" len="med"/>
+                      <a:tailEnd type="none" w="med" len="med"/>
+                    </a:lnT>
+                    <a:lnB w="12700" cap="flat" cmpd="sng" algn="ctr">
+                      <a:solidFill>
+                        <a:schemeClr val="accent5"/>
+                      </a:solidFill>
+                      <a:prstDash val="solid"/>
+                      <a:round/>
+                      <a:headEnd type="none" w="med" len="med"/>
+                      <a:tailEnd type="none" w="med" len="med"/>
+                    </a:lnB>
+                    <a:solidFill>
+                      <a:schemeClr val="tx1"/>
+                    </a:solidFill>
+                  </a:tcPr>
+                </a:tc>
+              </a:tr>
+              <a:tr h="420624">
+                <a:tc>
+                  <a:txBody>
+                    <a:bodyPr/>
+                    <a:lstStyle/>
+                    <a:p>
+                      <a:pPr indent="0" marL="0">
+                        <a:buNone/>
+                      </a:pPr>
+                      <a:r>
+                        <a:rPr lang="en-US" sz="1250" dirty="0">
+                          <a:solidFill>
+                            <a:schemeClr val="tx1"/>
+                          </a:solidFill>
+                          <a:latin typeface="Courier New" pitchFamily="34" charset="0"/>
+                          <a:ea typeface="Courier New" pitchFamily="34" charset="-122"/>
+                          <a:cs typeface="Courier New" pitchFamily="34" charset="-120"/>
+                        </a:rPr>
+                        <a:t>sysparm_query</a:t>
+                      </a:r>
+                      <a:endParaRPr lang="en-US" sz="1250" dirty="0">
+                        <a:latin typeface="Courier New" charset="0"/>
+                        <a:ea typeface="Courier New" charset="0"/>
+                        <a:cs typeface="Courier New" charset="0"/>
+                      </a:endParaRPr>
+                    </a:p>
+                  </a:txBody>
+                  <a:tcPr marL="91440" marR="91440" marT="45720" marB="45720" anchor="ctr">
+                    <a:lnL w="12700" cap="flat" cmpd="sng" algn="ctr">
+                      <a:solidFill>
+                        <a:schemeClr val="accent5"/>
+                      </a:solidFill>
+                      <a:prstDash val="solid"/>
+                      <a:round/>
+                      <a:headEnd type="none" w="med" len="med"/>
+                      <a:tailEnd type="none" w="med" len="med"/>
+                    </a:lnL>
+                    <a:lnR w="12700" cap="flat" cmpd="sng" algn="ctr">
+                      <a:solidFill>
+                        <a:schemeClr val="accent5"/>
+                      </a:solidFill>
+                      <a:prstDash val="solid"/>
+                      <a:round/>
+                      <a:headEnd type="none" w="med" len="med"/>
+                      <a:tailEnd type="none" w="med" len="med"/>
+                    </a:lnR>
+                    <a:lnT w="12700" cap="flat" cmpd="sng" algn="ctr">
+                      <a:solidFill>
+                        <a:schemeClr val="accent5"/>
+                      </a:solidFill>
+                      <a:prstDash val="solid"/>
+                      <a:round/>
+                      <a:headEnd type="none" w="med" len="med"/>
+                      <a:tailEnd type="none" w="med" len="med"/>
+                    </a:lnT>
+                    <a:lnB w="12700" cap="flat" cmpd="sng" algn="ctr">
+                      <a:solidFill>
+                        <a:schemeClr val="accent5"/>
+                      </a:solidFill>
+                      <a:prstDash val="solid"/>
+                      <a:round/>
+                      <a:headEnd type="none" w="med" len="med"/>
+                      <a:tailEnd type="none" w="med" len="med"/>
+                    </a:lnB>
+                  </a:tcPr>
+                </a:tc>
+                <a:tc>
+                  <a:txBody>
+                    <a:bodyPr/>
+                    <a:lstStyle/>
+                    <a:p>
+                      <a:pPr indent="0" marL="0">
+                        <a:buNone/>
+                      </a:pPr>
+                      <a:r>
+                        <a:rPr lang="en-US" sz="1100" dirty="0">
+                          <a:solidFill>
+                            <a:schemeClr val="tx1"/>
+                          </a:solidFill>
+                          <a:latin typeface="Courier New" pitchFamily="34" charset="0"/>
+                          <a:ea typeface="Courier New" pitchFamily="34" charset="-122"/>
+                          <a:cs typeface="Courier New" pitchFamily="34" charset="-120"/>
+                        </a:rPr>
+                        <a:t>stateNOT IN6,7,8</a:t>
+                      </a:r>
+                      <a:endParaRPr lang="en-US" sz="1100" dirty="0">
+                        <a:latin typeface="Courier New" charset="0"/>
+                        <a:ea typeface="Courier New" charset="0"/>
+                        <a:cs typeface="Courier New" charset="0"/>
+                      </a:endParaRPr>
+                    </a:p>
+                  </a:txBody>
+                  <a:tcPr marL="91440" marR="91440" marT="45720" marB="45720" anchor="ctr">
+                    <a:lnL w="12700" cap="flat" cmpd="sng" algn="ctr">
+                      <a:solidFill>
+                        <a:schemeClr val="accent5"/>
+                      </a:solidFill>
+                      <a:prstDash val="solid"/>
+                      <a:round/>
+                      <a:headEnd type="none" w="med" len="med"/>
+                      <a:tailEnd type="none" w="med" len="med"/>
+                    </a:lnL>
+                    <a:lnR w="12700" cap="flat" cmpd="sng" algn="ctr">
+                      <a:solidFill>
+                        <a:schemeClr val="accent5"/>
+                      </a:solidFill>
+                      <a:prstDash val="solid"/>
+                      <a:round/>
+                      <a:headEnd type="none" w="med" len="med"/>
+                      <a:tailEnd type="none" w="med" len="med"/>
+                    </a:lnR>
+                    <a:lnT w="12700" cap="flat" cmpd="sng" algn="ctr">
+                      <a:solidFill>
+                        <a:schemeClr val="accent5"/>
+                      </a:solidFill>
+                      <a:prstDash val="solid"/>
+                      <a:round/>
+                      <a:headEnd type="none" w="med" len="med"/>
+                      <a:tailEnd type="none" w="med" len="med"/>
+                    </a:lnT>
+                    <a:lnB w="12700" cap="flat" cmpd="sng" algn="ctr">
+                      <a:solidFill>
+                        <a:schemeClr val="accent5"/>
+                      </a:solidFill>
+                      <a:prstDash val="solid"/>
+                      <a:round/>
+                      <a:headEnd type="none" w="med" len="med"/>
+                      <a:tailEnd type="none" w="med" len="med"/>
+                    </a:lnB>
+                  </a:tcPr>
+                </a:tc>
+                <a:tc>
+                  <a:txBody>
+                    <a:bodyPr/>
+                    <a:lstStyle/>
+                    <a:p>
+                      <a:pPr indent="0" marL="0">
+                        <a:buNone/>
+                      </a:pPr>
+                      <a:r>
+                        <a:rPr lang="en-US" sz="1250" dirty="0">
+                          <a:solidFill>
+                            <a:schemeClr val="tx1"/>
+                          </a:solidFill>
+                          <a:latin typeface="Calibri" pitchFamily="34" charset="0"/>
+                          <a:ea typeface="Calibri" pitchFamily="34" charset="-122"/>
+                          <a:cs typeface="Calibri" pitchFamily="34" charset="-120"/>
+                        </a:rPr>
+                        <a:t>Exclude resolved / closed / cancelled incidents</a:t>
+                      </a:r>
+                      <a:endParaRPr lang="en-US" sz="1250" dirty="0">
+                        <a:latin typeface="Calibri" charset="0"/>
+                        <a:ea typeface="Calibri" charset="0"/>
+                        <a:cs typeface="Calibri" charset="0"/>
+                      </a:endParaRPr>
+                    </a:p>
+                  </a:txBody>
+                  <a:tcPr marL="91440" marR="91440" marT="45720" marB="45720" anchor="ctr">
+                    <a:lnL w="12700" cap="flat" cmpd="sng" algn="ctr">
+                      <a:solidFill>
+                        <a:schemeClr val="accent5"/>
+                      </a:solidFill>
+                      <a:prstDash val="solid"/>
+                      <a:round/>
+                      <a:headEnd type="none" w="med" len="med"/>
+                      <a:tailEnd type="none" w="med" len="med"/>
+                    </a:lnL>
+                    <a:lnR w="12700" cap="flat" cmpd="sng" algn="ctr">
+                      <a:solidFill>
+                        <a:schemeClr val="accent5"/>
+                      </a:solidFill>
+                      <a:prstDash val="solid"/>
+                      <a:round/>
+                      <a:headEnd type="none" w="med" len="med"/>
+                      <a:tailEnd type="none" w="med" len="med"/>
+                    </a:lnR>
+                    <a:lnT w="12700" cap="flat" cmpd="sng" algn="ctr">
+                      <a:solidFill>
+                        <a:schemeClr val="accent5"/>
+                      </a:solidFill>
+                      <a:prstDash val="solid"/>
+                      <a:round/>
+                      <a:headEnd type="none" w="med" len="med"/>
+                      <a:tailEnd type="none" w="med" len="med"/>
+                    </a:lnT>
+                    <a:lnB w="12700" cap="flat" cmpd="sng" algn="ctr">
+                      <a:solidFill>
+                        <a:schemeClr val="accent5"/>
+                      </a:solidFill>
+                      <a:prstDash val="solid"/>
+                      <a:round/>
+                      <a:headEnd type="none" w="med" len="med"/>
+                      <a:tailEnd type="none" w="med" len="med"/>
+                    </a:lnB>
+                  </a:tcPr>
+                </a:tc>
+              </a:tr>
+              <a:tr h="420624">
+                <a:tc>
+                  <a:txBody>
+                    <a:bodyPr/>
+                    <a:lstStyle/>
+                    <a:p>
+                      <a:pPr indent="0" marL="0">
+                        <a:buNone/>
+                      </a:pPr>
+                      <a:r>
+                        <a:rPr lang="en-US" sz="1250" dirty="0">
+                          <a:solidFill>
+                            <a:schemeClr val="tx1"/>
+                          </a:solidFill>
+                          <a:latin typeface="Courier New" pitchFamily="34" charset="0"/>
+                          <a:ea typeface="Courier New" pitchFamily="34" charset="-122"/>
+                          <a:cs typeface="Courier New" pitchFamily="34" charset="-120"/>
+                        </a:rPr>
+                        <a:t>sysparm_fields</a:t>
+                      </a:r>
+                      <a:endParaRPr lang="en-US" sz="1250" dirty="0">
+                        <a:latin typeface="Courier New" charset="0"/>
+                        <a:ea typeface="Courier New" charset="0"/>
+                        <a:cs typeface="Courier New" charset="0"/>
+                      </a:endParaRPr>
+                    </a:p>
+                  </a:txBody>
+                  <a:tcPr marL="91440" marR="91440" marT="45720" marB="45720" anchor="ctr">
+                    <a:lnL w="12700" cap="flat" cmpd="sng" algn="ctr">
+                      <a:solidFill>
+                        <a:schemeClr val="accent5"/>
+                      </a:solidFill>
+                      <a:prstDash val="solid"/>
+                      <a:round/>
+                      <a:headEnd type="none" w="med" len="med"/>
+                      <a:tailEnd type="none" w="med" len="med"/>
+                    </a:lnL>
+                    <a:lnR w="12700" cap="flat" cmpd="sng" algn="ctr">
+                      <a:solidFill>
+                        <a:schemeClr val="accent5"/>
+                      </a:solidFill>
+                      <a:prstDash val="solid"/>
+                      <a:round/>
+                      <a:headEnd type="none" w="med" len="med"/>
+                      <a:tailEnd type="none" w="med" len="med"/>
+                    </a:lnR>
+                    <a:lnT w="12700" cap="flat" cmpd="sng" algn="ctr">
+                      <a:solidFill>
+                        <a:schemeClr val="accent5"/>
+                      </a:solidFill>
+                      <a:prstDash val="solid"/>
+                      <a:round/>
+                      <a:headEnd type="none" w="med" len="med"/>
+                      <a:tailEnd type="none" w="med" len="med"/>
+                    </a:lnT>
+                    <a:lnB w="12700" cap="flat" cmpd="sng" algn="ctr">
+                      <a:solidFill>
+                        <a:schemeClr val="accent5"/>
+                      </a:solidFill>
+                      <a:prstDash val="solid"/>
+                      <a:round/>
+                      <a:headEnd type="none" w="med" len="med"/>
+                      <a:tailEnd type="none" w="med" len="med"/>
+                    </a:lnB>
+                  </a:tcPr>
+                </a:tc>
+                <a:tc>
+                  <a:txBody>
+                    <a:bodyPr/>
+                    <a:lstStyle/>
+                    <a:p>
+                      <a:pPr indent="0" marL="0">
+                        <a:buNone/>
+                      </a:pPr>
+                      <a:r>
+                        <a:rPr lang="en-US" sz="1250" dirty="0">
+                          <a:solidFill>
+                            <a:schemeClr val="tx1"/>
+                          </a:solidFill>
+                          <a:latin typeface="Calibri" pitchFamily="34" charset="0"/>
+                          <a:ea typeface="Calibri" pitchFamily="34" charset="-122"/>
+                          <a:cs typeface="Calibri" pitchFamily="34" charset="-120"/>
+                        </a:rPr>
+                        <a:t>number, priority, state, ...</a:t>
+                      </a:r>
+                      <a:endParaRPr lang="en-US" sz="1250" dirty="0">
+                        <a:latin typeface="Calibri" charset="0"/>
+                        <a:ea typeface="Calibri" charset="0"/>
+                        <a:cs typeface="Calibri" charset="0"/>
+                      </a:endParaRPr>
+                    </a:p>
+                  </a:txBody>
+                  <a:tcPr marL="91440" marR="91440" marT="45720" marB="45720" anchor="ctr">
+                    <a:lnL w="12700" cap="flat" cmpd="sng" algn="ctr">
+                      <a:solidFill>
+                        <a:schemeClr val="accent5"/>
+                      </a:solidFill>
+                      <a:prstDash val="solid"/>
+                      <a:round/>
+                      <a:headEnd type="none" w="med" len="med"/>
+                      <a:tailEnd type="none" w="med" len="med"/>
+                    </a:lnL>
+                    <a:lnR w="12700" cap="flat" cmpd="sng" algn="ctr">
+                      <a:solidFill>
+                        <a:schemeClr val="accent5"/>
+                      </a:solidFill>
+                      <a:prstDash val="solid"/>
+                      <a:round/>
+                      <a:headEnd type="none" w="med" len="med"/>
+                      <a:tailEnd type="none" w="med" len="med"/>
+                    </a:lnR>
+                    <a:lnT w="12700" cap="flat" cmpd="sng" algn="ctr">
+                      <a:solidFill>
+                        <a:schemeClr val="accent5"/>
+                      </a:solidFill>
+                      <a:prstDash val="solid"/>
+                      <a:round/>
+                      <a:headEnd type="none" w="med" len="med"/>
+                      <a:tailEnd type="none" w="med" len="med"/>
+                    </a:lnT>
+                    <a:lnB w="12700" cap="flat" cmpd="sng" algn="ctr">
+                      <a:solidFill>
+                        <a:schemeClr val="accent5"/>
+                      </a:solidFill>
+                      <a:prstDash val="solid"/>
+                      <a:round/>
+                      <a:headEnd type="none" w="med" len="med"/>
+                      <a:tailEnd type="none" w="med" len="med"/>
+                    </a:lnB>
+                  </a:tcPr>
+                </a:tc>
+                <a:tc>
+                  <a:txBody>
+                    <a:bodyPr/>
+                    <a:lstStyle/>
+                    <a:p>
+                      <a:pPr indent="0" marL="0">
+                        <a:buNone/>
+                      </a:pPr>
+                      <a:r>
+                        <a:rPr lang="en-US" sz="1250" dirty="0">
+                          <a:solidFill>
+                            <a:schemeClr val="tx1"/>
+                          </a:solidFill>
+                          <a:latin typeface="Calibri" pitchFamily="34" charset="0"/>
+                          <a:ea typeface="Calibri" pitchFamily="34" charset="-122"/>
+                          <a:cs typeface="Calibri" pitchFamily="34" charset="-120"/>
+                        </a:rPr>
+                        <a:t>Only the columns the workflow needs: smaller, faster response</a:t>
+                      </a:r>
+                      <a:endParaRPr lang="en-US" sz="1250" dirty="0">
+                        <a:latin typeface="Calibri" charset="0"/>
+                        <a:ea typeface="Calibri" charset="0"/>
+                        <a:cs typeface="Calibri" charset="0"/>
+                      </a:endParaRPr>
+                    </a:p>
+                  </a:txBody>
+                  <a:tcPr marL="91440" marR="91440" marT="45720" marB="45720" anchor="ctr">
+                    <a:lnL w="12700" cap="flat" cmpd="sng" algn="ctr">
+                      <a:solidFill>
+                        <a:schemeClr val="accent5"/>
+                      </a:solidFill>
+                      <a:prstDash val="solid"/>
+                      <a:round/>
+                      <a:headEnd type="none" w="med" len="med"/>
+                      <a:tailEnd type="none" w="med" len="med"/>
+                    </a:lnL>
+                    <a:lnR w="12700" cap="flat" cmpd="sng" algn="ctr">
+                      <a:solidFill>
+                        <a:schemeClr val="accent5"/>
+                      </a:solidFill>
+                      <a:prstDash val="solid"/>
+                      <a:round/>
+                      <a:headEnd type="none" w="med" len="med"/>
+                      <a:tailEnd type="none" w="med" len="med"/>
+                    </a:lnR>
+                    <a:lnT w="12700" cap="flat" cmpd="sng" algn="ctr">
+                      <a:solidFill>
+                        <a:schemeClr val="accent5"/>
+                      </a:solidFill>
+                      <a:prstDash val="solid"/>
+                      <a:round/>
+                      <a:headEnd type="none" w="med" len="med"/>
+                      <a:tailEnd type="none" w="med" len="med"/>
+                    </a:lnT>
+                    <a:lnB w="12700" cap="flat" cmpd="sng" algn="ctr">
+                      <a:solidFill>
+                        <a:schemeClr val="accent5"/>
+                      </a:solidFill>
+                      <a:prstDash val="solid"/>
+                      <a:round/>
+                      <a:headEnd type="none" w="med" len="med"/>
+                      <a:tailEnd type="none" w="med" len="med"/>
+                    </a:lnB>
+                  </a:tcPr>
+                </a:tc>
+              </a:tr>
+              <a:tr h="420624">
+                <a:tc>
+                  <a:txBody>
+                    <a:bodyPr/>
+                    <a:lstStyle/>
+                    <a:p>
+                      <a:pPr indent="0" marL="0">
+                        <a:buNone/>
+                      </a:pPr>
+                      <a:r>
+                        <a:rPr lang="en-US" sz="1250" dirty="0">
+                          <a:solidFill>
+                            <a:schemeClr val="tx1"/>
+                          </a:solidFill>
+                          <a:latin typeface="Courier New" pitchFamily="34" charset="0"/>
+                          <a:ea typeface="Courier New" pitchFamily="34" charset="-122"/>
+                          <a:cs typeface="Courier New" pitchFamily="34" charset="-120"/>
+                        </a:rPr>
+                        <a:t>sysparm_display_value</a:t>
+                      </a:r>
+                      <a:endParaRPr lang="en-US" sz="1250" dirty="0">
+                        <a:latin typeface="Courier New" charset="0"/>
+                        <a:ea typeface="Courier New" charset="0"/>
+                        <a:cs typeface="Courier New" charset="0"/>
+                      </a:endParaRPr>
+                    </a:p>
+                  </a:txBody>
+                  <a:tcPr marL="91440" marR="91440" marT="45720" marB="45720" anchor="ctr">
+                    <a:lnL w="12700" cap="flat" cmpd="sng" algn="ctr">
+                      <a:solidFill>
+                        <a:schemeClr val="accent5"/>
+                      </a:solidFill>
+                      <a:prstDash val="solid"/>
+                      <a:round/>
+                      <a:headEnd type="none" w="med" len="med"/>
+                      <a:tailEnd type="none" w="med" len="med"/>
+                    </a:lnL>
+                    <a:lnR w="12700" cap="flat" cmpd="sng" algn="ctr">
+                      <a:solidFill>
+                        <a:schemeClr val="accent5"/>
+                      </a:solidFill>
+                      <a:prstDash val="solid"/>
+                      <a:round/>
+                      <a:headEnd type="none" w="med" len="med"/>
+                      <a:tailEnd type="none" w="med" len="med"/>
+                    </a:lnR>
+                    <a:lnT w="12700" cap="flat" cmpd="sng" algn="ctr">
+                      <a:solidFill>
+                        <a:schemeClr val="accent5"/>
+                      </a:solidFill>
+                      <a:prstDash val="solid"/>
+                      <a:round/>
+                      <a:headEnd type="none" w="med" len="med"/>
+                      <a:tailEnd type="none" w="med" len="med"/>
+                    </a:lnT>
+                    <a:lnB w="12700" cap="flat" cmpd="sng" algn="ctr">
+                      <a:solidFill>
+                        <a:schemeClr val="accent5"/>
+                      </a:solidFill>
+                      <a:prstDash val="solid"/>
+                      <a:round/>
+                      <a:headEnd type="none" w="med" len="med"/>
+                      <a:tailEnd type="none" w="med" len="med"/>
+                    </a:lnB>
+                  </a:tcPr>
+                </a:tc>
+                <a:tc>
+                  <a:txBody>
+                    <a:bodyPr/>
+                    <a:lstStyle/>
+                    <a:p>
+                      <a:pPr indent="0" marL="0">
+                        <a:buNone/>
+                      </a:pPr>
+                      <a:r>
+                        <a:rPr lang="en-US" sz="1250" dirty="0">
+                          <a:solidFill>
+                            <a:schemeClr val="tx1"/>
+                          </a:solidFill>
+                          <a:latin typeface="Courier New" pitchFamily="34" charset="0"/>
+                          <a:ea typeface="Courier New" pitchFamily="34" charset="-122"/>
+                          <a:cs typeface="Courier New" pitchFamily="34" charset="-120"/>
+                        </a:rPr>
+                        <a:t>all</a:t>
+                      </a:r>
+                      <a:endParaRPr lang="en-US" sz="1250" dirty="0">
+                        <a:latin typeface="Courier New" charset="0"/>
+                        <a:ea typeface="Courier New" charset="0"/>
+                        <a:cs typeface="Courier New" charset="0"/>
+                      </a:endParaRPr>
+                    </a:p>
+                  </a:txBody>
+                  <a:tcPr marL="91440" marR="91440" marT="45720" marB="45720" anchor="ctr">
+                    <a:lnL w="12700" cap="flat" cmpd="sng" algn="ctr">
+                      <a:solidFill>
+                        <a:schemeClr val="accent5"/>
+                      </a:solidFill>
+                      <a:prstDash val="solid"/>
+                      <a:round/>
+                      <a:headEnd type="none" w="med" len="med"/>
+                      <a:tailEnd type="none" w="med" len="med"/>
+                    </a:lnL>
+                    <a:lnR w="12700" cap="flat" cmpd="sng" algn="ctr">
+                      <a:solidFill>
+                        <a:schemeClr val="accent5"/>
+                      </a:solidFill>
+                      <a:prstDash val="solid"/>
+                      <a:round/>
+                      <a:headEnd type="none" w="med" len="med"/>
+                      <a:tailEnd type="none" w="med" len="med"/>
+                    </a:lnR>
+                    <a:lnT w="12700" cap="flat" cmpd="sng" algn="ctr">
+                      <a:solidFill>
+                        <a:schemeClr val="accent5"/>
+                      </a:solidFill>
+                      <a:prstDash val="solid"/>
+                      <a:round/>
+                      <a:headEnd type="none" w="med" len="med"/>
+                      <a:tailEnd type="none" w="med" len="med"/>
+                    </a:lnT>
+                    <a:lnB w="12700" cap="flat" cmpd="sng" algn="ctr">
+                      <a:solidFill>
+                        <a:schemeClr val="accent5"/>
+                      </a:solidFill>
+                      <a:prstDash val="solid"/>
+                      <a:round/>
+                      <a:headEnd type="none" w="med" len="med"/>
+                      <a:tailEnd type="none" w="med" len="med"/>
+                    </a:lnB>
+                  </a:tcPr>
+                </a:tc>
+                <a:tc>
+                  <a:txBody>
+                    <a:bodyPr/>
+                    <a:lstStyle/>
+                    <a:p>
+                      <a:pPr indent="0" marL="0">
+                        <a:buNone/>
+                      </a:pPr>
+                      <a:r>
+                        <a:rPr lang="en-US" sz="1250" dirty="0">
+                          <a:solidFill>
+                            <a:schemeClr val="tx1"/>
+                          </a:solidFill>
+                          <a:latin typeface="Calibri" pitchFamily="34" charset="0"/>
+                          <a:ea typeface="Calibri" pitchFamily="34" charset="-122"/>
+                          <a:cs typeface="Calibri" pitchFamily="34" charset="-120"/>
+                        </a:rPr>
+                        <a:t>Return both the raw value and the human label for choice fields</a:t>
+                      </a:r>
+                      <a:endParaRPr lang="en-US" sz="1250" dirty="0">
+                        <a:latin typeface="Calibri" charset="0"/>
+                        <a:ea typeface="Calibri" charset="0"/>
+                        <a:cs typeface="Calibri" charset="0"/>
+                      </a:endParaRPr>
+                    </a:p>
+                  </a:txBody>
+                  <a:tcPr marL="91440" marR="91440" marT="45720" marB="45720" anchor="ctr">
+                    <a:lnL w="12700" cap="flat" cmpd="sng" algn="ctr">
+                      <a:solidFill>
+                        <a:schemeClr val="accent5"/>
+                      </a:solidFill>
+                      <a:prstDash val="solid"/>
+                      <a:round/>
+                      <a:headEnd type="none" w="med" len="med"/>
+                      <a:tailEnd type="none" w="med" len="med"/>
+                    </a:lnL>
+                    <a:lnR w="12700" cap="flat" cmpd="sng" algn="ctr">
+                      <a:solidFill>
+                        <a:schemeClr val="accent5"/>
+                      </a:solidFill>
+                      <a:prstDash val="solid"/>
+                      <a:round/>
+                      <a:headEnd type="none" w="med" len="med"/>
+                      <a:tailEnd type="none" w="med" len="med"/>
+                    </a:lnR>
+                    <a:lnT w="12700" cap="flat" cmpd="sng" algn="ctr">
+                      <a:solidFill>
+                        <a:schemeClr val="accent5"/>
+                      </a:solidFill>
+                      <a:prstDash val="solid"/>
+                      <a:round/>
+                      <a:headEnd type="none" w="med" len="med"/>
+                      <a:tailEnd type="none" w="med" len="med"/>
+                    </a:lnT>
+                    <a:lnB w="12700" cap="flat" cmpd="sng" algn="ctr">
+                      <a:solidFill>
+                        <a:schemeClr val="accent5"/>
+                      </a:solidFill>
+                      <a:prstDash val="solid"/>
+                      <a:round/>
+                      <a:headEnd type="none" w="med" len="med"/>
+                      <a:tailEnd type="none" w="med" len="med"/>
+                    </a:lnB>
+                  </a:tcPr>
+                </a:tc>
+              </a:tr>
+              <a:tr h="420624">
+                <a:tc>
+                  <a:txBody>
+                    <a:bodyPr/>
+                    <a:lstStyle/>
+                    <a:p>
+                      <a:pPr indent="0" marL="0">
+                        <a:buNone/>
+                      </a:pPr>
+                      <a:r>
+                        <a:rPr lang="en-US" sz="1250" dirty="0">
+                          <a:solidFill>
+                            <a:schemeClr val="tx1"/>
+                          </a:solidFill>
+                          <a:latin typeface="Courier New" pitchFamily="34" charset="0"/>
+                          <a:ea typeface="Courier New" pitchFamily="34" charset="-122"/>
+                          <a:cs typeface="Courier New" pitchFamily="34" charset="-120"/>
+                        </a:rPr>
+                        <a:t>sysparm_limit</a:t>
+                      </a:r>
+                      <a:endParaRPr lang="en-US" sz="1250" dirty="0">
+                        <a:latin typeface="Courier New" charset="0"/>
+                        <a:ea typeface="Courier New" charset="0"/>
+                        <a:cs typeface="Courier New" charset="0"/>
+                      </a:endParaRPr>
+                    </a:p>
+                  </a:txBody>
+                  <a:tcPr marL="91440" marR="91440" marT="45720" marB="45720" anchor="ctr">
+                    <a:lnL w="12700" cap="flat" cmpd="sng" algn="ctr">
+                      <a:solidFill>
+                        <a:schemeClr val="accent5"/>
+                      </a:solidFill>
+                      <a:prstDash val="solid"/>
+                      <a:round/>
+                      <a:headEnd type="none" w="med" len="med"/>
+                      <a:tailEnd type="none" w="med" len="med"/>
+                    </a:lnL>
+                    <a:lnR w="12700" cap="flat" cmpd="sng" algn="ctr">
+                      <a:solidFill>
+                        <a:schemeClr val="accent5"/>
+                      </a:solidFill>
+                      <a:prstDash val="solid"/>
+                      <a:round/>
+                      <a:headEnd type="none" w="med" len="med"/>
+                      <a:tailEnd type="none" w="med" len="med"/>
+                    </a:lnR>
+                    <a:lnT w="12700" cap="flat" cmpd="sng" algn="ctr">
+                      <a:solidFill>
+                        <a:schemeClr val="accent5"/>
+                      </a:solidFill>
+                      <a:prstDash val="solid"/>
+                      <a:round/>
+                      <a:headEnd type="none" w="med" len="med"/>
+                      <a:tailEnd type="none" w="med" len="med"/>
+                    </a:lnT>
+                    <a:lnB w="12700" cap="flat" cmpd="sng" algn="ctr">
+                      <a:solidFill>
+                        <a:schemeClr val="accent5"/>
+                      </a:solidFill>
+                      <a:prstDash val="solid"/>
+                      <a:round/>
+                      <a:headEnd type="none" w="med" len="med"/>
+                      <a:tailEnd type="none" w="med" len="med"/>
+                    </a:lnB>
+                  </a:tcPr>
+                </a:tc>
+                <a:tc>
+                  <a:txBody>
+                    <a:bodyPr/>
+                    <a:lstStyle/>
+                    <a:p>
+                      <a:pPr indent="0" marL="0">
+                        <a:buNone/>
+                      </a:pPr>
+                      <a:r>
+                        <a:rPr lang="en-US" sz="1250" dirty="0">
+                          <a:solidFill>
+                            <a:schemeClr val="tx1"/>
+                          </a:solidFill>
+                          <a:latin typeface="Courier New" pitchFamily="34" charset="0"/>
+                          <a:ea typeface="Courier New" pitchFamily="34" charset="-122"/>
+                          <a:cs typeface="Courier New" pitchFamily="34" charset="-120"/>
+                        </a:rPr>
+                        <a:t>200</a:t>
+                      </a:r>
+                      <a:endParaRPr lang="en-US" sz="1250" dirty="0">
+                        <a:latin typeface="Courier New" charset="0"/>
+                        <a:ea typeface="Courier New" charset="0"/>
+                        <a:cs typeface="Courier New" charset="0"/>
+                      </a:endParaRPr>
+                    </a:p>
+                  </a:txBody>
+                  <a:tcPr marL="91440" marR="91440" marT="45720" marB="45720" anchor="ctr">
+                    <a:lnL w="12700" cap="flat" cmpd="sng" algn="ctr">
+                      <a:solidFill>
+                        <a:schemeClr val="accent5"/>
+                      </a:solidFill>
+                      <a:prstDash val="solid"/>
+                      <a:round/>
+                      <a:headEnd type="none" w="med" len="med"/>
+                      <a:tailEnd type="none" w="med" len="med"/>
+                    </a:lnL>
+                    <a:lnR w="12700" cap="flat" cmpd="sng" algn="ctr">
+                      <a:solidFill>
+                        <a:schemeClr val="accent5"/>
+                      </a:solidFill>
+                      <a:prstDash val="solid"/>
+                      <a:round/>
+                      <a:headEnd type="none" w="med" len="med"/>
+                      <a:tailEnd type="none" w="med" len="med"/>
+                    </a:lnR>
+                    <a:lnT w="12700" cap="flat" cmpd="sng" algn="ctr">
+                      <a:solidFill>
+                        <a:schemeClr val="accent5"/>
+                      </a:solidFill>
+                      <a:prstDash val="solid"/>
+                      <a:round/>
+                      <a:headEnd type="none" w="med" len="med"/>
+                      <a:tailEnd type="none" w="med" len="med"/>
+                    </a:lnT>
+                    <a:lnB w="12700" cap="flat" cmpd="sng" algn="ctr">
+                      <a:solidFill>
+                        <a:schemeClr val="accent5"/>
+                      </a:solidFill>
+                      <a:prstDash val="solid"/>
+                      <a:round/>
+                      <a:headEnd type="none" w="med" len="med"/>
+                      <a:tailEnd type="none" w="med" len="med"/>
+                    </a:lnB>
+                  </a:tcPr>
+                </a:tc>
+                <a:tc>
+                  <a:txBody>
+                    <a:bodyPr/>
+                    <a:lstStyle/>
+                    <a:p>
+                      <a:pPr indent="0" marL="0">
+                        <a:buNone/>
+                      </a:pPr>
+                      <a:r>
+                        <a:rPr lang="en-US" sz="1250" dirty="0">
+                          <a:solidFill>
+                            <a:schemeClr val="tx1"/>
+                          </a:solidFill>
+                          <a:latin typeface="Calibri" pitchFamily="34" charset="0"/>
+                          <a:ea typeface="Calibri" pitchFamily="34" charset="-122"/>
+                          <a:cs typeface="Calibri" pitchFamily="34" charset="-120"/>
+                        </a:rPr>
+                        <a:t>Caps how many incidents come back in one call</a:t>
+                      </a:r>
+                      <a:endParaRPr lang="en-US" sz="1250" dirty="0">
+                        <a:latin typeface="Calibri" charset="0"/>
+                        <a:ea typeface="Calibri" charset="0"/>
+                        <a:cs typeface="Calibri" charset="0"/>
+                      </a:endParaRPr>
+                    </a:p>
+                  </a:txBody>
+                  <a:tcPr marL="91440" marR="91440" marT="45720" marB="45720" anchor="ctr">
+                    <a:lnL w="12700" cap="flat" cmpd="sng" algn="ctr">
+                      <a:solidFill>
+                        <a:schemeClr val="accent5"/>
+                      </a:solidFill>
+                      <a:prstDash val="solid"/>
+                      <a:round/>
+                      <a:headEnd type="none" w="med" len="med"/>
+                      <a:tailEnd type="none" w="med" len="med"/>
+                    </a:lnL>
+                    <a:lnR w="12700" cap="flat" cmpd="sng" algn="ctr">
+                      <a:solidFill>
+                        <a:schemeClr val="accent5"/>
+                      </a:solidFill>
+                      <a:prstDash val="solid"/>
+                      <a:round/>
+                      <a:headEnd type="none" w="med" len="med"/>
+                      <a:tailEnd type="none" w="med" len="med"/>
+                    </a:lnR>
+                    <a:lnT w="12700" cap="flat" cmpd="sng" algn="ctr">
+                      <a:solidFill>
+                        <a:schemeClr val="accent5"/>
+                      </a:solidFill>
+                      <a:prstDash val="solid"/>
+                      <a:round/>
+                      <a:headEnd type="none" w="med" len="med"/>
+                      <a:tailEnd type="none" w="med" len="med"/>
+                    </a:lnT>
+                    <a:lnB w="12700" cap="flat" cmpd="sng" algn="ctr">
+                      <a:solidFill>
+                        <a:schemeClr val="accent5"/>
+                      </a:solidFill>
+                      <a:prstDash val="solid"/>
+                      <a:round/>
+                      <a:headEnd type="none" w="med" len="med"/>
+                      <a:tailEnd type="none" w="med" len="med"/>
+                    </a:lnB>
+                  </a:tcPr>
+                </a:tc>
+              </a:tr>
+            </a:tbl>
+          </a:graphicData>
+        </a:graphic>
+      </p:graphicFrame>
+      <p:sp>
+        <p:nvSpPr>
+          <p:cNvPr id="7" name="Text 4"/>
+          <p:cNvSpPr txBox="1"/>
+          <p:nvPr/>
+        </p:nvSpPr>
+        <p:spPr>
+          <a:xfrm>
+            <a:off x="548640" y="5806440"/>
+            <a:ext cx="11064240" cy="457200"/>
+          </a:xfrm>
+          <a:prstGeom prst="rect">
+            <a:avLst/>
+          </a:prstGeom>
+          <a:noFill/>
+          <a:ln/>
+        </p:spPr>
+        <p:txBody>
+          <a:bodyPr wrap="square" lIns="0" tIns="0" rIns="0" bIns="0" rtlCol="0" anchor="ctr"/>
+          <a:lstStyle/>
+          <a:p>
+            <a:pPr algn="l" indent="0" marL="0">
+              <a:lnSpc>
+                <a:spcPct val="125000"/>
+              </a:lnSpc>
+              <a:buNone/>
+            </a:pPr>
+            <a:r>
+              <a:rPr lang="en-US" sz="1250" i="1" dirty="0">
+                <a:solidFill>
+                  <a:schemeClr val="accent4"/>
                 </a:solidFill>
                 <a:latin typeface="Calibri" pitchFamily="34" charset="0"/>
                 <a:ea typeface="Calibri" pitchFamily="34" charset="-122"/>
                 <a:cs typeface="Calibri" pitchFamily="34" charset="-120"/>
               </a:rPr>
-              <a:t>No record found → sends again</a:t>
+              <a:t>The response is JSON: an array of incident objects under result. That array is what Split Incidents turns into one n8n item per incident.</a:t>
             </a:r>
             <a:endParaRPr lang="en-US" sz="1250" dirty="0"/>
-          </a:p>
-        </p:txBody>
-      </p:sp>
-      <p:sp>
-        <p:nvSpPr>
-          <p:cNvPr id="16" name="Text 14"/>
-          <p:cNvSpPr txBox="1"/>
-          <p:nvPr/>
-        </p:nvSpPr>
-        <p:spPr>
-          <a:xfrm>
-            <a:off x="548640" y="5029200"/>
-            <a:ext cx="11064240" cy="457200"/>
-          </a:xfrm>
-          <a:prstGeom prst="rect">
-            <a:avLst/>
-          </a:prstGeom>
-          <a:noFill/>
-          <a:ln/>
-        </p:spPr>
-        <p:txBody>
-          <a:bodyPr wrap="square" lIns="0" tIns="0" rIns="0" bIns="0" rtlCol="0" anchor="ctr"/>
-          <a:lstStyle/>
-          <a:p>
-            <a:pPr algn="l" indent="0" marL="0">
-              <a:buNone/>
-            </a:pPr>
-            <a:r>
-              <a:rPr lang="en-US" sz="1300" i="1" dirty="0">
-                <a:solidFill>
-                  <a:schemeClr val="accent4"/>
-                </a:solidFill>
-                <a:latin typeface="Calibri" pitchFamily="34" charset="0"/>
-                <a:ea typeface="Calibri" pitchFamily="34" charset="-122"/>
-                <a:cs typeface="Calibri" pitchFamily="34" charset="-120"/>
-              </a:rPr>
-              <a:t>Why ordinary SMTP can't fix this: there is no transaction spanning “send an email” and “write a database row.” One of them has to come first.</a:t>
-            </a:r>
-            <a:endParaRPr lang="en-US" sz="1300" dirty="0"/>
           </a:p>
         </p:txBody>
       </p:sp>

--- a/n8n-epsilon-detailed.pptx
+++ b/n8n-epsilon-detailed.pptx
@@ -4,6 +4,9 @@
   <p:sldMasterIdLst>
     <p:sldMasterId id="2147483648" r:id="rId1"/>
   </p:sldMasterIdLst>
+  <p:notesMasterIdLst>
+    <p:notesMasterId r:id="rId19"/>
+  </p:notesMasterIdLst>
   <p:sldIdLst>
     <p:sldId id="256" r:id="rId2"/>
     <p:sldId id="257" r:id="rId3"/>
@@ -21,12 +24,8 @@
     <p:sldId id="269" r:id="rId15"/>
     <p:sldId id="270" r:id="rId16"/>
     <p:sldId id="271" r:id="rId17"/>
-    <p:sldId id="272" r:id="rId18"/>
-    <p:sldId id="273" r:id="rId19"/>
+    <p:sldId id="273" r:id="rId18"/>
   </p:sldIdLst>
-  <p:notesMasterIdLst>
-    <p:notesMasterId r:id="rId20"/>
-  </p:notesMasterIdLst>
   <p:sldSz cx="12192000" cy="6858000"/>
   <p:notesSz cx="6858000" cy="12192000"/>
   <p:defaultTextStyle>
@@ -124,41 +123,41 @@
   <p:extLst>
     <p:ext uri="{521415D9-36F7-43E2-AB2F-B90AF26B5E84}">
       <p14:sectionLst xmlns:p14="http://schemas.microsoft.com/office/powerpoint/2010/main">
-        <p14:section name="Title" id="{139c69fd-f968-e223-f586-ad01923921d3}">
+        <p14:section name="Title" id="{139C69FD-F968-E223-F586-AD01923921D3}">
           <p14:sldIdLst>
             <p14:sldId id="256"/>
           </p14:sldIdLst>
         </p14:section>
-        <p14:section name="Overview" id="{0d57b266-616e-167c-7fce-a8cddc9d46f8}">
+        <p14:section name="Overview" id="{0D57B266-616E-167C-7FCE-A8CDDC9D46F8}">
           <p14:sldIdLst>
             <p14:sldId id="257"/>
             <p14:sldId id="258"/>
           </p14:sldIdLst>
         </p14:section>
-        <p14:section name="Architecture" id="{172d912e-9df9-6c25-9c73-69453eacd038}">
+        <p14:section name="Architecture" id="{172D912E-9DF9-6C25-9C73-69453EACD038}">
           <p14:sldIdLst>
             <p14:sldId id="259"/>
             <p14:sldId id="260"/>
           </p14:sldIdLst>
         </p14:section>
-        <p14:section name="Logic" id="{333f03b9-0834-7af6-e2d9-0604ab579450}">
+        <p14:section name="Logic" id="{333F03B9-0834-7AF6-E2D9-0604AB579450}">
           <p14:sldIdLst>
             <p14:sldId id="261"/>
           </p14:sldIdLst>
         </p14:section>
-        <p14:section name="Pipeline" id="{0491a843-9780-bb4e-e718-d476169036ce}">
+        <p14:section name="Pipeline" id="{0491A843-9780-BB4E-E718-D476169036CE}">
           <p14:sldIdLst>
             <p14:sldId id="262"/>
           </p14:sldIdLst>
         </p14:section>
-        <p14:section name="RestApi" id="{89655295-1fee-fbbc-6353-aae8a533f03f}">
+        <p14:section name="RestApi" id="{89655295-1FEE-FBBC-6353-AAE8A533F03F}">
           <p14:sldIdLst>
             <p14:sldId id="263"/>
             <p14:sldId id="264"/>
             <p14:sldId id="265"/>
           </p14:sldIdLst>
         </p14:section>
-        <p14:section name="Reliability" id="{b103373e-7289-c91e-5fee-2ead839fc83b}">
+        <p14:section name="Reliability" id="{B103373E-7289-C91E-5FEE-2EAD839FC83B}">
           <p14:sldIdLst>
             <p14:sldId id="266"/>
             <p14:sldId id="267"/>
@@ -168,9 +167,8 @@
             <p14:sldId id="271"/>
           </p14:sldIdLst>
         </p14:section>
-        <p14:section name="Delivery" id="{0881d30b-2a0d-6f6e-810e-7a29de008016}">
+        <p14:section name="Delivery" id="{0881D30B-2A0D-6F6E-810E-7A29DE008016}">
           <p14:sldIdLst>
-            <p14:sldId id="272"/>
             <p14:sldId id="273"/>
           </p14:sldIdLst>
         </p14:section>
@@ -205,234 +203,10 @@
           <a:chExt cx="0" cy="0"/>
         </a:xfrm>
       </p:grpSpPr>
-      <p:sp>
-        <p:nvSpPr>
-          <p:cNvPr id="2" name="Header Placeholder 1"/>
-          <p:cNvSpPr>
-            <a:spLocks noGrp="1"/>
-          </p:cNvSpPr>
-          <p:nvPr>
-            <p:ph type="hdr" sz="quarter"/>
-          </p:nvPr>
-        </p:nvSpPr>
-        <p:spPr>
-          <a:xfrm>
-            <a:off x="0" y="0"/>
-            <a:ext cx="2971800" cy="458788"/>
-          </a:xfrm>
-          <a:prstGeom prst="rect">
-            <a:avLst/>
-          </a:prstGeom>
-        </p:spPr>
-        <p:txBody>
-          <a:bodyPr vert="horz" lIns="91440" tIns="45720" rIns="91440" bIns="45720" rtlCol="0"/>
-          <a:lstStyle>
-            <a:lvl1pPr algn="l">
-              <a:defRPr sz="1200"/>
-            </a:lvl1pPr>
-          </a:lstStyle>
-          <a:p>
-            <a:endParaRPr lang="en-US"/>
-          </a:p>
-        </p:txBody>
-      </p:sp>
-      <p:sp>
-        <p:nvSpPr>
-          <p:cNvPr id="3" name="Date Placeholder 2"/>
-          <p:cNvSpPr>
-            <a:spLocks noGrp="1"/>
-          </p:cNvSpPr>
-          <p:nvPr>
-            <p:ph type="dt" idx="1"/>
-          </p:nvPr>
-        </p:nvSpPr>
-        <p:spPr>
-          <a:xfrm>
-            <a:off x="3884613" y="0"/>
-            <a:ext cx="2971800" cy="458788"/>
-          </a:xfrm>
-          <a:prstGeom prst="rect">
-            <a:avLst/>
-          </a:prstGeom>
-        </p:spPr>
-        <p:txBody>
-          <a:bodyPr vert="horz" lIns="91440" tIns="45720" rIns="91440" bIns="45720" rtlCol="0"/>
-          <a:lstStyle>
-            <a:lvl1pPr algn="r">
-              <a:defRPr sz="1200"/>
-            </a:lvl1pPr>
-          </a:lstStyle>
-          <a:p>
-            <a:fld id="{5282F153-3F37-0F45-9E97-73ACFA13230C}" type="datetimeFigureOut">
-              <a:rPr lang="en-US"/>
-              <a:t>7/23/19</a:t>
-            </a:fld>
-            <a:endParaRPr lang="en-US"/>
-          </a:p>
-        </p:txBody>
-      </p:sp>
-      <p:sp>
-        <p:nvSpPr>
-          <p:cNvPr id="4" name="Slide Image Placeholder 3"/>
-          <p:cNvSpPr>
-            <a:spLocks noGrp="1" noRot="1" noChangeAspect="1"/>
-          </p:cNvSpPr>
-          <p:nvPr>
-            <p:ph type="sldImg" idx="2"/>
-          </p:nvPr>
-        </p:nvSpPr>
-        <p:spPr>
-          <a:xfrm>
-            <a:off x="685800" y="1143000"/>
-            <a:ext cx="5486400" cy="3086100"/>
-          </a:xfrm>
-          <a:prstGeom prst="rect">
-            <a:avLst/>
-          </a:prstGeom>
-          <a:noFill/>
-          <a:ln w="12700">
-            <a:solidFill>
-              <a:prstClr val="black"/>
-            </a:solidFill>
-          </a:ln>
-        </p:spPr>
-        <p:txBody>
-          <a:bodyPr vert="horz" lIns="91440" tIns="45720" rIns="91440" bIns="45720" rtlCol="0" anchor="ctr"/>
-          <a:lstStyle/>
-          <a:p>
-            <a:endParaRPr lang="en-US"/>
-          </a:p>
-        </p:txBody>
-      </p:sp>
-      <p:sp>
-        <p:nvSpPr>
-          <p:cNvPr id="5" name="Notes Placeholder 4"/>
-          <p:cNvSpPr>
-            <a:spLocks noGrp="1"/>
-          </p:cNvSpPr>
-          <p:nvPr>
-            <p:ph type="body" sz="quarter" idx="3"/>
-          </p:nvPr>
-        </p:nvSpPr>
-        <p:spPr>
-          <a:xfrm>
-            <a:off x="685800" y="4400550"/>
-            <a:ext cx="5486400" cy="3600450"/>
-          </a:xfrm>
-          <a:prstGeom prst="rect">
-            <a:avLst/>
-          </a:prstGeom>
-        </p:spPr>
-        <p:txBody>
-          <a:bodyPr vert="horz" lIns="91440" tIns="45720" rIns="91440" bIns="45720" rtlCol="0"/>
-          <a:lstStyle/>
-          <a:p>
-            <a:pPr lvl="0"/>
-            <a:r>
-              <a:rPr lang="en-US"/>
-              <a:t>Click to edit Master text styles</a:t>
-            </a:r>
-          </a:p>
-          <a:p>
-            <a:pPr lvl="1"/>
-            <a:r>
-              <a:rPr lang="en-US"/>
-              <a:t>Second level</a:t>
-            </a:r>
-          </a:p>
-          <a:p>
-            <a:pPr lvl="2"/>
-            <a:r>
-              <a:rPr lang="en-US"/>
-              <a:t>Third level</a:t>
-            </a:r>
-          </a:p>
-          <a:p>
-            <a:pPr lvl="3"/>
-            <a:r>
-              <a:rPr lang="en-US"/>
-              <a:t>Fourth level</a:t>
-            </a:r>
-          </a:p>
-          <a:p>
-            <a:pPr lvl="4"/>
-            <a:r>
-              <a:rPr lang="en-US"/>
-              <a:t>Fifth level</a:t>
-            </a:r>
-          </a:p>
-        </p:txBody>
-      </p:sp>
-      <p:sp>
-        <p:nvSpPr>
-          <p:cNvPr id="6" name="Footer Placeholder 5"/>
-          <p:cNvSpPr>
-            <a:spLocks noGrp="1"/>
-          </p:cNvSpPr>
-          <p:nvPr>
-            <p:ph type="ftr" sz="quarter" idx="4"/>
-          </p:nvPr>
-        </p:nvSpPr>
-        <p:spPr>
-          <a:xfrm>
-            <a:off x="0" y="8685213"/>
-            <a:ext cx="2971800" cy="458787"/>
-          </a:xfrm>
-          <a:prstGeom prst="rect">
-            <a:avLst/>
-          </a:prstGeom>
-        </p:spPr>
-        <p:txBody>
-          <a:bodyPr vert="horz" lIns="91440" tIns="45720" rIns="91440" bIns="45720" rtlCol="0" anchor="b"/>
-          <a:lstStyle>
-            <a:lvl1pPr algn="l">
-              <a:defRPr sz="1200"/>
-            </a:lvl1pPr>
-          </a:lstStyle>
-          <a:p>
-            <a:endParaRPr lang="en-US"/>
-          </a:p>
-        </p:txBody>
-      </p:sp>
-      <p:sp>
-        <p:nvSpPr>
-          <p:cNvPr id="7" name="Slide Number Placeholder 6"/>
-          <p:cNvSpPr>
-            <a:spLocks noGrp="1"/>
-          </p:cNvSpPr>
-          <p:nvPr>
-            <p:ph type="sldNum" sz="quarter" idx="5"/>
-          </p:nvPr>
-        </p:nvSpPr>
-        <p:spPr>
-          <a:xfrm>
-            <a:off x="3884613" y="8685213"/>
-            <a:ext cx="2971800" cy="458787"/>
-          </a:xfrm>
-          <a:prstGeom prst="rect">
-            <a:avLst/>
-          </a:prstGeom>
-        </p:spPr>
-        <p:txBody>
-          <a:bodyPr vert="horz" lIns="91440" tIns="45720" rIns="91440" bIns="45720" rtlCol="0" anchor="b"/>
-          <a:lstStyle>
-            <a:lvl1pPr algn="r">
-              <a:defRPr sz="1200"/>
-            </a:lvl1pPr>
-          </a:lstStyle>
-          <a:p>
-            <a:fld id="{CE5E9CC1-C706-0F49-92D6-E571CC5EEA8F}" type="slidenum">
-              <a:rPr lang="en-US"/>
-              <a:t>‹#›</a:t>
-            </a:fld>
-            <a:endParaRPr lang="en-US"/>
-          </a:p>
-        </p:txBody>
-      </p:sp>
     </p:spTree>
     <p:extLst>
       <p:ext uri="{BB962C8B-B14F-4D97-AF65-F5344CB8AC3E}">
-        <p14:creationId xmlns:p14="http://schemas.microsoft.com/office/powerpoint/2010/main" val="1024086991"/>
+        <p14:creationId xmlns:p14="http://schemas.microsoft.com/office/powerpoint/2010/main" val="1181806243"/>
       </p:ext>
     </p:extLst>
   </p:cSld>
@@ -576,10 +350,6 @@
           <a:bodyPr/>
           <a:lstStyle/>
           <a:p>
-            <a:r>
-              <a:rPr lang="en-US" dirty="0"/>
-              <a:t/>
-            </a:r>
             <a:endParaRPr lang="en-US" dirty="0"/>
           </a:p>
         </p:txBody>
@@ -664,10 +434,6 @@
           <a:bodyPr/>
           <a:lstStyle/>
           <a:p>
-            <a:r>
-              <a:rPr lang="en-US" dirty="0"/>
-              <a:t/>
-            </a:r>
             <a:endParaRPr lang="en-US" dirty="0"/>
           </a:p>
         </p:txBody>
@@ -752,10 +518,6 @@
           <a:bodyPr/>
           <a:lstStyle/>
           <a:p>
-            <a:r>
-              <a:rPr lang="en-US" dirty="0"/>
-              <a:t/>
-            </a:r>
             <a:endParaRPr lang="en-US" dirty="0"/>
           </a:p>
         </p:txBody>
@@ -840,10 +602,6 @@
           <a:bodyPr/>
           <a:lstStyle/>
           <a:p>
-            <a:r>
-              <a:rPr lang="en-US" dirty="0"/>
-              <a:t/>
-            </a:r>
             <a:endParaRPr lang="en-US" dirty="0"/>
           </a:p>
         </p:txBody>
@@ -928,10 +686,6 @@
           <a:bodyPr/>
           <a:lstStyle/>
           <a:p>
-            <a:r>
-              <a:rPr lang="en-US" dirty="0"/>
-              <a:t/>
-            </a:r>
             <a:endParaRPr lang="en-US" dirty="0"/>
           </a:p>
         </p:txBody>
@@ -1016,10 +770,6 @@
           <a:bodyPr/>
           <a:lstStyle/>
           <a:p>
-            <a:r>
-              <a:rPr lang="en-US" dirty="0"/>
-              <a:t/>
-            </a:r>
             <a:endParaRPr lang="en-US" dirty="0"/>
           </a:p>
         </p:txBody>
@@ -1104,10 +854,6 @@
           <a:bodyPr/>
           <a:lstStyle/>
           <a:p>
-            <a:r>
-              <a:rPr lang="en-US" dirty="0"/>
-              <a:t/>
-            </a:r>
             <a:endParaRPr lang="en-US" dirty="0"/>
           </a:p>
         </p:txBody>
@@ -1192,10 +938,6 @@
           <a:bodyPr/>
           <a:lstStyle/>
           <a:p>
-            <a:r>
-              <a:rPr lang="en-US" dirty="0"/>
-              <a:t/>
-            </a:r>
             <a:endParaRPr lang="en-US" dirty="0"/>
           </a:p>
         </p:txBody>
@@ -1280,10 +1022,6 @@
           <a:bodyPr/>
           <a:lstStyle/>
           <a:p>
-            <a:r>
-              <a:rPr lang="en-US" dirty="0"/>
-              <a:t/>
-            </a:r>
             <a:endParaRPr lang="en-US" dirty="0"/>
           </a:p>
         </p:txBody>
@@ -1306,94 +1044,6 @@
             <a:fld id="{F7021451-1387-4CA6-816F-3879F97B5CBC}" type="slidenum">
               <a:rPr lang="en-US"/>
               <a:t>17</a:t>
-            </a:fld>
-            <a:endParaRPr lang="en-US"/>
-          </a:p>
-        </p:txBody>
-      </p:sp>
-    </p:spTree>
-    <p:extLst>
-      <p:ext uri="{BB962C8B-B14F-4D97-AF65-F5344CB8AC3E}">
-        <p14:creationId xmlns:p14="http://schemas.microsoft.com/office/powerpoint/2010/main" val="1024086991"/>
-      </p:ext>
-    </p:extLst>
-  </p:cSld>
-  <p:clrMapOvr>
-    <a:masterClrMapping/>
-  </p:clrMapOvr>
-</p:notes>
-</file>
-
-<file path=ppt/notesSlides/notesSlide18.xml><?xml version="1.0" encoding="utf-8"?>
-<p:notes xmlns:a="http://schemas.openxmlformats.org/drawingml/2006/main" xmlns:r="http://schemas.openxmlformats.org/officeDocument/2006/relationships" xmlns:p="http://schemas.openxmlformats.org/presentationml/2006/main">
-  <p:cSld>
-    <p:spTree>
-      <p:nvGrpSpPr>
-        <p:cNvPr id="1" name=""/>
-        <p:cNvGrpSpPr/>
-        <p:nvPr/>
-      </p:nvGrpSpPr>
-      <p:grpSpPr>
-        <a:xfrm>
-          <a:off x="0" y="0"/>
-          <a:ext cx="0" cy="0"/>
-          <a:chOff x="0" y="0"/>
-          <a:chExt cx="0" cy="0"/>
-        </a:xfrm>
-      </p:grpSpPr>
-      <p:sp>
-        <p:nvSpPr>
-          <p:cNvPr id="2" name="Slide Image Placeholder 1"/>
-          <p:cNvSpPr>
-            <a:spLocks noGrp="1" noRot="1" noChangeAspect="1"/>
-          </p:cNvSpPr>
-          <p:nvPr>
-            <p:ph type="sldImg"/>
-          </p:nvPr>
-        </p:nvSpPr>
-        <p:spPr/>
-      </p:sp>
-      <p:sp>
-        <p:nvSpPr>
-          <p:cNvPr id="3" name="Notes Placeholder 2"/>
-          <p:cNvSpPr>
-            <a:spLocks noGrp="1"/>
-          </p:cNvSpPr>
-          <p:nvPr>
-            <p:ph type="body" idx="1"/>
-          </p:nvPr>
-        </p:nvSpPr>
-        <p:spPr/>
-        <p:txBody>
-          <a:bodyPr/>
-          <a:lstStyle/>
-          <a:p>
-            <a:r>
-              <a:rPr lang="en-US" dirty="0"/>
-              <a:t/>
-            </a:r>
-            <a:endParaRPr lang="en-US" dirty="0"/>
-          </a:p>
-        </p:txBody>
-      </p:sp>
-      <p:sp>
-        <p:nvSpPr>
-          <p:cNvPr id="4" name="Slide Number Placeholder 3"/>
-          <p:cNvSpPr>
-            <a:spLocks noGrp="1"/>
-          </p:cNvSpPr>
-          <p:nvPr>
-            <p:ph type="sldNum" sz="quarter" idx="10"/>
-          </p:nvPr>
-        </p:nvSpPr>
-        <p:spPr/>
-        <p:txBody>
-          <a:bodyPr/>
-          <a:lstStyle/>
-          <a:p>
-            <a:fld id="{F7021451-1387-4CA6-816F-3879F97B5CBC}" type="slidenum">
-              <a:rPr lang="en-US"/>
-              <a:t>18</a:t>
             </a:fld>
             <a:endParaRPr lang="en-US"/>
           </a:p>
@@ -1456,10 +1106,6 @@
           <a:bodyPr/>
           <a:lstStyle/>
           <a:p>
-            <a:r>
-              <a:rPr lang="en-US" dirty="0"/>
-              <a:t/>
-            </a:r>
             <a:endParaRPr lang="en-US" dirty="0"/>
           </a:p>
         </p:txBody>
@@ -1544,10 +1190,6 @@
           <a:bodyPr/>
           <a:lstStyle/>
           <a:p>
-            <a:r>
-              <a:rPr lang="en-US" dirty="0"/>
-              <a:t/>
-            </a:r>
             <a:endParaRPr lang="en-US" dirty="0"/>
           </a:p>
         </p:txBody>
@@ -1632,10 +1274,6 @@
           <a:bodyPr/>
           <a:lstStyle/>
           <a:p>
-            <a:r>
-              <a:rPr lang="en-US" dirty="0"/>
-              <a:t/>
-            </a:r>
             <a:endParaRPr lang="en-US" dirty="0"/>
           </a:p>
         </p:txBody>
@@ -1720,10 +1358,6 @@
           <a:bodyPr/>
           <a:lstStyle/>
           <a:p>
-            <a:r>
-              <a:rPr lang="en-US" dirty="0"/>
-              <a:t/>
-            </a:r>
             <a:endParaRPr lang="en-US" dirty="0"/>
           </a:p>
         </p:txBody>
@@ -1808,10 +1442,6 @@
           <a:bodyPr/>
           <a:lstStyle/>
           <a:p>
-            <a:r>
-              <a:rPr lang="en-US" dirty="0"/>
-              <a:t/>
-            </a:r>
             <a:endParaRPr lang="en-US" dirty="0"/>
           </a:p>
         </p:txBody>
@@ -1896,10 +1526,6 @@
           <a:bodyPr/>
           <a:lstStyle/>
           <a:p>
-            <a:r>
-              <a:rPr lang="en-US" dirty="0"/>
-              <a:t/>
-            </a:r>
             <a:endParaRPr lang="en-US" dirty="0"/>
           </a:p>
         </p:txBody>
@@ -1984,10 +1610,6 @@
           <a:bodyPr/>
           <a:lstStyle/>
           <a:p>
-            <a:r>
-              <a:rPr lang="en-US" dirty="0"/>
-              <a:t/>
-            </a:r>
             <a:endParaRPr lang="en-US" dirty="0"/>
           </a:p>
         </p:txBody>
@@ -2072,10 +1694,6 @@
           <a:bodyPr/>
           <a:lstStyle/>
           <a:p>
-            <a:r>
-              <a:rPr lang="en-US" dirty="0"/>
-              <a:t/>
-            </a:r>
             <a:endParaRPr lang="en-US" dirty="0"/>
           </a:p>
         </p:txBody>
@@ -2154,6 +1772,7 @@
         <a:solidFill>
           <a:schemeClr val="tx2"/>
         </a:solidFill>
+        <a:effectLst/>
       </p:bgPr>
     </p:bg>
     <p:spTree>
@@ -2173,9 +1792,11 @@
       <p:sp>
         <p:nvSpPr>
           <p:cNvPr id="2" name="Text 0"/>
-          <p:cNvSpPr/>
+          <p:cNvSpPr>
+            <a:spLocks noGrp="1"/>
+          </p:cNvSpPr>
           <p:nvPr>
-            <p:ph idx="100" type="title" hasCustomPrompt="1"/>
+            <p:ph type="title" idx="100" hasCustomPrompt="1"/>
           </p:nvPr>
         </p:nvSpPr>
         <p:spPr>
@@ -2192,7 +1813,7 @@
         <p:txBody>
           <a:bodyPr wrap="square" rtlCol="0"/>
           <a:lstStyle>
-            <a:lvl1pPr algn="l" indent="0" marL="0">
+            <a:lvl1pPr marL="0" indent="0" algn="l">
               <a:buNone/>
               <a:defRPr lang="en-US" sz="4400" b="1" dirty="0">
                 <a:solidFill>
@@ -2205,7 +1826,7 @@
             </a:lvl1pPr>
           </a:lstStyle>
           <a:p>
-            <a:pPr algn="l" indent="0" marL="0">
+            <a:pPr marL="0" indent="0" algn="l">
               <a:buNone/>
             </a:pPr>
             <a:endParaRPr lang="en-US" sz="4400" dirty="0"/>
@@ -2215,9 +1836,11 @@
       <p:sp>
         <p:nvSpPr>
           <p:cNvPr id="3" name="Text 0"/>
-          <p:cNvSpPr/>
+          <p:cNvSpPr>
+            <a:spLocks noGrp="1"/>
+          </p:cNvSpPr>
           <p:nvPr>
-            <p:ph idx="101" type="body" hasCustomPrompt="1"/>
+            <p:ph type="body" idx="101" hasCustomPrompt="1"/>
           </p:nvPr>
         </p:nvSpPr>
         <p:spPr>
@@ -2234,7 +1857,7 @@
         <p:txBody>
           <a:bodyPr wrap="square" rtlCol="0"/>
           <a:lstStyle>
-            <a:lvl1pPr algn="l" indent="0" marL="0">
+            <a:lvl1pPr marL="0" indent="0" algn="l">
               <a:buNone/>
               <a:defRPr lang="en-US" sz="1800" dirty="0">
                 <a:solidFill>
@@ -2247,7 +1870,7 @@
             </a:lvl1pPr>
           </a:lstStyle>
           <a:p>
-            <a:pPr algn="l" indent="0" marL="0">
+            <a:pPr marL="0" indent="0" algn="l">
               <a:buNone/>
             </a:pPr>
             <a:endParaRPr lang="en-US" sz="1800" dirty="0"/>
@@ -2270,6 +1893,7 @@
         <a:solidFill>
           <a:schemeClr val="tx2"/>
         </a:solidFill>
+        <a:effectLst/>
       </p:bgPr>
     </p:bg>
     <p:spTree>
@@ -2289,9 +1913,11 @@
       <p:sp>
         <p:nvSpPr>
           <p:cNvPr id="2" name="Text 0"/>
-          <p:cNvSpPr/>
+          <p:cNvSpPr>
+            <a:spLocks noGrp="1"/>
+          </p:cNvSpPr>
           <p:nvPr>
-            <p:ph idx="100" type="title" hasCustomPrompt="1"/>
+            <p:ph type="title" idx="100" hasCustomPrompt="1"/>
           </p:nvPr>
         </p:nvSpPr>
         <p:spPr>
@@ -2308,7 +1934,7 @@
         <p:txBody>
           <a:bodyPr wrap="square" rtlCol="0"/>
           <a:lstStyle>
-            <a:lvl1pPr algn="l" indent="0" marL="0">
+            <a:lvl1pPr marL="0" indent="0" algn="l">
               <a:buNone/>
               <a:defRPr lang="en-US" sz="4000" b="1" dirty="0">
                 <a:solidFill>
@@ -2321,7 +1947,7 @@
             </a:lvl1pPr>
           </a:lstStyle>
           <a:p>
-            <a:pPr algn="l" indent="0" marL="0">
+            <a:pPr marL="0" indent="0" algn="l">
               <a:buNone/>
             </a:pPr>
             <a:endParaRPr lang="en-US" sz="4000" dirty="0"/>
@@ -2331,9 +1957,11 @@
       <p:sp>
         <p:nvSpPr>
           <p:cNvPr id="3" name="Text 0"/>
-          <p:cNvSpPr/>
+          <p:cNvSpPr>
+            <a:spLocks noGrp="1"/>
+          </p:cNvSpPr>
           <p:nvPr>
-            <p:ph idx="101" type="body" hasCustomPrompt="1"/>
+            <p:ph type="body" idx="101" hasCustomPrompt="1"/>
           </p:nvPr>
         </p:nvSpPr>
         <p:spPr>
@@ -2350,7 +1978,7 @@
         <p:txBody>
           <a:bodyPr wrap="square" rtlCol="0"/>
           <a:lstStyle>
-            <a:lvl1pPr algn="l" indent="0" marL="0">
+            <a:lvl1pPr marL="0" indent="0" algn="l">
               <a:buNone/>
               <a:defRPr lang="en-US" sz="1600" dirty="0">
                 <a:solidFill>
@@ -2363,7 +1991,7 @@
             </a:lvl1pPr>
           </a:lstStyle>
           <a:p>
-            <a:pPr algn="l" indent="0" marL="0">
+            <a:pPr marL="0" indent="0" algn="l">
               <a:buNone/>
             </a:pPr>
             <a:endParaRPr lang="en-US" sz="1600" dirty="0"/>
@@ -2386,6 +2014,7 @@
         <a:solidFill>
           <a:schemeClr val="bg1"/>
         </a:solidFill>
+        <a:effectLst/>
       </p:bgPr>
     </p:bg>
     <p:spTree>
@@ -2405,9 +2034,11 @@
       <p:sp>
         <p:nvSpPr>
           <p:cNvPr id="2" name="Text 0"/>
-          <p:cNvSpPr/>
+          <p:cNvSpPr>
+            <a:spLocks noGrp="1"/>
+          </p:cNvSpPr>
           <p:nvPr>
-            <p:ph idx="100" type="body" hasCustomPrompt="1"/>
+            <p:ph type="body" idx="100" hasCustomPrompt="1"/>
           </p:nvPr>
         </p:nvSpPr>
         <p:spPr>
@@ -2424,9 +2055,9 @@
         <p:txBody>
           <a:bodyPr wrap="square" rtlCol="0"/>
           <a:lstStyle>
-            <a:lvl1pPr algn="l" indent="0" marL="0">
-              <a:buNone/>
-              <a:defRPr lang="en-US" sz="1300" b="1" spc="200" kern="0" dirty="0">
+            <a:lvl1pPr marL="0" indent="0" algn="l">
+              <a:buNone/>
+              <a:defRPr lang="en-US" sz="1300" b="1" kern="0" spc="200" dirty="0">
                 <a:solidFill>
                   <a:schemeClr val="accent2"/>
                 </a:solidFill>
@@ -2437,7 +2068,7 @@
             </a:lvl1pPr>
           </a:lstStyle>
           <a:p>
-            <a:pPr algn="l" indent="0" marL="0">
+            <a:pPr marL="0" indent="0" algn="l">
               <a:buNone/>
             </a:pPr>
             <a:endParaRPr lang="en-US" sz="1300" dirty="0"/>
@@ -2447,9 +2078,11 @@
       <p:sp>
         <p:nvSpPr>
           <p:cNvPr id="3" name="Text 0"/>
-          <p:cNvSpPr/>
+          <p:cNvSpPr>
+            <a:spLocks noGrp="1"/>
+          </p:cNvSpPr>
           <p:nvPr>
-            <p:ph idx="101" type="title" hasCustomPrompt="1"/>
+            <p:ph type="title" idx="101" hasCustomPrompt="1"/>
           </p:nvPr>
         </p:nvSpPr>
         <p:spPr>
@@ -2466,7 +2099,7 @@
         <p:txBody>
           <a:bodyPr wrap="square" rtlCol="0"/>
           <a:lstStyle>
-            <a:lvl1pPr algn="l" indent="0" marL="0">
+            <a:lvl1pPr marL="0" indent="0" algn="l">
               <a:buNone/>
               <a:defRPr lang="en-US" sz="3200" b="1" dirty="0">
                 <a:solidFill>
@@ -2479,7 +2112,7 @@
             </a:lvl1pPr>
           </a:lstStyle>
           <a:p>
-            <a:pPr algn="l" indent="0" marL="0">
+            <a:pPr marL="0" indent="0" algn="l">
               <a:buNone/>
             </a:pPr>
             <a:endParaRPr lang="en-US" sz="3200" dirty="0"/>
@@ -2507,7 +2140,7 @@
           <a:bodyPr wrap="square" rtlCol="0" anchor="ctr"/>
           <a:lstStyle/>
           <a:p>
-            <a:pPr algn="l" indent="0" marL="0">
+            <a:pPr marL="0" indent="0" algn="l">
               <a:buNone/>
             </a:pPr>
             <a:r>
@@ -2545,7 +2178,7 @@
           </a:prstGeom>
           <a:extLst>
             <a:ext uri="{C572A759-6A51-4108-AA02-DFA0A04FC94B}">
-              <ma14:wrappingTextBoxFlag xmlns:ma14="http://schemas.microsoft.com/office/mac/drawingml/2011/main" val="0"/>
+              <ma14:wrappingTextBoxFlag xmlns:ma14="http://schemas.microsoft.com/office/mac/drawingml/2011/main" xmlns="" val="0"/>
             </a:ext>
           </a:extLst>
         </p:spPr>
@@ -2566,8 +2199,8 @@
           <a:p>
             <a:pPr algn="l"/>
             <a:fld id="{F7021451-1387-4CA6-816F-3879F97B5CBC}" type="slidenum">
-              <a:rPr b="0" lang="en-US"/>
-              <a:t>1004</a:t>
+              <a:rPr lang="en-US" b="0"/>
+              <a:t>‹#›</a:t>
             </a:fld>
             <a:endParaRPr lang="en-US"/>
           </a:p>
@@ -2589,6 +2222,7 @@
         <a:solidFill>
           <a:schemeClr val="tx2"/>
         </a:solidFill>
+        <a:effectLst/>
       </p:bgPr>
     </p:bg>
     <p:spTree>
@@ -2608,9 +2242,11 @@
       <p:sp>
         <p:nvSpPr>
           <p:cNvPr id="2" name="Text 0"/>
-          <p:cNvSpPr/>
+          <p:cNvSpPr>
+            <a:spLocks noGrp="1"/>
+          </p:cNvSpPr>
           <p:nvPr>
-            <p:ph idx="100" type="title" hasCustomPrompt="1"/>
+            <p:ph type="title" idx="100" hasCustomPrompt="1"/>
           </p:nvPr>
         </p:nvSpPr>
         <p:spPr>
@@ -2627,7 +2263,7 @@
         <p:txBody>
           <a:bodyPr wrap="square" rtlCol="0"/>
           <a:lstStyle>
-            <a:lvl1pPr algn="l" indent="0" marL="0">
+            <a:lvl1pPr marL="0" indent="0" algn="l">
               <a:buNone/>
               <a:defRPr lang="en-US" sz="3600" b="1" dirty="0">
                 <a:solidFill>
@@ -2640,7 +2276,7 @@
             </a:lvl1pPr>
           </a:lstStyle>
           <a:p>
-            <a:pPr algn="l" indent="0" marL="0">
+            <a:pPr marL="0" indent="0" algn="l">
               <a:buNone/>
             </a:pPr>
             <a:endParaRPr lang="en-US" sz="3600" dirty="0"/>
@@ -2658,6 +2294,11 @@
 <file path=ppt/slideMasters/slideMaster1.xml><?xml version="1.0" encoding="utf-8"?>
 <p:sldMaster xmlns:a="http://schemas.openxmlformats.org/drawingml/2006/main" xmlns:r="http://schemas.openxmlformats.org/officeDocument/2006/relationships" xmlns:p="http://schemas.openxmlformats.org/presentationml/2006/main">
   <p:cSld>
+    <p:bg>
+      <p:bgRef idx="1001">
+        <a:schemeClr val="bg1"/>
+      </p:bgRef>
+    </p:bg>
     <p:spTree>
       <p:nvGrpSpPr>
         <p:cNvPr id="1" name=""/>
@@ -2692,7 +2333,7 @@
           </a:prstGeom>
           <a:extLst>
             <a:ext uri="{C572A759-6A51-4108-AA02-DFA0A04FC94B}">
-              <ma14:wrappingTextBoxFlag xmlns:ma14="http://schemas.microsoft.com/office/mac/drawingml/2011/main" val="0"/>
+              <ma14:wrappingTextBoxFlag xmlns:ma14="http://schemas.microsoft.com/office/mac/drawingml/2011/main" xmlns="" val="0"/>
             </a:ext>
           </a:extLst>
         </p:spPr>
@@ -2713,8 +2354,8 @@
           <a:p>
             <a:pPr algn="l"/>
             <a:fld id="{F7021451-1387-4CA6-816F-3879F97B5CBC}" type="slidenum">
-              <a:rPr b="0" lang="en-US"/>
-              <a:t>null</a:t>
+              <a:rPr lang="en-US" b="0"/>
+              <a:t>‹#›</a:t>
             </a:fld>
             <a:endParaRPr lang="en-US"/>
           </a:p>
@@ -3022,11 +2663,11 @@
           <a:bodyPr wrap="square" lIns="0" tIns="0" rIns="0" bIns="0" rtlCol="0" anchor="ctr"/>
           <a:lstStyle/>
           <a:p>
-            <a:pPr algn="l" indent="0" marL="0">
-              <a:buNone/>
-            </a:pPr>
-            <a:r>
-              <a:rPr lang="en-US" sz="1400" b="1" spc="200" kern="0" dirty="0">
+            <a:pPr marL="0" indent="0" algn="l">
+              <a:buNone/>
+            </a:pPr>
+            <a:r>
+              <a:rPr lang="en-US" sz="1400" b="1" kern="0" spc="200" dirty="0">
                 <a:solidFill>
                   <a:schemeClr val="accent1"/>
                 </a:solidFill>
@@ -3043,9 +2684,11 @@
       <p:sp>
         <p:nvSpPr>
           <p:cNvPr id="3" name="Text 0"/>
-          <p:cNvSpPr/>
+          <p:cNvSpPr>
+            <a:spLocks noGrp="1"/>
+          </p:cNvSpPr>
           <p:nvPr>
-            <p:ph idx="100" type="title" hasCustomPrompt="1"/>
+            <p:ph type="title" idx="100" hasCustomPrompt="1"/>
           </p:nvPr>
         </p:nvSpPr>
         <p:spPr>
@@ -3063,7 +2706,7 @@
           <a:bodyPr wrap="square" rtlCol="0"/>
           <a:lstStyle/>
           <a:p>
-            <a:pPr algn="l" indent="0" marL="0">
+            <a:pPr marL="0" indent="0" algn="l">
               <a:buNone/>
             </a:pPr>
             <a:r>
@@ -3084,9 +2727,11 @@
       <p:sp>
         <p:nvSpPr>
           <p:cNvPr id="4" name="Text 0"/>
-          <p:cNvSpPr/>
+          <p:cNvSpPr>
+            <a:spLocks noGrp="1"/>
+          </p:cNvSpPr>
           <p:nvPr>
-            <p:ph idx="101" type="body" hasCustomPrompt="1"/>
+            <p:ph type="body" idx="101" hasCustomPrompt="1"/>
           </p:nvPr>
         </p:nvSpPr>
         <p:spPr>
@@ -3104,7 +2749,7 @@
           <a:bodyPr wrap="square" rtlCol="0"/>
           <a:lstStyle/>
           <a:p>
-            <a:pPr algn="l" indent="0" marL="0">
+            <a:pPr marL="0" indent="0" algn="l">
               <a:buNone/>
             </a:pPr>
             <a:r>
@@ -3143,7 +2788,7 @@
           <a:bodyPr wrap="square" lIns="0" tIns="0" rIns="0" bIns="0" rtlCol="0" anchor="ctr"/>
           <a:lstStyle/>
           <a:p>
-            <a:pPr algn="l" indent="0" marL="0">
+            <a:pPr marL="0" indent="0" algn="l">
               <a:buNone/>
             </a:pPr>
             <a:r>
@@ -3157,9 +2802,6 @@
               </a:rPr>
               <a:t>Sanjna J</a:t>
             </a:r>
-            <a:pPr algn="l" indent="0" marL="0">
-              <a:buNone/>
-            </a:pPr>
             <a:r>
               <a:rPr lang="en-US" sz="1500" dirty="0">
                 <a:solidFill>
@@ -3171,9 +2813,6 @@
               </a:rPr>
               <a:t>   ·   </a:t>
             </a:r>
-            <a:pPr algn="l" indent="0" marL="0">
-              <a:buNone/>
-            </a:pPr>
             <a:r>
               <a:rPr lang="en-US" sz="1500" b="1" dirty="0">
                 <a:solidFill>
@@ -3210,7 +2849,7 @@
           <a:bodyPr wrap="square" lIns="0" tIns="0" rIns="0" bIns="0" rtlCol="0" anchor="ctr"/>
           <a:lstStyle/>
           <a:p>
-            <a:pPr algn="l" indent="0" marL="0">
+            <a:pPr marL="0" indent="0" algn="l">
               <a:buNone/>
             </a:pPr>
             <a:r>
@@ -3256,9 +2895,11 @@
       <p:sp>
         <p:nvSpPr>
           <p:cNvPr id="2" name="Text 0"/>
-          <p:cNvSpPr/>
+          <p:cNvSpPr>
+            <a:spLocks noGrp="1"/>
+          </p:cNvSpPr>
           <p:nvPr>
-            <p:ph idx="100" type="body" hasCustomPrompt="1"/>
+            <p:ph type="body" idx="100" hasCustomPrompt="1"/>
           </p:nvPr>
         </p:nvSpPr>
         <p:spPr>
@@ -3276,11 +2917,11 @@
           <a:bodyPr wrap="square" rtlCol="0"/>
           <a:lstStyle/>
           <a:p>
-            <a:pPr algn="l" indent="0" marL="0">
-              <a:buNone/>
-            </a:pPr>
-            <a:r>
-              <a:rPr lang="en-US" sz="1300" b="1" spc="200" kern="0" dirty="0">
+            <a:pPr marL="0" indent="0" algn="l">
+              <a:buNone/>
+            </a:pPr>
+            <a:r>
+              <a:rPr lang="en-US" sz="1300" b="1" kern="0" spc="200" dirty="0">
                 <a:solidFill>
                   <a:schemeClr val="accent2"/>
                 </a:solidFill>
@@ -3297,9 +2938,11 @@
       <p:sp>
         <p:nvSpPr>
           <p:cNvPr id="3" name="Text 0"/>
-          <p:cNvSpPr/>
+          <p:cNvSpPr>
+            <a:spLocks noGrp="1"/>
+          </p:cNvSpPr>
           <p:nvPr>
-            <p:ph idx="101" type="title" hasCustomPrompt="1"/>
+            <p:ph type="title" idx="101" hasCustomPrompt="1"/>
           </p:nvPr>
         </p:nvSpPr>
         <p:spPr>
@@ -3317,7 +2960,7 @@
           <a:bodyPr wrap="square" rtlCol="0"/>
           <a:lstStyle/>
           <a:p>
-            <a:pPr algn="l" indent="0" marL="0">
+            <a:pPr marL="0" indent="0" algn="l">
               <a:buNone/>
             </a:pPr>
             <a:r>
@@ -3356,7 +2999,7 @@
           <a:bodyPr wrap="square" lIns="0" tIns="0" rIns="0" bIns="0" rtlCol="0" anchor="ctr"/>
           <a:lstStyle/>
           <a:p>
-            <a:pPr algn="l" indent="0" marL="0">
+            <a:pPr marL="0" indent="0" algn="l">
               <a:lnSpc>
                 <a:spcPct val="125000"/>
               </a:lnSpc>
@@ -3398,6 +3041,13 @@
           </a:solidFill>
           <a:ln/>
         </p:spPr>
+        <p:txBody>
+          <a:bodyPr/>
+          <a:lstStyle/>
+          <a:p>
+            <a:endParaRPr lang="en-IN"/>
+          </a:p>
+        </p:txBody>
       </p:sp>
       <p:sp>
         <p:nvSpPr>
@@ -3420,7 +3070,7 @@
           <a:bodyPr wrap="square" lIns="0" tIns="0" rIns="0" bIns="0" rtlCol="0" anchor="t"/>
           <a:lstStyle/>
           <a:p>
-            <a:pPr algn="l" indent="0" marL="0">
+            <a:pPr marL="0" indent="0" algn="l">
               <a:lnSpc>
                 <a:spcPct val="125000"/>
               </a:lnSpc>
@@ -3440,7 +3090,7 @@
             <a:endParaRPr lang="en-US" sz="1300" dirty="0"/>
           </a:p>
           <a:p>
-            <a:pPr algn="l" indent="0" marL="0">
+            <a:pPr marL="0" indent="0" algn="l">
               <a:lnSpc>
                 <a:spcPct val="125000"/>
               </a:lnSpc>
@@ -3460,7 +3110,7 @@
             <a:endParaRPr lang="en-US" sz="1300" dirty="0"/>
           </a:p>
           <a:p>
-            <a:pPr algn="l" indent="0" marL="0">
+            <a:pPr marL="0" indent="0" algn="l">
               <a:lnSpc>
                 <a:spcPct val="125000"/>
               </a:lnSpc>
@@ -3480,7 +3130,7 @@
             <a:endParaRPr lang="en-US" sz="1300" dirty="0"/>
           </a:p>
           <a:p>
-            <a:pPr algn="l" indent="0" marL="0">
+            <a:pPr marL="0" indent="0" algn="l">
               <a:lnSpc>
                 <a:spcPct val="125000"/>
               </a:lnSpc>
@@ -3500,7 +3150,7 @@
             <a:endParaRPr lang="en-US" sz="1300" dirty="0"/>
           </a:p>
           <a:p>
-            <a:pPr algn="l" indent="0" marL="0">
+            <a:pPr marL="0" indent="0" algn="l">
               <a:lnSpc>
                 <a:spcPct val="125000"/>
               </a:lnSpc>
@@ -3520,7 +3170,7 @@
             <a:endParaRPr lang="en-US" sz="1300" dirty="0"/>
           </a:p>
           <a:p>
-            <a:pPr algn="l" indent="0" marL="0">
+            <a:pPr marL="0" indent="0" algn="l">
               <a:lnSpc>
                 <a:spcPct val="125000"/>
               </a:lnSpc>
@@ -3562,13 +3212,20 @@
           </a:solidFill>
           <a:ln/>
           <a:effectLst>
-            <a:outerShdw sx="100000" sy="100000" kx="0" ky="0" algn="bl" rotWithShape="0" blurRad="127000" dist="38100" dir="5400000">
+            <a:outerShdw blurRad="127000" dist="38100" dir="5400000" algn="bl" rotWithShape="0">
               <a:srgbClr val="1A1F2B">
                 <a:alpha val="18000"/>
               </a:srgbClr>
             </a:outerShdw>
           </a:effectLst>
         </p:spPr>
+        <p:txBody>
+          <a:bodyPr/>
+          <a:lstStyle/>
+          <a:p>
+            <a:endParaRPr lang="en-IN"/>
+          </a:p>
+        </p:txBody>
       </p:sp>
       <p:sp>
         <p:nvSpPr>
@@ -3591,7 +3248,7 @@
           <a:bodyPr wrap="square" lIns="0" tIns="0" rIns="0" bIns="0" rtlCol="0" anchor="ctr"/>
           <a:lstStyle/>
           <a:p>
-            <a:pPr algn="l" indent="0" marL="0">
+            <a:pPr marL="0" indent="0" algn="l">
               <a:buNone/>
             </a:pPr>
             <a:r>
@@ -3630,7 +3287,7 @@
           <a:bodyPr wrap="square" lIns="0" tIns="0" rIns="0" bIns="0" rtlCol="0" anchor="ctr"/>
           <a:lstStyle/>
           <a:p>
-            <a:pPr algn="l" indent="0" marL="0">
+            <a:pPr marL="0" indent="0" algn="l">
               <a:lnSpc>
                 <a:spcPct val="125000"/>
               </a:lnSpc>
@@ -3672,7 +3329,7 @@
           <a:bodyPr wrap="square" lIns="0" tIns="0" rIns="0" bIns="0" rtlCol="0" anchor="ctr"/>
           <a:lstStyle/>
           <a:p>
-            <a:pPr algn="l" indent="0" marL="0">
+            <a:pPr marL="0" indent="0" algn="l">
               <a:lnSpc>
                 <a:spcPct val="130000"/>
               </a:lnSpc>
@@ -3713,7 +3370,7 @@
           </a:prstGeom>
           <a:extLst>
             <a:ext uri="{C572A759-6A51-4108-AA02-DFA0A04FC94B}">
-              <ma14:wrappingTextBoxFlag xmlns:ma14="http://schemas.microsoft.com/office/mac/drawingml/2011/main" val="0"/>
+              <ma14:wrappingTextBoxFlag xmlns:ma14="http://schemas.microsoft.com/office/mac/drawingml/2011/main" xmlns="" val="0"/>
             </a:ext>
           </a:extLst>
         </p:spPr>
@@ -3734,7 +3391,7 @@
           <a:p>
             <a:pPr algn="l"/>
             <a:fld id="{F7021451-1387-4CA6-816F-3879F97B5CBC}" type="slidenum">
-              <a:rPr b="0" lang="en-US"/>
+              <a:rPr lang="en-US" b="0"/>
               <a:t>10</a:t>
             </a:fld>
             <a:endParaRPr lang="en-US"/>
@@ -3787,11 +3444,11 @@
           <a:bodyPr wrap="square" lIns="0" tIns="0" rIns="0" bIns="0" rtlCol="0" anchor="ctr"/>
           <a:lstStyle/>
           <a:p>
-            <a:pPr algn="l" indent="0" marL="0">
-              <a:buNone/>
-            </a:pPr>
-            <a:r>
-              <a:rPr lang="en-US" sz="1400" b="1" spc="200" kern="0" dirty="0">
+            <a:pPr marL="0" indent="0" algn="l">
+              <a:buNone/>
+            </a:pPr>
+            <a:r>
+              <a:rPr lang="en-US" sz="1400" b="1" kern="0" spc="200" dirty="0">
                 <a:solidFill>
                   <a:schemeClr val="accent1"/>
                 </a:solidFill>
@@ -3808,9 +3465,11 @@
       <p:sp>
         <p:nvSpPr>
           <p:cNvPr id="3" name="Text 0"/>
-          <p:cNvSpPr/>
+          <p:cNvSpPr>
+            <a:spLocks noGrp="1"/>
+          </p:cNvSpPr>
           <p:nvPr>
-            <p:ph idx="100" type="title" hasCustomPrompt="1"/>
+            <p:ph type="title" idx="100" hasCustomPrompt="1"/>
           </p:nvPr>
         </p:nvSpPr>
         <p:spPr>
@@ -3828,7 +3487,7 @@
           <a:bodyPr wrap="square" rtlCol="0"/>
           <a:lstStyle/>
           <a:p>
-            <a:pPr algn="l" indent="0" marL="0">
+            <a:pPr marL="0" indent="0" algn="l">
               <a:buNone/>
             </a:pPr>
             <a:r>
@@ -3849,9 +3508,11 @@
       <p:sp>
         <p:nvSpPr>
           <p:cNvPr id="4" name="Text 0"/>
-          <p:cNvSpPr/>
+          <p:cNvSpPr>
+            <a:spLocks noGrp="1"/>
+          </p:cNvSpPr>
           <p:nvPr>
-            <p:ph idx="101" type="body" hasCustomPrompt="1"/>
+            <p:ph type="body" idx="101" hasCustomPrompt="1"/>
           </p:nvPr>
         </p:nvSpPr>
         <p:spPr>
@@ -3869,7 +3530,7 @@
           <a:bodyPr wrap="square" rtlCol="0"/>
           <a:lstStyle/>
           <a:p>
-            <a:pPr algn="l" indent="0" marL="0">
+            <a:pPr marL="0" indent="0" algn="l">
               <a:buNone/>
             </a:pPr>
             <a:r>
@@ -3915,9 +3576,11 @@
       <p:sp>
         <p:nvSpPr>
           <p:cNvPr id="2" name="Text 0"/>
-          <p:cNvSpPr/>
+          <p:cNvSpPr>
+            <a:spLocks noGrp="1"/>
+          </p:cNvSpPr>
           <p:nvPr>
-            <p:ph idx="100" type="body" hasCustomPrompt="1"/>
+            <p:ph type="body" idx="100" hasCustomPrompt="1"/>
           </p:nvPr>
         </p:nvSpPr>
         <p:spPr>
@@ -3935,11 +3598,11 @@
           <a:bodyPr wrap="square" rtlCol="0"/>
           <a:lstStyle/>
           <a:p>
-            <a:pPr algn="l" indent="0" marL="0">
-              <a:buNone/>
-            </a:pPr>
-            <a:r>
-              <a:rPr lang="en-US" sz="1300" b="1" spc="200" kern="0" dirty="0">
+            <a:pPr marL="0" indent="0" algn="l">
+              <a:buNone/>
+            </a:pPr>
+            <a:r>
+              <a:rPr lang="en-US" sz="1300" b="1" kern="0" spc="200" dirty="0">
                 <a:solidFill>
                   <a:schemeClr val="accent2"/>
                 </a:solidFill>
@@ -3956,9 +3619,11 @@
       <p:sp>
         <p:nvSpPr>
           <p:cNvPr id="3" name="Text 0"/>
-          <p:cNvSpPr/>
+          <p:cNvSpPr>
+            <a:spLocks noGrp="1"/>
+          </p:cNvSpPr>
           <p:nvPr>
-            <p:ph idx="101" type="title" hasCustomPrompt="1"/>
+            <p:ph type="title" idx="101" hasCustomPrompt="1"/>
           </p:nvPr>
         </p:nvSpPr>
         <p:spPr>
@@ -3976,7 +3641,7 @@
           <a:bodyPr wrap="square" rtlCol="0"/>
           <a:lstStyle/>
           <a:p>
-            <a:pPr algn="l" indent="0" marL="0">
+            <a:pPr marL="0" indent="0" algn="l">
               <a:buNone/>
             </a:pPr>
             <a:r>
@@ -4015,7 +3680,7 @@
           <a:bodyPr wrap="square" lIns="0" tIns="0" rIns="0" bIns="0" rtlCol="0" anchor="ctr"/>
           <a:lstStyle/>
           <a:p>
-            <a:pPr algn="l" indent="0" marL="0">
+            <a:pPr marL="0" indent="0" algn="l">
               <a:lnSpc>
                 <a:spcPct val="130000"/>
               </a:lnSpc>
@@ -4062,13 +3727,20 @@
             <a:prstDash val="solid"/>
           </a:ln>
           <a:effectLst>
-            <a:outerShdw sx="100000" sy="100000" kx="0" ky="0" algn="bl" rotWithShape="0" blurRad="127000" dist="38100" dir="5400000">
+            <a:outerShdw blurRad="127000" dist="38100" dir="5400000" algn="bl" rotWithShape="0">
               <a:srgbClr val="1A1F2B">
                 <a:alpha val="18000"/>
               </a:srgbClr>
             </a:outerShdw>
           </a:effectLst>
         </p:spPr>
+        <p:txBody>
+          <a:bodyPr/>
+          <a:lstStyle/>
+          <a:p>
+            <a:endParaRPr lang="en-IN"/>
+          </a:p>
+        </p:txBody>
       </p:sp>
       <p:sp>
         <p:nvSpPr>
@@ -4091,7 +3763,7 @@
           <a:bodyPr wrap="square" lIns="0" tIns="0" rIns="0" bIns="0" rtlCol="0" anchor="ctr"/>
           <a:lstStyle/>
           <a:p>
-            <a:pPr algn="l" indent="0" marL="0">
+            <a:pPr marL="0" indent="0" algn="l">
               <a:buNone/>
             </a:pPr>
             <a:r>
@@ -4130,7 +3802,7 @@
           <a:bodyPr wrap="square" lIns="0" tIns="0" rIns="0" bIns="0" rtlCol="0" anchor="ctr"/>
           <a:lstStyle/>
           <a:p>
-            <a:pPr algn="l" indent="0" marL="0">
+            <a:pPr marL="0" indent="0" algn="l">
               <a:lnSpc>
                 <a:spcPct val="125000"/>
               </a:lnSpc>
@@ -4170,6 +3842,13 @@
           </a:solidFill>
           <a:ln/>
         </p:spPr>
+        <p:txBody>
+          <a:bodyPr/>
+          <a:lstStyle/>
+          <a:p>
+            <a:endParaRPr lang="en-IN"/>
+          </a:p>
+        </p:txBody>
       </p:sp>
       <p:sp>
         <p:nvSpPr>
@@ -4197,13 +3876,20 @@
             <a:prstDash val="solid"/>
           </a:ln>
           <a:effectLst>
-            <a:outerShdw sx="100000" sy="100000" kx="0" ky="0" algn="bl" rotWithShape="0" blurRad="127000" dist="38100" dir="5400000">
+            <a:outerShdw blurRad="127000" dist="38100" dir="5400000" algn="bl" rotWithShape="0">
               <a:srgbClr val="1A1F2B">
                 <a:alpha val="18000"/>
               </a:srgbClr>
             </a:outerShdw>
           </a:effectLst>
         </p:spPr>
+        <p:txBody>
+          <a:bodyPr/>
+          <a:lstStyle/>
+          <a:p>
+            <a:endParaRPr lang="en-IN"/>
+          </a:p>
+        </p:txBody>
       </p:sp>
       <p:sp>
         <p:nvSpPr>
@@ -4226,7 +3912,7 @@
           <a:bodyPr wrap="square" lIns="0" tIns="0" rIns="0" bIns="0" rtlCol="0" anchor="ctr"/>
           <a:lstStyle/>
           <a:p>
-            <a:pPr algn="l" indent="0" marL="0">
+            <a:pPr marL="0" indent="0" algn="l">
               <a:buNone/>
             </a:pPr>
             <a:r>
@@ -4265,7 +3951,7 @@
           <a:bodyPr wrap="square" lIns="0" tIns="0" rIns="0" bIns="0" rtlCol="0" anchor="ctr"/>
           <a:lstStyle/>
           <a:p>
-            <a:pPr algn="l" indent="0" marL="0">
+            <a:pPr marL="0" indent="0" algn="l">
               <a:lnSpc>
                 <a:spcPct val="125000"/>
               </a:lnSpc>
@@ -4305,6 +3991,13 @@
           </a:solidFill>
           <a:ln/>
         </p:spPr>
+        <p:txBody>
+          <a:bodyPr/>
+          <a:lstStyle/>
+          <a:p>
+            <a:endParaRPr lang="en-IN"/>
+          </a:p>
+        </p:txBody>
       </p:sp>
       <p:sp>
         <p:nvSpPr>
@@ -4327,13 +4020,20 @@
           </a:solidFill>
           <a:ln/>
           <a:effectLst>
-            <a:outerShdw sx="100000" sy="100000" kx="0" ky="0" algn="bl" rotWithShape="0" blurRad="127000" dist="38100" dir="5400000">
+            <a:outerShdw blurRad="127000" dist="38100" dir="5400000" algn="bl" rotWithShape="0">
               <a:srgbClr val="1A1F2B">
                 <a:alpha val="18000"/>
               </a:srgbClr>
             </a:outerShdw>
           </a:effectLst>
         </p:spPr>
+        <p:txBody>
+          <a:bodyPr/>
+          <a:lstStyle/>
+          <a:p>
+            <a:endParaRPr lang="en-IN"/>
+          </a:p>
+        </p:txBody>
       </p:sp>
       <p:sp>
         <p:nvSpPr>
@@ -4356,7 +4056,7 @@
           <a:bodyPr wrap="square" lIns="0" tIns="0" rIns="0" bIns="0" rtlCol="0" anchor="ctr"/>
           <a:lstStyle/>
           <a:p>
-            <a:pPr algn="l" indent="0" marL="0">
+            <a:pPr marL="0" indent="0" algn="l">
               <a:buNone/>
             </a:pPr>
             <a:r>
@@ -4395,7 +4095,7 @@
           <a:bodyPr wrap="square" lIns="0" tIns="0" rIns="0" bIns="0" rtlCol="0" anchor="ctr"/>
           <a:lstStyle/>
           <a:p>
-            <a:pPr algn="l" indent="0" marL="0">
+            <a:pPr marL="0" indent="0" algn="l">
               <a:lnSpc>
                 <a:spcPct val="125000"/>
               </a:lnSpc>
@@ -4437,7 +4137,7 @@
           <a:bodyPr wrap="square" lIns="0" tIns="0" rIns="0" bIns="0" rtlCol="0" anchor="ctr"/>
           <a:lstStyle/>
           <a:p>
-            <a:pPr algn="l" indent="0" marL="0">
+            <a:pPr marL="0" indent="0" algn="l">
               <a:buNone/>
             </a:pPr>
             <a:r>
@@ -4475,7 +4175,7 @@
           </a:prstGeom>
           <a:extLst>
             <a:ext uri="{C572A759-6A51-4108-AA02-DFA0A04FC94B}">
-              <ma14:wrappingTextBoxFlag xmlns:ma14="http://schemas.microsoft.com/office/mac/drawingml/2011/main" val="0"/>
+              <ma14:wrappingTextBoxFlag xmlns:ma14="http://schemas.microsoft.com/office/mac/drawingml/2011/main" xmlns="" val="0"/>
             </a:ext>
           </a:extLst>
         </p:spPr>
@@ -4496,7 +4196,7 @@
           <a:p>
             <a:pPr algn="l"/>
             <a:fld id="{F7021451-1387-4CA6-816F-3879F97B5CBC}" type="slidenum">
-              <a:rPr b="0" lang="en-US"/>
+              <a:rPr lang="en-US" b="0"/>
               <a:t>12</a:t>
             </a:fld>
             <a:endParaRPr lang="en-US"/>
@@ -4531,9 +4231,11 @@
       <p:sp>
         <p:nvSpPr>
           <p:cNvPr id="2" name="Text 0"/>
-          <p:cNvSpPr/>
+          <p:cNvSpPr>
+            <a:spLocks noGrp="1"/>
+          </p:cNvSpPr>
           <p:nvPr>
-            <p:ph idx="100" type="body" hasCustomPrompt="1"/>
+            <p:ph type="body" idx="100" hasCustomPrompt="1"/>
           </p:nvPr>
         </p:nvSpPr>
         <p:spPr>
@@ -4551,11 +4253,11 @@
           <a:bodyPr wrap="square" rtlCol="0"/>
           <a:lstStyle/>
           <a:p>
-            <a:pPr algn="l" indent="0" marL="0">
-              <a:buNone/>
-            </a:pPr>
-            <a:r>
-              <a:rPr lang="en-US" sz="1300" b="1" spc="200" kern="0" dirty="0">
+            <a:pPr marL="0" indent="0" algn="l">
+              <a:buNone/>
+            </a:pPr>
+            <a:r>
+              <a:rPr lang="en-US" sz="1300" b="1" kern="0" spc="200" dirty="0">
                 <a:solidFill>
                   <a:schemeClr val="accent2"/>
                 </a:solidFill>
@@ -4572,9 +4274,11 @@
       <p:sp>
         <p:nvSpPr>
           <p:cNvPr id="3" name="Text 0"/>
-          <p:cNvSpPr/>
+          <p:cNvSpPr>
+            <a:spLocks noGrp="1"/>
+          </p:cNvSpPr>
           <p:nvPr>
-            <p:ph idx="101" type="title" hasCustomPrompt="1"/>
+            <p:ph type="title" idx="101" hasCustomPrompt="1"/>
           </p:nvPr>
         </p:nvSpPr>
         <p:spPr>
@@ -4592,7 +4296,7 @@
           <a:bodyPr wrap="square" rtlCol="0"/>
           <a:lstStyle/>
           <a:p>
-            <a:pPr algn="l" indent="0" marL="0">
+            <a:pPr marL="0" indent="0" algn="l">
               <a:buNone/>
             </a:pPr>
             <a:r>
@@ -4636,6 +4340,13 @@
             <a:prstDash val="solid"/>
           </a:ln>
         </p:spPr>
+        <p:txBody>
+          <a:bodyPr/>
+          <a:lstStyle/>
+          <a:p>
+            <a:endParaRPr lang="en-IN"/>
+          </a:p>
+        </p:txBody>
       </p:sp>
       <p:sp>
         <p:nvSpPr>
@@ -4658,7 +4369,7 @@
           <a:bodyPr wrap="square" lIns="0" tIns="0" rIns="0" bIns="0" rtlCol="0" anchor="ctr"/>
           <a:lstStyle/>
           <a:p>
-            <a:pPr algn="ctr" indent="0" marL="0">
+            <a:pPr marL="0" indent="0" algn="ctr">
               <a:buNone/>
             </a:pPr>
             <a:r>
@@ -4695,6 +4406,13 @@
           </a:solidFill>
           <a:ln/>
         </p:spPr>
+        <p:txBody>
+          <a:bodyPr/>
+          <a:lstStyle/>
+          <a:p>
+            <a:endParaRPr lang="en-IN"/>
+          </a:p>
+        </p:txBody>
       </p:sp>
       <p:sp>
         <p:nvSpPr>
@@ -4722,6 +4440,13 @@
             <a:prstDash val="solid"/>
           </a:ln>
         </p:spPr>
+        <p:txBody>
+          <a:bodyPr/>
+          <a:lstStyle/>
+          <a:p>
+            <a:endParaRPr lang="en-IN"/>
+          </a:p>
+        </p:txBody>
       </p:sp>
       <p:sp>
         <p:nvSpPr>
@@ -4744,7 +4469,7 @@
           <a:bodyPr wrap="square" lIns="0" tIns="0" rIns="0" bIns="0" rtlCol="0" anchor="ctr"/>
           <a:lstStyle/>
           <a:p>
-            <a:pPr algn="ctr" indent="0" marL="0">
+            <a:pPr marL="0" indent="0" algn="ctr">
               <a:buNone/>
             </a:pPr>
             <a:r>
@@ -4781,6 +4506,13 @@
           </a:solidFill>
           <a:ln/>
         </p:spPr>
+        <p:txBody>
+          <a:bodyPr/>
+          <a:lstStyle/>
+          <a:p>
+            <a:endParaRPr lang="en-IN"/>
+          </a:p>
+        </p:txBody>
       </p:sp>
       <p:sp>
         <p:nvSpPr>
@@ -4808,6 +4540,13 @@
             <a:prstDash val="solid"/>
           </a:ln>
         </p:spPr>
+        <p:txBody>
+          <a:bodyPr/>
+          <a:lstStyle/>
+          <a:p>
+            <a:endParaRPr lang="en-IN"/>
+          </a:p>
+        </p:txBody>
       </p:sp>
       <p:sp>
         <p:nvSpPr>
@@ -4830,7 +4569,7 @@
           <a:bodyPr wrap="square" lIns="0" tIns="0" rIns="0" bIns="0" rtlCol="0" anchor="ctr"/>
           <a:lstStyle/>
           <a:p>
-            <a:pPr algn="ctr" indent="0" marL="0">
+            <a:pPr marL="0" indent="0" algn="ctr">
               <a:buNone/>
             </a:pPr>
             <a:r>
@@ -4867,6 +4606,13 @@
           </a:solidFill>
           <a:ln/>
         </p:spPr>
+        <p:txBody>
+          <a:bodyPr/>
+          <a:lstStyle/>
+          <a:p>
+            <a:endParaRPr lang="en-IN"/>
+          </a:p>
+        </p:txBody>
       </p:sp>
       <p:sp>
         <p:nvSpPr>
@@ -4894,6 +4640,13 @@
             <a:prstDash val="solid"/>
           </a:ln>
         </p:spPr>
+        <p:txBody>
+          <a:bodyPr/>
+          <a:lstStyle/>
+          <a:p>
+            <a:endParaRPr lang="en-IN"/>
+          </a:p>
+        </p:txBody>
       </p:sp>
       <p:sp>
         <p:nvSpPr>
@@ -4916,7 +4669,7 @@
           <a:bodyPr wrap="square" lIns="0" tIns="0" rIns="0" bIns="0" rtlCol="0" anchor="ctr"/>
           <a:lstStyle/>
           <a:p>
-            <a:pPr algn="ctr" indent="0" marL="0">
+            <a:pPr marL="0" indent="0" algn="ctr">
               <a:buNone/>
             </a:pPr>
             <a:r>
@@ -4955,6 +4708,13 @@
           </a:solidFill>
           <a:ln/>
         </p:spPr>
+        <p:txBody>
+          <a:bodyPr/>
+          <a:lstStyle/>
+          <a:p>
+            <a:endParaRPr lang="en-IN"/>
+          </a:p>
+        </p:txBody>
       </p:sp>
       <p:sp>
         <p:nvSpPr>
@@ -4977,7 +4737,7 @@
           <a:bodyPr wrap="square" lIns="0" tIns="0" rIns="0" bIns="0" rtlCol="0" anchor="t"/>
           <a:lstStyle/>
           <a:p>
-            <a:pPr algn="l" indent="0" marL="0">
+            <a:pPr marL="0" indent="0" algn="l">
               <a:lnSpc>
                 <a:spcPct val="125000"/>
               </a:lnSpc>
@@ -4997,7 +4757,7 @@
             <a:endParaRPr lang="en-US" sz="1300" dirty="0"/>
           </a:p>
           <a:p>
-            <a:pPr algn="l" indent="0" marL="0">
+            <a:pPr marL="0" indent="0" algn="l">
               <a:lnSpc>
                 <a:spcPct val="125000"/>
               </a:lnSpc>
@@ -5017,7 +4777,7 @@
             <a:endParaRPr lang="en-US" sz="1300" dirty="0"/>
           </a:p>
           <a:p>
-            <a:pPr algn="l" indent="0" marL="0">
+            <a:pPr marL="0" indent="0" algn="l">
               <a:lnSpc>
                 <a:spcPct val="125000"/>
               </a:lnSpc>
@@ -5037,7 +4797,7 @@
             <a:endParaRPr lang="en-US" sz="1300" dirty="0"/>
           </a:p>
           <a:p>
-            <a:pPr algn="l" indent="0" marL="0">
+            <a:pPr marL="0" indent="0" algn="l">
               <a:lnSpc>
                 <a:spcPct val="125000"/>
               </a:lnSpc>
@@ -5057,7 +4817,7 @@
             <a:endParaRPr lang="en-US" sz="1300" dirty="0"/>
           </a:p>
           <a:p>
-            <a:pPr algn="l" indent="0" marL="0">
+            <a:pPr marL="0" indent="0" algn="l">
               <a:lnSpc>
                 <a:spcPct val="125000"/>
               </a:lnSpc>
@@ -5077,7 +4837,7 @@
             <a:endParaRPr lang="en-US" sz="1300" dirty="0"/>
           </a:p>
           <a:p>
-            <a:pPr algn="l" indent="0" marL="0">
+            <a:pPr marL="0" indent="0" algn="l">
               <a:lnSpc>
                 <a:spcPct val="125000"/>
               </a:lnSpc>
@@ -5097,7 +4857,7 @@
             <a:endParaRPr lang="en-US" sz="1300" dirty="0"/>
           </a:p>
           <a:p>
-            <a:pPr algn="l" indent="0" marL="0">
+            <a:pPr marL="0" indent="0" algn="l">
               <a:lnSpc>
                 <a:spcPct val="125000"/>
               </a:lnSpc>
@@ -5117,7 +4877,7 @@
             <a:endParaRPr lang="en-US" sz="1300" dirty="0"/>
           </a:p>
           <a:p>
-            <a:pPr algn="l" indent="0" marL="0">
+            <a:pPr marL="0" indent="0" algn="l">
               <a:lnSpc>
                 <a:spcPct val="125000"/>
               </a:lnSpc>
@@ -5137,7 +4897,7 @@
             <a:endParaRPr lang="en-US" sz="1300" dirty="0"/>
           </a:p>
           <a:p>
-            <a:pPr algn="l" indent="0" marL="0">
+            <a:pPr marL="0" indent="0" algn="l">
               <a:lnSpc>
                 <a:spcPct val="125000"/>
               </a:lnSpc>
@@ -5157,7 +4917,7 @@
             <a:endParaRPr lang="en-US" sz="1300" dirty="0"/>
           </a:p>
           <a:p>
-            <a:pPr algn="l" indent="0" marL="0">
+            <a:pPr marL="0" indent="0" algn="l">
               <a:lnSpc>
                 <a:spcPct val="125000"/>
               </a:lnSpc>
@@ -5204,13 +4964,20 @@
             <a:prstDash val="solid"/>
           </a:ln>
           <a:effectLst>
-            <a:outerShdw sx="100000" sy="100000" kx="0" ky="0" algn="bl" rotWithShape="0" blurRad="127000" dist="38100" dir="5400000">
+            <a:outerShdw blurRad="127000" dist="38100" dir="5400000" algn="bl" rotWithShape="0">
               <a:srgbClr val="1A1F2B">
                 <a:alpha val="18000"/>
               </a:srgbClr>
             </a:outerShdw>
           </a:effectLst>
         </p:spPr>
+        <p:txBody>
+          <a:bodyPr/>
+          <a:lstStyle/>
+          <a:p>
+            <a:endParaRPr lang="en-IN"/>
+          </a:p>
+        </p:txBody>
       </p:sp>
       <p:sp>
         <p:nvSpPr>
@@ -5233,7 +5000,7 @@
           <a:bodyPr wrap="square" lIns="0" tIns="0" rIns="0" bIns="0" rtlCol="0" anchor="ctr"/>
           <a:lstStyle/>
           <a:p>
-            <a:pPr algn="l" indent="0" marL="0">
+            <a:pPr marL="0" indent="0" algn="l">
               <a:buNone/>
             </a:pPr>
             <a:r>
@@ -5272,7 +5039,7 @@
           <a:bodyPr wrap="square" lIns="0" tIns="0" rIns="0" bIns="0" rtlCol="0" anchor="ctr"/>
           <a:lstStyle/>
           <a:p>
-            <a:pPr algn="l" indent="0" marL="0">
+            <a:pPr marL="0" indent="0" algn="l">
               <a:buNone/>
             </a:pPr>
             <a:r>
@@ -5311,7 +5078,7 @@
           <a:bodyPr wrap="square" lIns="0" tIns="0" rIns="0" bIns="0" rtlCol="0" anchor="ctr"/>
           <a:lstStyle/>
           <a:p>
-            <a:pPr algn="l" indent="0" marL="0">
+            <a:pPr marL="0" indent="0" algn="l">
               <a:lnSpc>
                 <a:spcPct val="125000"/>
               </a:lnSpc>
@@ -5358,13 +5125,20 @@
             <a:prstDash val="solid"/>
           </a:ln>
           <a:effectLst>
-            <a:outerShdw sx="100000" sy="100000" kx="0" ky="0" algn="bl" rotWithShape="0" blurRad="127000" dist="38100" dir="5400000">
+            <a:outerShdw blurRad="127000" dist="38100" dir="5400000" algn="bl" rotWithShape="0">
               <a:srgbClr val="1A1F2B">
                 <a:alpha val="18000"/>
               </a:srgbClr>
             </a:outerShdw>
           </a:effectLst>
         </p:spPr>
+        <p:txBody>
+          <a:bodyPr/>
+          <a:lstStyle/>
+          <a:p>
+            <a:endParaRPr lang="en-IN"/>
+          </a:p>
+        </p:txBody>
       </p:sp>
       <p:sp>
         <p:nvSpPr>
@@ -5387,7 +5161,7 @@
           <a:bodyPr wrap="square" lIns="0" tIns="0" rIns="0" bIns="0" rtlCol="0" anchor="ctr"/>
           <a:lstStyle/>
           <a:p>
-            <a:pPr algn="l" indent="0" marL="0">
+            <a:pPr marL="0" indent="0" algn="l">
               <a:buNone/>
             </a:pPr>
             <a:r>
@@ -5426,7 +5200,7 @@
           <a:bodyPr wrap="square" lIns="0" tIns="0" rIns="0" bIns="0" rtlCol="0" anchor="ctr"/>
           <a:lstStyle/>
           <a:p>
-            <a:pPr algn="l" marL="342900" indent="-342900">
+            <a:pPr marL="342900" indent="-342900" algn="l">
               <a:lnSpc>
                 <a:spcPct val="130000"/>
               </a:lnSpc>
@@ -5444,12 +5218,6 @@
               </a:rPr>
               <a:t>Stale-claim recovery</a:t>
             </a:r>
-            <a:pPr algn="l" indent="0" marL="0">
-              <a:lnSpc>
-                <a:spcPct val="130000"/>
-              </a:lnSpc>
-              <a:buNone/>
-            </a:pPr>
             <a:r>
               <a:rPr lang="en-US" sz="1200" dirty="0">
                 <a:solidFill>
@@ -5464,7 +5232,7 @@
             <a:endParaRPr lang="en-US" sz="1200" dirty="0"/>
           </a:p>
           <a:p>
-            <a:pPr algn="l" marL="342900" indent="-342900">
+            <a:pPr marL="342900" indent="-342900" algn="l">
               <a:lnSpc>
                 <a:spcPct val="130000"/>
               </a:lnSpc>
@@ -5482,12 +5250,6 @@
               </a:rPr>
               <a:t>Run lock</a:t>
             </a:r>
-            <a:pPr algn="l" indent="0" marL="0">
-              <a:lnSpc>
-                <a:spcPct val="130000"/>
-              </a:lnSpc>
-              <a:buNone/>
-            </a:pPr>
             <a:r>
               <a:rPr lang="en-US" sz="1200" dirty="0">
                 <a:solidFill>
@@ -5524,7 +5286,7 @@
           <a:bodyPr wrap="square" lIns="0" tIns="0" rIns="0" bIns="0" rtlCol="0" anchor="ctr"/>
           <a:lstStyle/>
           <a:p>
-            <a:pPr algn="l" indent="0" marL="0">
+            <a:pPr marL="0" indent="0" algn="l">
               <a:lnSpc>
                 <a:spcPct val="120000"/>
               </a:lnSpc>
@@ -5565,7 +5327,7 @@
           </a:prstGeom>
           <a:extLst>
             <a:ext uri="{C572A759-6A51-4108-AA02-DFA0A04FC94B}">
-              <ma14:wrappingTextBoxFlag xmlns:ma14="http://schemas.microsoft.com/office/mac/drawingml/2011/main" val="0"/>
+              <ma14:wrappingTextBoxFlag xmlns:ma14="http://schemas.microsoft.com/office/mac/drawingml/2011/main" xmlns="" val="0"/>
             </a:ext>
           </a:extLst>
         </p:spPr>
@@ -5586,7 +5348,7 @@
           <a:p>
             <a:pPr algn="l"/>
             <a:fld id="{F7021451-1387-4CA6-816F-3879F97B5CBC}" type="slidenum">
-              <a:rPr b="0" lang="en-US"/>
+              <a:rPr lang="en-US" b="0"/>
               <a:t>13</a:t>
             </a:fld>
             <a:endParaRPr lang="en-US"/>
@@ -5621,9 +5383,11 @@
       <p:sp>
         <p:nvSpPr>
           <p:cNvPr id="2" name="Text 0"/>
-          <p:cNvSpPr/>
+          <p:cNvSpPr>
+            <a:spLocks noGrp="1"/>
+          </p:cNvSpPr>
           <p:nvPr>
-            <p:ph idx="100" type="body" hasCustomPrompt="1"/>
+            <p:ph type="body" idx="100" hasCustomPrompt="1"/>
           </p:nvPr>
         </p:nvSpPr>
         <p:spPr>
@@ -5641,11 +5405,11 @@
           <a:bodyPr wrap="square" rtlCol="0"/>
           <a:lstStyle/>
           <a:p>
-            <a:pPr algn="l" indent="0" marL="0">
-              <a:buNone/>
-            </a:pPr>
-            <a:r>
-              <a:rPr lang="en-US" sz="1300" b="1" spc="200" kern="0" dirty="0">
+            <a:pPr marL="0" indent="0" algn="l">
+              <a:buNone/>
+            </a:pPr>
+            <a:r>
+              <a:rPr lang="en-US" sz="1300" b="1" kern="0" spc="200" dirty="0">
                 <a:solidFill>
                   <a:schemeClr val="accent2"/>
                 </a:solidFill>
@@ -5662,9 +5426,11 @@
       <p:sp>
         <p:nvSpPr>
           <p:cNvPr id="3" name="Text 0"/>
-          <p:cNvSpPr/>
+          <p:cNvSpPr>
+            <a:spLocks noGrp="1"/>
+          </p:cNvSpPr>
           <p:nvPr>
-            <p:ph idx="101" type="title" hasCustomPrompt="1"/>
+            <p:ph type="title" idx="101" hasCustomPrompt="1"/>
           </p:nvPr>
         </p:nvSpPr>
         <p:spPr>
@@ -5682,7 +5448,7 @@
           <a:bodyPr wrap="square" rtlCol="0"/>
           <a:lstStyle/>
           <a:p>
-            <a:pPr algn="l" indent="0" marL="0">
+            <a:pPr marL="0" indent="0" algn="l">
               <a:buNone/>
             </a:pPr>
             <a:r>
@@ -5716,16 +5482,34 @@
         </p:nvGraphicFramePr>
         <p:xfrm>
           <a:off x="548640" y="1783080"/>
-          <a:ext cx="11064240" cy="2606040"/>
+          <a:ext cx="11064240" cy="2834640"/>
         </p:xfrm>
         <a:graphic>
           <a:graphicData uri="http://schemas.openxmlformats.org/drawingml/2006/table">
             <a:tbl>
               <a:tblPr/>
               <a:tblGrid>
-                <a:gridCol w="1828800"/>
-                <a:gridCol w="2834640"/>
-                <a:gridCol w="6400800"/>
+                <a:gridCol w="1828800">
+                  <a:extLst>
+                    <a:ext uri="{9D8B030D-6E8A-4147-A177-3AD203B41FA5}">
+                      <a16:colId xmlns:a16="http://schemas.microsoft.com/office/drawing/2014/main" val="20000"/>
+                    </a:ext>
+                  </a:extLst>
+                </a:gridCol>
+                <a:gridCol w="2834640">
+                  <a:extLst>
+                    <a:ext uri="{9D8B030D-6E8A-4147-A177-3AD203B41FA5}">
+                      <a16:colId xmlns:a16="http://schemas.microsoft.com/office/drawing/2014/main" val="20001"/>
+                    </a:ext>
+                  </a:extLst>
+                </a:gridCol>
+                <a:gridCol w="6400800">
+                  <a:extLst>
+                    <a:ext uri="{9D8B030D-6E8A-4147-A177-3AD203B41FA5}">
+                      <a16:colId xmlns:a16="http://schemas.microsoft.com/office/drawing/2014/main" val="20002"/>
+                    </a:ext>
+                  </a:extLst>
+                </a:gridCol>
               </a:tblGrid>
               <a:tr h="566928">
                 <a:tc>
@@ -5733,7 +5517,7 @@
                     <a:bodyPr/>
                     <a:lstStyle/>
                     <a:p>
-                      <a:pPr indent="0" marL="0">
+                      <a:pPr marL="0" indent="0">
                         <a:buNone/>
                       </a:pPr>
                       <a:r>
@@ -5754,7 +5538,7 @@
                       </a:endParaRPr>
                     </a:p>
                   </a:txBody>
-                  <a:tcPr marL="91440" marR="91440" marT="45720" marB="45720" anchor="ctr">
+                  <a:tcPr anchor="ctr">
                     <a:lnL w="12700" cap="flat" cmpd="sng" algn="ctr">
                       <a:solidFill>
                         <a:schemeClr val="accent5"/>
@@ -5801,7 +5585,7 @@
                     <a:bodyPr/>
                     <a:lstStyle/>
                     <a:p>
-                      <a:pPr indent="0" marL="0">
+                      <a:pPr marL="0" indent="0">
                         <a:buNone/>
                       </a:pPr>
                       <a:r>
@@ -5822,7 +5606,7 @@
                       </a:endParaRPr>
                     </a:p>
                   </a:txBody>
-                  <a:tcPr marL="91440" marR="91440" marT="45720" marB="45720" anchor="ctr">
+                  <a:tcPr anchor="ctr">
                     <a:lnL w="12700" cap="flat" cmpd="sng" algn="ctr">
                       <a:solidFill>
                         <a:schemeClr val="accent5"/>
@@ -5869,7 +5653,7 @@
                     <a:bodyPr/>
                     <a:lstStyle/>
                     <a:p>
-                      <a:pPr indent="0" marL="0">
+                      <a:pPr marL="0" indent="0">
                         <a:buNone/>
                       </a:pPr>
                       <a:r>
@@ -5890,7 +5674,7 @@
                       </a:endParaRPr>
                     </a:p>
                   </a:txBody>
-                  <a:tcPr marL="91440" marR="91440" marT="45720" marB="45720" anchor="ctr">
+                  <a:tcPr anchor="ctr">
                     <a:lnL w="12700" cap="flat" cmpd="sng" algn="ctr">
                       <a:solidFill>
                         <a:schemeClr val="accent5"/>
@@ -5932,6 +5716,11 @@
                     </a:solidFill>
                   </a:tcPr>
                 </a:tc>
+                <a:extLst>
+                  <a:ext uri="{0D108BD9-81ED-4DB2-BD59-A6C34878D82A}">
+                    <a16:rowId xmlns:a16="http://schemas.microsoft.com/office/drawing/2014/main" val="10000"/>
+                  </a:ext>
+                </a:extLst>
               </a:tr>
               <a:tr h="566928">
                 <a:tc>
@@ -5939,7 +5728,7 @@
                     <a:bodyPr/>
                     <a:lstStyle/>
                     <a:p>
-                      <a:pPr indent="0" marL="0">
+                      <a:pPr marL="0" indent="0">
                         <a:buNone/>
                       </a:pPr>
                       <a:r>
@@ -5960,7 +5749,7 @@
                       </a:endParaRPr>
                     </a:p>
                   </a:txBody>
-                  <a:tcPr marL="91440" marR="91440" marT="45720" marB="45720" anchor="ctr">
+                  <a:tcPr anchor="ctr">
                     <a:lnL w="12700" cap="flat" cmpd="sng" algn="ctr">
                       <a:solidFill>
                         <a:schemeClr val="accent5"/>
@@ -6004,7 +5793,7 @@
                     <a:bodyPr/>
                     <a:lstStyle/>
                     <a:p>
-                      <a:pPr indent="0" marL="0">
+                      <a:pPr marL="0" indent="0">
                         <a:buNone/>
                       </a:pPr>
                       <a:r>
@@ -6025,7 +5814,7 @@
                       </a:endParaRPr>
                     </a:p>
                   </a:txBody>
-                  <a:tcPr marL="91440" marR="91440" marT="45720" marB="45720" anchor="ctr">
+                  <a:tcPr anchor="ctr">
                     <a:lnL w="12700" cap="flat" cmpd="sng" algn="ctr">
                       <a:solidFill>
                         <a:schemeClr val="accent5"/>
@@ -6069,7 +5858,7 @@
                     <a:bodyPr/>
                     <a:lstStyle/>
                     <a:p>
-                      <a:pPr indent="0" marL="0">
+                      <a:pPr marL="0" indent="0">
                         <a:buNone/>
                       </a:pPr>
                       <a:r>
@@ -6090,7 +5879,7 @@
                       </a:endParaRPr>
                     </a:p>
                   </a:txBody>
-                  <a:tcPr marL="91440" marR="91440" marT="45720" marB="45720" anchor="ctr">
+                  <a:tcPr anchor="ctr">
                     <a:lnL w="12700" cap="flat" cmpd="sng" algn="ctr">
                       <a:solidFill>
                         <a:schemeClr val="accent5"/>
@@ -6129,6 +5918,11 @@
                     </a:lnB>
                   </a:tcPr>
                 </a:tc>
+                <a:extLst>
+                  <a:ext uri="{0D108BD9-81ED-4DB2-BD59-A6C34878D82A}">
+                    <a16:rowId xmlns:a16="http://schemas.microsoft.com/office/drawing/2014/main" val="10001"/>
+                  </a:ext>
+                </a:extLst>
               </a:tr>
               <a:tr h="566928">
                 <a:tc>
@@ -6136,7 +5930,7 @@
                     <a:bodyPr/>
                     <a:lstStyle/>
                     <a:p>
-                      <a:pPr indent="0" marL="0">
+                      <a:pPr marL="0" indent="0">
                         <a:buNone/>
                       </a:pPr>
                       <a:r>
@@ -6157,7 +5951,7 @@
                       </a:endParaRPr>
                     </a:p>
                   </a:txBody>
-                  <a:tcPr marL="91440" marR="91440" marT="45720" marB="45720" anchor="ctr">
+                  <a:tcPr anchor="ctr">
                     <a:lnL w="12700" cap="flat" cmpd="sng" algn="ctr">
                       <a:solidFill>
                         <a:schemeClr val="accent5"/>
@@ -6201,7 +5995,7 @@
                     <a:bodyPr/>
                     <a:lstStyle/>
                     <a:p>
-                      <a:pPr indent="0" marL="0">
+                      <a:pPr marL="0" indent="0">
                         <a:buNone/>
                       </a:pPr>
                       <a:r>
@@ -6222,7 +6016,7 @@
                       </a:endParaRPr>
                     </a:p>
                   </a:txBody>
-                  <a:tcPr marL="91440" marR="91440" marT="45720" marB="45720" anchor="ctr">
+                  <a:tcPr anchor="ctr">
                     <a:lnL w="12700" cap="flat" cmpd="sng" algn="ctr">
                       <a:solidFill>
                         <a:schemeClr val="accent5"/>
@@ -6266,7 +6060,7 @@
                     <a:bodyPr/>
                     <a:lstStyle/>
                     <a:p>
-                      <a:pPr indent="0" marL="0">
+                      <a:pPr marL="0" indent="0">
                         <a:buNone/>
                       </a:pPr>
                       <a:r>
@@ -6287,7 +6081,7 @@
                       </a:endParaRPr>
                     </a:p>
                   </a:txBody>
-                  <a:tcPr marL="91440" marR="91440" marT="45720" marB="45720" anchor="ctr">
+                  <a:tcPr anchor="ctr">
                     <a:lnL w="12700" cap="flat" cmpd="sng" algn="ctr">
                       <a:solidFill>
                         <a:schemeClr val="accent5"/>
@@ -6326,6 +6120,11 @@
                     </a:lnB>
                   </a:tcPr>
                 </a:tc>
+                <a:extLst>
+                  <a:ext uri="{0D108BD9-81ED-4DB2-BD59-A6C34878D82A}">
+                    <a16:rowId xmlns:a16="http://schemas.microsoft.com/office/drawing/2014/main" val="10002"/>
+                  </a:ext>
+                </a:extLst>
               </a:tr>
               <a:tr h="566928">
                 <a:tc>
@@ -6333,7 +6132,7 @@
                     <a:bodyPr/>
                     <a:lstStyle/>
                     <a:p>
-                      <a:pPr indent="0" marL="0">
+                      <a:pPr marL="0" indent="0">
                         <a:buNone/>
                       </a:pPr>
                       <a:r>
@@ -6354,7 +6153,7 @@
                       </a:endParaRPr>
                     </a:p>
                   </a:txBody>
-                  <a:tcPr marL="91440" marR="91440" marT="45720" marB="45720" anchor="ctr">
+                  <a:tcPr anchor="ctr">
                     <a:lnL w="12700" cap="flat" cmpd="sng" algn="ctr">
                       <a:solidFill>
                         <a:schemeClr val="accent5"/>
@@ -6398,7 +6197,7 @@
                     <a:bodyPr/>
                     <a:lstStyle/>
                     <a:p>
-                      <a:pPr indent="0" marL="0">
+                      <a:pPr marL="0" indent="0">
                         <a:buNone/>
                       </a:pPr>
                       <a:r>
@@ -6419,7 +6218,7 @@
                       </a:endParaRPr>
                     </a:p>
                   </a:txBody>
-                  <a:tcPr marL="91440" marR="91440" marT="45720" marB="45720" anchor="ctr">
+                  <a:tcPr anchor="ctr">
                     <a:lnL w="12700" cap="flat" cmpd="sng" algn="ctr">
                       <a:solidFill>
                         <a:schemeClr val="accent5"/>
@@ -6463,7 +6262,7 @@
                     <a:bodyPr/>
                     <a:lstStyle/>
                     <a:p>
-                      <a:pPr indent="0" marL="0">
+                      <a:pPr marL="0" indent="0">
                         <a:buNone/>
                       </a:pPr>
                       <a:r>
@@ -6484,7 +6283,7 @@
                       </a:endParaRPr>
                     </a:p>
                   </a:txBody>
-                  <a:tcPr marL="91440" marR="91440" marT="45720" marB="45720" anchor="ctr">
+                  <a:tcPr anchor="ctr">
                     <a:lnL w="12700" cap="flat" cmpd="sng" algn="ctr">
                       <a:solidFill>
                         <a:schemeClr val="accent5"/>
@@ -6523,6 +6322,11 @@
                     </a:lnB>
                   </a:tcPr>
                 </a:tc>
+                <a:extLst>
+                  <a:ext uri="{0D108BD9-81ED-4DB2-BD59-A6C34878D82A}">
+                    <a16:rowId xmlns:a16="http://schemas.microsoft.com/office/drawing/2014/main" val="10003"/>
+                  </a:ext>
+                </a:extLst>
               </a:tr>
               <a:tr h="566928">
                 <a:tc>
@@ -6530,7 +6334,7 @@
                     <a:bodyPr/>
                     <a:lstStyle/>
                     <a:p>
-                      <a:pPr indent="0" marL="0">
+                      <a:pPr marL="0" indent="0">
                         <a:buNone/>
                       </a:pPr>
                       <a:r>
@@ -6551,7 +6355,7 @@
                       </a:endParaRPr>
                     </a:p>
                   </a:txBody>
-                  <a:tcPr marL="91440" marR="91440" marT="45720" marB="45720" anchor="ctr">
+                  <a:tcPr anchor="ctr">
                     <a:lnL w="12700" cap="flat" cmpd="sng" algn="ctr">
                       <a:solidFill>
                         <a:schemeClr val="accent5"/>
@@ -6595,7 +6399,7 @@
                     <a:bodyPr/>
                     <a:lstStyle/>
                     <a:p>
-                      <a:pPr indent="0" marL="0">
+                      <a:pPr marL="0" indent="0">
                         <a:buNone/>
                       </a:pPr>
                       <a:r>
@@ -6616,7 +6420,7 @@
                       </a:endParaRPr>
                     </a:p>
                   </a:txBody>
-                  <a:tcPr marL="91440" marR="91440" marT="45720" marB="45720" anchor="ctr">
+                  <a:tcPr anchor="ctr">
                     <a:lnL w="12700" cap="flat" cmpd="sng" algn="ctr">
                       <a:solidFill>
                         <a:schemeClr val="accent5"/>
@@ -6660,7 +6464,7 @@
                     <a:bodyPr/>
                     <a:lstStyle/>
                     <a:p>
-                      <a:pPr indent="0" marL="0">
+                      <a:pPr marL="0" indent="0">
                         <a:buNone/>
                       </a:pPr>
                       <a:r>
@@ -6681,7 +6485,7 @@
                       </a:endParaRPr>
                     </a:p>
                   </a:txBody>
-                  <a:tcPr marL="91440" marR="91440" marT="45720" marB="45720" anchor="ctr">
+                  <a:tcPr anchor="ctr">
                     <a:lnL w="12700" cap="flat" cmpd="sng" algn="ctr">
                       <a:solidFill>
                         <a:schemeClr val="accent5"/>
@@ -6720,6 +6524,11 @@
                     </a:lnB>
                   </a:tcPr>
                 </a:tc>
+                <a:extLst>
+                  <a:ext uri="{0D108BD9-81ED-4DB2-BD59-A6C34878D82A}">
+                    <a16:rowId xmlns:a16="http://schemas.microsoft.com/office/drawing/2014/main" val="10004"/>
+                  </a:ext>
+                </a:extLst>
               </a:tr>
             </a:tbl>
           </a:graphicData>
@@ -6746,7 +6555,7 @@
           <a:bodyPr wrap="square" lIns="0" tIns="0" rIns="0" bIns="0" rtlCol="0" anchor="ctr"/>
           <a:lstStyle/>
           <a:p>
-            <a:pPr algn="l" indent="0" marL="0">
+            <a:pPr marL="0" indent="0" algn="l">
               <a:lnSpc>
                 <a:spcPct val="130000"/>
               </a:lnSpc>
@@ -6763,12 +6572,6 @@
               </a:rPr>
               <a:t>Never reset </a:t>
             </a:r>
-            <a:pPr algn="l" indent="0" marL="0">
-              <a:lnSpc>
-                <a:spcPct val="130000"/>
-              </a:lnSpc>
-              <a:buNone/>
-            </a:pPr>
             <a:r>
               <a:rPr lang="en-US" sz="1300" dirty="0">
                 <a:solidFill>
@@ -6780,12 +6583,6 @@
               </a:rPr>
               <a:t>status</a:t>
             </a:r>
-            <a:pPr algn="l" indent="0" marL="0">
-              <a:lnSpc>
-                <a:spcPct val="130000"/>
-              </a:lnSpc>
-              <a:buNone/>
-            </a:pPr>
             <a:r>
               <a:rPr lang="en-US" sz="1300" dirty="0">
                 <a:solidFill>
@@ -6797,12 +6594,6 @@
               </a:rPr>
               <a:t> back to unsent on every run; only </a:t>
             </a:r>
-            <a:pPr algn="l" indent="0" marL="0">
-              <a:lnSpc>
-                <a:spcPct val="130000"/>
-              </a:lnSpc>
-              <a:buNone/>
-            </a:pPr>
             <a:r>
               <a:rPr lang="en-US" sz="1300" dirty="0">
                 <a:solidFill>
@@ -6814,12 +6605,6 @@
               </a:rPr>
               <a:t>last_notified_at</a:t>
             </a:r>
-            <a:pPr algn="l" indent="0" marL="0">
-              <a:lnSpc>
-                <a:spcPct val="130000"/>
-              </a:lnSpc>
-              <a:buNone/>
-            </a:pPr>
             <a:r>
               <a:rPr lang="en-US" sz="1300" dirty="0">
                 <a:solidFill>
@@ -6856,7 +6641,7 @@
           <a:bodyPr wrap="square" lIns="0" tIns="0" rIns="0" bIns="0" rtlCol="0" anchor="ctr"/>
           <a:lstStyle/>
           <a:p>
-            <a:pPr algn="l" indent="0" marL="0">
+            <a:pPr marL="0" indent="0" algn="l">
               <a:buNone/>
             </a:pPr>
             <a:r>
@@ -6894,7 +6679,7 @@
           </a:prstGeom>
           <a:extLst>
             <a:ext uri="{C572A759-6A51-4108-AA02-DFA0A04FC94B}">
-              <ma14:wrappingTextBoxFlag xmlns:ma14="http://schemas.microsoft.com/office/mac/drawingml/2011/main" val="0"/>
+              <ma14:wrappingTextBoxFlag xmlns:ma14="http://schemas.microsoft.com/office/mac/drawingml/2011/main" xmlns="" val="0"/>
             </a:ext>
           </a:extLst>
         </p:spPr>
@@ -6915,7 +6700,7 @@
           <a:p>
             <a:pPr algn="l"/>
             <a:fld id="{F7021451-1387-4CA6-816F-3879F97B5CBC}" type="slidenum">
-              <a:rPr b="0" lang="en-US"/>
+              <a:rPr lang="en-US" b="0"/>
               <a:t>14</a:t>
             </a:fld>
             <a:endParaRPr lang="en-US"/>
@@ -6950,9 +6735,11 @@
       <p:sp>
         <p:nvSpPr>
           <p:cNvPr id="2" name="Text 0"/>
-          <p:cNvSpPr/>
+          <p:cNvSpPr>
+            <a:spLocks noGrp="1"/>
+          </p:cNvSpPr>
           <p:nvPr>
-            <p:ph idx="100" type="body" hasCustomPrompt="1"/>
+            <p:ph type="body" idx="100" hasCustomPrompt="1"/>
           </p:nvPr>
         </p:nvSpPr>
         <p:spPr>
@@ -6970,11 +6757,11 @@
           <a:bodyPr wrap="square" rtlCol="0"/>
           <a:lstStyle/>
           <a:p>
-            <a:pPr algn="l" indent="0" marL="0">
-              <a:buNone/>
-            </a:pPr>
-            <a:r>
-              <a:rPr lang="en-US" sz="1300" b="1" spc="200" kern="0" dirty="0">
+            <a:pPr marL="0" indent="0" algn="l">
+              <a:buNone/>
+            </a:pPr>
+            <a:r>
+              <a:rPr lang="en-US" sz="1300" b="1" kern="0" spc="200" dirty="0">
                 <a:solidFill>
                   <a:schemeClr val="accent2"/>
                 </a:solidFill>
@@ -6991,9 +6778,11 @@
       <p:sp>
         <p:nvSpPr>
           <p:cNvPr id="3" name="Text 0"/>
-          <p:cNvSpPr/>
+          <p:cNvSpPr>
+            <a:spLocks noGrp="1"/>
+          </p:cNvSpPr>
           <p:nvPr>
-            <p:ph idx="101" type="title" hasCustomPrompt="1"/>
+            <p:ph type="title" idx="101" hasCustomPrompt="1"/>
           </p:nvPr>
         </p:nvSpPr>
         <p:spPr>
@@ -7011,7 +6800,7 @@
           <a:bodyPr wrap="square" rtlCol="0"/>
           <a:lstStyle/>
           <a:p>
-            <a:pPr algn="l" indent="0" marL="0">
+            <a:pPr marL="0" indent="0" algn="l">
               <a:buNone/>
             </a:pPr>
             <a:r>
@@ -7045,16 +6834,34 @@
         </p:nvGraphicFramePr>
         <p:xfrm>
           <a:off x="548640" y="1828800"/>
-          <a:ext cx="11064240" cy="2926080"/>
+          <a:ext cx="11064240" cy="3072384"/>
         </p:xfrm>
         <a:graphic>
           <a:graphicData uri="http://schemas.openxmlformats.org/drawingml/2006/table">
             <a:tbl>
               <a:tblPr/>
               <a:tblGrid>
-                <a:gridCol w="2377440"/>
-                <a:gridCol w="3566160"/>
-                <a:gridCol w="5120640"/>
+                <a:gridCol w="2377440">
+                  <a:extLst>
+                    <a:ext uri="{9D8B030D-6E8A-4147-A177-3AD203B41FA5}">
+                      <a16:colId xmlns:a16="http://schemas.microsoft.com/office/drawing/2014/main" val="20000"/>
+                    </a:ext>
+                  </a:extLst>
+                </a:gridCol>
+                <a:gridCol w="3566160">
+                  <a:extLst>
+                    <a:ext uri="{9D8B030D-6E8A-4147-A177-3AD203B41FA5}">
+                      <a16:colId xmlns:a16="http://schemas.microsoft.com/office/drawing/2014/main" val="20001"/>
+                    </a:ext>
+                  </a:extLst>
+                </a:gridCol>
+                <a:gridCol w="5120640">
+                  <a:extLst>
+                    <a:ext uri="{9D8B030D-6E8A-4147-A177-3AD203B41FA5}">
+                      <a16:colId xmlns:a16="http://schemas.microsoft.com/office/drawing/2014/main" val="20002"/>
+                    </a:ext>
+                  </a:extLst>
+                </a:gridCol>
               </a:tblGrid>
               <a:tr h="512064">
                 <a:tc>
@@ -7062,7 +6869,7 @@
                     <a:bodyPr/>
                     <a:lstStyle/>
                     <a:p>
-                      <a:pPr indent="0" marL="0">
+                      <a:pPr marL="0" indent="0">
                         <a:buNone/>
                       </a:pPr>
                       <a:r>
@@ -7083,7 +6890,7 @@
                       </a:endParaRPr>
                     </a:p>
                   </a:txBody>
-                  <a:tcPr marL="91440" marR="91440" marT="45720" marB="45720" anchor="ctr">
+                  <a:tcPr anchor="ctr">
                     <a:lnL w="12700" cap="flat" cmpd="sng" algn="ctr">
                       <a:solidFill>
                         <a:schemeClr val="accent5"/>
@@ -7130,7 +6937,7 @@
                     <a:bodyPr/>
                     <a:lstStyle/>
                     <a:p>
-                      <a:pPr indent="0" marL="0">
+                      <a:pPr marL="0" indent="0">
                         <a:buNone/>
                       </a:pPr>
                       <a:r>
@@ -7151,7 +6958,7 @@
                       </a:endParaRPr>
                     </a:p>
                   </a:txBody>
-                  <a:tcPr marL="91440" marR="91440" marT="45720" marB="45720" anchor="ctr">
+                  <a:tcPr anchor="ctr">
                     <a:lnL w="12700" cap="flat" cmpd="sng" algn="ctr">
                       <a:solidFill>
                         <a:schemeClr val="accent5"/>
@@ -7198,7 +7005,7 @@
                     <a:bodyPr/>
                     <a:lstStyle/>
                     <a:p>
-                      <a:pPr indent="0" marL="0">
+                      <a:pPr marL="0" indent="0">
                         <a:buNone/>
                       </a:pPr>
                       <a:r>
@@ -7219,7 +7026,7 @@
                       </a:endParaRPr>
                     </a:p>
                   </a:txBody>
-                  <a:tcPr marL="91440" marR="91440" marT="45720" marB="45720" anchor="ctr">
+                  <a:tcPr anchor="ctr">
                     <a:lnL w="12700" cap="flat" cmpd="sng" algn="ctr">
                       <a:solidFill>
                         <a:schemeClr val="accent5"/>
@@ -7261,6 +7068,11 @@
                     </a:solidFill>
                   </a:tcPr>
                 </a:tc>
+                <a:extLst>
+                  <a:ext uri="{0D108BD9-81ED-4DB2-BD59-A6C34878D82A}">
+                    <a16:rowId xmlns:a16="http://schemas.microsoft.com/office/drawing/2014/main" val="10000"/>
+                  </a:ext>
+                </a:extLst>
               </a:tr>
               <a:tr h="512064">
                 <a:tc>
@@ -7268,7 +7080,7 @@
                     <a:bodyPr/>
                     <a:lstStyle/>
                     <a:p>
-                      <a:pPr indent="0" marL="0">
+                      <a:pPr marL="0" indent="0">
                         <a:buNone/>
                       </a:pPr>
                       <a:r>
@@ -7289,7 +7101,7 @@
                       </a:endParaRPr>
                     </a:p>
                   </a:txBody>
-                  <a:tcPr marL="91440" marR="91440" marT="45720" marB="45720" anchor="ctr">
+                  <a:tcPr anchor="ctr">
                     <a:lnL w="12700" cap="flat" cmpd="sng" algn="ctr">
                       <a:solidFill>
                         <a:schemeClr val="accent5"/>
@@ -7333,7 +7145,7 @@
                     <a:bodyPr/>
                     <a:lstStyle/>
                     <a:p>
-                      <a:pPr indent="0" marL="0">
+                      <a:pPr marL="0" indent="0">
                         <a:buNone/>
                       </a:pPr>
                       <a:r>
@@ -7354,7 +7166,7 @@
                       </a:endParaRPr>
                     </a:p>
                   </a:txBody>
-                  <a:tcPr marL="91440" marR="91440" marT="45720" marB="45720" anchor="ctr">
+                  <a:tcPr anchor="ctr">
                     <a:lnL w="12700" cap="flat" cmpd="sng" algn="ctr">
                       <a:solidFill>
                         <a:schemeClr val="accent5"/>
@@ -7398,7 +7210,7 @@
                     <a:bodyPr/>
                     <a:lstStyle/>
                     <a:p>
-                      <a:pPr indent="0" marL="0">
+                      <a:pPr marL="0" indent="0">
                         <a:buNone/>
                       </a:pPr>
                       <a:r>
@@ -7419,7 +7231,7 @@
                       </a:endParaRPr>
                     </a:p>
                   </a:txBody>
-                  <a:tcPr marL="91440" marR="91440" marT="45720" marB="45720" anchor="ctr">
+                  <a:tcPr anchor="ctr">
                     <a:lnL w="12700" cap="flat" cmpd="sng" algn="ctr">
                       <a:solidFill>
                         <a:schemeClr val="accent5"/>
@@ -7458,6 +7270,11 @@
                     </a:lnB>
                   </a:tcPr>
                 </a:tc>
+                <a:extLst>
+                  <a:ext uri="{0D108BD9-81ED-4DB2-BD59-A6C34878D82A}">
+                    <a16:rowId xmlns:a16="http://schemas.microsoft.com/office/drawing/2014/main" val="10001"/>
+                  </a:ext>
+                </a:extLst>
               </a:tr>
               <a:tr h="512064">
                 <a:tc>
@@ -7465,7 +7282,7 @@
                     <a:bodyPr/>
                     <a:lstStyle/>
                     <a:p>
-                      <a:pPr indent="0" marL="0">
+                      <a:pPr marL="0" indent="0">
                         <a:buNone/>
                       </a:pPr>
                       <a:r>
@@ -7486,7 +7303,7 @@
                       </a:endParaRPr>
                     </a:p>
                   </a:txBody>
-                  <a:tcPr marL="91440" marR="91440" marT="45720" marB="45720" anchor="ctr">
+                  <a:tcPr anchor="ctr">
                     <a:lnL w="12700" cap="flat" cmpd="sng" algn="ctr">
                       <a:solidFill>
                         <a:schemeClr val="accent5"/>
@@ -7530,7 +7347,7 @@
                     <a:bodyPr/>
                     <a:lstStyle/>
                     <a:p>
-                      <a:pPr indent="0" marL="0">
+                      <a:pPr marL="0" indent="0">
                         <a:buNone/>
                       </a:pPr>
                       <a:r>
@@ -7551,7 +7368,7 @@
                       </a:endParaRPr>
                     </a:p>
                   </a:txBody>
-                  <a:tcPr marL="91440" marR="91440" marT="45720" marB="45720" anchor="ctr">
+                  <a:tcPr anchor="ctr">
                     <a:lnL w="12700" cap="flat" cmpd="sng" algn="ctr">
                       <a:solidFill>
                         <a:schemeClr val="accent5"/>
@@ -7595,7 +7412,7 @@
                     <a:bodyPr/>
                     <a:lstStyle/>
                     <a:p>
-                      <a:pPr indent="0" marL="0">
+                      <a:pPr marL="0" indent="0">
                         <a:buNone/>
                       </a:pPr>
                       <a:r>
@@ -7616,7 +7433,7 @@
                       </a:endParaRPr>
                     </a:p>
                   </a:txBody>
-                  <a:tcPr marL="91440" marR="91440" marT="45720" marB="45720" anchor="ctr">
+                  <a:tcPr anchor="ctr">
                     <a:lnL w="12700" cap="flat" cmpd="sng" algn="ctr">
                       <a:solidFill>
                         <a:schemeClr val="accent5"/>
@@ -7655,6 +7472,11 @@
                     </a:lnB>
                   </a:tcPr>
                 </a:tc>
+                <a:extLst>
+                  <a:ext uri="{0D108BD9-81ED-4DB2-BD59-A6C34878D82A}">
+                    <a16:rowId xmlns:a16="http://schemas.microsoft.com/office/drawing/2014/main" val="10002"/>
+                  </a:ext>
+                </a:extLst>
               </a:tr>
               <a:tr h="512064">
                 <a:tc>
@@ -7662,7 +7484,7 @@
                     <a:bodyPr/>
                     <a:lstStyle/>
                     <a:p>
-                      <a:pPr indent="0" marL="0">
+                      <a:pPr marL="0" indent="0">
                         <a:buNone/>
                       </a:pPr>
                       <a:r>
@@ -7683,7 +7505,7 @@
                       </a:endParaRPr>
                     </a:p>
                   </a:txBody>
-                  <a:tcPr marL="91440" marR="91440" marT="45720" marB="45720" anchor="ctr">
+                  <a:tcPr anchor="ctr">
                     <a:lnL w="12700" cap="flat" cmpd="sng" algn="ctr">
                       <a:solidFill>
                         <a:schemeClr val="accent5"/>
@@ -7727,7 +7549,7 @@
                     <a:bodyPr/>
                     <a:lstStyle/>
                     <a:p>
-                      <a:pPr indent="0" marL="0">
+                      <a:pPr marL="0" indent="0">
                         <a:buNone/>
                       </a:pPr>
                       <a:r>
@@ -7748,7 +7570,7 @@
                       </a:endParaRPr>
                     </a:p>
                   </a:txBody>
-                  <a:tcPr marL="91440" marR="91440" marT="45720" marB="45720" anchor="ctr">
+                  <a:tcPr anchor="ctr">
                     <a:lnL w="12700" cap="flat" cmpd="sng" algn="ctr">
                       <a:solidFill>
                         <a:schemeClr val="accent5"/>
@@ -7792,7 +7614,7 @@
                     <a:bodyPr/>
                     <a:lstStyle/>
                     <a:p>
-                      <a:pPr indent="0" marL="0">
+                      <a:pPr marL="0" indent="0">
                         <a:buNone/>
                       </a:pPr>
                       <a:r>
@@ -7813,7 +7635,7 @@
                       </a:endParaRPr>
                     </a:p>
                   </a:txBody>
-                  <a:tcPr marL="91440" marR="91440" marT="45720" marB="45720" anchor="ctr">
+                  <a:tcPr anchor="ctr">
                     <a:lnL w="12700" cap="flat" cmpd="sng" algn="ctr">
                       <a:solidFill>
                         <a:schemeClr val="accent5"/>
@@ -7852,6 +7674,11 @@
                     </a:lnB>
                   </a:tcPr>
                 </a:tc>
+                <a:extLst>
+                  <a:ext uri="{0D108BD9-81ED-4DB2-BD59-A6C34878D82A}">
+                    <a16:rowId xmlns:a16="http://schemas.microsoft.com/office/drawing/2014/main" val="10003"/>
+                  </a:ext>
+                </a:extLst>
               </a:tr>
               <a:tr h="512064">
                 <a:tc>
@@ -7859,7 +7686,7 @@
                     <a:bodyPr/>
                     <a:lstStyle/>
                     <a:p>
-                      <a:pPr indent="0" marL="0">
+                      <a:pPr marL="0" indent="0">
                         <a:buNone/>
                       </a:pPr>
                       <a:r>
@@ -7880,7 +7707,7 @@
                       </a:endParaRPr>
                     </a:p>
                   </a:txBody>
-                  <a:tcPr marL="91440" marR="91440" marT="45720" marB="45720" anchor="ctr">
+                  <a:tcPr anchor="ctr">
                     <a:lnL w="12700" cap="flat" cmpd="sng" algn="ctr">
                       <a:solidFill>
                         <a:schemeClr val="accent5"/>
@@ -7924,7 +7751,7 @@
                     <a:bodyPr/>
                     <a:lstStyle/>
                     <a:p>
-                      <a:pPr indent="0" marL="0">
+                      <a:pPr marL="0" indent="0">
                         <a:buNone/>
                       </a:pPr>
                       <a:r>
@@ -7945,7 +7772,7 @@
                       </a:endParaRPr>
                     </a:p>
                   </a:txBody>
-                  <a:tcPr marL="91440" marR="91440" marT="45720" marB="45720" anchor="ctr">
+                  <a:tcPr anchor="ctr">
                     <a:lnL w="12700" cap="flat" cmpd="sng" algn="ctr">
                       <a:solidFill>
                         <a:schemeClr val="accent5"/>
@@ -7989,7 +7816,7 @@
                     <a:bodyPr/>
                     <a:lstStyle/>
                     <a:p>
-                      <a:pPr indent="0" marL="0">
+                      <a:pPr marL="0" indent="0">
                         <a:buNone/>
                       </a:pPr>
                       <a:r>
@@ -8010,7 +7837,7 @@
                       </a:endParaRPr>
                     </a:p>
                   </a:txBody>
-                  <a:tcPr marL="91440" marR="91440" marT="45720" marB="45720" anchor="ctr">
+                  <a:tcPr anchor="ctr">
                     <a:lnL w="12700" cap="flat" cmpd="sng" algn="ctr">
                       <a:solidFill>
                         <a:schemeClr val="accent5"/>
@@ -8049,6 +7876,11 @@
                     </a:lnB>
                   </a:tcPr>
                 </a:tc>
+                <a:extLst>
+                  <a:ext uri="{0D108BD9-81ED-4DB2-BD59-A6C34878D82A}">
+                    <a16:rowId xmlns:a16="http://schemas.microsoft.com/office/drawing/2014/main" val="10004"/>
+                  </a:ext>
+                </a:extLst>
               </a:tr>
               <a:tr h="512064">
                 <a:tc>
@@ -8056,7 +7888,7 @@
                     <a:bodyPr/>
                     <a:lstStyle/>
                     <a:p>
-                      <a:pPr indent="0" marL="0">
+                      <a:pPr marL="0" indent="0">
                         <a:buNone/>
                       </a:pPr>
                       <a:r>
@@ -8077,7 +7909,7 @@
                       </a:endParaRPr>
                     </a:p>
                   </a:txBody>
-                  <a:tcPr marL="91440" marR="91440" marT="45720" marB="45720" anchor="ctr">
+                  <a:tcPr anchor="ctr">
                     <a:lnL w="12700" cap="flat" cmpd="sng" algn="ctr">
                       <a:solidFill>
                         <a:schemeClr val="accent5"/>
@@ -8121,7 +7953,7 @@
                     <a:bodyPr/>
                     <a:lstStyle/>
                     <a:p>
-                      <a:pPr indent="0" marL="0">
+                      <a:pPr marL="0" indent="0">
                         <a:buNone/>
                       </a:pPr>
                       <a:r>
@@ -8142,7 +7974,7 @@
                       </a:endParaRPr>
                     </a:p>
                   </a:txBody>
-                  <a:tcPr marL="91440" marR="91440" marT="45720" marB="45720" anchor="ctr">
+                  <a:tcPr anchor="ctr">
                     <a:lnL w="12700" cap="flat" cmpd="sng" algn="ctr">
                       <a:solidFill>
                         <a:schemeClr val="accent5"/>
@@ -8186,7 +8018,7 @@
                     <a:bodyPr/>
                     <a:lstStyle/>
                     <a:p>
-                      <a:pPr indent="0" marL="0">
+                      <a:pPr marL="0" indent="0">
                         <a:buNone/>
                       </a:pPr>
                       <a:r>
@@ -8207,7 +8039,7 @@
                       </a:endParaRPr>
                     </a:p>
                   </a:txBody>
-                  <a:tcPr marL="91440" marR="91440" marT="45720" marB="45720" anchor="ctr">
+                  <a:tcPr anchor="ctr">
                     <a:lnL w="12700" cap="flat" cmpd="sng" algn="ctr">
                       <a:solidFill>
                         <a:schemeClr val="accent5"/>
@@ -8246,6 +8078,11 @@
                     </a:lnB>
                   </a:tcPr>
                 </a:tc>
+                <a:extLst>
+                  <a:ext uri="{0D108BD9-81ED-4DB2-BD59-A6C34878D82A}">
+                    <a16:rowId xmlns:a16="http://schemas.microsoft.com/office/drawing/2014/main" val="10005"/>
+                  </a:ext>
+                </a:extLst>
               </a:tr>
             </a:tbl>
           </a:graphicData>
@@ -8272,7 +8109,7 @@
           <a:bodyPr wrap="square" lIns="0" tIns="0" rIns="0" bIns="0" rtlCol="0" anchor="ctr"/>
           <a:lstStyle/>
           <a:p>
-            <a:pPr algn="l" indent="0" marL="0">
+            <a:pPr marL="0" indent="0" algn="l">
               <a:lnSpc>
                 <a:spcPct val="130000"/>
               </a:lnSpc>
@@ -8313,7 +8150,7 @@
           </a:prstGeom>
           <a:extLst>
             <a:ext uri="{C572A759-6A51-4108-AA02-DFA0A04FC94B}">
-              <ma14:wrappingTextBoxFlag xmlns:ma14="http://schemas.microsoft.com/office/mac/drawingml/2011/main" val="0"/>
+              <ma14:wrappingTextBoxFlag xmlns:ma14="http://schemas.microsoft.com/office/mac/drawingml/2011/main" xmlns="" val="0"/>
             </a:ext>
           </a:extLst>
         </p:spPr>
@@ -8334,7 +8171,7 @@
           <a:p>
             <a:pPr algn="l"/>
             <a:fld id="{F7021451-1387-4CA6-816F-3879F97B5CBC}" type="slidenum">
-              <a:rPr b="0" lang="en-US"/>
+              <a:rPr lang="en-US" b="0"/>
               <a:t>15</a:t>
             </a:fld>
             <a:endParaRPr lang="en-US"/>
@@ -8369,9 +8206,11 @@
       <p:sp>
         <p:nvSpPr>
           <p:cNvPr id="2" name="Text 0"/>
-          <p:cNvSpPr/>
+          <p:cNvSpPr>
+            <a:spLocks noGrp="1"/>
+          </p:cNvSpPr>
           <p:nvPr>
-            <p:ph idx="100" type="body" hasCustomPrompt="1"/>
+            <p:ph type="body" idx="100" hasCustomPrompt="1"/>
           </p:nvPr>
         </p:nvSpPr>
         <p:spPr>
@@ -8389,11 +8228,11 @@
           <a:bodyPr wrap="square" rtlCol="0"/>
           <a:lstStyle/>
           <a:p>
-            <a:pPr algn="l" indent="0" marL="0">
-              <a:buNone/>
-            </a:pPr>
-            <a:r>
-              <a:rPr lang="en-US" sz="1300" b="1" spc="200" kern="0" dirty="0">
+            <a:pPr marL="0" indent="0" algn="l">
+              <a:buNone/>
+            </a:pPr>
+            <a:r>
+              <a:rPr lang="en-US" sz="1300" b="1" kern="0" spc="200" dirty="0">
                 <a:solidFill>
                   <a:schemeClr val="accent2"/>
                 </a:solidFill>
@@ -8410,9 +8249,11 @@
       <p:sp>
         <p:nvSpPr>
           <p:cNvPr id="3" name="Text 0"/>
-          <p:cNvSpPr/>
+          <p:cNvSpPr>
+            <a:spLocks noGrp="1"/>
+          </p:cNvSpPr>
           <p:nvPr>
-            <p:ph idx="101" type="title" hasCustomPrompt="1"/>
+            <p:ph type="title" idx="101" hasCustomPrompt="1"/>
           </p:nvPr>
         </p:nvSpPr>
         <p:spPr>
@@ -8430,7 +8271,7 @@
           <a:bodyPr wrap="square" rtlCol="0"/>
           <a:lstStyle/>
           <a:p>
-            <a:pPr algn="l" indent="0" marL="0">
+            <a:pPr marL="0" indent="0" algn="l">
               <a:buNone/>
             </a:pPr>
             <a:r>
@@ -8474,13 +8315,20 @@
             <a:prstDash val="solid"/>
           </a:ln>
           <a:effectLst>
-            <a:outerShdw sx="100000" sy="100000" kx="0" ky="0" algn="bl" rotWithShape="0" blurRad="127000" dist="38100" dir="5400000">
+            <a:outerShdw blurRad="127000" dist="38100" dir="5400000" algn="bl" rotWithShape="0">
               <a:srgbClr val="1A1F2B">
                 <a:alpha val="18000"/>
               </a:srgbClr>
             </a:outerShdw>
           </a:effectLst>
         </p:spPr>
+        <p:txBody>
+          <a:bodyPr/>
+          <a:lstStyle/>
+          <a:p>
+            <a:endParaRPr lang="en-IN"/>
+          </a:p>
+        </p:txBody>
       </p:sp>
       <p:sp>
         <p:nvSpPr>
@@ -8503,6 +8351,13 @@
           </a:solidFill>
           <a:ln/>
         </p:spPr>
+        <p:txBody>
+          <a:bodyPr/>
+          <a:lstStyle/>
+          <a:p>
+            <a:endParaRPr lang="en-IN"/>
+          </a:p>
+        </p:txBody>
       </p:sp>
       <p:sp>
         <p:nvSpPr>
@@ -8525,7 +8380,7 @@
           <a:bodyPr wrap="square" lIns="0" tIns="0" rIns="0" bIns="0" rtlCol="0" anchor="ctr"/>
           <a:lstStyle/>
           <a:p>
-            <a:pPr algn="l" indent="0" marL="0">
+            <a:pPr marL="0" indent="0" algn="l">
               <a:buNone/>
             </a:pPr>
             <a:r>
@@ -8564,7 +8419,7 @@
           <a:bodyPr wrap="square" lIns="0" tIns="0" rIns="0" bIns="0" rtlCol="0" anchor="ctr"/>
           <a:lstStyle/>
           <a:p>
-            <a:pPr algn="l" indent="0" marL="0">
+            <a:pPr marL="0" indent="0" algn="l">
               <a:lnSpc>
                 <a:spcPct val="120000"/>
               </a:lnSpc>
@@ -8584,7 +8439,7 @@
             <a:endParaRPr lang="en-US" sz="1300" dirty="0"/>
           </a:p>
           <a:p>
-            <a:pPr algn="l" indent="0" marL="0">
+            <a:pPr marL="0" indent="0" algn="l">
               <a:lnSpc>
                 <a:spcPct val="120000"/>
               </a:lnSpc>
@@ -8593,7 +8448,7 @@
             <a:endParaRPr lang="en-US" sz="1300" dirty="0"/>
           </a:p>
           <a:p>
-            <a:pPr algn="l" indent="0" marL="0">
+            <a:pPr marL="0" indent="0" algn="l">
               <a:lnSpc>
                 <a:spcPct val="120000"/>
               </a:lnSpc>
@@ -8613,7 +8468,7 @@
             <a:endParaRPr lang="en-US" sz="1300" dirty="0"/>
           </a:p>
           <a:p>
-            <a:pPr algn="l" indent="0" marL="0">
+            <a:pPr marL="0" indent="0" algn="l">
               <a:lnSpc>
                 <a:spcPct val="120000"/>
               </a:lnSpc>
@@ -8622,7 +8477,7 @@
             <a:endParaRPr lang="en-US" sz="1300" dirty="0"/>
           </a:p>
           <a:p>
-            <a:pPr algn="l" indent="0" marL="0">
+            <a:pPr marL="0" indent="0" algn="l">
               <a:lnSpc>
                 <a:spcPct val="120000"/>
               </a:lnSpc>
@@ -8642,7 +8497,7 @@
             <a:endParaRPr lang="en-US" sz="1300" dirty="0"/>
           </a:p>
           <a:p>
-            <a:pPr algn="l" indent="0" marL="0">
+            <a:pPr marL="0" indent="0" algn="l">
               <a:lnSpc>
                 <a:spcPct val="120000"/>
               </a:lnSpc>
@@ -8662,7 +8517,7 @@
             <a:endParaRPr lang="en-US" sz="1300" dirty="0"/>
           </a:p>
           <a:p>
-            <a:pPr algn="l" indent="0" marL="0">
+            <a:pPr marL="0" indent="0" algn="l">
               <a:lnSpc>
                 <a:spcPct val="120000"/>
               </a:lnSpc>
@@ -8682,7 +8537,7 @@
             <a:endParaRPr lang="en-US" sz="1300" dirty="0"/>
           </a:p>
           <a:p>
-            <a:pPr algn="l" indent="0" marL="0">
+            <a:pPr marL="0" indent="0" algn="l">
               <a:lnSpc>
                 <a:spcPct val="120000"/>
               </a:lnSpc>
@@ -8702,7 +8557,7 @@
             <a:endParaRPr lang="en-US" sz="1300" dirty="0"/>
           </a:p>
           <a:p>
-            <a:pPr algn="l" indent="0" marL="0">
+            <a:pPr marL="0" indent="0" algn="l">
               <a:lnSpc>
                 <a:spcPct val="120000"/>
               </a:lnSpc>
@@ -8722,7 +8577,7 @@
             <a:endParaRPr lang="en-US" sz="1300" dirty="0"/>
           </a:p>
           <a:p>
-            <a:pPr algn="l" indent="0" marL="0">
+            <a:pPr marL="0" indent="0" algn="l">
               <a:lnSpc>
                 <a:spcPct val="120000"/>
               </a:lnSpc>
@@ -8742,7 +8597,7 @@
             <a:endParaRPr lang="en-US" sz="1300" dirty="0"/>
           </a:p>
           <a:p>
-            <a:pPr algn="l" indent="0" marL="0">
+            <a:pPr marL="0" indent="0" algn="l">
               <a:lnSpc>
                 <a:spcPct val="120000"/>
               </a:lnSpc>
@@ -8751,7 +8606,7 @@
             <a:endParaRPr lang="en-US" sz="1300" dirty="0"/>
           </a:p>
           <a:p>
-            <a:pPr algn="l" indent="0" marL="0">
+            <a:pPr marL="0" indent="0" algn="l">
               <a:lnSpc>
                 <a:spcPct val="120000"/>
               </a:lnSpc>
@@ -8771,7 +8626,7 @@
             <a:endParaRPr lang="en-US" sz="1300" dirty="0"/>
           </a:p>
           <a:p>
-            <a:pPr algn="l" indent="0" marL="0">
+            <a:pPr marL="0" indent="0" algn="l">
               <a:lnSpc>
                 <a:spcPct val="120000"/>
               </a:lnSpc>
@@ -8813,7 +8668,7 @@
           <a:bodyPr wrap="square" lIns="0" tIns="0" rIns="0" bIns="0" rtlCol="0" anchor="ctr"/>
           <a:lstStyle/>
           <a:p>
-            <a:pPr algn="l" indent="0" marL="0">
+            <a:pPr marL="0" indent="0" algn="l">
               <a:buNone/>
             </a:pPr>
             <a:r>
@@ -8851,7 +8706,7 @@
           </a:prstGeom>
           <a:extLst>
             <a:ext uri="{C572A759-6A51-4108-AA02-DFA0A04FC94B}">
-              <ma14:wrappingTextBoxFlag xmlns:ma14="http://schemas.microsoft.com/office/mac/drawingml/2011/main" val="0"/>
+              <ma14:wrappingTextBoxFlag xmlns:ma14="http://schemas.microsoft.com/office/mac/drawingml/2011/main" xmlns="" val="0"/>
             </a:ext>
           </a:extLst>
         </p:spPr>
@@ -8872,7 +8727,7 @@
           <a:p>
             <a:pPr algn="l"/>
             <a:fld id="{F7021451-1387-4CA6-816F-3879F97B5CBC}" type="slidenum">
-              <a:rPr b="0" lang="en-US"/>
+              <a:rPr lang="en-US" b="0"/>
               <a:t>16</a:t>
             </a:fld>
             <a:endParaRPr lang="en-US"/>
@@ -8888,152 +8743,6 @@
 </file>
 
 <file path=ppt/slides/slide17.xml><?xml version="1.0" encoding="utf-8"?>
-<p:sld xmlns:a="http://schemas.openxmlformats.org/drawingml/2006/main" xmlns:r="http://schemas.openxmlformats.org/officeDocument/2006/relationships" xmlns:p="http://schemas.openxmlformats.org/presentationml/2006/main">
-  <p:cSld name="Slide 17">
-    <p:spTree>
-      <p:nvGrpSpPr>
-        <p:cNvPr id="1" name=""/>
-        <p:cNvGrpSpPr/>
-        <p:nvPr/>
-      </p:nvGrpSpPr>
-      <p:grpSpPr>
-        <a:xfrm>
-          <a:off x="0" y="0"/>
-          <a:ext cx="0" cy="0"/>
-          <a:chOff x="0" y="0"/>
-          <a:chExt cx="0" cy="0"/>
-        </a:xfrm>
-      </p:grpSpPr>
-      <p:sp>
-        <p:nvSpPr>
-          <p:cNvPr id="2" name="Text 0"/>
-          <p:cNvSpPr txBox="1"/>
-          <p:nvPr/>
-        </p:nvSpPr>
-        <p:spPr>
-          <a:xfrm>
-            <a:off x="822960" y="2011680"/>
-            <a:ext cx="9144000" cy="365760"/>
-          </a:xfrm>
-          <a:prstGeom prst="rect">
-            <a:avLst/>
-          </a:prstGeom>
-          <a:noFill/>
-          <a:ln/>
-        </p:spPr>
-        <p:txBody>
-          <a:bodyPr wrap="square" lIns="0" tIns="0" rIns="0" bIns="0" rtlCol="0" anchor="ctr"/>
-          <a:lstStyle/>
-          <a:p>
-            <a:pPr algn="l" indent="0" marL="0">
-              <a:buNone/>
-            </a:pPr>
-            <a:r>
-              <a:rPr lang="en-US" sz="1400" b="1" spc="200" kern="0" dirty="0">
-                <a:solidFill>
-                  <a:schemeClr val="accent1"/>
-                </a:solidFill>
-                <a:latin typeface="Calibri" pitchFamily="34" charset="0"/>
-                <a:ea typeface="Calibri" pitchFamily="34" charset="-122"/>
-                <a:cs typeface="Calibri" pitchFamily="34" charset="-120"/>
-              </a:rPr>
-              <a:t>03 · DELIVERY</a:t>
-            </a:r>
-            <a:endParaRPr lang="en-US" sz="1400" dirty="0"/>
-          </a:p>
-        </p:txBody>
-      </p:sp>
-      <p:sp>
-        <p:nvSpPr>
-          <p:cNvPr id="3" name="Text 0"/>
-          <p:cNvSpPr/>
-          <p:nvPr>
-            <p:ph idx="100" type="title" hasCustomPrompt="1"/>
-          </p:nvPr>
-        </p:nvSpPr>
-        <p:spPr>
-          <a:xfrm>
-            <a:off x="822960" y="2743200"/>
-            <a:ext cx="10515600" cy="1463040"/>
-          </a:xfrm>
-          <a:prstGeom prst="rect">
-            <a:avLst/>
-          </a:prstGeom>
-          <a:noFill/>
-          <a:ln/>
-        </p:spPr>
-        <p:txBody>
-          <a:bodyPr wrap="square" rtlCol="0"/>
-          <a:lstStyle/>
-          <a:p>
-            <a:pPr algn="l" indent="0" marL="0">
-              <a:buNone/>
-            </a:pPr>
-            <a:r>
-              <a:rPr lang="en-US" sz="4000" b="1" dirty="0">
-                <a:solidFill>
-                  <a:schemeClr val="bg1"/>
-                </a:solidFill>
-                <a:latin typeface="Cambria" pitchFamily="34" charset="0"/>
-                <a:ea typeface="Cambria" pitchFamily="34" charset="-122"/>
-                <a:cs typeface="Cambria" pitchFamily="34" charset="-120"/>
-              </a:rPr>
-              <a:t>Where it all lives</a:t>
-            </a:r>
-            <a:endParaRPr lang="en-US" sz="4000" dirty="0"/>
-          </a:p>
-        </p:txBody>
-      </p:sp>
-      <p:sp>
-        <p:nvSpPr>
-          <p:cNvPr id="4" name="Text 0"/>
-          <p:cNvSpPr/>
-          <p:nvPr>
-            <p:ph idx="101" type="body" hasCustomPrompt="1"/>
-          </p:nvPr>
-        </p:nvSpPr>
-        <p:spPr>
-          <a:xfrm>
-            <a:off x="822960" y="4160520"/>
-            <a:ext cx="9601200" cy="1097280"/>
-          </a:xfrm>
-          <a:prstGeom prst="rect">
-            <a:avLst/>
-          </a:prstGeom>
-          <a:noFill/>
-          <a:ln/>
-        </p:spPr>
-        <p:txBody>
-          <a:bodyPr wrap="square" rtlCol="0"/>
-          <a:lstStyle/>
-          <a:p>
-            <a:pPr algn="l" indent="0" marL="0">
-              <a:buNone/>
-            </a:pPr>
-            <a:r>
-              <a:rPr lang="en-US" sz="1600" dirty="0">
-                <a:solidFill>
-                  <a:srgbClr val="AEB8C9"/>
-                </a:solidFill>
-                <a:latin typeface="Calibri" pitchFamily="34" charset="0"/>
-                <a:ea typeface="Calibri" pitchFamily="34" charset="-122"/>
-                <a:cs typeface="Calibri" pitchFamily="34" charset="-120"/>
-              </a:rPr>
-              <a:t>A public GitHub repo with the workflow, the design docs, and everything needed to run it.</a:t>
-            </a:r>
-            <a:endParaRPr lang="en-US" sz="1600" dirty="0"/>
-          </a:p>
-        </p:txBody>
-      </p:sp>
-    </p:spTree>
-  </p:cSld>
-  <p:clrMapOvr>
-    <a:masterClrMapping/>
-  </p:clrMapOvr>
-</p:sld>
-</file>
-
-<file path=ppt/slides/slide18.xml><?xml version="1.0" encoding="utf-8"?>
 <p:sld xmlns:a="http://schemas.openxmlformats.org/drawingml/2006/main" xmlns:r="http://schemas.openxmlformats.org/officeDocument/2006/relationships" xmlns:p="http://schemas.openxmlformats.org/presentationml/2006/main">
   <p:cSld name="Slide 18">
     <p:spTree>
@@ -9053,9 +8762,11 @@
       <p:sp>
         <p:nvSpPr>
           <p:cNvPr id="2" name="Text 0"/>
-          <p:cNvSpPr/>
+          <p:cNvSpPr>
+            <a:spLocks noGrp="1"/>
+          </p:cNvSpPr>
           <p:nvPr>
-            <p:ph idx="100" type="body" hasCustomPrompt="1"/>
+            <p:ph type="body" idx="100" hasCustomPrompt="1"/>
           </p:nvPr>
         </p:nvSpPr>
         <p:spPr>
@@ -9073,11 +8784,11 @@
           <a:bodyPr wrap="square" rtlCol="0"/>
           <a:lstStyle/>
           <a:p>
-            <a:pPr algn="l" indent="0" marL="0">
-              <a:buNone/>
-            </a:pPr>
-            <a:r>
-              <a:rPr lang="en-US" sz="1300" b="1" spc="200" kern="0" dirty="0">
+            <a:pPr marL="0" indent="0" algn="l">
+              <a:buNone/>
+            </a:pPr>
+            <a:r>
+              <a:rPr lang="en-US" sz="1300" b="1" kern="0" spc="200" dirty="0">
                 <a:solidFill>
                   <a:schemeClr val="accent2"/>
                 </a:solidFill>
@@ -9094,9 +8805,11 @@
       <p:sp>
         <p:nvSpPr>
           <p:cNvPr id="3" name="Text 0"/>
-          <p:cNvSpPr/>
+          <p:cNvSpPr>
+            <a:spLocks noGrp="1"/>
+          </p:cNvSpPr>
           <p:nvPr>
-            <p:ph idx="101" type="title" hasCustomPrompt="1"/>
+            <p:ph type="title" idx="101" hasCustomPrompt="1"/>
           </p:nvPr>
         </p:nvSpPr>
         <p:spPr>
@@ -9114,7 +8827,7 @@
           <a:bodyPr wrap="square" rtlCol="0"/>
           <a:lstStyle/>
           <a:p>
-            <a:pPr algn="l" indent="0" marL="0">
+            <a:pPr marL="0" indent="0" algn="l">
               <a:buNone/>
             </a:pPr>
             <a:r>
@@ -9126,7 +8839,7 @@
                 <a:ea typeface="Cambria" pitchFamily="34" charset="-122"/>
                 <a:cs typeface="Cambria" pitchFamily="34" charset="-120"/>
               </a:rPr>
-              <a:t>github.com/Chethan616/n8n-epsilon  ·  public</a:t>
+              <a:t>github.com/Chethan616/n8n-epsilon </a:t>
             </a:r>
             <a:endParaRPr lang="en-US" sz="3200" dirty="0"/>
           </a:p>
@@ -9158,6 +8871,13 @@
             <a:prstDash val="solid"/>
           </a:ln>
         </p:spPr>
+        <p:txBody>
+          <a:bodyPr/>
+          <a:lstStyle/>
+          <a:p>
+            <a:endParaRPr lang="en-IN"/>
+          </a:p>
+        </p:txBody>
       </p:sp>
       <p:sp>
         <p:nvSpPr>
@@ -9180,7 +8900,7 @@
           <a:bodyPr wrap="square" lIns="0" tIns="0" rIns="0" bIns="0" rtlCol="0" anchor="ctr"/>
           <a:lstStyle/>
           <a:p>
-            <a:pPr algn="l" indent="0" marL="0">
+            <a:pPr marL="0" indent="0" algn="l">
               <a:buNone/>
             </a:pPr>
             <a:r>
@@ -9219,7 +8939,7 @@
           <a:bodyPr wrap="square" lIns="0" tIns="0" rIns="0" bIns="0" rtlCol="0" anchor="ctr"/>
           <a:lstStyle/>
           <a:p>
-            <a:pPr algn="l" indent="0" marL="0">
+            <a:pPr marL="0" indent="0" algn="l">
               <a:buNone/>
             </a:pPr>
             <a:r>
@@ -9263,6 +8983,13 @@
             <a:prstDash val="solid"/>
           </a:ln>
         </p:spPr>
+        <p:txBody>
+          <a:bodyPr/>
+          <a:lstStyle/>
+          <a:p>
+            <a:endParaRPr lang="en-IN"/>
+          </a:p>
+        </p:txBody>
       </p:sp>
       <p:sp>
         <p:nvSpPr>
@@ -9285,7 +9012,7 @@
           <a:bodyPr wrap="square" lIns="0" tIns="0" rIns="0" bIns="0" rtlCol="0" anchor="ctr"/>
           <a:lstStyle/>
           <a:p>
-            <a:pPr algn="l" indent="0" marL="0">
+            <a:pPr marL="0" indent="0" algn="l">
               <a:buNone/>
             </a:pPr>
             <a:r>
@@ -9324,7 +9051,7 @@
           <a:bodyPr wrap="square" lIns="0" tIns="0" rIns="0" bIns="0" rtlCol="0" anchor="ctr"/>
           <a:lstStyle/>
           <a:p>
-            <a:pPr algn="l" indent="0" marL="0">
+            <a:pPr marL="0" indent="0" algn="l">
               <a:buNone/>
             </a:pPr>
             <a:r>
@@ -9368,6 +9095,13 @@
             <a:prstDash val="solid"/>
           </a:ln>
         </p:spPr>
+        <p:txBody>
+          <a:bodyPr/>
+          <a:lstStyle/>
+          <a:p>
+            <a:endParaRPr lang="en-IN"/>
+          </a:p>
+        </p:txBody>
       </p:sp>
       <p:sp>
         <p:nvSpPr>
@@ -9390,7 +9124,7 @@
           <a:bodyPr wrap="square" lIns="0" tIns="0" rIns="0" bIns="0" rtlCol="0" anchor="ctr"/>
           <a:lstStyle/>
           <a:p>
-            <a:pPr algn="l" indent="0" marL="0">
+            <a:pPr marL="0" indent="0" algn="l">
               <a:buNone/>
             </a:pPr>
             <a:r>
@@ -9429,7 +9163,7 @@
           <a:bodyPr wrap="square" lIns="0" tIns="0" rIns="0" bIns="0" rtlCol="0" anchor="ctr"/>
           <a:lstStyle/>
           <a:p>
-            <a:pPr algn="l" indent="0" marL="0">
+            <a:pPr marL="0" indent="0" algn="l">
               <a:buNone/>
             </a:pPr>
             <a:r>
@@ -9473,6 +9207,13 @@
             <a:prstDash val="solid"/>
           </a:ln>
         </p:spPr>
+        <p:txBody>
+          <a:bodyPr/>
+          <a:lstStyle/>
+          <a:p>
+            <a:endParaRPr lang="en-IN"/>
+          </a:p>
+        </p:txBody>
       </p:sp>
       <p:sp>
         <p:nvSpPr>
@@ -9495,7 +9236,7 @@
           <a:bodyPr wrap="square" lIns="0" tIns="0" rIns="0" bIns="0" rtlCol="0" anchor="ctr"/>
           <a:lstStyle/>
           <a:p>
-            <a:pPr algn="l" indent="0" marL="0">
+            <a:pPr marL="0" indent="0" algn="l">
               <a:buNone/>
             </a:pPr>
             <a:r>
@@ -9534,7 +9275,7 @@
           <a:bodyPr wrap="square" lIns="0" tIns="0" rIns="0" bIns="0" rtlCol="0" anchor="ctr"/>
           <a:lstStyle/>
           <a:p>
-            <a:pPr algn="l" indent="0" marL="0">
+            <a:pPr marL="0" indent="0" algn="l">
               <a:buNone/>
             </a:pPr>
             <a:r>
@@ -9578,6 +9319,13 @@
             <a:prstDash val="solid"/>
           </a:ln>
         </p:spPr>
+        <p:txBody>
+          <a:bodyPr/>
+          <a:lstStyle/>
+          <a:p>
+            <a:endParaRPr lang="en-IN"/>
+          </a:p>
+        </p:txBody>
       </p:sp>
       <p:sp>
         <p:nvSpPr>
@@ -9600,7 +9348,7 @@
           <a:bodyPr wrap="square" lIns="0" tIns="0" rIns="0" bIns="0" rtlCol="0" anchor="ctr"/>
           <a:lstStyle/>
           <a:p>
-            <a:pPr algn="l" indent="0" marL="0">
+            <a:pPr marL="0" indent="0" algn="l">
               <a:buNone/>
             </a:pPr>
             <a:r>
@@ -9639,7 +9387,7 @@
           <a:bodyPr wrap="square" lIns="0" tIns="0" rIns="0" bIns="0" rtlCol="0" anchor="ctr"/>
           <a:lstStyle/>
           <a:p>
-            <a:pPr algn="l" indent="0" marL="0">
+            <a:pPr marL="0" indent="0" algn="l">
               <a:buNone/>
             </a:pPr>
             <a:r>
@@ -9683,6 +9431,13 @@
             <a:prstDash val="solid"/>
           </a:ln>
         </p:spPr>
+        <p:txBody>
+          <a:bodyPr/>
+          <a:lstStyle/>
+          <a:p>
+            <a:endParaRPr lang="en-IN"/>
+          </a:p>
+        </p:txBody>
       </p:sp>
       <p:sp>
         <p:nvSpPr>
@@ -9705,7 +9460,7 @@
           <a:bodyPr wrap="square" lIns="0" tIns="0" rIns="0" bIns="0" rtlCol="0" anchor="ctr"/>
           <a:lstStyle/>
           <a:p>
-            <a:pPr algn="l" indent="0" marL="0">
+            <a:pPr marL="0" indent="0" algn="l">
               <a:buNone/>
             </a:pPr>
             <a:r>
@@ -9744,7 +9499,7 @@
           <a:bodyPr wrap="square" lIns="0" tIns="0" rIns="0" bIns="0" rtlCol="0" anchor="ctr"/>
           <a:lstStyle/>
           <a:p>
-            <a:pPr algn="l" indent="0" marL="0">
+            <a:pPr marL="0" indent="0" algn="l">
               <a:buNone/>
             </a:pPr>
             <a:r>
@@ -9782,7 +9537,7 @@
           </a:prstGeom>
           <a:extLst>
             <a:ext uri="{C572A759-6A51-4108-AA02-DFA0A04FC94B}">
-              <ma14:wrappingTextBoxFlag xmlns:ma14="http://schemas.microsoft.com/office/mac/drawingml/2011/main" val="0"/>
+              <ma14:wrappingTextBoxFlag xmlns:ma14="http://schemas.microsoft.com/office/mac/drawingml/2011/main" xmlns="" val="0"/>
             </a:ext>
           </a:extLst>
         </p:spPr>
@@ -9803,8 +9558,8 @@
           <a:p>
             <a:pPr algn="l"/>
             <a:fld id="{F7021451-1387-4CA6-816F-3879F97B5CBC}" type="slidenum">
-              <a:rPr b="0" lang="en-US"/>
-              <a:t>18</a:t>
+              <a:rPr lang="en-US" b="0"/>
+              <a:t>17</a:t>
             </a:fld>
             <a:endParaRPr lang="en-US"/>
           </a:p>
@@ -9838,9 +9593,11 @@
       <p:sp>
         <p:nvSpPr>
           <p:cNvPr id="2" name="Text 0"/>
-          <p:cNvSpPr/>
+          <p:cNvSpPr>
+            <a:spLocks noGrp="1"/>
+          </p:cNvSpPr>
           <p:nvPr>
-            <p:ph idx="100" type="body" hasCustomPrompt="1"/>
+            <p:ph type="body" idx="100" hasCustomPrompt="1"/>
           </p:nvPr>
         </p:nvSpPr>
         <p:spPr>
@@ -9858,11 +9615,11 @@
           <a:bodyPr wrap="square" rtlCol="0"/>
           <a:lstStyle/>
           <a:p>
-            <a:pPr algn="l" indent="0" marL="0">
-              <a:buNone/>
-            </a:pPr>
-            <a:r>
-              <a:rPr lang="en-US" sz="1300" b="1" spc="200" kern="0" dirty="0">
+            <a:pPr marL="0" indent="0" algn="l">
+              <a:buNone/>
+            </a:pPr>
+            <a:r>
+              <a:rPr lang="en-US" sz="1300" b="1" kern="0" spc="200" dirty="0">
                 <a:solidFill>
                   <a:schemeClr val="accent2"/>
                 </a:solidFill>
@@ -9879,9 +9636,11 @@
       <p:sp>
         <p:nvSpPr>
           <p:cNvPr id="3" name="Text 0"/>
-          <p:cNvSpPr/>
+          <p:cNvSpPr>
+            <a:spLocks noGrp="1"/>
+          </p:cNvSpPr>
           <p:nvPr>
-            <p:ph idx="101" type="title" hasCustomPrompt="1"/>
+            <p:ph type="title" idx="101" hasCustomPrompt="1"/>
           </p:nvPr>
         </p:nvSpPr>
         <p:spPr>
@@ -9899,7 +9658,7 @@
           <a:bodyPr wrap="square" rtlCol="0"/>
           <a:lstStyle/>
           <a:p>
-            <a:pPr algn="l" indent="0" marL="0">
+            <a:pPr marL="0" indent="0" algn="l">
               <a:buNone/>
             </a:pPr>
             <a:r>
@@ -9938,7 +9697,7 @@
           <a:bodyPr wrap="square" lIns="0" tIns="0" rIns="0" bIns="0" rtlCol="0" anchor="ctr"/>
           <a:lstStyle/>
           <a:p>
-            <a:pPr algn="l" indent="0" marL="0">
+            <a:pPr marL="0" indent="0" algn="l">
               <a:lnSpc>
                 <a:spcPct val="125000"/>
               </a:lnSpc>
@@ -9985,13 +9744,20 @@
             <a:prstDash val="solid"/>
           </a:ln>
           <a:effectLst>
-            <a:outerShdw sx="100000" sy="100000" kx="0" ky="0" algn="bl" rotWithShape="0" blurRad="127000" dist="38100" dir="5400000">
+            <a:outerShdw blurRad="127000" dist="38100" dir="5400000" algn="bl" rotWithShape="0">
               <a:srgbClr val="1A1F2B">
                 <a:alpha val="18000"/>
               </a:srgbClr>
             </a:outerShdw>
           </a:effectLst>
         </p:spPr>
+        <p:txBody>
+          <a:bodyPr/>
+          <a:lstStyle/>
+          <a:p>
+            <a:endParaRPr lang="en-IN"/>
+          </a:p>
+        </p:txBody>
       </p:sp>
       <p:sp>
         <p:nvSpPr>
@@ -10014,6 +9780,13 @@
           </a:solidFill>
           <a:ln/>
         </p:spPr>
+        <p:txBody>
+          <a:bodyPr/>
+          <a:lstStyle/>
+          <a:p>
+            <a:endParaRPr lang="en-IN"/>
+          </a:p>
+        </p:txBody>
       </p:sp>
       <p:sp>
         <p:nvSpPr>
@@ -10036,7 +9809,7 @@
           <a:bodyPr wrap="square" lIns="0" tIns="0" rIns="0" bIns="0" rtlCol="0" anchor="ctr"/>
           <a:lstStyle/>
           <a:p>
-            <a:pPr algn="ctr" indent="0" marL="0">
+            <a:pPr marL="0" indent="0" algn="ctr">
               <a:buNone/>
             </a:pPr>
             <a:r>
@@ -10075,7 +9848,7 @@
           <a:bodyPr wrap="square" lIns="0" tIns="0" rIns="0" bIns="0" rtlCol="0" anchor="ctr"/>
           <a:lstStyle/>
           <a:p>
-            <a:pPr algn="l" indent="0" marL="0">
+            <a:pPr marL="0" indent="0" algn="l">
               <a:buNone/>
             </a:pPr>
             <a:r>
@@ -10114,7 +9887,7 @@
           <a:bodyPr wrap="square" lIns="0" tIns="0" rIns="0" bIns="0" rtlCol="0" anchor="ctr"/>
           <a:lstStyle/>
           <a:p>
-            <a:pPr algn="l" indent="0" marL="0">
+            <a:pPr marL="0" indent="0" algn="l">
               <a:lnSpc>
                 <a:spcPct val="125000"/>
               </a:lnSpc>
@@ -10161,13 +9934,20 @@
             <a:prstDash val="solid"/>
           </a:ln>
           <a:effectLst>
-            <a:outerShdw sx="100000" sy="100000" kx="0" ky="0" algn="bl" rotWithShape="0" blurRad="127000" dist="38100" dir="5400000">
+            <a:outerShdw blurRad="127000" dist="38100" dir="5400000" algn="bl" rotWithShape="0">
               <a:srgbClr val="1A1F2B">
                 <a:alpha val="18000"/>
               </a:srgbClr>
             </a:outerShdw>
           </a:effectLst>
         </p:spPr>
+        <p:txBody>
+          <a:bodyPr/>
+          <a:lstStyle/>
+          <a:p>
+            <a:endParaRPr lang="en-IN"/>
+          </a:p>
+        </p:txBody>
       </p:sp>
       <p:sp>
         <p:nvSpPr>
@@ -10190,6 +9970,13 @@
           </a:solidFill>
           <a:ln/>
         </p:spPr>
+        <p:txBody>
+          <a:bodyPr/>
+          <a:lstStyle/>
+          <a:p>
+            <a:endParaRPr lang="en-IN"/>
+          </a:p>
+        </p:txBody>
       </p:sp>
       <p:sp>
         <p:nvSpPr>
@@ -10212,7 +9999,7 @@
           <a:bodyPr wrap="square" lIns="0" tIns="0" rIns="0" bIns="0" rtlCol="0" anchor="ctr"/>
           <a:lstStyle/>
           <a:p>
-            <a:pPr algn="ctr" indent="0" marL="0">
+            <a:pPr marL="0" indent="0" algn="ctr">
               <a:buNone/>
             </a:pPr>
             <a:r>
@@ -10251,7 +10038,7 @@
           <a:bodyPr wrap="square" lIns="0" tIns="0" rIns="0" bIns="0" rtlCol="0" anchor="ctr"/>
           <a:lstStyle/>
           <a:p>
-            <a:pPr algn="l" indent="0" marL="0">
+            <a:pPr marL="0" indent="0" algn="l">
               <a:buNone/>
             </a:pPr>
             <a:r>
@@ -10290,7 +10077,7 @@
           <a:bodyPr wrap="square" lIns="0" tIns="0" rIns="0" bIns="0" rtlCol="0" anchor="ctr"/>
           <a:lstStyle/>
           <a:p>
-            <a:pPr algn="l" indent="0" marL="0">
+            <a:pPr marL="0" indent="0" algn="l">
               <a:lnSpc>
                 <a:spcPct val="125000"/>
               </a:lnSpc>
@@ -10337,13 +10124,20 @@
             <a:prstDash val="solid"/>
           </a:ln>
           <a:effectLst>
-            <a:outerShdw sx="100000" sy="100000" kx="0" ky="0" algn="bl" rotWithShape="0" blurRad="127000" dist="38100" dir="5400000">
+            <a:outerShdw blurRad="127000" dist="38100" dir="5400000" algn="bl" rotWithShape="0">
               <a:srgbClr val="1A1F2B">
                 <a:alpha val="18000"/>
               </a:srgbClr>
             </a:outerShdw>
           </a:effectLst>
         </p:spPr>
+        <p:txBody>
+          <a:bodyPr/>
+          <a:lstStyle/>
+          <a:p>
+            <a:endParaRPr lang="en-IN"/>
+          </a:p>
+        </p:txBody>
       </p:sp>
       <p:sp>
         <p:nvSpPr>
@@ -10366,6 +10160,13 @@
           </a:solidFill>
           <a:ln/>
         </p:spPr>
+        <p:txBody>
+          <a:bodyPr/>
+          <a:lstStyle/>
+          <a:p>
+            <a:endParaRPr lang="en-IN"/>
+          </a:p>
+        </p:txBody>
       </p:sp>
       <p:sp>
         <p:nvSpPr>
@@ -10388,7 +10189,7 @@
           <a:bodyPr wrap="square" lIns="0" tIns="0" rIns="0" bIns="0" rtlCol="0" anchor="ctr"/>
           <a:lstStyle/>
           <a:p>
-            <a:pPr algn="ctr" indent="0" marL="0">
+            <a:pPr marL="0" indent="0" algn="ctr">
               <a:buNone/>
             </a:pPr>
             <a:r>
@@ -10427,7 +10228,7 @@
           <a:bodyPr wrap="square" lIns="0" tIns="0" rIns="0" bIns="0" rtlCol="0" anchor="ctr"/>
           <a:lstStyle/>
           <a:p>
-            <a:pPr algn="l" indent="0" marL="0">
+            <a:pPr marL="0" indent="0" algn="l">
               <a:buNone/>
             </a:pPr>
             <a:r>
@@ -10466,7 +10267,7 @@
           <a:bodyPr wrap="square" lIns="0" tIns="0" rIns="0" bIns="0" rtlCol="0" anchor="ctr"/>
           <a:lstStyle/>
           <a:p>
-            <a:pPr algn="l" indent="0" marL="0">
+            <a:pPr marL="0" indent="0" algn="l">
               <a:lnSpc>
                 <a:spcPct val="125000"/>
               </a:lnSpc>
@@ -10507,7 +10308,7 @@
           </a:prstGeom>
           <a:extLst>
             <a:ext uri="{C572A759-6A51-4108-AA02-DFA0A04FC94B}">
-              <ma14:wrappingTextBoxFlag xmlns:ma14="http://schemas.microsoft.com/office/mac/drawingml/2011/main" val="0"/>
+              <ma14:wrappingTextBoxFlag xmlns:ma14="http://schemas.microsoft.com/office/mac/drawingml/2011/main" xmlns="" val="0"/>
             </a:ext>
           </a:extLst>
         </p:spPr>
@@ -10528,7 +10329,7 @@
           <a:p>
             <a:pPr algn="l"/>
             <a:fld id="{F7021451-1387-4CA6-816F-3879F97B5CBC}" type="slidenum">
-              <a:rPr b="0" lang="en-US"/>
+              <a:rPr lang="en-US" b="0"/>
               <a:t>2</a:t>
             </a:fld>
             <a:endParaRPr lang="en-US"/>
@@ -10563,9 +10364,11 @@
       <p:sp>
         <p:nvSpPr>
           <p:cNvPr id="2" name="Text 0"/>
-          <p:cNvSpPr/>
+          <p:cNvSpPr>
+            <a:spLocks noGrp="1"/>
+          </p:cNvSpPr>
           <p:nvPr>
-            <p:ph idx="100" type="body" hasCustomPrompt="1"/>
+            <p:ph type="body" idx="100" hasCustomPrompt="1"/>
           </p:nvPr>
         </p:nvSpPr>
         <p:spPr>
@@ -10583,11 +10386,11 @@
           <a:bodyPr wrap="square" rtlCol="0"/>
           <a:lstStyle/>
           <a:p>
-            <a:pPr algn="l" indent="0" marL="0">
-              <a:buNone/>
-            </a:pPr>
-            <a:r>
-              <a:rPr lang="en-US" sz="1300" b="1" spc="200" kern="0" dirty="0">
+            <a:pPr marL="0" indent="0" algn="l">
+              <a:buNone/>
+            </a:pPr>
+            <a:r>
+              <a:rPr lang="en-US" sz="1300" b="1" kern="0" spc="200" dirty="0">
                 <a:solidFill>
                   <a:schemeClr val="accent2"/>
                 </a:solidFill>
@@ -10604,9 +10407,11 @@
       <p:sp>
         <p:nvSpPr>
           <p:cNvPr id="3" name="Text 0"/>
-          <p:cNvSpPr/>
+          <p:cNvSpPr>
+            <a:spLocks noGrp="1"/>
+          </p:cNvSpPr>
           <p:nvPr>
-            <p:ph idx="101" type="title" hasCustomPrompt="1"/>
+            <p:ph type="title" idx="101" hasCustomPrompt="1"/>
           </p:nvPr>
         </p:nvSpPr>
         <p:spPr>
@@ -10624,7 +10429,7 @@
           <a:bodyPr wrap="square" rtlCol="0"/>
           <a:lstStyle/>
           <a:p>
-            <a:pPr algn="l" indent="0" marL="0">
+            <a:pPr marL="0" indent="0" algn="l">
               <a:buNone/>
             </a:pPr>
             <a:r>
@@ -10663,7 +10468,7 @@
           <a:bodyPr wrap="square" lIns="0" tIns="0" rIns="0" bIns="0" rtlCol="0" anchor="ctr"/>
           <a:lstStyle/>
           <a:p>
-            <a:pPr algn="l" indent="0" marL="0">
+            <a:pPr marL="0" indent="0" algn="l">
               <a:lnSpc>
                 <a:spcPct val="125000"/>
               </a:lnSpc>
@@ -10710,13 +10515,20 @@
             <a:prstDash val="solid"/>
           </a:ln>
           <a:effectLst>
-            <a:outerShdw sx="100000" sy="100000" kx="0" ky="0" algn="bl" rotWithShape="0" blurRad="127000" dist="38100" dir="5400000">
+            <a:outerShdw blurRad="127000" dist="38100" dir="5400000" algn="bl" rotWithShape="0">
               <a:srgbClr val="1A1F2B">
                 <a:alpha val="18000"/>
               </a:srgbClr>
             </a:outerShdw>
           </a:effectLst>
         </p:spPr>
+        <p:txBody>
+          <a:bodyPr/>
+          <a:lstStyle/>
+          <a:p>
+            <a:endParaRPr lang="en-IN"/>
+          </a:p>
+        </p:txBody>
       </p:sp>
       <p:sp>
         <p:nvSpPr>
@@ -10737,6 +10549,13 @@
           </a:solidFill>
           <a:ln/>
         </p:spPr>
+        <p:txBody>
+          <a:bodyPr/>
+          <a:lstStyle/>
+          <a:p>
+            <a:endParaRPr lang="en-IN"/>
+          </a:p>
+        </p:txBody>
       </p:sp>
       <p:sp>
         <p:nvSpPr>
@@ -10759,11 +10578,11 @@
           <a:bodyPr wrap="square" lIns="0" tIns="0" rIns="0" bIns="0" rtlCol="0" anchor="ctr"/>
           <a:lstStyle/>
           <a:p>
-            <a:pPr algn="l" indent="0" marL="0">
-              <a:buNone/>
-            </a:pPr>
-            <a:r>
-              <a:rPr lang="en-US" sz="1400" b="1" spc="200" kern="0" dirty="0">
+            <a:pPr marL="0" indent="0" algn="l">
+              <a:buNone/>
+            </a:pPr>
+            <a:r>
+              <a:rPr lang="en-US" sz="1400" b="1" kern="0" spc="200" dirty="0">
                 <a:solidFill>
                   <a:schemeClr val="accent2"/>
                 </a:solidFill>
@@ -10798,7 +10617,7 @@
           <a:bodyPr wrap="square" lIns="0" tIns="0" rIns="0" bIns="0" rtlCol="0" anchor="ctr"/>
           <a:lstStyle/>
           <a:p>
-            <a:pPr algn="l" indent="0" marL="0">
+            <a:pPr marL="0" indent="0" algn="l">
               <a:lnSpc>
                 <a:spcPct val="130000"/>
               </a:lnSpc>
@@ -10845,13 +10664,20 @@
             <a:prstDash val="solid"/>
           </a:ln>
           <a:effectLst>
-            <a:outerShdw sx="100000" sy="100000" kx="0" ky="0" algn="bl" rotWithShape="0" blurRad="127000" dist="38100" dir="5400000">
+            <a:outerShdw blurRad="127000" dist="38100" dir="5400000" algn="bl" rotWithShape="0">
               <a:srgbClr val="1A1F2B">
                 <a:alpha val="18000"/>
               </a:srgbClr>
             </a:outerShdw>
           </a:effectLst>
         </p:spPr>
+        <p:txBody>
+          <a:bodyPr/>
+          <a:lstStyle/>
+          <a:p>
+            <a:endParaRPr lang="en-IN"/>
+          </a:p>
+        </p:txBody>
       </p:sp>
       <p:sp>
         <p:nvSpPr>
@@ -10872,6 +10698,13 @@
           </a:solidFill>
           <a:ln/>
         </p:spPr>
+        <p:txBody>
+          <a:bodyPr/>
+          <a:lstStyle/>
+          <a:p>
+            <a:endParaRPr lang="en-IN"/>
+          </a:p>
+        </p:txBody>
       </p:sp>
       <p:sp>
         <p:nvSpPr>
@@ -10894,11 +10727,11 @@
           <a:bodyPr wrap="square" lIns="0" tIns="0" rIns="0" bIns="0" rtlCol="0" anchor="ctr"/>
           <a:lstStyle/>
           <a:p>
-            <a:pPr algn="l" indent="0" marL="0">
-              <a:buNone/>
-            </a:pPr>
-            <a:r>
-              <a:rPr lang="en-US" sz="1400" b="1" spc="200" kern="0" dirty="0">
+            <a:pPr marL="0" indent="0" algn="l">
+              <a:buNone/>
+            </a:pPr>
+            <a:r>
+              <a:rPr lang="en-US" sz="1400" b="1" kern="0" spc="200" dirty="0">
                 <a:solidFill>
                   <a:schemeClr val="accent1"/>
                 </a:solidFill>
@@ -10933,7 +10766,7 @@
           <a:bodyPr wrap="square" lIns="0" tIns="0" rIns="0" bIns="0" rtlCol="0" anchor="ctr"/>
           <a:lstStyle/>
           <a:p>
-            <a:pPr algn="l" indent="0" marL="0">
+            <a:pPr marL="0" indent="0" algn="l">
               <a:lnSpc>
                 <a:spcPct val="130000"/>
               </a:lnSpc>
@@ -10980,13 +10813,20 @@
             <a:prstDash val="solid"/>
           </a:ln>
           <a:effectLst>
-            <a:outerShdw sx="100000" sy="100000" kx="0" ky="0" algn="bl" rotWithShape="0" blurRad="127000" dist="38100" dir="5400000">
+            <a:outerShdw blurRad="127000" dist="38100" dir="5400000" algn="bl" rotWithShape="0">
               <a:srgbClr val="1A1F2B">
                 <a:alpha val="18000"/>
               </a:srgbClr>
             </a:outerShdw>
           </a:effectLst>
         </p:spPr>
+        <p:txBody>
+          <a:bodyPr/>
+          <a:lstStyle/>
+          <a:p>
+            <a:endParaRPr lang="en-IN"/>
+          </a:p>
+        </p:txBody>
       </p:sp>
       <p:sp>
         <p:nvSpPr>
@@ -11007,6 +10847,13 @@
           </a:solidFill>
           <a:ln/>
         </p:spPr>
+        <p:txBody>
+          <a:bodyPr/>
+          <a:lstStyle/>
+          <a:p>
+            <a:endParaRPr lang="en-IN"/>
+          </a:p>
+        </p:txBody>
       </p:sp>
       <p:sp>
         <p:nvSpPr>
@@ -11029,11 +10876,11 @@
           <a:bodyPr wrap="square" lIns="0" tIns="0" rIns="0" bIns="0" rtlCol="0" anchor="ctr"/>
           <a:lstStyle/>
           <a:p>
-            <a:pPr algn="l" indent="0" marL="0">
-              <a:buNone/>
-            </a:pPr>
-            <a:r>
-              <a:rPr lang="en-US" sz="1400" b="1" spc="200" kern="0" dirty="0">
+            <a:pPr marL="0" indent="0" algn="l">
+              <a:buNone/>
+            </a:pPr>
+            <a:r>
+              <a:rPr lang="en-US" sz="1400" b="1" kern="0" spc="200" dirty="0">
                 <a:solidFill>
                   <a:schemeClr val="accent3"/>
                 </a:solidFill>
@@ -11068,7 +10915,7 @@
           <a:bodyPr wrap="square" lIns="0" tIns="0" rIns="0" bIns="0" rtlCol="0" anchor="ctr"/>
           <a:lstStyle/>
           <a:p>
-            <a:pPr algn="l" indent="0" marL="0">
+            <a:pPr marL="0" indent="0" algn="l">
               <a:lnSpc>
                 <a:spcPct val="130000"/>
               </a:lnSpc>
@@ -11109,7 +10956,7 @@
           </a:prstGeom>
           <a:extLst>
             <a:ext uri="{C572A759-6A51-4108-AA02-DFA0A04FC94B}">
-              <ma14:wrappingTextBoxFlag xmlns:ma14="http://schemas.microsoft.com/office/mac/drawingml/2011/main" val="0"/>
+              <ma14:wrappingTextBoxFlag xmlns:ma14="http://schemas.microsoft.com/office/mac/drawingml/2011/main" xmlns="" val="0"/>
             </a:ext>
           </a:extLst>
         </p:spPr>
@@ -11130,7 +10977,7 @@
           <a:p>
             <a:pPr algn="l"/>
             <a:fld id="{F7021451-1387-4CA6-816F-3879F97B5CBC}" type="slidenum">
-              <a:rPr b="0" lang="en-US"/>
+              <a:rPr lang="en-US" b="0"/>
               <a:t>3</a:t>
             </a:fld>
             <a:endParaRPr lang="en-US"/>
@@ -11165,9 +11012,11 @@
       <p:sp>
         <p:nvSpPr>
           <p:cNvPr id="2" name="Text 0"/>
-          <p:cNvSpPr/>
+          <p:cNvSpPr>
+            <a:spLocks noGrp="1"/>
+          </p:cNvSpPr>
           <p:nvPr>
-            <p:ph idx="100" type="body" hasCustomPrompt="1"/>
+            <p:ph type="body" idx="100" hasCustomPrompt="1"/>
           </p:nvPr>
         </p:nvSpPr>
         <p:spPr>
@@ -11185,11 +11034,11 @@
           <a:bodyPr wrap="square" rtlCol="0"/>
           <a:lstStyle/>
           <a:p>
-            <a:pPr algn="l" indent="0" marL="0">
-              <a:buNone/>
-            </a:pPr>
-            <a:r>
-              <a:rPr lang="en-US" sz="1300" b="1" spc="200" kern="0" dirty="0">
+            <a:pPr marL="0" indent="0" algn="l">
+              <a:buNone/>
+            </a:pPr>
+            <a:r>
+              <a:rPr lang="en-US" sz="1300" b="1" kern="0" spc="200" dirty="0">
                 <a:solidFill>
                   <a:schemeClr val="accent2"/>
                 </a:solidFill>
@@ -11206,9 +11055,11 @@
       <p:sp>
         <p:nvSpPr>
           <p:cNvPr id="3" name="Text 0"/>
-          <p:cNvSpPr/>
+          <p:cNvSpPr>
+            <a:spLocks noGrp="1"/>
+          </p:cNvSpPr>
           <p:nvPr>
-            <p:ph idx="101" type="title" hasCustomPrompt="1"/>
+            <p:ph type="title" idx="101" hasCustomPrompt="1"/>
           </p:nvPr>
         </p:nvSpPr>
         <p:spPr>
@@ -11226,7 +11077,7 @@
           <a:bodyPr wrap="square" rtlCol="0"/>
           <a:lstStyle/>
           <a:p>
-            <a:pPr algn="l" indent="0" marL="0">
+            <a:pPr marL="0" indent="0" algn="l">
               <a:buNone/>
             </a:pPr>
             <a:r>
@@ -11267,6 +11118,13 @@
             <a:tailEnd type="none"/>
           </a:ln>
         </p:spPr>
+        <p:txBody>
+          <a:bodyPr/>
+          <a:lstStyle/>
+          <a:p>
+            <a:endParaRPr lang="en-IN"/>
+          </a:p>
+        </p:txBody>
       </p:sp>
       <p:sp>
         <p:nvSpPr>
@@ -11291,6 +11149,13 @@
             <a:tailEnd type="none"/>
           </a:ln>
         </p:spPr>
+        <p:txBody>
+          <a:bodyPr/>
+          <a:lstStyle/>
+          <a:p>
+            <a:endParaRPr lang="en-IN"/>
+          </a:p>
+        </p:txBody>
       </p:sp>
       <p:sp>
         <p:nvSpPr>
@@ -11315,6 +11180,13 @@
             <a:tailEnd type="triangle"/>
           </a:ln>
         </p:spPr>
+        <p:txBody>
+          <a:bodyPr/>
+          <a:lstStyle/>
+          <a:p>
+            <a:endParaRPr lang="en-IN"/>
+          </a:p>
+        </p:txBody>
       </p:sp>
       <p:sp>
         <p:nvSpPr>
@@ -11339,6 +11211,13 @@
             <a:tailEnd type="none"/>
           </a:ln>
         </p:spPr>
+        <p:txBody>
+          <a:bodyPr/>
+          <a:lstStyle/>
+          <a:p>
+            <a:endParaRPr lang="en-IN"/>
+          </a:p>
+        </p:txBody>
       </p:sp>
       <p:sp>
         <p:nvSpPr>
@@ -11363,6 +11242,13 @@
             <a:tailEnd type="none"/>
           </a:ln>
         </p:spPr>
+        <p:txBody>
+          <a:bodyPr/>
+          <a:lstStyle/>
+          <a:p>
+            <a:endParaRPr lang="en-IN"/>
+          </a:p>
+        </p:txBody>
       </p:sp>
       <p:sp>
         <p:nvSpPr>
@@ -11387,6 +11273,13 @@
             <a:tailEnd type="triangle"/>
           </a:ln>
         </p:spPr>
+        <p:txBody>
+          <a:bodyPr/>
+          <a:lstStyle/>
+          <a:p>
+            <a:endParaRPr lang="en-IN"/>
+          </a:p>
+        </p:txBody>
       </p:sp>
       <p:sp>
         <p:nvSpPr>
@@ -11411,6 +11304,13 @@
             <a:tailEnd type="triangle"/>
           </a:ln>
         </p:spPr>
+        <p:txBody>
+          <a:bodyPr/>
+          <a:lstStyle/>
+          <a:p>
+            <a:endParaRPr lang="en-IN"/>
+          </a:p>
+        </p:txBody>
       </p:sp>
       <p:sp>
         <p:nvSpPr>
@@ -11435,6 +11335,13 @@
             <a:tailEnd type="triangle"/>
           </a:ln>
         </p:spPr>
+        <p:txBody>
+          <a:bodyPr/>
+          <a:lstStyle/>
+          <a:p>
+            <a:endParaRPr lang="en-IN"/>
+          </a:p>
+        </p:txBody>
       </p:sp>
       <p:sp>
         <p:nvSpPr>
@@ -11459,6 +11366,13 @@
             <a:tailEnd type="triangle"/>
           </a:ln>
         </p:spPr>
+        <p:txBody>
+          <a:bodyPr/>
+          <a:lstStyle/>
+          <a:p>
+            <a:endParaRPr lang="en-IN"/>
+          </a:p>
+        </p:txBody>
       </p:sp>
       <p:sp>
         <p:nvSpPr>
@@ -11483,7 +11397,7 @@
           <a:bodyPr wrap="square" lIns="0" tIns="0" rIns="0" bIns="0" rtlCol="0" anchor="ctr"/>
           <a:lstStyle/>
           <a:p>
-            <a:pPr algn="ctr" indent="0" marL="0">
+            <a:pPr marL="0" indent="0" algn="ctr">
               <a:buNone/>
             </a:pPr>
             <a:r>
@@ -11524,6 +11438,13 @@
             <a:tailEnd type="triangle"/>
           </a:ln>
         </p:spPr>
+        <p:txBody>
+          <a:bodyPr/>
+          <a:lstStyle/>
+          <a:p>
+            <a:endParaRPr lang="en-IN"/>
+          </a:p>
+        </p:txBody>
       </p:sp>
       <p:sp>
         <p:nvSpPr>
@@ -11548,7 +11469,7 @@
           <a:bodyPr wrap="square" lIns="0" tIns="0" rIns="0" bIns="0" rtlCol="0" anchor="ctr"/>
           <a:lstStyle/>
           <a:p>
-            <a:pPr algn="ctr" indent="0" marL="0">
+            <a:pPr marL="0" indent="0" algn="ctr">
               <a:buNone/>
             </a:pPr>
             <a:r>
@@ -11589,6 +11510,13 @@
             <a:tailEnd type="triangle"/>
           </a:ln>
         </p:spPr>
+        <p:txBody>
+          <a:bodyPr/>
+          <a:lstStyle/>
+          <a:p>
+            <a:endParaRPr lang="en-IN"/>
+          </a:p>
+        </p:txBody>
       </p:sp>
       <p:sp>
         <p:nvSpPr>
@@ -11613,7 +11541,7 @@
           <a:bodyPr wrap="square" lIns="0" tIns="0" rIns="0" bIns="0" rtlCol="0" anchor="ctr"/>
           <a:lstStyle/>
           <a:p>
-            <a:pPr algn="ctr" indent="0" marL="0">
+            <a:pPr marL="0" indent="0" algn="ctr">
               <a:buNone/>
             </a:pPr>
             <a:r>
@@ -11654,6 +11582,13 @@
             <a:tailEnd type="none"/>
           </a:ln>
         </p:spPr>
+        <p:txBody>
+          <a:bodyPr/>
+          <a:lstStyle/>
+          <a:p>
+            <a:endParaRPr lang="en-IN"/>
+          </a:p>
+        </p:txBody>
       </p:sp>
       <p:sp>
         <p:nvSpPr>
@@ -11678,6 +11613,13 @@
             <a:tailEnd type="none"/>
           </a:ln>
         </p:spPr>
+        <p:txBody>
+          <a:bodyPr/>
+          <a:lstStyle/>
+          <a:p>
+            <a:endParaRPr lang="en-IN"/>
+          </a:p>
+        </p:txBody>
       </p:sp>
       <p:sp>
         <p:nvSpPr>
@@ -11702,6 +11644,13 @@
             <a:tailEnd type="triangle"/>
           </a:ln>
         </p:spPr>
+        <p:txBody>
+          <a:bodyPr/>
+          <a:lstStyle/>
+          <a:p>
+            <a:endParaRPr lang="en-IN"/>
+          </a:p>
+        </p:txBody>
       </p:sp>
       <p:sp>
         <p:nvSpPr>
@@ -11726,7 +11675,7 @@
           <a:bodyPr wrap="square" lIns="0" tIns="0" rIns="0" bIns="0" rtlCol="0" anchor="ctr"/>
           <a:lstStyle/>
           <a:p>
-            <a:pPr algn="ctr" indent="0" marL="0">
+            <a:pPr marL="0" indent="0" algn="ctr">
               <a:buNone/>
             </a:pPr>
             <a:r>
@@ -11767,6 +11716,13 @@
             <a:tailEnd type="none"/>
           </a:ln>
         </p:spPr>
+        <p:txBody>
+          <a:bodyPr/>
+          <a:lstStyle/>
+          <a:p>
+            <a:endParaRPr lang="en-IN"/>
+          </a:p>
+        </p:txBody>
       </p:sp>
       <p:sp>
         <p:nvSpPr>
@@ -11791,6 +11747,13 @@
             <a:tailEnd type="none"/>
           </a:ln>
         </p:spPr>
+        <p:txBody>
+          <a:bodyPr/>
+          <a:lstStyle/>
+          <a:p>
+            <a:endParaRPr lang="en-IN"/>
+          </a:p>
+        </p:txBody>
       </p:sp>
       <p:sp>
         <p:nvSpPr>
@@ -11815,6 +11778,13 @@
             <a:tailEnd type="triangle"/>
           </a:ln>
         </p:spPr>
+        <p:txBody>
+          <a:bodyPr/>
+          <a:lstStyle/>
+          <a:p>
+            <a:endParaRPr lang="en-IN"/>
+          </a:p>
+        </p:txBody>
       </p:sp>
       <p:sp>
         <p:nvSpPr>
@@ -11839,6 +11809,13 @@
             <a:tailEnd type="none"/>
           </a:ln>
         </p:spPr>
+        <p:txBody>
+          <a:bodyPr/>
+          <a:lstStyle/>
+          <a:p>
+            <a:endParaRPr lang="en-IN"/>
+          </a:p>
+        </p:txBody>
       </p:sp>
       <p:sp>
         <p:nvSpPr>
@@ -11863,6 +11840,13 @@
             <a:tailEnd type="none"/>
           </a:ln>
         </p:spPr>
+        <p:txBody>
+          <a:bodyPr/>
+          <a:lstStyle/>
+          <a:p>
+            <a:endParaRPr lang="en-IN"/>
+          </a:p>
+        </p:txBody>
       </p:sp>
       <p:sp>
         <p:nvSpPr>
@@ -11887,6 +11871,13 @@
             <a:tailEnd type="triangle"/>
           </a:ln>
         </p:spPr>
+        <p:txBody>
+          <a:bodyPr/>
+          <a:lstStyle/>
+          <a:p>
+            <a:endParaRPr lang="en-IN"/>
+          </a:p>
+        </p:txBody>
       </p:sp>
       <p:sp>
         <p:nvSpPr>
@@ -11911,7 +11902,7 @@
           <a:bodyPr wrap="square" lIns="0" tIns="0" rIns="0" bIns="0" rtlCol="0" anchor="ctr"/>
           <a:lstStyle/>
           <a:p>
-            <a:pPr algn="ctr" indent="0" marL="0">
+            <a:pPr marL="0" indent="0" algn="ctr">
               <a:buNone/>
             </a:pPr>
             <a:r>
@@ -11950,6 +11941,13 @@
           </a:solidFill>
           <a:ln/>
         </p:spPr>
+        <p:txBody>
+          <a:bodyPr/>
+          <a:lstStyle/>
+          <a:p>
+            <a:endParaRPr lang="en-IN"/>
+          </a:p>
+        </p:txBody>
       </p:sp>
       <p:sp>
         <p:nvSpPr>
@@ -11972,7 +11970,7 @@
           <a:bodyPr wrap="square" lIns="0" tIns="0" rIns="0" bIns="0" rtlCol="0" anchor="ctr"/>
           <a:lstStyle/>
           <a:p>
-            <a:pPr algn="ctr" indent="0" marL="0">
+            <a:pPr marL="0" indent="0" algn="ctr">
               <a:lnSpc>
                 <a:spcPct val="115000"/>
               </a:lnSpc>
@@ -11992,7 +11990,7 @@
             <a:endParaRPr lang="en-US" sz="1300" dirty="0"/>
           </a:p>
           <a:p>
-            <a:pPr algn="ctr" indent="0" marL="0">
+            <a:pPr marL="0" indent="0" algn="ctr">
               <a:lnSpc>
                 <a:spcPct val="115000"/>
               </a:lnSpc>
@@ -12039,6 +12037,13 @@
             <a:prstDash val="solid"/>
           </a:ln>
         </p:spPr>
+        <p:txBody>
+          <a:bodyPr/>
+          <a:lstStyle/>
+          <a:p>
+            <a:endParaRPr lang="en-IN"/>
+          </a:p>
+        </p:txBody>
       </p:sp>
       <p:sp>
         <p:nvSpPr>
@@ -12061,7 +12066,7 @@
           <a:bodyPr wrap="square" lIns="0" tIns="0" rIns="0" bIns="0" rtlCol="0" anchor="ctr"/>
           <a:lstStyle/>
           <a:p>
-            <a:pPr algn="ctr" indent="0" marL="0">
+            <a:pPr marL="0" indent="0" algn="ctr">
               <a:lnSpc>
                 <a:spcPct val="115000"/>
               </a:lnSpc>
@@ -12081,7 +12086,7 @@
             <a:endParaRPr lang="en-US" sz="1300" dirty="0"/>
           </a:p>
           <a:p>
-            <a:pPr algn="ctr" indent="0" marL="0">
+            <a:pPr marL="0" indent="0" algn="ctr">
               <a:lnSpc>
                 <a:spcPct val="115000"/>
               </a:lnSpc>
@@ -12128,6 +12133,13 @@
             <a:prstDash val="solid"/>
           </a:ln>
         </p:spPr>
+        <p:txBody>
+          <a:bodyPr/>
+          <a:lstStyle/>
+          <a:p>
+            <a:endParaRPr lang="en-IN"/>
+          </a:p>
+        </p:txBody>
       </p:sp>
       <p:sp>
         <p:nvSpPr>
@@ -12150,7 +12162,7 @@
           <a:bodyPr wrap="square" lIns="0" tIns="0" rIns="0" bIns="0" rtlCol="0" anchor="ctr"/>
           <a:lstStyle/>
           <a:p>
-            <a:pPr algn="ctr" indent="0" marL="0">
+            <a:pPr marL="0" indent="0" algn="ctr">
               <a:lnSpc>
                 <a:spcPct val="115000"/>
               </a:lnSpc>
@@ -12170,7 +12182,7 @@
             <a:endParaRPr lang="en-US" sz="1300" dirty="0"/>
           </a:p>
           <a:p>
-            <a:pPr algn="ctr" indent="0" marL="0">
+            <a:pPr marL="0" indent="0" algn="ctr">
               <a:lnSpc>
                 <a:spcPct val="115000"/>
               </a:lnSpc>
@@ -12217,6 +12229,13 @@
             <a:prstDash val="solid"/>
           </a:ln>
         </p:spPr>
+        <p:txBody>
+          <a:bodyPr/>
+          <a:lstStyle/>
+          <a:p>
+            <a:endParaRPr lang="en-IN"/>
+          </a:p>
+        </p:txBody>
       </p:sp>
       <p:sp>
         <p:nvSpPr>
@@ -12239,7 +12258,7 @@
           <a:bodyPr wrap="square" lIns="0" tIns="0" rIns="0" bIns="0" rtlCol="0" anchor="ctr"/>
           <a:lstStyle/>
           <a:p>
-            <a:pPr algn="ctr" indent="0" marL="0">
+            <a:pPr marL="0" indent="0" algn="ctr">
               <a:lnSpc>
                 <a:spcPct val="115000"/>
               </a:lnSpc>
@@ -12259,7 +12278,7 @@
             <a:endParaRPr lang="en-US" sz="1300" dirty="0"/>
           </a:p>
           <a:p>
-            <a:pPr algn="ctr" indent="0" marL="0">
+            <a:pPr marL="0" indent="0" algn="ctr">
               <a:lnSpc>
                 <a:spcPct val="115000"/>
               </a:lnSpc>
@@ -12299,6 +12318,13 @@
           </a:solidFill>
           <a:ln/>
         </p:spPr>
+        <p:txBody>
+          <a:bodyPr/>
+          <a:lstStyle/>
+          <a:p>
+            <a:endParaRPr lang="en-IN"/>
+          </a:p>
+        </p:txBody>
       </p:sp>
       <p:sp>
         <p:nvSpPr>
@@ -12321,7 +12347,7 @@
           <a:bodyPr wrap="square" lIns="0" tIns="0" rIns="0" bIns="0" rtlCol="0" anchor="ctr"/>
           <a:lstStyle/>
           <a:p>
-            <a:pPr algn="ctr" indent="0" marL="0">
+            <a:pPr marL="0" indent="0" algn="ctr">
               <a:lnSpc>
                 <a:spcPct val="110000"/>
               </a:lnSpc>
@@ -12341,7 +12367,7 @@
             <a:endParaRPr lang="en-US" sz="1300" dirty="0"/>
           </a:p>
           <a:p>
-            <a:pPr algn="ctr" indent="0" marL="0">
+            <a:pPr marL="0" indent="0" algn="ctr">
               <a:lnSpc>
                 <a:spcPct val="110000"/>
               </a:lnSpc>
@@ -12381,6 +12407,13 @@
           </a:solidFill>
           <a:ln/>
         </p:spPr>
+        <p:txBody>
+          <a:bodyPr/>
+          <a:lstStyle/>
+          <a:p>
+            <a:endParaRPr lang="en-IN"/>
+          </a:p>
+        </p:txBody>
       </p:sp>
       <p:sp>
         <p:nvSpPr>
@@ -12403,7 +12436,7 @@
           <a:bodyPr wrap="square" lIns="0" tIns="0" rIns="0" bIns="0" rtlCol="0" anchor="ctr"/>
           <a:lstStyle/>
           <a:p>
-            <a:pPr algn="ctr" indent="0" marL="0">
+            <a:pPr marL="0" indent="0" algn="ctr">
               <a:lnSpc>
                 <a:spcPct val="110000"/>
               </a:lnSpc>
@@ -12423,7 +12456,7 @@
             <a:endParaRPr lang="en-US" sz="1300" dirty="0"/>
           </a:p>
           <a:p>
-            <a:pPr algn="ctr" indent="0" marL="0">
+            <a:pPr marL="0" indent="0" algn="ctr">
               <a:lnSpc>
                 <a:spcPct val="110000"/>
               </a:lnSpc>
@@ -12470,6 +12503,13 @@
             <a:prstDash val="solid"/>
           </a:ln>
         </p:spPr>
+        <p:txBody>
+          <a:bodyPr/>
+          <a:lstStyle/>
+          <a:p>
+            <a:endParaRPr lang="en-IN"/>
+          </a:p>
+        </p:txBody>
       </p:sp>
       <p:sp>
         <p:nvSpPr>
@@ -12492,7 +12532,7 @@
           <a:bodyPr wrap="square" lIns="0" tIns="0" rIns="0" bIns="0" rtlCol="0" anchor="ctr"/>
           <a:lstStyle/>
           <a:p>
-            <a:pPr algn="ctr" indent="0" marL="0">
+            <a:pPr marL="0" indent="0" algn="ctr">
               <a:lnSpc>
                 <a:spcPct val="115000"/>
               </a:lnSpc>
@@ -12539,6 +12579,13 @@
             <a:prstDash val="solid"/>
           </a:ln>
         </p:spPr>
+        <p:txBody>
+          <a:bodyPr/>
+          <a:lstStyle/>
+          <a:p>
+            <a:endParaRPr lang="en-IN"/>
+          </a:p>
+        </p:txBody>
       </p:sp>
       <p:sp>
         <p:nvSpPr>
@@ -12561,7 +12608,7 @@
           <a:bodyPr wrap="square" lIns="0" tIns="0" rIns="0" bIns="0" rtlCol="0" anchor="ctr"/>
           <a:lstStyle/>
           <a:p>
-            <a:pPr algn="ctr" indent="0" marL="0">
+            <a:pPr marL="0" indent="0" algn="ctr">
               <a:lnSpc>
                 <a:spcPct val="115000"/>
               </a:lnSpc>
@@ -12581,7 +12628,7 @@
             <a:endParaRPr lang="en-US" sz="1300" dirty="0"/>
           </a:p>
           <a:p>
-            <a:pPr algn="ctr" indent="0" marL="0">
+            <a:pPr marL="0" indent="0" algn="ctr">
               <a:lnSpc>
                 <a:spcPct val="115000"/>
               </a:lnSpc>
@@ -12623,6 +12670,13 @@
           </a:solidFill>
           <a:ln/>
         </p:spPr>
+        <p:txBody>
+          <a:bodyPr/>
+          <a:lstStyle/>
+          <a:p>
+            <a:endParaRPr lang="en-IN"/>
+          </a:p>
+        </p:txBody>
       </p:sp>
       <p:sp>
         <p:nvSpPr>
@@ -12645,7 +12699,7 @@
           <a:bodyPr wrap="square" lIns="0" tIns="0" rIns="0" bIns="0" rtlCol="0" anchor="ctr"/>
           <a:lstStyle/>
           <a:p>
-            <a:pPr algn="ctr" indent="0" marL="0">
+            <a:pPr marL="0" indent="0" algn="ctr">
               <a:lnSpc>
                 <a:spcPct val="115000"/>
               </a:lnSpc>
@@ -12665,7 +12719,7 @@
             <a:endParaRPr lang="en-US" sz="1300" dirty="0"/>
           </a:p>
           <a:p>
-            <a:pPr algn="ctr" indent="0" marL="0">
+            <a:pPr marL="0" indent="0" algn="ctr">
               <a:lnSpc>
                 <a:spcPct val="115000"/>
               </a:lnSpc>
@@ -12707,7 +12761,7 @@
           <a:bodyPr wrap="square" lIns="0" tIns="0" rIns="0" bIns="0" rtlCol="0" anchor="ctr"/>
           <a:lstStyle/>
           <a:p>
-            <a:pPr algn="l" indent="0" marL="0">
+            <a:pPr marL="0" indent="0" algn="l">
               <a:buNone/>
             </a:pPr>
             <a:r>
@@ -12727,7 +12781,7 @@
       </p:sp>
       <p:sp>
         <p:nvSpPr>
-          <p:cNvPr id="25" name="Slide Number Placeholder 0"/>
+          <p:cNvPr id="48" name="Slide Number Placeholder 0"/>
           <p:cNvSpPr>
             <a:spLocks noGrp="1"/>
           </p:cNvSpPr>
@@ -12745,7 +12799,7 @@
           </a:prstGeom>
           <a:extLst>
             <a:ext uri="{C572A759-6A51-4108-AA02-DFA0A04FC94B}">
-              <ma14:wrappingTextBoxFlag xmlns:ma14="http://schemas.microsoft.com/office/mac/drawingml/2011/main" val="0"/>
+              <ma14:wrappingTextBoxFlag xmlns:ma14="http://schemas.microsoft.com/office/mac/drawingml/2011/main" xmlns="" val="0"/>
             </a:ext>
           </a:extLst>
         </p:spPr>
@@ -12766,7 +12820,7 @@
           <a:p>
             <a:pPr algn="l"/>
             <a:fld id="{F7021451-1387-4CA6-816F-3879F97B5CBC}" type="slidenum">
-              <a:rPr b="0" lang="en-US"/>
+              <a:rPr lang="en-US" b="0"/>
               <a:t>4</a:t>
             </a:fld>
             <a:endParaRPr lang="en-US"/>
@@ -12801,9 +12855,11 @@
       <p:sp>
         <p:nvSpPr>
           <p:cNvPr id="2" name="Text 0"/>
-          <p:cNvSpPr/>
+          <p:cNvSpPr>
+            <a:spLocks noGrp="1"/>
+          </p:cNvSpPr>
           <p:nvPr>
-            <p:ph idx="100" type="body" hasCustomPrompt="1"/>
+            <p:ph type="body" idx="100" hasCustomPrompt="1"/>
           </p:nvPr>
         </p:nvSpPr>
         <p:spPr>
@@ -12821,11 +12877,11 @@
           <a:bodyPr wrap="square" rtlCol="0"/>
           <a:lstStyle/>
           <a:p>
-            <a:pPr algn="l" indent="0" marL="0">
-              <a:buNone/>
-            </a:pPr>
-            <a:r>
-              <a:rPr lang="en-US" sz="1300" b="1" spc="200" kern="0" dirty="0">
+            <a:pPr marL="0" indent="0" algn="l">
+              <a:buNone/>
+            </a:pPr>
+            <a:r>
+              <a:rPr lang="en-US" sz="1300" b="1" kern="0" spc="200" dirty="0">
                 <a:solidFill>
                   <a:schemeClr val="accent2"/>
                 </a:solidFill>
@@ -12842,9 +12898,11 @@
       <p:sp>
         <p:nvSpPr>
           <p:cNvPr id="3" name="Text 0"/>
-          <p:cNvSpPr/>
+          <p:cNvSpPr>
+            <a:spLocks noGrp="1"/>
+          </p:cNvSpPr>
           <p:nvPr>
-            <p:ph idx="101" type="title" hasCustomPrompt="1"/>
+            <p:ph type="title" idx="101" hasCustomPrompt="1"/>
           </p:nvPr>
         </p:nvSpPr>
         <p:spPr>
@@ -12862,7 +12920,7 @@
           <a:bodyPr wrap="square" rtlCol="0"/>
           <a:lstStyle/>
           <a:p>
-            <a:pPr algn="l" indent="0" marL="0">
+            <a:pPr marL="0" indent="0" algn="l">
               <a:buNone/>
             </a:pPr>
             <a:r>
@@ -12906,13 +12964,20 @@
             <a:prstDash val="solid"/>
           </a:ln>
           <a:effectLst>
-            <a:outerShdw sx="100000" sy="100000" kx="0" ky="0" algn="bl" rotWithShape="0" blurRad="127000" dist="38100" dir="5400000">
+            <a:outerShdw blurRad="127000" dist="38100" dir="5400000" algn="bl" rotWithShape="0">
               <a:srgbClr val="1A1F2B">
                 <a:alpha val="18000"/>
               </a:srgbClr>
             </a:outerShdw>
           </a:effectLst>
         </p:spPr>
+        <p:txBody>
+          <a:bodyPr/>
+          <a:lstStyle/>
+          <a:p>
+            <a:endParaRPr lang="en-IN"/>
+          </a:p>
+        </p:txBody>
       </p:sp>
       <p:sp>
         <p:nvSpPr>
@@ -12935,6 +13000,13 @@
           </a:solidFill>
           <a:ln/>
         </p:spPr>
+        <p:txBody>
+          <a:bodyPr/>
+          <a:lstStyle/>
+          <a:p>
+            <a:endParaRPr lang="en-IN"/>
+          </a:p>
+        </p:txBody>
       </p:sp>
       <p:sp>
         <p:nvSpPr>
@@ -12957,7 +13029,7 @@
           <a:bodyPr wrap="square" lIns="0" tIns="0" rIns="0" bIns="0" rtlCol="0" anchor="ctr"/>
           <a:lstStyle/>
           <a:p>
-            <a:pPr algn="l" indent="0" marL="0">
+            <a:pPr marL="0" indent="0" algn="l">
               <a:buNone/>
             </a:pPr>
             <a:r>
@@ -12996,7 +13068,7 @@
           <a:bodyPr wrap="square" lIns="0" tIns="0" rIns="0" bIns="0" rtlCol="0" anchor="ctr"/>
           <a:lstStyle/>
           <a:p>
-            <a:pPr algn="l" indent="0" marL="0">
+            <a:pPr marL="0" indent="0" algn="l">
               <a:lnSpc>
                 <a:spcPct val="125000"/>
               </a:lnSpc>
@@ -13043,13 +13115,20 @@
             <a:prstDash val="solid"/>
           </a:ln>
           <a:effectLst>
-            <a:outerShdw sx="100000" sy="100000" kx="0" ky="0" algn="bl" rotWithShape="0" blurRad="127000" dist="38100" dir="5400000">
+            <a:outerShdw blurRad="127000" dist="38100" dir="5400000" algn="bl" rotWithShape="0">
               <a:srgbClr val="1A1F2B">
                 <a:alpha val="18000"/>
               </a:srgbClr>
             </a:outerShdw>
           </a:effectLst>
         </p:spPr>
+        <p:txBody>
+          <a:bodyPr/>
+          <a:lstStyle/>
+          <a:p>
+            <a:endParaRPr lang="en-IN"/>
+          </a:p>
+        </p:txBody>
       </p:sp>
       <p:sp>
         <p:nvSpPr>
@@ -13072,6 +13151,13 @@
           </a:solidFill>
           <a:ln/>
         </p:spPr>
+        <p:txBody>
+          <a:bodyPr/>
+          <a:lstStyle/>
+          <a:p>
+            <a:endParaRPr lang="en-IN"/>
+          </a:p>
+        </p:txBody>
       </p:sp>
       <p:sp>
         <p:nvSpPr>
@@ -13094,7 +13180,7 @@
           <a:bodyPr wrap="square" lIns="0" tIns="0" rIns="0" bIns="0" rtlCol="0" anchor="ctr"/>
           <a:lstStyle/>
           <a:p>
-            <a:pPr algn="l" indent="0" marL="0">
+            <a:pPr marL="0" indent="0" algn="l">
               <a:buNone/>
             </a:pPr>
             <a:r>
@@ -13133,7 +13219,7 @@
           <a:bodyPr wrap="square" lIns="0" tIns="0" rIns="0" bIns="0" rtlCol="0" anchor="ctr"/>
           <a:lstStyle/>
           <a:p>
-            <a:pPr algn="l" indent="0" marL="0">
+            <a:pPr marL="0" indent="0" algn="l">
               <a:lnSpc>
                 <a:spcPct val="125000"/>
               </a:lnSpc>
@@ -13180,13 +13266,20 @@
             <a:prstDash val="solid"/>
           </a:ln>
           <a:effectLst>
-            <a:outerShdw sx="100000" sy="100000" kx="0" ky="0" algn="bl" rotWithShape="0" blurRad="127000" dist="38100" dir="5400000">
+            <a:outerShdw blurRad="127000" dist="38100" dir="5400000" algn="bl" rotWithShape="0">
               <a:srgbClr val="1A1F2B">
                 <a:alpha val="18000"/>
               </a:srgbClr>
             </a:outerShdw>
           </a:effectLst>
         </p:spPr>
+        <p:txBody>
+          <a:bodyPr/>
+          <a:lstStyle/>
+          <a:p>
+            <a:endParaRPr lang="en-IN"/>
+          </a:p>
+        </p:txBody>
       </p:sp>
       <p:sp>
         <p:nvSpPr>
@@ -13209,6 +13302,13 @@
           </a:solidFill>
           <a:ln/>
         </p:spPr>
+        <p:txBody>
+          <a:bodyPr/>
+          <a:lstStyle/>
+          <a:p>
+            <a:endParaRPr lang="en-IN"/>
+          </a:p>
+        </p:txBody>
       </p:sp>
       <p:sp>
         <p:nvSpPr>
@@ -13231,7 +13331,7 @@
           <a:bodyPr wrap="square" lIns="0" tIns="0" rIns="0" bIns="0" rtlCol="0" anchor="ctr"/>
           <a:lstStyle/>
           <a:p>
-            <a:pPr algn="l" indent="0" marL="0">
+            <a:pPr marL="0" indent="0" algn="l">
               <a:buNone/>
             </a:pPr>
             <a:r>
@@ -13270,7 +13370,7 @@
           <a:bodyPr wrap="square" lIns="0" tIns="0" rIns="0" bIns="0" rtlCol="0" anchor="ctr"/>
           <a:lstStyle/>
           <a:p>
-            <a:pPr algn="l" indent="0" marL="0">
+            <a:pPr marL="0" indent="0" algn="l">
               <a:lnSpc>
                 <a:spcPct val="125000"/>
               </a:lnSpc>
@@ -13317,13 +13417,20 @@
             <a:prstDash val="solid"/>
           </a:ln>
           <a:effectLst>
-            <a:outerShdw sx="100000" sy="100000" kx="0" ky="0" algn="bl" rotWithShape="0" blurRad="127000" dist="38100" dir="5400000">
+            <a:outerShdw blurRad="127000" dist="38100" dir="5400000" algn="bl" rotWithShape="0">
               <a:srgbClr val="1A1F2B">
                 <a:alpha val="18000"/>
               </a:srgbClr>
             </a:outerShdw>
           </a:effectLst>
         </p:spPr>
+        <p:txBody>
+          <a:bodyPr/>
+          <a:lstStyle/>
+          <a:p>
+            <a:endParaRPr lang="en-IN"/>
+          </a:p>
+        </p:txBody>
       </p:sp>
       <p:sp>
         <p:nvSpPr>
@@ -13346,6 +13453,13 @@
           </a:solidFill>
           <a:ln/>
         </p:spPr>
+        <p:txBody>
+          <a:bodyPr/>
+          <a:lstStyle/>
+          <a:p>
+            <a:endParaRPr lang="en-IN"/>
+          </a:p>
+        </p:txBody>
       </p:sp>
       <p:sp>
         <p:nvSpPr>
@@ -13368,7 +13482,7 @@
           <a:bodyPr wrap="square" lIns="0" tIns="0" rIns="0" bIns="0" rtlCol="0" anchor="ctr"/>
           <a:lstStyle/>
           <a:p>
-            <a:pPr algn="l" indent="0" marL="0">
+            <a:pPr marL="0" indent="0" algn="l">
               <a:buNone/>
             </a:pPr>
             <a:r>
@@ -13407,7 +13521,7 @@
           <a:bodyPr wrap="square" lIns="0" tIns="0" rIns="0" bIns="0" rtlCol="0" anchor="ctr"/>
           <a:lstStyle/>
           <a:p>
-            <a:pPr algn="l" indent="0" marL="0">
+            <a:pPr marL="0" indent="0" algn="l">
               <a:lnSpc>
                 <a:spcPct val="125000"/>
               </a:lnSpc>
@@ -13454,13 +13568,20 @@
             <a:prstDash val="solid"/>
           </a:ln>
           <a:effectLst>
-            <a:outerShdw sx="100000" sy="100000" kx="0" ky="0" algn="bl" rotWithShape="0" blurRad="127000" dist="38100" dir="5400000">
+            <a:outerShdw blurRad="127000" dist="38100" dir="5400000" algn="bl" rotWithShape="0">
               <a:srgbClr val="1A1F2B">
                 <a:alpha val="18000"/>
               </a:srgbClr>
             </a:outerShdw>
           </a:effectLst>
         </p:spPr>
+        <p:txBody>
+          <a:bodyPr/>
+          <a:lstStyle/>
+          <a:p>
+            <a:endParaRPr lang="en-IN"/>
+          </a:p>
+        </p:txBody>
       </p:sp>
       <p:sp>
         <p:nvSpPr>
@@ -13483,6 +13604,13 @@
           </a:solidFill>
           <a:ln/>
         </p:spPr>
+        <p:txBody>
+          <a:bodyPr/>
+          <a:lstStyle/>
+          <a:p>
+            <a:endParaRPr lang="en-IN"/>
+          </a:p>
+        </p:txBody>
       </p:sp>
       <p:sp>
         <p:nvSpPr>
@@ -13505,7 +13633,7 @@
           <a:bodyPr wrap="square" lIns="0" tIns="0" rIns="0" bIns="0" rtlCol="0" anchor="ctr"/>
           <a:lstStyle/>
           <a:p>
-            <a:pPr algn="l" indent="0" marL="0">
+            <a:pPr marL="0" indent="0" algn="l">
               <a:buNone/>
             </a:pPr>
             <a:r>
@@ -13544,7 +13672,7 @@
           <a:bodyPr wrap="square" lIns="0" tIns="0" rIns="0" bIns="0" rtlCol="0" anchor="ctr"/>
           <a:lstStyle/>
           <a:p>
-            <a:pPr algn="l" indent="0" marL="0">
+            <a:pPr marL="0" indent="0" algn="l">
               <a:lnSpc>
                 <a:spcPct val="125000"/>
               </a:lnSpc>
@@ -13591,13 +13719,20 @@
             <a:prstDash val="solid"/>
           </a:ln>
           <a:effectLst>
-            <a:outerShdw sx="100000" sy="100000" kx="0" ky="0" algn="bl" rotWithShape="0" blurRad="127000" dist="38100" dir="5400000">
+            <a:outerShdw blurRad="127000" dist="38100" dir="5400000" algn="bl" rotWithShape="0">
               <a:srgbClr val="1A1F2B">
                 <a:alpha val="18000"/>
               </a:srgbClr>
             </a:outerShdw>
           </a:effectLst>
         </p:spPr>
+        <p:txBody>
+          <a:bodyPr/>
+          <a:lstStyle/>
+          <a:p>
+            <a:endParaRPr lang="en-IN"/>
+          </a:p>
+        </p:txBody>
       </p:sp>
       <p:sp>
         <p:nvSpPr>
@@ -13620,6 +13755,13 @@
           </a:solidFill>
           <a:ln/>
         </p:spPr>
+        <p:txBody>
+          <a:bodyPr/>
+          <a:lstStyle/>
+          <a:p>
+            <a:endParaRPr lang="en-IN"/>
+          </a:p>
+        </p:txBody>
       </p:sp>
       <p:sp>
         <p:nvSpPr>
@@ -13642,7 +13784,7 @@
           <a:bodyPr wrap="square" lIns="0" tIns="0" rIns="0" bIns="0" rtlCol="0" anchor="ctr"/>
           <a:lstStyle/>
           <a:p>
-            <a:pPr algn="l" indent="0" marL="0">
+            <a:pPr marL="0" indent="0" algn="l">
               <a:buNone/>
             </a:pPr>
             <a:r>
@@ -13681,7 +13823,7 @@
           <a:bodyPr wrap="square" lIns="0" tIns="0" rIns="0" bIns="0" rtlCol="0" anchor="ctr"/>
           <a:lstStyle/>
           <a:p>
-            <a:pPr algn="l" indent="0" marL="0">
+            <a:pPr marL="0" indent="0" algn="l">
               <a:lnSpc>
                 <a:spcPct val="125000"/>
               </a:lnSpc>
@@ -13723,7 +13865,7 @@
           <a:bodyPr wrap="square" lIns="0" tIns="0" rIns="0" bIns="0" rtlCol="0" anchor="ctr"/>
           <a:lstStyle/>
           <a:p>
-            <a:pPr algn="l" indent="0" marL="0">
+            <a:pPr marL="0" indent="0" algn="l">
               <a:lnSpc>
                 <a:spcPct val="120000"/>
               </a:lnSpc>
@@ -13746,7 +13888,7 @@
       </p:sp>
       <p:sp>
         <p:nvSpPr>
-          <p:cNvPr id="25" name="Slide Number Placeholder 0"/>
+          <p:cNvPr id="29" name="Slide Number Placeholder 0"/>
           <p:cNvSpPr>
             <a:spLocks noGrp="1"/>
           </p:cNvSpPr>
@@ -13764,7 +13906,7 @@
           </a:prstGeom>
           <a:extLst>
             <a:ext uri="{C572A759-6A51-4108-AA02-DFA0A04FC94B}">
-              <ma14:wrappingTextBoxFlag xmlns:ma14="http://schemas.microsoft.com/office/mac/drawingml/2011/main" val="0"/>
+              <ma14:wrappingTextBoxFlag xmlns:ma14="http://schemas.microsoft.com/office/mac/drawingml/2011/main" xmlns="" val="0"/>
             </a:ext>
           </a:extLst>
         </p:spPr>
@@ -13785,7 +13927,7 @@
           <a:p>
             <a:pPr algn="l"/>
             <a:fld id="{F7021451-1387-4CA6-816F-3879F97B5CBC}" type="slidenum">
-              <a:rPr b="0" lang="en-US"/>
+              <a:rPr lang="en-US" b="0"/>
               <a:t>5</a:t>
             </a:fld>
             <a:endParaRPr lang="en-US"/>
@@ -13820,9 +13962,11 @@
       <p:sp>
         <p:nvSpPr>
           <p:cNvPr id="2" name="Text 0"/>
-          <p:cNvSpPr/>
+          <p:cNvSpPr>
+            <a:spLocks noGrp="1"/>
+          </p:cNvSpPr>
           <p:nvPr>
-            <p:ph idx="100" type="body" hasCustomPrompt="1"/>
+            <p:ph type="body" idx="100" hasCustomPrompt="1"/>
           </p:nvPr>
         </p:nvSpPr>
         <p:spPr>
@@ -13840,11 +13984,11 @@
           <a:bodyPr wrap="square" rtlCol="0"/>
           <a:lstStyle/>
           <a:p>
-            <a:pPr algn="l" indent="0" marL="0">
-              <a:buNone/>
-            </a:pPr>
-            <a:r>
-              <a:rPr lang="en-US" sz="1300" b="1" spc="200" kern="0" dirty="0">
+            <a:pPr marL="0" indent="0" algn="l">
+              <a:buNone/>
+            </a:pPr>
+            <a:r>
+              <a:rPr lang="en-US" sz="1300" b="1" kern="0" spc="200" dirty="0">
                 <a:solidFill>
                   <a:schemeClr val="accent2"/>
                 </a:solidFill>
@@ -13861,9 +14005,11 @@
       <p:sp>
         <p:nvSpPr>
           <p:cNvPr id="3" name="Text 0"/>
-          <p:cNvSpPr/>
+          <p:cNvSpPr>
+            <a:spLocks noGrp="1"/>
+          </p:cNvSpPr>
           <p:nvPr>
-            <p:ph idx="101" type="title" hasCustomPrompt="1"/>
+            <p:ph type="title" idx="101" hasCustomPrompt="1"/>
           </p:nvPr>
         </p:nvSpPr>
         <p:spPr>
@@ -13881,7 +14027,7 @@
           <a:bodyPr wrap="square" rtlCol="0"/>
           <a:lstStyle/>
           <a:p>
-            <a:pPr algn="l" indent="0" marL="0">
+            <a:pPr marL="0" indent="0" algn="l">
               <a:buNone/>
             </a:pPr>
             <a:r>
@@ -13915,17 +14061,41 @@
         </p:nvGraphicFramePr>
         <p:xfrm>
           <a:off x="548640" y="1828800"/>
-          <a:ext cx="11064240" cy="1920240"/>
+          <a:ext cx="11064240" cy="1901952"/>
         </p:xfrm>
         <a:graphic>
           <a:graphicData uri="http://schemas.openxmlformats.org/drawingml/2006/table">
             <a:tbl>
               <a:tblPr/>
               <a:tblGrid>
-                <a:gridCol w="2103120"/>
-                <a:gridCol w="3291840"/>
-                <a:gridCol w="2834640"/>
-                <a:gridCol w="2834640"/>
+                <a:gridCol w="2103120">
+                  <a:extLst>
+                    <a:ext uri="{9D8B030D-6E8A-4147-A177-3AD203B41FA5}">
+                      <a16:colId xmlns:a16="http://schemas.microsoft.com/office/drawing/2014/main" val="20000"/>
+                    </a:ext>
+                  </a:extLst>
+                </a:gridCol>
+                <a:gridCol w="3291840">
+                  <a:extLst>
+                    <a:ext uri="{9D8B030D-6E8A-4147-A177-3AD203B41FA5}">
+                      <a16:colId xmlns:a16="http://schemas.microsoft.com/office/drawing/2014/main" val="20001"/>
+                    </a:ext>
+                  </a:extLst>
+                </a:gridCol>
+                <a:gridCol w="2834640">
+                  <a:extLst>
+                    <a:ext uri="{9D8B030D-6E8A-4147-A177-3AD203B41FA5}">
+                      <a16:colId xmlns:a16="http://schemas.microsoft.com/office/drawing/2014/main" val="20002"/>
+                    </a:ext>
+                  </a:extLst>
+                </a:gridCol>
+                <a:gridCol w="2834640">
+                  <a:extLst>
+                    <a:ext uri="{9D8B030D-6E8A-4147-A177-3AD203B41FA5}">
+                      <a16:colId xmlns:a16="http://schemas.microsoft.com/office/drawing/2014/main" val="20003"/>
+                    </a:ext>
+                  </a:extLst>
+                </a:gridCol>
               </a:tblGrid>
               <a:tr h="475488">
                 <a:tc>
@@ -13933,7 +14103,7 @@
                     <a:bodyPr/>
                     <a:lstStyle/>
                     <a:p>
-                      <a:pPr indent="0" marL="0">
+                      <a:pPr marL="0" indent="0">
                         <a:buNone/>
                       </a:pPr>
                       <a:r>
@@ -13954,7 +14124,7 @@
                       </a:endParaRPr>
                     </a:p>
                   </a:txBody>
-                  <a:tcPr marL="91440" marR="91440" marT="45720" marB="45720" anchor="ctr">
+                  <a:tcPr anchor="ctr">
                     <a:lnL w="12700" cap="flat" cmpd="sng" algn="ctr">
                       <a:solidFill>
                         <a:schemeClr val="accent5"/>
@@ -14001,7 +14171,7 @@
                     <a:bodyPr/>
                     <a:lstStyle/>
                     <a:p>
-                      <a:pPr indent="0" marL="0">
+                      <a:pPr marL="0" indent="0">
                         <a:buNone/>
                       </a:pPr>
                       <a:r>
@@ -14022,7 +14192,7 @@
                       </a:endParaRPr>
                     </a:p>
                   </a:txBody>
-                  <a:tcPr marL="91440" marR="91440" marT="45720" marB="45720" anchor="ctr">
+                  <a:tcPr anchor="ctr">
                     <a:lnL w="12700" cap="flat" cmpd="sng" algn="ctr">
                       <a:solidFill>
                         <a:schemeClr val="accent5"/>
@@ -14069,7 +14239,7 @@
                     <a:bodyPr/>
                     <a:lstStyle/>
                     <a:p>
-                      <a:pPr indent="0" marL="0">
+                      <a:pPr marL="0" indent="0">
                         <a:buNone/>
                       </a:pPr>
                       <a:r>
@@ -14090,7 +14260,7 @@
                       </a:endParaRPr>
                     </a:p>
                   </a:txBody>
-                  <a:tcPr marL="91440" marR="91440" marT="45720" marB="45720" anchor="ctr">
+                  <a:tcPr anchor="ctr">
                     <a:lnL w="12700" cap="flat" cmpd="sng" algn="ctr">
                       <a:solidFill>
                         <a:schemeClr val="accent5"/>
@@ -14137,7 +14307,7 @@
                     <a:bodyPr/>
                     <a:lstStyle/>
                     <a:p>
-                      <a:pPr indent="0" marL="0">
+                      <a:pPr marL="0" indent="0">
                         <a:buNone/>
                       </a:pPr>
                       <a:r>
@@ -14158,7 +14328,7 @@
                       </a:endParaRPr>
                     </a:p>
                   </a:txBody>
-                  <a:tcPr marL="91440" marR="91440" marT="45720" marB="45720" anchor="ctr">
+                  <a:tcPr anchor="ctr">
                     <a:lnL w="12700" cap="flat" cmpd="sng" algn="ctr">
                       <a:solidFill>
                         <a:schemeClr val="accent5"/>
@@ -14200,6 +14370,11 @@
                     </a:solidFill>
                   </a:tcPr>
                 </a:tc>
+                <a:extLst>
+                  <a:ext uri="{0D108BD9-81ED-4DB2-BD59-A6C34878D82A}">
+                    <a16:rowId xmlns:a16="http://schemas.microsoft.com/office/drawing/2014/main" val="10000"/>
+                  </a:ext>
+                </a:extLst>
               </a:tr>
               <a:tr h="475488">
                 <a:tc>
@@ -14207,7 +14382,7 @@
                     <a:bodyPr/>
                     <a:lstStyle/>
                     <a:p>
-                      <a:pPr indent="0" marL="0">
+                      <a:pPr marL="0" indent="0">
                         <a:buNone/>
                       </a:pPr>
                       <a:r>
@@ -14228,7 +14403,7 @@
                       </a:endParaRPr>
                     </a:p>
                   </a:txBody>
-                  <a:tcPr marL="91440" marR="91440" marT="45720" marB="45720" anchor="ctr">
+                  <a:tcPr anchor="ctr">
                     <a:lnL w="12700" cap="flat" cmpd="sng" algn="ctr">
                       <a:solidFill>
                         <a:schemeClr val="accent5"/>
@@ -14272,7 +14447,7 @@
                     <a:bodyPr/>
                     <a:lstStyle/>
                     <a:p>
-                      <a:pPr indent="0" marL="0">
+                      <a:pPr marL="0" indent="0">
                         <a:buNone/>
                       </a:pPr>
                       <a:r>
@@ -14293,7 +14468,7 @@
                       </a:endParaRPr>
                     </a:p>
                   </a:txBody>
-                  <a:tcPr marL="91440" marR="91440" marT="45720" marB="45720" anchor="ctr">
+                  <a:tcPr anchor="ctr">
                     <a:lnL w="12700" cap="flat" cmpd="sng" algn="ctr">
                       <a:solidFill>
                         <a:schemeClr val="accent5"/>
@@ -14337,7 +14512,7 @@
                     <a:bodyPr/>
                     <a:lstStyle/>
                     <a:p>
-                      <a:pPr indent="0" marL="0">
+                      <a:pPr marL="0" indent="0">
                         <a:buNone/>
                       </a:pPr>
                       <a:r>
@@ -14358,7 +14533,7 @@
                       </a:endParaRPr>
                     </a:p>
                   </a:txBody>
-                  <a:tcPr marL="91440" marR="91440" marT="45720" marB="45720" anchor="ctr">
+                  <a:tcPr anchor="ctr">
                     <a:lnL w="12700" cap="flat" cmpd="sng" algn="ctr">
                       <a:solidFill>
                         <a:schemeClr val="accent5"/>
@@ -14402,7 +14577,7 @@
                     <a:bodyPr/>
                     <a:lstStyle/>
                     <a:p>
-                      <a:pPr indent="0" marL="0">
+                      <a:pPr marL="0" indent="0">
                         <a:buNone/>
                       </a:pPr>
                       <a:r>
@@ -14423,7 +14598,7 @@
                       </a:endParaRPr>
                     </a:p>
                   </a:txBody>
-                  <a:tcPr marL="91440" marR="91440" marT="45720" marB="45720" anchor="ctr">
+                  <a:tcPr anchor="ctr">
                     <a:lnL w="12700" cap="flat" cmpd="sng" algn="ctr">
                       <a:solidFill>
                         <a:schemeClr val="accent5"/>
@@ -14462,6 +14637,11 @@
                     </a:lnB>
                   </a:tcPr>
                 </a:tc>
+                <a:extLst>
+                  <a:ext uri="{0D108BD9-81ED-4DB2-BD59-A6C34878D82A}">
+                    <a16:rowId xmlns:a16="http://schemas.microsoft.com/office/drawing/2014/main" val="10001"/>
+                  </a:ext>
+                </a:extLst>
               </a:tr>
               <a:tr h="475488">
                 <a:tc>
@@ -14469,7 +14649,7 @@
                     <a:bodyPr/>
                     <a:lstStyle/>
                     <a:p>
-                      <a:pPr indent="0" marL="0">
+                      <a:pPr marL="0" indent="0">
                         <a:buNone/>
                       </a:pPr>
                       <a:r>
@@ -14490,7 +14670,7 @@
                       </a:endParaRPr>
                     </a:p>
                   </a:txBody>
-                  <a:tcPr marL="91440" marR="91440" marT="45720" marB="45720" anchor="ctr">
+                  <a:tcPr anchor="ctr">
                     <a:lnL w="12700" cap="flat" cmpd="sng" algn="ctr">
                       <a:solidFill>
                         <a:schemeClr val="accent5"/>
@@ -14534,7 +14714,7 @@
                     <a:bodyPr/>
                     <a:lstStyle/>
                     <a:p>
-                      <a:pPr indent="0" marL="0">
+                      <a:pPr marL="0" indent="0">
                         <a:buNone/>
                       </a:pPr>
                       <a:r>
@@ -14555,7 +14735,7 @@
                       </a:endParaRPr>
                     </a:p>
                   </a:txBody>
-                  <a:tcPr marL="91440" marR="91440" marT="45720" marB="45720" anchor="ctr">
+                  <a:tcPr anchor="ctr">
                     <a:lnL w="12700" cap="flat" cmpd="sng" algn="ctr">
                       <a:solidFill>
                         <a:schemeClr val="accent5"/>
@@ -14599,7 +14779,7 @@
                     <a:bodyPr/>
                     <a:lstStyle/>
                     <a:p>
-                      <a:pPr indent="0" marL="0">
+                      <a:pPr marL="0" indent="0">
                         <a:buNone/>
                       </a:pPr>
                       <a:r>
@@ -14620,7 +14800,7 @@
                       </a:endParaRPr>
                     </a:p>
                   </a:txBody>
-                  <a:tcPr marL="91440" marR="91440" marT="45720" marB="45720" anchor="ctr">
+                  <a:tcPr anchor="ctr">
                     <a:lnL w="12700" cap="flat" cmpd="sng" algn="ctr">
                       <a:solidFill>
                         <a:schemeClr val="accent5"/>
@@ -14664,7 +14844,7 @@
                     <a:bodyPr/>
                     <a:lstStyle/>
                     <a:p>
-                      <a:pPr indent="0" marL="0">
+                      <a:pPr marL="0" indent="0">
                         <a:buNone/>
                       </a:pPr>
                       <a:r>
@@ -14685,7 +14865,7 @@
                       </a:endParaRPr>
                     </a:p>
                   </a:txBody>
-                  <a:tcPr marL="91440" marR="91440" marT="45720" marB="45720" anchor="ctr">
+                  <a:tcPr anchor="ctr">
                     <a:lnL w="12700" cap="flat" cmpd="sng" algn="ctr">
                       <a:solidFill>
                         <a:schemeClr val="accent5"/>
@@ -14724,6 +14904,11 @@
                     </a:lnB>
                   </a:tcPr>
                 </a:tc>
+                <a:extLst>
+                  <a:ext uri="{0D108BD9-81ED-4DB2-BD59-A6C34878D82A}">
+                    <a16:rowId xmlns:a16="http://schemas.microsoft.com/office/drawing/2014/main" val="10002"/>
+                  </a:ext>
+                </a:extLst>
               </a:tr>
               <a:tr h="475488">
                 <a:tc>
@@ -14731,7 +14916,7 @@
                     <a:bodyPr/>
                     <a:lstStyle/>
                     <a:p>
-                      <a:pPr indent="0" marL="0">
+                      <a:pPr marL="0" indent="0">
                         <a:buNone/>
                       </a:pPr>
                       <a:r>
@@ -14752,7 +14937,7 @@
                       </a:endParaRPr>
                     </a:p>
                   </a:txBody>
-                  <a:tcPr marL="91440" marR="91440" marT="45720" marB="45720" anchor="ctr">
+                  <a:tcPr anchor="ctr">
                     <a:lnL w="12700" cap="flat" cmpd="sng" algn="ctr">
                       <a:solidFill>
                         <a:schemeClr val="accent5"/>
@@ -14796,7 +14981,7 @@
                     <a:bodyPr/>
                     <a:lstStyle/>
                     <a:p>
-                      <a:pPr indent="0" marL="0">
+                      <a:pPr marL="0" indent="0">
                         <a:buNone/>
                       </a:pPr>
                       <a:r>
@@ -14817,7 +15002,7 @@
                       </a:endParaRPr>
                     </a:p>
                   </a:txBody>
-                  <a:tcPr marL="91440" marR="91440" marT="45720" marB="45720" anchor="ctr">
+                  <a:tcPr anchor="ctr">
                     <a:lnL w="12700" cap="flat" cmpd="sng" algn="ctr">
                       <a:solidFill>
                         <a:schemeClr val="accent5"/>
@@ -14861,7 +15046,7 @@
                     <a:bodyPr/>
                     <a:lstStyle/>
                     <a:p>
-                      <a:pPr indent="0" marL="0">
+                      <a:pPr marL="0" indent="0">
                         <a:buNone/>
                       </a:pPr>
                       <a:r>
@@ -14882,7 +15067,7 @@
                       </a:endParaRPr>
                     </a:p>
                   </a:txBody>
-                  <a:tcPr marL="91440" marR="91440" marT="45720" marB="45720" anchor="ctr">
+                  <a:tcPr anchor="ctr">
                     <a:lnL w="12700" cap="flat" cmpd="sng" algn="ctr">
                       <a:solidFill>
                         <a:schemeClr val="accent5"/>
@@ -14926,7 +15111,7 @@
                     <a:bodyPr/>
                     <a:lstStyle/>
                     <a:p>
-                      <a:pPr indent="0" marL="0">
+                      <a:pPr marL="0" indent="0">
                         <a:buNone/>
                       </a:pPr>
                       <a:r>
@@ -14947,7 +15132,7 @@
                       </a:endParaRPr>
                     </a:p>
                   </a:txBody>
-                  <a:tcPr marL="91440" marR="91440" marT="45720" marB="45720" anchor="ctr">
+                  <a:tcPr anchor="ctr">
                     <a:lnL w="12700" cap="flat" cmpd="sng" algn="ctr">
                       <a:solidFill>
                         <a:schemeClr val="accent5"/>
@@ -14986,6 +15171,11 @@
                     </a:lnB>
                   </a:tcPr>
                 </a:tc>
+                <a:extLst>
+                  <a:ext uri="{0D108BD9-81ED-4DB2-BD59-A6C34878D82A}">
+                    <a16:rowId xmlns:a16="http://schemas.microsoft.com/office/drawing/2014/main" val="10003"/>
+                  </a:ext>
+                </a:extLst>
               </a:tr>
             </a:tbl>
           </a:graphicData>
@@ -15012,13 +15202,20 @@
           </a:solidFill>
           <a:ln/>
           <a:effectLst>
-            <a:outerShdw sx="100000" sy="100000" kx="0" ky="0" algn="bl" rotWithShape="0" blurRad="127000" dist="38100" dir="5400000">
+            <a:outerShdw blurRad="127000" dist="38100" dir="5400000" algn="bl" rotWithShape="0">
               <a:srgbClr val="1A1F2B">
                 <a:alpha val="18000"/>
               </a:srgbClr>
             </a:outerShdw>
           </a:effectLst>
         </p:spPr>
+        <p:txBody>
+          <a:bodyPr/>
+          <a:lstStyle/>
+          <a:p>
+            <a:endParaRPr lang="en-IN"/>
+          </a:p>
+        </p:txBody>
       </p:sp>
       <p:sp>
         <p:nvSpPr>
@@ -15041,7 +15238,7 @@
           <a:bodyPr wrap="square" lIns="0" tIns="0" rIns="0" bIns="0" rtlCol="0" anchor="ctr"/>
           <a:lstStyle/>
           <a:p>
-            <a:pPr algn="l" indent="0" marL="0">
+            <a:pPr marL="0" indent="0" algn="l">
               <a:buNone/>
             </a:pPr>
             <a:r>
@@ -15061,7 +15258,7 @@
       </p:sp>
       <p:sp>
         <p:nvSpPr>
-          <p:cNvPr id="7" name="Text 4"/>
+          <p:cNvPr id="4" name="Text 4"/>
           <p:cNvSpPr txBox="1"/>
           <p:nvPr/>
         </p:nvSpPr>
@@ -15080,7 +15277,7 @@
           <a:bodyPr wrap="square" lIns="0" tIns="0" rIns="0" bIns="0" rtlCol="0" anchor="ctr"/>
           <a:lstStyle/>
           <a:p>
-            <a:pPr algn="l" indent="0" marL="0">
+            <a:pPr marL="0" indent="0" algn="l">
               <a:buNone/>
             </a:pPr>
             <a:r>
@@ -15094,9 +15291,6 @@
               </a:rPr>
               <a:t>incident number</a:t>
             </a:r>
-            <a:pPr algn="l" indent="0" marL="0">
-              <a:buNone/>
-            </a:pPr>
             <a:r>
               <a:rPr lang="en-US" sz="1600" dirty="0">
                 <a:solidFill>
@@ -15108,9 +15302,6 @@
               </a:rPr>
               <a:t> + </a:t>
             </a:r>
-            <a:pPr algn="l" indent="0" marL="0">
-              <a:buNone/>
-            </a:pPr>
             <a:r>
               <a:rPr lang="en-US" sz="1600" dirty="0">
                 <a:solidFill>
@@ -15122,9 +15313,6 @@
               </a:rPr>
               <a:t>alert type</a:t>
             </a:r>
-            <a:pPr algn="l" indent="0" marL="0">
-              <a:buNone/>
-            </a:pPr>
             <a:r>
               <a:rPr lang="en-US" sz="1600" dirty="0">
                 <a:solidFill>
@@ -15136,9 +15324,6 @@
               </a:rPr>
               <a:t>   e.g.   </a:t>
             </a:r>
-            <a:pPr algn="l" indent="0" marL="0">
-              <a:buNone/>
-            </a:pPr>
             <a:r>
               <a:rPr lang="en-US" sz="1600" dirty="0">
                 <a:solidFill>
@@ -15175,7 +15360,7 @@
           <a:bodyPr wrap="square" lIns="0" tIns="0" rIns="0" bIns="0" rtlCol="0" anchor="ctr"/>
           <a:lstStyle/>
           <a:p>
-            <a:pPr algn="l" indent="0" marL="0">
+            <a:pPr marL="0" indent="0" algn="l">
               <a:buNone/>
             </a:pPr>
             <a:r>
@@ -15213,7 +15398,7 @@
           </a:prstGeom>
           <a:extLst>
             <a:ext uri="{C572A759-6A51-4108-AA02-DFA0A04FC94B}">
-              <ma14:wrappingTextBoxFlag xmlns:ma14="http://schemas.microsoft.com/office/mac/drawingml/2011/main" val="0"/>
+              <ma14:wrappingTextBoxFlag xmlns:ma14="http://schemas.microsoft.com/office/mac/drawingml/2011/main" xmlns="" val="0"/>
             </a:ext>
           </a:extLst>
         </p:spPr>
@@ -15234,7 +15419,7 @@
           <a:p>
             <a:pPr algn="l"/>
             <a:fld id="{F7021451-1387-4CA6-816F-3879F97B5CBC}" type="slidenum">
-              <a:rPr b="0" lang="en-US"/>
+              <a:rPr lang="en-US" b="0"/>
               <a:t>6</a:t>
             </a:fld>
             <a:endParaRPr lang="en-US"/>
@@ -15269,9 +15454,11 @@
       <p:sp>
         <p:nvSpPr>
           <p:cNvPr id="2" name="Text 0"/>
-          <p:cNvSpPr/>
+          <p:cNvSpPr>
+            <a:spLocks noGrp="1"/>
+          </p:cNvSpPr>
           <p:nvPr>
-            <p:ph idx="100" type="body" hasCustomPrompt="1"/>
+            <p:ph type="body" idx="100" hasCustomPrompt="1"/>
           </p:nvPr>
         </p:nvSpPr>
         <p:spPr>
@@ -15289,11 +15476,11 @@
           <a:bodyPr wrap="square" rtlCol="0"/>
           <a:lstStyle/>
           <a:p>
-            <a:pPr algn="l" indent="0" marL="0">
-              <a:buNone/>
-            </a:pPr>
-            <a:r>
-              <a:rPr lang="en-US" sz="1300" b="1" spc="200" kern="0" dirty="0">
+            <a:pPr marL="0" indent="0" algn="l">
+              <a:buNone/>
+            </a:pPr>
+            <a:r>
+              <a:rPr lang="en-US" sz="1300" b="1" kern="0" spc="200" dirty="0">
                 <a:solidFill>
                   <a:schemeClr val="accent2"/>
                 </a:solidFill>
@@ -15310,9 +15497,11 @@
       <p:sp>
         <p:nvSpPr>
           <p:cNvPr id="3" name="Text 0"/>
-          <p:cNvSpPr/>
+          <p:cNvSpPr>
+            <a:spLocks noGrp="1"/>
+          </p:cNvSpPr>
           <p:nvPr>
-            <p:ph idx="101" type="title" hasCustomPrompt="1"/>
+            <p:ph type="title" idx="101" hasCustomPrompt="1"/>
           </p:nvPr>
         </p:nvSpPr>
         <p:spPr>
@@ -15330,7 +15519,7 @@
           <a:bodyPr wrap="square" rtlCol="0"/>
           <a:lstStyle/>
           <a:p>
-            <a:pPr algn="l" indent="0" marL="0">
+            <a:pPr marL="0" indent="0" algn="l">
               <a:buNone/>
             </a:pPr>
             <a:r>
@@ -15374,6 +15563,13 @@
             <a:prstDash val="solid"/>
           </a:ln>
         </p:spPr>
+        <p:txBody>
+          <a:bodyPr/>
+          <a:lstStyle/>
+          <a:p>
+            <a:endParaRPr lang="en-IN"/>
+          </a:p>
+        </p:txBody>
       </p:sp>
       <p:sp>
         <p:nvSpPr>
@@ -15394,6 +15590,13 @@
           </a:solidFill>
           <a:ln/>
         </p:spPr>
+        <p:txBody>
+          <a:bodyPr/>
+          <a:lstStyle/>
+          <a:p>
+            <a:endParaRPr lang="en-IN"/>
+          </a:p>
+        </p:txBody>
       </p:sp>
       <p:sp>
         <p:nvSpPr>
@@ -15416,7 +15619,7 @@
           <a:bodyPr wrap="square" lIns="0" tIns="0" rIns="0" bIns="0" rtlCol="0" anchor="ctr"/>
           <a:lstStyle/>
           <a:p>
-            <a:pPr algn="ctr" indent="0" marL="0">
+            <a:pPr marL="0" indent="0" algn="ctr">
               <a:buNone/>
             </a:pPr>
             <a:r>
@@ -15455,7 +15658,7 @@
           <a:bodyPr wrap="square" lIns="0" tIns="0" rIns="0" bIns="0" rtlCol="0" anchor="ctr"/>
           <a:lstStyle/>
           <a:p>
-            <a:pPr algn="l" indent="0" marL="0">
+            <a:pPr marL="0" indent="0" algn="l">
               <a:buNone/>
             </a:pPr>
             <a:r>
@@ -15494,7 +15697,7 @@
           <a:bodyPr wrap="square" lIns="0" tIns="0" rIns="0" bIns="0" rtlCol="0" anchor="ctr"/>
           <a:lstStyle/>
           <a:p>
-            <a:pPr algn="l" indent="0" marL="0">
+            <a:pPr marL="0" indent="0" algn="l">
               <a:lnSpc>
                 <a:spcPct val="115000"/>
               </a:lnSpc>
@@ -15541,6 +15744,13 @@
             <a:prstDash val="solid"/>
           </a:ln>
         </p:spPr>
+        <p:txBody>
+          <a:bodyPr/>
+          <a:lstStyle/>
+          <a:p>
+            <a:endParaRPr lang="en-IN"/>
+          </a:p>
+        </p:txBody>
       </p:sp>
       <p:sp>
         <p:nvSpPr>
@@ -15561,6 +15771,13 @@
           </a:solidFill>
           <a:ln/>
         </p:spPr>
+        <p:txBody>
+          <a:bodyPr/>
+          <a:lstStyle/>
+          <a:p>
+            <a:endParaRPr lang="en-IN"/>
+          </a:p>
+        </p:txBody>
       </p:sp>
       <p:sp>
         <p:nvSpPr>
@@ -15583,7 +15800,7 @@
           <a:bodyPr wrap="square" lIns="0" tIns="0" rIns="0" bIns="0" rtlCol="0" anchor="ctr"/>
           <a:lstStyle/>
           <a:p>
-            <a:pPr algn="ctr" indent="0" marL="0">
+            <a:pPr marL="0" indent="0" algn="ctr">
               <a:buNone/>
             </a:pPr>
             <a:r>
@@ -15622,7 +15839,7 @@
           <a:bodyPr wrap="square" lIns="0" tIns="0" rIns="0" bIns="0" rtlCol="0" anchor="ctr"/>
           <a:lstStyle/>
           <a:p>
-            <a:pPr algn="l" indent="0" marL="0">
+            <a:pPr marL="0" indent="0" algn="l">
               <a:buNone/>
             </a:pPr>
             <a:r>
@@ -15661,7 +15878,7 @@
           <a:bodyPr wrap="square" lIns="0" tIns="0" rIns="0" bIns="0" rtlCol="0" anchor="ctr"/>
           <a:lstStyle/>
           <a:p>
-            <a:pPr algn="l" indent="0" marL="0">
+            <a:pPr marL="0" indent="0" algn="l">
               <a:lnSpc>
                 <a:spcPct val="115000"/>
               </a:lnSpc>
@@ -15708,6 +15925,13 @@
             <a:prstDash val="solid"/>
           </a:ln>
         </p:spPr>
+        <p:txBody>
+          <a:bodyPr/>
+          <a:lstStyle/>
+          <a:p>
+            <a:endParaRPr lang="en-IN"/>
+          </a:p>
+        </p:txBody>
       </p:sp>
       <p:sp>
         <p:nvSpPr>
@@ -15728,6 +15952,13 @@
           </a:solidFill>
           <a:ln/>
         </p:spPr>
+        <p:txBody>
+          <a:bodyPr/>
+          <a:lstStyle/>
+          <a:p>
+            <a:endParaRPr lang="en-IN"/>
+          </a:p>
+        </p:txBody>
       </p:sp>
       <p:sp>
         <p:nvSpPr>
@@ -15750,7 +15981,7 @@
           <a:bodyPr wrap="square" lIns="0" tIns="0" rIns="0" bIns="0" rtlCol="0" anchor="ctr"/>
           <a:lstStyle/>
           <a:p>
-            <a:pPr algn="ctr" indent="0" marL="0">
+            <a:pPr marL="0" indent="0" algn="ctr">
               <a:buNone/>
             </a:pPr>
             <a:r>
@@ -15789,7 +16020,7 @@
           <a:bodyPr wrap="square" lIns="0" tIns="0" rIns="0" bIns="0" rtlCol="0" anchor="ctr"/>
           <a:lstStyle/>
           <a:p>
-            <a:pPr algn="l" indent="0" marL="0">
+            <a:pPr marL="0" indent="0" algn="l">
               <a:buNone/>
             </a:pPr>
             <a:r>
@@ -15828,7 +16059,7 @@
           <a:bodyPr wrap="square" lIns="0" tIns="0" rIns="0" bIns="0" rtlCol="0" anchor="ctr"/>
           <a:lstStyle/>
           <a:p>
-            <a:pPr algn="l" indent="0" marL="0">
+            <a:pPr marL="0" indent="0" algn="l">
               <a:lnSpc>
                 <a:spcPct val="115000"/>
               </a:lnSpc>
@@ -15875,6 +16106,13 @@
             <a:prstDash val="solid"/>
           </a:ln>
         </p:spPr>
+        <p:txBody>
+          <a:bodyPr/>
+          <a:lstStyle/>
+          <a:p>
+            <a:endParaRPr lang="en-IN"/>
+          </a:p>
+        </p:txBody>
       </p:sp>
       <p:sp>
         <p:nvSpPr>
@@ -15895,6 +16133,13 @@
           </a:solidFill>
           <a:ln/>
         </p:spPr>
+        <p:txBody>
+          <a:bodyPr/>
+          <a:lstStyle/>
+          <a:p>
+            <a:endParaRPr lang="en-IN"/>
+          </a:p>
+        </p:txBody>
       </p:sp>
       <p:sp>
         <p:nvSpPr>
@@ -15917,7 +16162,7 @@
           <a:bodyPr wrap="square" lIns="0" tIns="0" rIns="0" bIns="0" rtlCol="0" anchor="ctr"/>
           <a:lstStyle/>
           <a:p>
-            <a:pPr algn="ctr" indent="0" marL="0">
+            <a:pPr marL="0" indent="0" algn="ctr">
               <a:buNone/>
             </a:pPr>
             <a:r>
@@ -15956,7 +16201,7 @@
           <a:bodyPr wrap="square" lIns="0" tIns="0" rIns="0" bIns="0" rtlCol="0" anchor="ctr"/>
           <a:lstStyle/>
           <a:p>
-            <a:pPr algn="l" indent="0" marL="0">
+            <a:pPr marL="0" indent="0" algn="l">
               <a:buNone/>
             </a:pPr>
             <a:r>
@@ -15995,7 +16240,7 @@
           <a:bodyPr wrap="square" lIns="0" tIns="0" rIns="0" bIns="0" rtlCol="0" anchor="ctr"/>
           <a:lstStyle/>
           <a:p>
-            <a:pPr algn="l" indent="0" marL="0">
+            <a:pPr marL="0" indent="0" algn="l">
               <a:lnSpc>
                 <a:spcPct val="115000"/>
               </a:lnSpc>
@@ -16042,6 +16287,13 @@
             <a:prstDash val="solid"/>
           </a:ln>
         </p:spPr>
+        <p:txBody>
+          <a:bodyPr/>
+          <a:lstStyle/>
+          <a:p>
+            <a:endParaRPr lang="en-IN"/>
+          </a:p>
+        </p:txBody>
       </p:sp>
       <p:sp>
         <p:nvSpPr>
@@ -16062,6 +16314,13 @@
           </a:solidFill>
           <a:ln/>
         </p:spPr>
+        <p:txBody>
+          <a:bodyPr/>
+          <a:lstStyle/>
+          <a:p>
+            <a:endParaRPr lang="en-IN"/>
+          </a:p>
+        </p:txBody>
       </p:sp>
       <p:sp>
         <p:nvSpPr>
@@ -16084,7 +16343,7 @@
           <a:bodyPr wrap="square" lIns="0" tIns="0" rIns="0" bIns="0" rtlCol="0" anchor="ctr"/>
           <a:lstStyle/>
           <a:p>
-            <a:pPr algn="ctr" indent="0" marL="0">
+            <a:pPr marL="0" indent="0" algn="ctr">
               <a:buNone/>
             </a:pPr>
             <a:r>
@@ -16123,7 +16382,7 @@
           <a:bodyPr wrap="square" lIns="0" tIns="0" rIns="0" bIns="0" rtlCol="0" anchor="ctr"/>
           <a:lstStyle/>
           <a:p>
-            <a:pPr algn="l" indent="0" marL="0">
+            <a:pPr marL="0" indent="0" algn="l">
               <a:buNone/>
             </a:pPr>
             <a:r>
@@ -16162,7 +16421,7 @@
           <a:bodyPr wrap="square" lIns="0" tIns="0" rIns="0" bIns="0" rtlCol="0" anchor="ctr"/>
           <a:lstStyle/>
           <a:p>
-            <a:pPr algn="l" indent="0" marL="0">
+            <a:pPr marL="0" indent="0" algn="l">
               <a:lnSpc>
                 <a:spcPct val="115000"/>
               </a:lnSpc>
@@ -16209,6 +16468,13 @@
             <a:prstDash val="solid"/>
           </a:ln>
         </p:spPr>
+        <p:txBody>
+          <a:bodyPr/>
+          <a:lstStyle/>
+          <a:p>
+            <a:endParaRPr lang="en-IN"/>
+          </a:p>
+        </p:txBody>
       </p:sp>
       <p:sp>
         <p:nvSpPr>
@@ -16229,6 +16495,13 @@
           </a:solidFill>
           <a:ln/>
         </p:spPr>
+        <p:txBody>
+          <a:bodyPr/>
+          <a:lstStyle/>
+          <a:p>
+            <a:endParaRPr lang="en-IN"/>
+          </a:p>
+        </p:txBody>
       </p:sp>
       <p:sp>
         <p:nvSpPr>
@@ -16251,7 +16524,7 @@
           <a:bodyPr wrap="square" lIns="0" tIns="0" rIns="0" bIns="0" rtlCol="0" anchor="ctr"/>
           <a:lstStyle/>
           <a:p>
-            <a:pPr algn="ctr" indent="0" marL="0">
+            <a:pPr marL="0" indent="0" algn="ctr">
               <a:buNone/>
             </a:pPr>
             <a:r>
@@ -16290,7 +16563,7 @@
           <a:bodyPr wrap="square" lIns="0" tIns="0" rIns="0" bIns="0" rtlCol="0" anchor="ctr"/>
           <a:lstStyle/>
           <a:p>
-            <a:pPr algn="l" indent="0" marL="0">
+            <a:pPr marL="0" indent="0" algn="l">
               <a:buNone/>
             </a:pPr>
             <a:r>
@@ -16329,7 +16602,7 @@
           <a:bodyPr wrap="square" lIns="0" tIns="0" rIns="0" bIns="0" rtlCol="0" anchor="ctr"/>
           <a:lstStyle/>
           <a:p>
-            <a:pPr algn="l" indent="0" marL="0">
+            <a:pPr marL="0" indent="0" algn="l">
               <a:lnSpc>
                 <a:spcPct val="115000"/>
               </a:lnSpc>
@@ -16376,6 +16649,13 @@
             <a:prstDash val="solid"/>
           </a:ln>
         </p:spPr>
+        <p:txBody>
+          <a:bodyPr/>
+          <a:lstStyle/>
+          <a:p>
+            <a:endParaRPr lang="en-IN"/>
+          </a:p>
+        </p:txBody>
       </p:sp>
       <p:sp>
         <p:nvSpPr>
@@ -16396,6 +16676,13 @@
           </a:solidFill>
           <a:ln/>
         </p:spPr>
+        <p:txBody>
+          <a:bodyPr/>
+          <a:lstStyle/>
+          <a:p>
+            <a:endParaRPr lang="en-IN"/>
+          </a:p>
+        </p:txBody>
       </p:sp>
       <p:sp>
         <p:nvSpPr>
@@ -16418,7 +16705,7 @@
           <a:bodyPr wrap="square" lIns="0" tIns="0" rIns="0" bIns="0" rtlCol="0" anchor="ctr"/>
           <a:lstStyle/>
           <a:p>
-            <a:pPr algn="ctr" indent="0" marL="0">
+            <a:pPr marL="0" indent="0" algn="ctr">
               <a:buNone/>
             </a:pPr>
             <a:r>
@@ -16457,7 +16744,7 @@
           <a:bodyPr wrap="square" lIns="0" tIns="0" rIns="0" bIns="0" rtlCol="0" anchor="ctr"/>
           <a:lstStyle/>
           <a:p>
-            <a:pPr algn="l" indent="0" marL="0">
+            <a:pPr marL="0" indent="0" algn="l">
               <a:buNone/>
             </a:pPr>
             <a:r>
@@ -16496,7 +16783,7 @@
           <a:bodyPr wrap="square" lIns="0" tIns="0" rIns="0" bIns="0" rtlCol="0" anchor="ctr"/>
           <a:lstStyle/>
           <a:p>
-            <a:pPr algn="l" indent="0" marL="0">
+            <a:pPr marL="0" indent="0" algn="l">
               <a:lnSpc>
                 <a:spcPct val="115000"/>
               </a:lnSpc>
@@ -16543,6 +16830,13 @@
             <a:prstDash val="solid"/>
           </a:ln>
         </p:spPr>
+        <p:txBody>
+          <a:bodyPr/>
+          <a:lstStyle/>
+          <a:p>
+            <a:endParaRPr lang="en-IN"/>
+          </a:p>
+        </p:txBody>
       </p:sp>
       <p:sp>
         <p:nvSpPr>
@@ -16563,6 +16857,13 @@
           </a:solidFill>
           <a:ln/>
         </p:spPr>
+        <p:txBody>
+          <a:bodyPr/>
+          <a:lstStyle/>
+          <a:p>
+            <a:endParaRPr lang="en-IN"/>
+          </a:p>
+        </p:txBody>
       </p:sp>
       <p:sp>
         <p:nvSpPr>
@@ -16585,7 +16886,7 @@
           <a:bodyPr wrap="square" lIns="0" tIns="0" rIns="0" bIns="0" rtlCol="0" anchor="ctr"/>
           <a:lstStyle/>
           <a:p>
-            <a:pPr algn="ctr" indent="0" marL="0">
+            <a:pPr marL="0" indent="0" algn="ctr">
               <a:buNone/>
             </a:pPr>
             <a:r>
@@ -16624,7 +16925,7 @@
           <a:bodyPr wrap="square" lIns="0" tIns="0" rIns="0" bIns="0" rtlCol="0" anchor="ctr"/>
           <a:lstStyle/>
           <a:p>
-            <a:pPr algn="l" indent="0" marL="0">
+            <a:pPr marL="0" indent="0" algn="l">
               <a:buNone/>
             </a:pPr>
             <a:r>
@@ -16663,7 +16964,7 @@
           <a:bodyPr wrap="square" lIns="0" tIns="0" rIns="0" bIns="0" rtlCol="0" anchor="ctr"/>
           <a:lstStyle/>
           <a:p>
-            <a:pPr algn="l" indent="0" marL="0">
+            <a:pPr marL="0" indent="0" algn="l">
               <a:lnSpc>
                 <a:spcPct val="115000"/>
               </a:lnSpc>
@@ -16710,6 +17011,13 @@
             <a:prstDash val="solid"/>
           </a:ln>
         </p:spPr>
+        <p:txBody>
+          <a:bodyPr/>
+          <a:lstStyle/>
+          <a:p>
+            <a:endParaRPr lang="en-IN"/>
+          </a:p>
+        </p:txBody>
       </p:sp>
       <p:sp>
         <p:nvSpPr>
@@ -16730,6 +17038,13 @@
           </a:solidFill>
           <a:ln/>
         </p:spPr>
+        <p:txBody>
+          <a:bodyPr/>
+          <a:lstStyle/>
+          <a:p>
+            <a:endParaRPr lang="en-IN"/>
+          </a:p>
+        </p:txBody>
       </p:sp>
       <p:sp>
         <p:nvSpPr>
@@ -16752,7 +17067,7 @@
           <a:bodyPr wrap="square" lIns="0" tIns="0" rIns="0" bIns="0" rtlCol="0" anchor="ctr"/>
           <a:lstStyle/>
           <a:p>
-            <a:pPr algn="ctr" indent="0" marL="0">
+            <a:pPr marL="0" indent="0" algn="ctr">
               <a:buNone/>
             </a:pPr>
             <a:r>
@@ -16791,7 +17106,7 @@
           <a:bodyPr wrap="square" lIns="0" tIns="0" rIns="0" bIns="0" rtlCol="0" anchor="ctr"/>
           <a:lstStyle/>
           <a:p>
-            <a:pPr algn="l" indent="0" marL="0">
+            <a:pPr marL="0" indent="0" algn="l">
               <a:buNone/>
             </a:pPr>
             <a:r>
@@ -16830,7 +17145,7 @@
           <a:bodyPr wrap="square" lIns="0" tIns="0" rIns="0" bIns="0" rtlCol="0" anchor="ctr"/>
           <a:lstStyle/>
           <a:p>
-            <a:pPr algn="l" indent="0" marL="0">
+            <a:pPr marL="0" indent="0" algn="l">
               <a:lnSpc>
                 <a:spcPct val="115000"/>
               </a:lnSpc>
@@ -16877,6 +17192,13 @@
             <a:prstDash val="solid"/>
           </a:ln>
         </p:spPr>
+        <p:txBody>
+          <a:bodyPr/>
+          <a:lstStyle/>
+          <a:p>
+            <a:endParaRPr lang="en-IN"/>
+          </a:p>
+        </p:txBody>
       </p:sp>
       <p:sp>
         <p:nvSpPr>
@@ -16897,6 +17219,13 @@
           </a:solidFill>
           <a:ln/>
         </p:spPr>
+        <p:txBody>
+          <a:bodyPr/>
+          <a:lstStyle/>
+          <a:p>
+            <a:endParaRPr lang="en-IN"/>
+          </a:p>
+        </p:txBody>
       </p:sp>
       <p:sp>
         <p:nvSpPr>
@@ -16919,7 +17248,7 @@
           <a:bodyPr wrap="square" lIns="0" tIns="0" rIns="0" bIns="0" rtlCol="0" anchor="ctr"/>
           <a:lstStyle/>
           <a:p>
-            <a:pPr algn="ctr" indent="0" marL="0">
+            <a:pPr marL="0" indent="0" algn="ctr">
               <a:buNone/>
             </a:pPr>
             <a:r>
@@ -16958,7 +17287,7 @@
           <a:bodyPr wrap="square" lIns="0" tIns="0" rIns="0" bIns="0" rtlCol="0" anchor="ctr"/>
           <a:lstStyle/>
           <a:p>
-            <a:pPr algn="l" indent="0" marL="0">
+            <a:pPr marL="0" indent="0" algn="l">
               <a:buNone/>
             </a:pPr>
             <a:r>
@@ -16997,7 +17326,7 @@
           <a:bodyPr wrap="square" lIns="0" tIns="0" rIns="0" bIns="0" rtlCol="0" anchor="ctr"/>
           <a:lstStyle/>
           <a:p>
-            <a:pPr algn="l" indent="0" marL="0">
+            <a:pPr marL="0" indent="0" algn="l">
               <a:lnSpc>
                 <a:spcPct val="115000"/>
               </a:lnSpc>
@@ -17044,6 +17373,13 @@
             <a:prstDash val="solid"/>
           </a:ln>
         </p:spPr>
+        <p:txBody>
+          <a:bodyPr/>
+          <a:lstStyle/>
+          <a:p>
+            <a:endParaRPr lang="en-IN"/>
+          </a:p>
+        </p:txBody>
       </p:sp>
       <p:sp>
         <p:nvSpPr>
@@ -17064,6 +17400,13 @@
           </a:solidFill>
           <a:ln/>
         </p:spPr>
+        <p:txBody>
+          <a:bodyPr/>
+          <a:lstStyle/>
+          <a:p>
+            <a:endParaRPr lang="en-IN"/>
+          </a:p>
+        </p:txBody>
       </p:sp>
       <p:sp>
         <p:nvSpPr>
@@ -17086,7 +17429,7 @@
           <a:bodyPr wrap="square" lIns="0" tIns="0" rIns="0" bIns="0" rtlCol="0" anchor="ctr"/>
           <a:lstStyle/>
           <a:p>
-            <a:pPr algn="ctr" indent="0" marL="0">
+            <a:pPr marL="0" indent="0" algn="ctr">
               <a:buNone/>
             </a:pPr>
             <a:r>
@@ -17125,7 +17468,7 @@
           <a:bodyPr wrap="square" lIns="0" tIns="0" rIns="0" bIns="0" rtlCol="0" anchor="ctr"/>
           <a:lstStyle/>
           <a:p>
-            <a:pPr algn="l" indent="0" marL="0">
+            <a:pPr marL="0" indent="0" algn="l">
               <a:buNone/>
             </a:pPr>
             <a:r>
@@ -17164,7 +17507,7 @@
           <a:bodyPr wrap="square" lIns="0" tIns="0" rIns="0" bIns="0" rtlCol="0" anchor="ctr"/>
           <a:lstStyle/>
           <a:p>
-            <a:pPr algn="l" indent="0" marL="0">
+            <a:pPr marL="0" indent="0" algn="l">
               <a:lnSpc>
                 <a:spcPct val="115000"/>
               </a:lnSpc>
@@ -17187,7 +17530,7 @@
       </p:sp>
       <p:sp>
         <p:nvSpPr>
-          <p:cNvPr id="25" name="Slide Number Placeholder 0"/>
+          <p:cNvPr id="59" name="Slide Number Placeholder 0"/>
           <p:cNvSpPr>
             <a:spLocks noGrp="1"/>
           </p:cNvSpPr>
@@ -17205,7 +17548,7 @@
           </a:prstGeom>
           <a:extLst>
             <a:ext uri="{C572A759-6A51-4108-AA02-DFA0A04FC94B}">
-              <ma14:wrappingTextBoxFlag xmlns:ma14="http://schemas.microsoft.com/office/mac/drawingml/2011/main" val="0"/>
+              <ma14:wrappingTextBoxFlag xmlns:ma14="http://schemas.microsoft.com/office/mac/drawingml/2011/main" xmlns="" val="0"/>
             </a:ext>
           </a:extLst>
         </p:spPr>
@@ -17226,7 +17569,7 @@
           <a:p>
             <a:pPr algn="l"/>
             <a:fld id="{F7021451-1387-4CA6-816F-3879F97B5CBC}" type="slidenum">
-              <a:rPr b="0" lang="en-US"/>
+              <a:rPr lang="en-US" b="0"/>
               <a:t>7</a:t>
             </a:fld>
             <a:endParaRPr lang="en-US"/>
@@ -17279,11 +17622,11 @@
           <a:bodyPr wrap="square" lIns="0" tIns="0" rIns="0" bIns="0" rtlCol="0" anchor="ctr"/>
           <a:lstStyle/>
           <a:p>
-            <a:pPr algn="l" indent="0" marL="0">
-              <a:buNone/>
-            </a:pPr>
-            <a:r>
-              <a:rPr lang="en-US" sz="1400" b="1" spc="200" kern="0" dirty="0">
+            <a:pPr marL="0" indent="0" algn="l">
+              <a:buNone/>
+            </a:pPr>
+            <a:r>
+              <a:rPr lang="en-US" sz="1400" b="1" kern="0" spc="200" dirty="0">
                 <a:solidFill>
                   <a:schemeClr val="accent1"/>
                 </a:solidFill>
@@ -17300,9 +17643,11 @@
       <p:sp>
         <p:nvSpPr>
           <p:cNvPr id="3" name="Text 0"/>
-          <p:cNvSpPr/>
+          <p:cNvSpPr>
+            <a:spLocks noGrp="1"/>
+          </p:cNvSpPr>
           <p:nvPr>
-            <p:ph idx="100" type="title" hasCustomPrompt="1"/>
+            <p:ph type="title" idx="100" hasCustomPrompt="1"/>
           </p:nvPr>
         </p:nvSpPr>
         <p:spPr>
@@ -17320,7 +17665,7 @@
           <a:bodyPr wrap="square" rtlCol="0"/>
           <a:lstStyle/>
           <a:p>
-            <a:pPr algn="l" indent="0" marL="0">
+            <a:pPr marL="0" indent="0" algn="l">
               <a:buNone/>
             </a:pPr>
             <a:r>
@@ -17341,9 +17686,11 @@
       <p:sp>
         <p:nvSpPr>
           <p:cNvPr id="4" name="Text 0"/>
-          <p:cNvSpPr/>
+          <p:cNvSpPr>
+            <a:spLocks noGrp="1"/>
+          </p:cNvSpPr>
           <p:nvPr>
-            <p:ph idx="101" type="body" hasCustomPrompt="1"/>
+            <p:ph type="body" idx="101" hasCustomPrompt="1"/>
           </p:nvPr>
         </p:nvSpPr>
         <p:spPr>
@@ -17361,7 +17708,7 @@
           <a:bodyPr wrap="square" rtlCol="0"/>
           <a:lstStyle/>
           <a:p>
-            <a:pPr algn="l" indent="0" marL="0">
+            <a:pPr marL="0" indent="0" algn="l">
               <a:buNone/>
             </a:pPr>
             <a:r>
@@ -17407,9 +17754,11 @@
       <p:sp>
         <p:nvSpPr>
           <p:cNvPr id="2" name="Text 0"/>
-          <p:cNvSpPr/>
+          <p:cNvSpPr>
+            <a:spLocks noGrp="1"/>
+          </p:cNvSpPr>
           <p:nvPr>
-            <p:ph idx="100" type="body" hasCustomPrompt="1"/>
+            <p:ph type="body" idx="100" hasCustomPrompt="1"/>
           </p:nvPr>
         </p:nvSpPr>
         <p:spPr>
@@ -17427,11 +17776,11 @@
           <a:bodyPr wrap="square" rtlCol="0"/>
           <a:lstStyle/>
           <a:p>
-            <a:pPr algn="l" indent="0" marL="0">
-              <a:buNone/>
-            </a:pPr>
-            <a:r>
-              <a:rPr lang="en-US" sz="1300" b="1" spc="200" kern="0" dirty="0">
+            <a:pPr marL="0" indent="0" algn="l">
+              <a:buNone/>
+            </a:pPr>
+            <a:r>
+              <a:rPr lang="en-US" sz="1300" b="1" kern="0" spc="200" dirty="0">
                 <a:solidFill>
                   <a:schemeClr val="accent2"/>
                 </a:solidFill>
@@ -17448,9 +17797,11 @@
       <p:sp>
         <p:nvSpPr>
           <p:cNvPr id="3" name="Text 0"/>
-          <p:cNvSpPr/>
+          <p:cNvSpPr>
+            <a:spLocks noGrp="1"/>
+          </p:cNvSpPr>
           <p:nvPr>
-            <p:ph idx="101" type="title" hasCustomPrompt="1"/>
+            <p:ph type="title" idx="101" hasCustomPrompt="1"/>
           </p:nvPr>
         </p:nvSpPr>
         <p:spPr>
@@ -17468,7 +17819,7 @@
           <a:bodyPr wrap="square" rtlCol="0"/>
           <a:lstStyle/>
           <a:p>
-            <a:pPr algn="l" indent="0" marL="0">
+            <a:pPr marL="0" indent="0" algn="l">
               <a:buNone/>
             </a:pPr>
             <a:r>
@@ -17507,6 +17858,13 @@
           </a:solidFill>
           <a:ln/>
         </p:spPr>
+        <p:txBody>
+          <a:bodyPr/>
+          <a:lstStyle/>
+          <a:p>
+            <a:endParaRPr lang="en-IN"/>
+          </a:p>
+        </p:txBody>
       </p:sp>
       <p:sp>
         <p:nvSpPr>
@@ -17529,7 +17887,7 @@
           <a:bodyPr wrap="square" lIns="0" tIns="0" rIns="0" bIns="0" rtlCol="0" anchor="t"/>
           <a:lstStyle/>
           <a:p>
-            <a:pPr algn="l" indent="0" marL="0">
+            <a:pPr marL="0" indent="0" algn="l">
               <a:lnSpc>
                 <a:spcPct val="125000"/>
               </a:lnSpc>
@@ -17549,7 +17907,7 @@
             <a:endParaRPr lang="en-US" sz="1300" dirty="0"/>
           </a:p>
           <a:p>
-            <a:pPr algn="l" indent="0" marL="0">
+            <a:pPr marL="0" indent="0" algn="l">
               <a:lnSpc>
                 <a:spcPct val="125000"/>
               </a:lnSpc>
@@ -17569,7 +17927,7 @@
             <a:endParaRPr lang="en-US" sz="1300" dirty="0"/>
           </a:p>
           <a:p>
-            <a:pPr algn="l" indent="0" marL="0">
+            <a:pPr marL="0" indent="0" algn="l">
               <a:lnSpc>
                 <a:spcPct val="125000"/>
               </a:lnSpc>
@@ -17589,7 +17947,7 @@
             <a:endParaRPr lang="en-US" sz="1300" dirty="0"/>
           </a:p>
           <a:p>
-            <a:pPr algn="l" indent="0" marL="0">
+            <a:pPr marL="0" indent="0" algn="l">
               <a:lnSpc>
                 <a:spcPct val="125000"/>
               </a:lnSpc>
@@ -17609,7 +17967,7 @@
             <a:endParaRPr lang="en-US" sz="1300" dirty="0"/>
           </a:p>
           <a:p>
-            <a:pPr algn="l" indent="0" marL="0">
+            <a:pPr marL="0" indent="0" algn="l">
               <a:lnSpc>
                 <a:spcPct val="125000"/>
               </a:lnSpc>
@@ -17629,7 +17987,7 @@
             <a:endParaRPr lang="en-US" sz="1300" dirty="0"/>
           </a:p>
           <a:p>
-            <a:pPr algn="l" indent="0" marL="0">
+            <a:pPr marL="0" indent="0" algn="l">
               <a:lnSpc>
                 <a:spcPct val="125000"/>
               </a:lnSpc>
@@ -17673,9 +18031,27 @@
             <a:tbl>
               <a:tblPr/>
               <a:tblGrid>
-                <a:gridCol w="2834640"/>
-                <a:gridCol w="3108960"/>
-                <a:gridCol w="5120640"/>
+                <a:gridCol w="2834640">
+                  <a:extLst>
+                    <a:ext uri="{9D8B030D-6E8A-4147-A177-3AD203B41FA5}">
+                      <a16:colId xmlns:a16="http://schemas.microsoft.com/office/drawing/2014/main" val="20000"/>
+                    </a:ext>
+                  </a:extLst>
+                </a:gridCol>
+                <a:gridCol w="3108960">
+                  <a:extLst>
+                    <a:ext uri="{9D8B030D-6E8A-4147-A177-3AD203B41FA5}">
+                      <a16:colId xmlns:a16="http://schemas.microsoft.com/office/drawing/2014/main" val="20001"/>
+                    </a:ext>
+                  </a:extLst>
+                </a:gridCol>
+                <a:gridCol w="5120640">
+                  <a:extLst>
+                    <a:ext uri="{9D8B030D-6E8A-4147-A177-3AD203B41FA5}">
+                      <a16:colId xmlns:a16="http://schemas.microsoft.com/office/drawing/2014/main" val="20002"/>
+                    </a:ext>
+                  </a:extLst>
+                </a:gridCol>
               </a:tblGrid>
               <a:tr h="420624">
                 <a:tc>
@@ -17683,7 +18059,7 @@
                     <a:bodyPr/>
                     <a:lstStyle/>
                     <a:p>
-                      <a:pPr indent="0" marL="0">
+                      <a:pPr marL="0" indent="0">
                         <a:buNone/>
                       </a:pPr>
                       <a:r>
@@ -17704,7 +18080,7 @@
                       </a:endParaRPr>
                     </a:p>
                   </a:txBody>
-                  <a:tcPr marL="91440" marR="91440" marT="45720" marB="45720" anchor="ctr">
+                  <a:tcPr anchor="ctr">
                     <a:lnL w="12700" cap="flat" cmpd="sng" algn="ctr">
                       <a:solidFill>
                         <a:schemeClr val="accent5"/>
@@ -17751,7 +18127,7 @@
                     <a:bodyPr/>
                     <a:lstStyle/>
                     <a:p>
-                      <a:pPr indent="0" marL="0">
+                      <a:pPr marL="0" indent="0">
                         <a:buNone/>
                       </a:pPr>
                       <a:r>
@@ -17772,7 +18148,7 @@
                       </a:endParaRPr>
                     </a:p>
                   </a:txBody>
-                  <a:tcPr marL="91440" marR="91440" marT="45720" marB="45720" anchor="ctr">
+                  <a:tcPr anchor="ctr">
                     <a:lnL w="12700" cap="flat" cmpd="sng" algn="ctr">
                       <a:solidFill>
                         <a:schemeClr val="accent5"/>
@@ -17819,7 +18195,7 @@
                     <a:bodyPr/>
                     <a:lstStyle/>
                     <a:p>
-                      <a:pPr indent="0" marL="0">
+                      <a:pPr marL="0" indent="0">
                         <a:buNone/>
                       </a:pPr>
                       <a:r>
@@ -17840,7 +18216,7 @@
                       </a:endParaRPr>
                     </a:p>
                   </a:txBody>
-                  <a:tcPr marL="91440" marR="91440" marT="45720" marB="45720" anchor="ctr">
+                  <a:tcPr anchor="ctr">
                     <a:lnL w="12700" cap="flat" cmpd="sng" algn="ctr">
                       <a:solidFill>
                         <a:schemeClr val="accent5"/>
@@ -17882,6 +18258,11 @@
                     </a:solidFill>
                   </a:tcPr>
                 </a:tc>
+                <a:extLst>
+                  <a:ext uri="{0D108BD9-81ED-4DB2-BD59-A6C34878D82A}">
+                    <a16:rowId xmlns:a16="http://schemas.microsoft.com/office/drawing/2014/main" val="10000"/>
+                  </a:ext>
+                </a:extLst>
               </a:tr>
               <a:tr h="420624">
                 <a:tc>
@@ -17889,7 +18270,7 @@
                     <a:bodyPr/>
                     <a:lstStyle/>
                     <a:p>
-                      <a:pPr indent="0" marL="0">
+                      <a:pPr marL="0" indent="0">
                         <a:buNone/>
                       </a:pPr>
                       <a:r>
@@ -17910,7 +18291,7 @@
                       </a:endParaRPr>
                     </a:p>
                   </a:txBody>
-                  <a:tcPr marL="91440" marR="91440" marT="45720" marB="45720" anchor="ctr">
+                  <a:tcPr anchor="ctr">
                     <a:lnL w="12700" cap="flat" cmpd="sng" algn="ctr">
                       <a:solidFill>
                         <a:schemeClr val="accent5"/>
@@ -17954,7 +18335,7 @@
                     <a:bodyPr/>
                     <a:lstStyle/>
                     <a:p>
-                      <a:pPr indent="0" marL="0">
+                      <a:pPr marL="0" indent="0">
                         <a:buNone/>
                       </a:pPr>
                       <a:r>
@@ -17975,7 +18356,7 @@
                       </a:endParaRPr>
                     </a:p>
                   </a:txBody>
-                  <a:tcPr marL="91440" marR="91440" marT="45720" marB="45720" anchor="ctr">
+                  <a:tcPr anchor="ctr">
                     <a:lnL w="12700" cap="flat" cmpd="sng" algn="ctr">
                       <a:solidFill>
                         <a:schemeClr val="accent5"/>
@@ -18019,7 +18400,7 @@
                     <a:bodyPr/>
                     <a:lstStyle/>
                     <a:p>
-                      <a:pPr indent="0" marL="0">
+                      <a:pPr marL="0" indent="0">
                         <a:buNone/>
                       </a:pPr>
                       <a:r>
@@ -18040,7 +18421,7 @@
                       </a:endParaRPr>
                     </a:p>
                   </a:txBody>
-                  <a:tcPr marL="91440" marR="91440" marT="45720" marB="45720" anchor="ctr">
+                  <a:tcPr anchor="ctr">
                     <a:lnL w="12700" cap="flat" cmpd="sng" algn="ctr">
                       <a:solidFill>
                         <a:schemeClr val="accent5"/>
@@ -18079,6 +18460,11 @@
                     </a:lnB>
                   </a:tcPr>
                 </a:tc>
+                <a:extLst>
+                  <a:ext uri="{0D108BD9-81ED-4DB2-BD59-A6C34878D82A}">
+                    <a16:rowId xmlns:a16="http://schemas.microsoft.com/office/drawing/2014/main" val="10001"/>
+                  </a:ext>
+                </a:extLst>
               </a:tr>
               <a:tr h="420624">
                 <a:tc>
@@ -18086,7 +18472,7 @@
                     <a:bodyPr/>
                     <a:lstStyle/>
                     <a:p>
-                      <a:pPr indent="0" marL="0">
+                      <a:pPr marL="0" indent="0">
                         <a:buNone/>
                       </a:pPr>
                       <a:r>
@@ -18107,7 +18493,7 @@
                       </a:endParaRPr>
                     </a:p>
                   </a:txBody>
-                  <a:tcPr marL="91440" marR="91440" marT="45720" marB="45720" anchor="ctr">
+                  <a:tcPr anchor="ctr">
                     <a:lnL w="12700" cap="flat" cmpd="sng" algn="ctr">
                       <a:solidFill>
                         <a:schemeClr val="accent5"/>
@@ -18151,7 +18537,7 @@
                     <a:bodyPr/>
                     <a:lstStyle/>
                     <a:p>
-                      <a:pPr indent="0" marL="0">
+                      <a:pPr marL="0" indent="0">
                         <a:buNone/>
                       </a:pPr>
                       <a:r>
@@ -18172,7 +18558,7 @@
                       </a:endParaRPr>
                     </a:p>
                   </a:txBody>
-                  <a:tcPr marL="91440" marR="91440" marT="45720" marB="45720" anchor="ctr">
+                  <a:tcPr anchor="ctr">
                     <a:lnL w="12700" cap="flat" cmpd="sng" algn="ctr">
                       <a:solidFill>
                         <a:schemeClr val="accent5"/>
@@ -18216,7 +18602,7 @@
                     <a:bodyPr/>
                     <a:lstStyle/>
                     <a:p>
-                      <a:pPr indent="0" marL="0">
+                      <a:pPr marL="0" indent="0">
                         <a:buNone/>
                       </a:pPr>
                       <a:r>
@@ -18237,7 +18623,7 @@
                       </a:endParaRPr>
                     </a:p>
                   </a:txBody>
-                  <a:tcPr marL="91440" marR="91440" marT="45720" marB="45720" anchor="ctr">
+                  <a:tcPr anchor="ctr">
                     <a:lnL w="12700" cap="flat" cmpd="sng" algn="ctr">
                       <a:solidFill>
                         <a:schemeClr val="accent5"/>
@@ -18276,6 +18662,11 @@
                     </a:lnB>
                   </a:tcPr>
                 </a:tc>
+                <a:extLst>
+                  <a:ext uri="{0D108BD9-81ED-4DB2-BD59-A6C34878D82A}">
+                    <a16:rowId xmlns:a16="http://schemas.microsoft.com/office/drawing/2014/main" val="10002"/>
+                  </a:ext>
+                </a:extLst>
               </a:tr>
               <a:tr h="420624">
                 <a:tc>
@@ -18283,7 +18674,7 @@
                     <a:bodyPr/>
                     <a:lstStyle/>
                     <a:p>
-                      <a:pPr indent="0" marL="0">
+                      <a:pPr marL="0" indent="0">
                         <a:buNone/>
                       </a:pPr>
                       <a:r>
@@ -18304,7 +18695,7 @@
                       </a:endParaRPr>
                     </a:p>
                   </a:txBody>
-                  <a:tcPr marL="91440" marR="91440" marT="45720" marB="45720" anchor="ctr">
+                  <a:tcPr anchor="ctr">
                     <a:lnL w="12700" cap="flat" cmpd="sng" algn="ctr">
                       <a:solidFill>
                         <a:schemeClr val="accent5"/>
@@ -18348,7 +18739,7 @@
                     <a:bodyPr/>
                     <a:lstStyle/>
                     <a:p>
-                      <a:pPr indent="0" marL="0">
+                      <a:pPr marL="0" indent="0">
                         <a:buNone/>
                       </a:pPr>
                       <a:r>
@@ -18369,7 +18760,7 @@
                       </a:endParaRPr>
                     </a:p>
                   </a:txBody>
-                  <a:tcPr marL="91440" marR="91440" marT="45720" marB="45720" anchor="ctr">
+                  <a:tcPr anchor="ctr">
                     <a:lnL w="12700" cap="flat" cmpd="sng" algn="ctr">
                       <a:solidFill>
                         <a:schemeClr val="accent5"/>
@@ -18413,7 +18804,7 @@
                     <a:bodyPr/>
                     <a:lstStyle/>
                     <a:p>
-                      <a:pPr indent="0" marL="0">
+                      <a:pPr marL="0" indent="0">
                         <a:buNone/>
                       </a:pPr>
                       <a:r>
@@ -18434,7 +18825,7 @@
                       </a:endParaRPr>
                     </a:p>
                   </a:txBody>
-                  <a:tcPr marL="91440" marR="91440" marT="45720" marB="45720" anchor="ctr">
+                  <a:tcPr anchor="ctr">
                     <a:lnL w="12700" cap="flat" cmpd="sng" algn="ctr">
                       <a:solidFill>
                         <a:schemeClr val="accent5"/>
@@ -18473,6 +18864,11 @@
                     </a:lnB>
                   </a:tcPr>
                 </a:tc>
+                <a:extLst>
+                  <a:ext uri="{0D108BD9-81ED-4DB2-BD59-A6C34878D82A}">
+                    <a16:rowId xmlns:a16="http://schemas.microsoft.com/office/drawing/2014/main" val="10003"/>
+                  </a:ext>
+                </a:extLst>
               </a:tr>
               <a:tr h="420624">
                 <a:tc>
@@ -18480,7 +18876,7 @@
                     <a:bodyPr/>
                     <a:lstStyle/>
                     <a:p>
-                      <a:pPr indent="0" marL="0">
+                      <a:pPr marL="0" indent="0">
                         <a:buNone/>
                       </a:pPr>
                       <a:r>
@@ -18501,7 +18897,7 @@
                       </a:endParaRPr>
                     </a:p>
                   </a:txBody>
-                  <a:tcPr marL="91440" marR="91440" marT="45720" marB="45720" anchor="ctr">
+                  <a:tcPr anchor="ctr">
                     <a:lnL w="12700" cap="flat" cmpd="sng" algn="ctr">
                       <a:solidFill>
                         <a:schemeClr val="accent5"/>
@@ -18545,7 +18941,7 @@
                     <a:bodyPr/>
                     <a:lstStyle/>
                     <a:p>
-                      <a:pPr indent="0" marL="0">
+                      <a:pPr marL="0" indent="0">
                         <a:buNone/>
                       </a:pPr>
                       <a:r>
@@ -18566,7 +18962,7 @@
                       </a:endParaRPr>
                     </a:p>
                   </a:txBody>
-                  <a:tcPr marL="91440" marR="91440" marT="45720" marB="45720" anchor="ctr">
+                  <a:tcPr anchor="ctr">
                     <a:lnL w="12700" cap="flat" cmpd="sng" algn="ctr">
                       <a:solidFill>
                         <a:schemeClr val="accent5"/>
@@ -18610,7 +19006,7 @@
                     <a:bodyPr/>
                     <a:lstStyle/>
                     <a:p>
-                      <a:pPr indent="0" marL="0">
+                      <a:pPr marL="0" indent="0">
                         <a:buNone/>
                       </a:pPr>
                       <a:r>
@@ -18631,7 +19027,7 @@
                       </a:endParaRPr>
                     </a:p>
                   </a:txBody>
-                  <a:tcPr marL="91440" marR="91440" marT="45720" marB="45720" anchor="ctr">
+                  <a:tcPr anchor="ctr">
                     <a:lnL w="12700" cap="flat" cmpd="sng" algn="ctr">
                       <a:solidFill>
                         <a:schemeClr val="accent5"/>
@@ -18670,6 +19066,11 @@
                     </a:lnB>
                   </a:tcPr>
                 </a:tc>
+                <a:extLst>
+                  <a:ext uri="{0D108BD9-81ED-4DB2-BD59-A6C34878D82A}">
+                    <a16:rowId xmlns:a16="http://schemas.microsoft.com/office/drawing/2014/main" val="10004"/>
+                  </a:ext>
+                </a:extLst>
               </a:tr>
             </a:tbl>
           </a:graphicData>
@@ -18696,7 +19097,7 @@
           <a:bodyPr wrap="square" lIns="0" tIns="0" rIns="0" bIns="0" rtlCol="0" anchor="ctr"/>
           <a:lstStyle/>
           <a:p>
-            <a:pPr algn="l" indent="0" marL="0">
+            <a:pPr marL="0" indent="0" algn="l">
               <a:lnSpc>
                 <a:spcPct val="125000"/>
               </a:lnSpc>
@@ -18737,7 +19138,7 @@
           </a:prstGeom>
           <a:extLst>
             <a:ext uri="{C572A759-6A51-4108-AA02-DFA0A04FC94B}">
-              <ma14:wrappingTextBoxFlag xmlns:ma14="http://schemas.microsoft.com/office/mac/drawingml/2011/main" val="0"/>
+              <ma14:wrappingTextBoxFlag xmlns:ma14="http://schemas.microsoft.com/office/mac/drawingml/2011/main" xmlns="" val="0"/>
             </a:ext>
           </a:extLst>
         </p:spPr>
@@ -18758,7 +19159,7 @@
           <a:p>
             <a:pPr algn="l"/>
             <a:fld id="{F7021451-1387-4CA6-816F-3879F97B5CBC}" type="slidenum">
-              <a:rPr b="0" lang="en-US"/>
+              <a:rPr lang="en-US" b="0"/>
               <a:t>9</a:t>
             </a:fld>
             <a:endParaRPr lang="en-US"/>
@@ -19066,4 +19467,319 @@
     </a:ext>
   </a:extLst>
 </a:theme>
+</file>
+
+<file path=ppt/theme/theme2.xml><?xml version="1.0" encoding="utf-8"?>
+<a:theme xmlns:a="http://schemas.openxmlformats.org/drawingml/2006/main" name="Office Theme">
+  <a:themeElements>
+    <a:clrScheme name="Office">
+      <a:dk1>
+        <a:sysClr val="windowText" lastClr="000000"/>
+      </a:dk1>
+      <a:lt1>
+        <a:sysClr val="window" lastClr="FFFFFF"/>
+      </a:lt1>
+      <a:dk2>
+        <a:srgbClr val="0E2841"/>
+      </a:dk2>
+      <a:lt2>
+        <a:srgbClr val="E8E8E8"/>
+      </a:lt2>
+      <a:accent1>
+        <a:srgbClr val="156082"/>
+      </a:accent1>
+      <a:accent2>
+        <a:srgbClr val="E97132"/>
+      </a:accent2>
+      <a:accent3>
+        <a:srgbClr val="196B24"/>
+      </a:accent3>
+      <a:accent4>
+        <a:srgbClr val="0F9ED5"/>
+      </a:accent4>
+      <a:accent5>
+        <a:srgbClr val="A02B93"/>
+      </a:accent5>
+      <a:accent6>
+        <a:srgbClr val="4EA72E"/>
+      </a:accent6>
+      <a:hlink>
+        <a:srgbClr val="467886"/>
+      </a:hlink>
+      <a:folHlink>
+        <a:srgbClr val="96607D"/>
+      </a:folHlink>
+    </a:clrScheme>
+    <a:fontScheme name="Office">
+      <a:majorFont>
+        <a:latin typeface="Aptos Display" panose="02110004020202020204"/>
+        <a:ea typeface=""/>
+        <a:cs typeface=""/>
+        <a:font script="Jpan" typeface="游ゴシック Light"/>
+        <a:font script="Hang" typeface="맑은 고딕"/>
+        <a:font script="Hans" typeface="等线 Light"/>
+        <a:font script="Hant" typeface="新細明體"/>
+        <a:font script="Arab" typeface="Times New Roman"/>
+        <a:font script="Hebr" typeface="Times New Roman"/>
+        <a:font script="Thai" typeface="Angsana New"/>
+        <a:font script="Ethi" typeface="Nyala"/>
+        <a:font script="Beng" typeface="Vrinda"/>
+        <a:font script="Gujr" typeface="Shruti"/>
+        <a:font script="Khmr" typeface="MoolBoran"/>
+        <a:font script="Knda" typeface="Tunga"/>
+        <a:font script="Guru" typeface="Raavi"/>
+        <a:font script="Cans" typeface="Euphemia"/>
+        <a:font script="Cher" typeface="Plantagenet Cherokee"/>
+        <a:font script="Yiii" typeface="Microsoft Yi Baiti"/>
+        <a:font script="Tibt" typeface="Microsoft Himalaya"/>
+        <a:font script="Thaa" typeface="MV Boli"/>
+        <a:font script="Deva" typeface="Mangal"/>
+        <a:font script="Telu" typeface="Gautami"/>
+        <a:font script="Taml" typeface="Latha"/>
+        <a:font script="Syrc" typeface="Estrangelo Edessa"/>
+        <a:font script="Orya" typeface="Kalinga"/>
+        <a:font script="Mlym" typeface="Kartika"/>
+        <a:font script="Laoo" typeface="DokChampa"/>
+        <a:font script="Sinh" typeface="Iskoola Pota"/>
+        <a:font script="Mong" typeface="Mongolian Baiti"/>
+        <a:font script="Viet" typeface="Times New Roman"/>
+        <a:font script="Uigh" typeface="Microsoft Uighur"/>
+        <a:font script="Geor" typeface="Sylfaen"/>
+        <a:font script="Armn" typeface="Arial"/>
+        <a:font script="Bugi" typeface="Leelawadee UI"/>
+        <a:font script="Bopo" typeface="Microsoft JhengHei"/>
+        <a:font script="Java" typeface="Javanese Text"/>
+        <a:font script="Lisu" typeface="Segoe UI"/>
+        <a:font script="Mymr" typeface="Myanmar Text"/>
+        <a:font script="Nkoo" typeface="Ebrima"/>
+        <a:font script="Olck" typeface="Nirmala UI"/>
+        <a:font script="Osma" typeface="Ebrima"/>
+        <a:font script="Phag" typeface="Phagspa"/>
+        <a:font script="Syrn" typeface="Estrangelo Edessa"/>
+        <a:font script="Syrj" typeface="Estrangelo Edessa"/>
+        <a:font script="Syre" typeface="Estrangelo Edessa"/>
+        <a:font script="Sora" typeface="Nirmala UI"/>
+        <a:font script="Tale" typeface="Microsoft Tai Le"/>
+        <a:font script="Talu" typeface="Microsoft New Tai Lue"/>
+        <a:font script="Tfng" typeface="Ebrima"/>
+      </a:majorFont>
+      <a:minorFont>
+        <a:latin typeface="Aptos" panose="02110004020202020204"/>
+        <a:ea typeface=""/>
+        <a:cs typeface=""/>
+        <a:font script="Jpan" typeface="游ゴシック"/>
+        <a:font script="Hang" typeface="맑은 고딕"/>
+        <a:font script="Hans" typeface="等线"/>
+        <a:font script="Hant" typeface="新細明體"/>
+        <a:font script="Arab" typeface="Arial"/>
+        <a:font script="Hebr" typeface="Arial"/>
+        <a:font script="Thai" typeface="Cordia New"/>
+        <a:font script="Ethi" typeface="Nyala"/>
+        <a:font script="Beng" typeface="Vrinda"/>
+        <a:font script="Gujr" typeface="Shruti"/>
+        <a:font script="Khmr" typeface="DaunPenh"/>
+        <a:font script="Knda" typeface="Tunga"/>
+        <a:font script="Guru" typeface="Raavi"/>
+        <a:font script="Cans" typeface="Euphemia"/>
+        <a:font script="Cher" typeface="Plantagenet Cherokee"/>
+        <a:font script="Yiii" typeface="Microsoft Yi Baiti"/>
+        <a:font script="Tibt" typeface="Microsoft Himalaya"/>
+        <a:font script="Thaa" typeface="MV Boli"/>
+        <a:font script="Deva" typeface="Mangal"/>
+        <a:font script="Telu" typeface="Gautami"/>
+        <a:font script="Taml" typeface="Latha"/>
+        <a:font script="Syrc" typeface="Estrangelo Edessa"/>
+        <a:font script="Orya" typeface="Kalinga"/>
+        <a:font script="Mlym" typeface="Kartika"/>
+        <a:font script="Laoo" typeface="DokChampa"/>
+        <a:font script="Sinh" typeface="Iskoola Pota"/>
+        <a:font script="Mong" typeface="Mongolian Baiti"/>
+        <a:font script="Viet" typeface="Arial"/>
+        <a:font script="Uigh" typeface="Microsoft Uighur"/>
+        <a:font script="Geor" typeface="Sylfaen"/>
+        <a:font script="Armn" typeface="Arial"/>
+        <a:font script="Bugi" typeface="Leelawadee UI"/>
+        <a:font script="Bopo" typeface="Microsoft JhengHei"/>
+        <a:font script="Java" typeface="Javanese Text"/>
+        <a:font script="Lisu" typeface="Segoe UI"/>
+        <a:font script="Mymr" typeface="Myanmar Text"/>
+        <a:font script="Nkoo" typeface="Ebrima"/>
+        <a:font script="Olck" typeface="Nirmala UI"/>
+        <a:font script="Osma" typeface="Ebrima"/>
+        <a:font script="Phag" typeface="Phagspa"/>
+        <a:font script="Syrn" typeface="Estrangelo Edessa"/>
+        <a:font script="Syrj" typeface="Estrangelo Edessa"/>
+        <a:font script="Syre" typeface="Estrangelo Edessa"/>
+        <a:font script="Sora" typeface="Nirmala UI"/>
+        <a:font script="Tale" typeface="Microsoft Tai Le"/>
+        <a:font script="Talu" typeface="Microsoft New Tai Lue"/>
+        <a:font script="Tfng" typeface="Ebrima"/>
+      </a:minorFont>
+    </a:fontScheme>
+    <a:fmtScheme name="Office">
+      <a:fillStyleLst>
+        <a:solidFill>
+          <a:schemeClr val="phClr"/>
+        </a:solidFill>
+        <a:gradFill rotWithShape="1">
+          <a:gsLst>
+            <a:gs pos="0">
+              <a:schemeClr val="phClr">
+                <a:lumMod val="110000"/>
+                <a:satMod val="105000"/>
+                <a:tint val="67000"/>
+              </a:schemeClr>
+            </a:gs>
+            <a:gs pos="50000">
+              <a:schemeClr val="phClr">
+                <a:lumMod val="105000"/>
+                <a:satMod val="103000"/>
+                <a:tint val="73000"/>
+              </a:schemeClr>
+            </a:gs>
+            <a:gs pos="100000">
+              <a:schemeClr val="phClr">
+                <a:lumMod val="105000"/>
+                <a:satMod val="109000"/>
+                <a:tint val="81000"/>
+              </a:schemeClr>
+            </a:gs>
+          </a:gsLst>
+          <a:lin ang="5400000" scaled="0"/>
+        </a:gradFill>
+        <a:gradFill rotWithShape="1">
+          <a:gsLst>
+            <a:gs pos="0">
+              <a:schemeClr val="phClr">
+                <a:satMod val="103000"/>
+                <a:lumMod val="102000"/>
+                <a:tint val="94000"/>
+              </a:schemeClr>
+            </a:gs>
+            <a:gs pos="50000">
+              <a:schemeClr val="phClr">
+                <a:satMod val="110000"/>
+                <a:lumMod val="100000"/>
+                <a:shade val="100000"/>
+              </a:schemeClr>
+            </a:gs>
+            <a:gs pos="100000">
+              <a:schemeClr val="phClr">
+                <a:lumMod val="99000"/>
+                <a:satMod val="120000"/>
+                <a:shade val="78000"/>
+              </a:schemeClr>
+            </a:gs>
+          </a:gsLst>
+          <a:lin ang="5400000" scaled="0"/>
+        </a:gradFill>
+      </a:fillStyleLst>
+      <a:lnStyleLst>
+        <a:ln w="12700" cap="flat" cmpd="sng" algn="ctr">
+          <a:solidFill>
+            <a:schemeClr val="phClr"/>
+          </a:solidFill>
+          <a:prstDash val="solid"/>
+          <a:miter lim="800000"/>
+        </a:ln>
+        <a:ln w="19050" cap="flat" cmpd="sng" algn="ctr">
+          <a:solidFill>
+            <a:schemeClr val="phClr"/>
+          </a:solidFill>
+          <a:prstDash val="solid"/>
+          <a:miter lim="800000"/>
+        </a:ln>
+        <a:ln w="25400" cap="flat" cmpd="sng" algn="ctr">
+          <a:solidFill>
+            <a:schemeClr val="phClr"/>
+          </a:solidFill>
+          <a:prstDash val="solid"/>
+          <a:miter lim="800000"/>
+        </a:ln>
+      </a:lnStyleLst>
+      <a:effectStyleLst>
+        <a:effectStyle>
+          <a:effectLst/>
+        </a:effectStyle>
+        <a:effectStyle>
+          <a:effectLst/>
+        </a:effectStyle>
+        <a:effectStyle>
+          <a:effectLst>
+            <a:outerShdw blurRad="57150" dist="19050" dir="5400000" algn="ctr" rotWithShape="0">
+              <a:srgbClr val="000000">
+                <a:alpha val="63000"/>
+              </a:srgbClr>
+            </a:outerShdw>
+          </a:effectLst>
+        </a:effectStyle>
+      </a:effectStyleLst>
+      <a:bgFillStyleLst>
+        <a:solidFill>
+          <a:schemeClr val="phClr"/>
+        </a:solidFill>
+        <a:solidFill>
+          <a:schemeClr val="phClr">
+            <a:tint val="95000"/>
+            <a:satMod val="170000"/>
+          </a:schemeClr>
+        </a:solidFill>
+        <a:gradFill rotWithShape="1">
+          <a:gsLst>
+            <a:gs pos="0">
+              <a:schemeClr val="phClr">
+                <a:tint val="93000"/>
+                <a:satMod val="150000"/>
+                <a:shade val="98000"/>
+                <a:lumMod val="102000"/>
+              </a:schemeClr>
+            </a:gs>
+            <a:gs pos="50000">
+              <a:schemeClr val="phClr">
+                <a:tint val="98000"/>
+                <a:satMod val="130000"/>
+                <a:shade val="90000"/>
+                <a:lumMod val="103000"/>
+              </a:schemeClr>
+            </a:gs>
+            <a:gs pos="100000">
+              <a:schemeClr val="phClr">
+                <a:shade val="63000"/>
+                <a:satMod val="120000"/>
+              </a:schemeClr>
+            </a:gs>
+          </a:gsLst>
+          <a:lin ang="5400000" scaled="0"/>
+        </a:gradFill>
+      </a:bgFillStyleLst>
+    </a:fmtScheme>
+  </a:themeElements>
+  <a:objectDefaults>
+    <a:lnDef>
+      <a:spPr/>
+      <a:bodyPr/>
+      <a:lstStyle/>
+      <a:style>
+        <a:lnRef idx="2">
+          <a:schemeClr val="accent1"/>
+        </a:lnRef>
+        <a:fillRef idx="0">
+          <a:schemeClr val="accent1"/>
+        </a:fillRef>
+        <a:effectRef idx="1">
+          <a:schemeClr val="accent1"/>
+        </a:effectRef>
+        <a:fontRef idx="minor">
+          <a:schemeClr val="tx1"/>
+        </a:fontRef>
+      </a:style>
+    </a:lnDef>
+  </a:objectDefaults>
+  <a:extraClrSchemeLst/>
+  <a:extLst>
+    <a:ext uri="{05A4C25C-085E-4340-85A3-A5531E510DB2}">
+      <thm15:themeFamily xmlns:thm15="http://schemas.microsoft.com/office/thememl/2012/main" name="Office Theme" id="{2E142A2C-CD16-42D6-873A-C26D2A0506FA}" vid="{1BDDFF52-6CD6-40A5-AB3C-68EB2F1E4D0A}"/>
+    </a:ext>
+  </a:extLst>
+</a:theme>
 </file>